--- a/assets/decks/episodio-10-finops-pipeline.pptx
+++ b/assets/decks/episodio-10-finops-pipeline.pptx
@@ -2,35 +2,35 @@
 <file path=ppt/presentation.xml><?xml version="1.0" encoding="utf-8"?>
 <p:presentation xmlns:p="http://schemas.openxmlformats.org/presentationml/2006/main">
   <p:sldMasterIdLst>
-    <p:sldMasterId xmlns:r="http://schemas.openxmlformats.org/officeDocument/2006/relationships" id="2147483648" r:id="R5d31a59f61ae4a12"/>
-    <p:sldMasterId xmlns:r="http://schemas.openxmlformats.org/officeDocument/2006/relationships" id="2147483650" r:id="R044f8102c0004c7b"/>
+    <p:sldMasterId xmlns:r="http://schemas.openxmlformats.org/officeDocument/2006/relationships" id="2147483648" r:id="Rca8d62246a954a22"/>
+    <p:sldMasterId xmlns:r="http://schemas.openxmlformats.org/officeDocument/2006/relationships" id="2147483650" r:id="R443c689da1b343ae"/>
   </p:sldMasterIdLst>
   <p:notesMasterIdLst>
-    <p:notesMasterId xmlns:r="http://schemas.openxmlformats.org/officeDocument/2006/relationships" r:id="Rbe7b4f059deb4496"/>
+    <p:notesMasterId xmlns:r="http://schemas.openxmlformats.org/officeDocument/2006/relationships" r:id="Rd82b453678a74515"/>
   </p:notesMasterIdLst>
   <p:sldIdLst>
-    <p:sldId xmlns:r="http://schemas.openxmlformats.org/officeDocument/2006/relationships" id="256" r:id="R0aaeb443be714ce5"/>
-    <p:sldId xmlns:r="http://schemas.openxmlformats.org/officeDocument/2006/relationships" id="257" r:id="R3a2779b56e04428f"/>
-    <p:sldId xmlns:r="http://schemas.openxmlformats.org/officeDocument/2006/relationships" id="258" r:id="Rd53520d68fa74196"/>
-    <p:sldId xmlns:r="http://schemas.openxmlformats.org/officeDocument/2006/relationships" id="259" r:id="Raf0d98e90bae4d59"/>
-    <p:sldId xmlns:r="http://schemas.openxmlformats.org/officeDocument/2006/relationships" id="260" r:id="Rbe8bdcd2eee342e7"/>
-    <p:sldId xmlns:r="http://schemas.openxmlformats.org/officeDocument/2006/relationships" id="261" r:id="R07adcedd62cf48ab"/>
-    <p:sldId xmlns:r="http://schemas.openxmlformats.org/officeDocument/2006/relationships" id="262" r:id="Rbfdacd3be9ce499f"/>
-    <p:sldId xmlns:r="http://schemas.openxmlformats.org/officeDocument/2006/relationships" id="263" r:id="Rcd16a1f5234747be"/>
-    <p:sldId xmlns:r="http://schemas.openxmlformats.org/officeDocument/2006/relationships" id="264" r:id="R87b6ad048e054b61"/>
-    <p:sldId xmlns:r="http://schemas.openxmlformats.org/officeDocument/2006/relationships" id="265" r:id="Rb97133f320bd4d7f"/>
-    <p:sldId xmlns:r="http://schemas.openxmlformats.org/officeDocument/2006/relationships" id="266" r:id="R2919c99244b74fc2"/>
-    <p:sldId xmlns:r="http://schemas.openxmlformats.org/officeDocument/2006/relationships" id="267" r:id="R489b43d524564083"/>
-    <p:sldId xmlns:r="http://schemas.openxmlformats.org/officeDocument/2006/relationships" id="268" r:id="R776dc3c5da8d4b41"/>
-    <p:sldId xmlns:r="http://schemas.openxmlformats.org/officeDocument/2006/relationships" id="269" r:id="Rf422510d37884925"/>
-    <p:sldId xmlns:r="http://schemas.openxmlformats.org/officeDocument/2006/relationships" id="270" r:id="Rabbde62bad474e86"/>
-    <p:sldId xmlns:r="http://schemas.openxmlformats.org/officeDocument/2006/relationships" id="271" r:id="R26ec58d25af8437e"/>
-    <p:sldId xmlns:r="http://schemas.openxmlformats.org/officeDocument/2006/relationships" id="272" r:id="R2a8ab14520a74aeb"/>
-    <p:sldId xmlns:r="http://schemas.openxmlformats.org/officeDocument/2006/relationships" id="273" r:id="R4f9e090203174315"/>
-    <p:sldId xmlns:r="http://schemas.openxmlformats.org/officeDocument/2006/relationships" id="274" r:id="Re76da37e39904eaf"/>
-    <p:sldId xmlns:r="http://schemas.openxmlformats.org/officeDocument/2006/relationships" id="275" r:id="Rb6cf4188e64141e1"/>
-    <p:sldId xmlns:r="http://schemas.openxmlformats.org/officeDocument/2006/relationships" id="276" r:id="R5c4c7fc7c672465c"/>
-    <p:sldId xmlns:r="http://schemas.openxmlformats.org/officeDocument/2006/relationships" id="277" r:id="R89e62bf755f441a3"/>
+    <p:sldId xmlns:r="http://schemas.openxmlformats.org/officeDocument/2006/relationships" id="256" r:id="Rfb6c515c6de84430"/>
+    <p:sldId xmlns:r="http://schemas.openxmlformats.org/officeDocument/2006/relationships" id="257" r:id="Rd918bb1fa4464ea9"/>
+    <p:sldId xmlns:r="http://schemas.openxmlformats.org/officeDocument/2006/relationships" id="258" r:id="R884acb4d99234a22"/>
+    <p:sldId xmlns:r="http://schemas.openxmlformats.org/officeDocument/2006/relationships" id="259" r:id="R8530de53985e4628"/>
+    <p:sldId xmlns:r="http://schemas.openxmlformats.org/officeDocument/2006/relationships" id="260" r:id="R2580510c809d443c"/>
+    <p:sldId xmlns:r="http://schemas.openxmlformats.org/officeDocument/2006/relationships" id="261" r:id="R632889db0f634444"/>
+    <p:sldId xmlns:r="http://schemas.openxmlformats.org/officeDocument/2006/relationships" id="262" r:id="R579f9a8ae80b4d68"/>
+    <p:sldId xmlns:r="http://schemas.openxmlformats.org/officeDocument/2006/relationships" id="263" r:id="R39fb049636414065"/>
+    <p:sldId xmlns:r="http://schemas.openxmlformats.org/officeDocument/2006/relationships" id="264" r:id="R0bc5da2b1460480a"/>
+    <p:sldId xmlns:r="http://schemas.openxmlformats.org/officeDocument/2006/relationships" id="265" r:id="R0dc613b51a7945cd"/>
+    <p:sldId xmlns:r="http://schemas.openxmlformats.org/officeDocument/2006/relationships" id="266" r:id="Raef75c9bca0a4a81"/>
+    <p:sldId xmlns:r="http://schemas.openxmlformats.org/officeDocument/2006/relationships" id="267" r:id="R65ecca36c10645f4"/>
+    <p:sldId xmlns:r="http://schemas.openxmlformats.org/officeDocument/2006/relationships" id="268" r:id="R055940522a9f4039"/>
+    <p:sldId xmlns:r="http://schemas.openxmlformats.org/officeDocument/2006/relationships" id="269" r:id="Re9b907ebf1034f4e"/>
+    <p:sldId xmlns:r="http://schemas.openxmlformats.org/officeDocument/2006/relationships" id="270" r:id="R6522adc8f03d4a5c"/>
+    <p:sldId xmlns:r="http://schemas.openxmlformats.org/officeDocument/2006/relationships" id="271" r:id="Rbd309bb1fdb048d3"/>
+    <p:sldId xmlns:r="http://schemas.openxmlformats.org/officeDocument/2006/relationships" id="272" r:id="Rbb5420352356486b"/>
+    <p:sldId xmlns:r="http://schemas.openxmlformats.org/officeDocument/2006/relationships" id="273" r:id="R5007ffdd45a24d61"/>
+    <p:sldId xmlns:r="http://schemas.openxmlformats.org/officeDocument/2006/relationships" id="274" r:id="Rfb722ff50b5d4ce6"/>
+    <p:sldId xmlns:r="http://schemas.openxmlformats.org/officeDocument/2006/relationships" id="275" r:id="Rfaff8812516c438e"/>
+    <p:sldId xmlns:r="http://schemas.openxmlformats.org/officeDocument/2006/relationships" id="276" r:id="Re2c11f50abdc45c6"/>
+    <p:sldId xmlns:r="http://schemas.openxmlformats.org/officeDocument/2006/relationships" id="277" r:id="Rac00fab375c94cba"/>
   </p:sldIdLst>
   <p:sldSz cx="12192000" cy="6858000"/>
   <p:notesSz cx="6858000" cy="9144000"/>
@@ -464,7 +464,57 @@
           <a:lstStyle xmlns:a="http://schemas.openxmlformats.org/drawingml/2006/main"/>
           <a:p xmlns:a="http://schemas.openxmlformats.org/drawingml/2006/main">
             <a:r>
-              <a:t>Apresente o objetivo do EPISÓDIO 10 e conecte-o ao checkpoint executável. Otimização só é válida quando o resultado continua igual ao full build.</a:t>
+              <a:t>[Roteiro recomendado]</a:t>
+            </a:r>
+          </a:p>
+          <a:p xmlns:a="http://schemas.openxmlformats.org/drawingml/2006/main">
+            <a:r>
+              <a:t>[Tempo sugerido: 00:45]</a:t>
+            </a:r>
+          </a:p>
+          <a:p xmlns:a="http://schemas.openxmlformats.org/drawingml/2006/main">
+            <a:r>
+              <a:t/>
+            </a:r>
+          </a:p>
+          <a:p xmlns:a="http://schemas.openxmlformats.org/drawingml/2006/main">
+            <a:r>
+              <a:t>Fala sugerida:</a:t>
+            </a:r>
+          </a:p>
+          <a:p xmlns:a="http://schemas.openxmlformats.org/drawingml/2006/main">
+            <a:r>
+              <a:t>Bem-vindo ao episódio 10 do dbt Moderno na Prática. Hoje vamos trabalhar o tema “FinOps do pipeline”. Menos recomputação sem mudar o resultado funcional. O objetivo não é apenas conhecer o conceito: vamos conectá-lo ao laboratório e terminar com uma evidência que você consegue reproduzir no seu próprio ambiente. Ao longo da aula, separe sempre o que é recurso aberto e estável daquilo que aparecerá apenas no Radar.</a:t>
+            </a:r>
+          </a:p>
+          <a:p xmlns:a="http://schemas.openxmlformats.org/drawingml/2006/main">
+            <a:r>
+              <a:t/>
+            </a:r>
+          </a:p>
+          <a:p xmlns:a="http://schemas.openxmlformats.org/drawingml/2006/main">
+            <a:r>
+              <a:t>O que destacar:</a:t>
+            </a:r>
+          </a:p>
+          <a:p xmlns:a="http://schemas.openxmlformats.org/drawingml/2006/main">
+            <a:r>
+              <a:t>- Apresente o título, situe o checkpoint 10 e deixe claro que a aula faz parte da trilha open/stable.</a:t>
+            </a:r>
+          </a:p>
+          <a:p xmlns:a="http://schemas.openxmlformats.org/drawingml/2006/main">
+            <a:r>
+              <a:t/>
+            </a:r>
+          </a:p>
+          <a:p xmlns:a="http://schemas.openxmlformats.org/drawingml/2006/main">
+            <a:r>
+              <a:t>Transição:</a:t>
+            </a:r>
+          </a:p>
+          <a:p xmlns:a="http://schemas.openxmlformats.org/drawingml/2006/main">
+            <a:r>
+              <a:t>Com esse ponto estabelecido, avance para “Otimização só é válida quando o resultado continua igual ao full build.”.</a:t>
             </a:r>
           </a:p>
           <a:p xmlns:a="http://schemas.openxmlformats.org/drawingml/2006/main">
@@ -579,7 +629,57 @@
           <a:lstStyle xmlns:a="http://schemas.openxmlformats.org/drawingml/2006/main"/>
           <a:p xmlns:a="http://schemas.openxmlformats.org/drawingml/2006/main">
             <a:r>
-              <a:t>Use a composição para explicar visualmente: Lotes temporais só ajudam quando evento, janela e backfill são mensuráveis. event_time batch_size lookback</a:t>
+              <a:t>[Roteiro recomendado]</a:t>
+            </a:r>
+          </a:p>
+          <a:p xmlns:a="http://schemas.openxmlformats.org/drawingml/2006/main">
+            <a:r>
+              <a:t>[Tempo sugerido: 00:55]</a:t>
+            </a:r>
+          </a:p>
+          <a:p xmlns:a="http://schemas.openxmlformats.org/drawingml/2006/main">
+            <a:r>
+              <a:t/>
+            </a:r>
+          </a:p>
+          <a:p xmlns:a="http://schemas.openxmlformats.org/drawingml/2006/main">
+            <a:r>
+              <a:t>Fala sugerida:</a:t>
+            </a:r>
+          </a:p>
+          <a:p xmlns:a="http://schemas.openxmlformats.org/drawingml/2006/main">
+            <a:r>
+              <a:t>Agora vamos ler a ideia visualmente. Lotes temporais só ajudam quando evento, janela e backfill são mensuráveis. Siga a composição na ordem mostrada e conecte os elementos principais. A imagem ou o fluxo não cria uma regra nova; ele torna visível a relação que acabamos de explicar. A figura é identificada como figura oficial da documentação dbt — Apache 2.0</a:t>
+            </a:r>
+          </a:p>
+          <a:p xmlns:a="http://schemas.openxmlformats.org/drawingml/2006/main">
+            <a:r>
+              <a:t/>
+            </a:r>
+          </a:p>
+          <a:p xmlns:a="http://schemas.openxmlformats.org/drawingml/2006/main">
+            <a:r>
+              <a:t>O que destacar:</a:t>
+            </a:r>
+          </a:p>
+          <a:p xmlns:a="http://schemas.openxmlformats.org/drawingml/2006/main">
+            <a:r>
+              <a:t>- Aponte a legenda e deixe explícito quando a figura é oficial; as anotações do curso ficam fora da imagem.</a:t>
+            </a:r>
+          </a:p>
+          <a:p xmlns:a="http://schemas.openxmlformats.org/drawingml/2006/main">
+            <a:r>
+              <a:t/>
+            </a:r>
+          </a:p>
+          <a:p xmlns:a="http://schemas.openxmlformats.org/drawingml/2006/main">
+            <a:r>
+              <a:t>Transição:</a:t>
+            </a:r>
+          </a:p>
+          <a:p xmlns:a="http://schemas.openxmlformats.org/drawingml/2006/main">
+            <a:r>
+              <a:t>Com esse ponto estabelecido, avance para “Materialização muda o perfil de custo”.</a:t>
             </a:r>
           </a:p>
           <a:p xmlns:a="http://schemas.openxmlformats.org/drawingml/2006/main">
@@ -699,7 +799,57 @@
           <a:lstStyle xmlns:a="http://schemas.openxmlformats.org/drawingml/2006/main"/>
           <a:p xmlns:a="http://schemas.openxmlformats.org/drawingml/2006/main">
             <a:r>
-              <a:t>View, table e incremental trocam compute, storage e latência. Desenvolva os pontos: View: compute na leitura; Table: compute na construção; Incremental: estado e complexidade.</a:t>
+              <a:t>[Roteiro recomendado]</a:t>
+            </a:r>
+          </a:p>
+          <a:p xmlns:a="http://schemas.openxmlformats.org/drawingml/2006/main">
+            <a:r>
+              <a:t>[Tempo sugerido: 01:10]</a:t>
+            </a:r>
+          </a:p>
+          <a:p xmlns:a="http://schemas.openxmlformats.org/drawingml/2006/main">
+            <a:r>
+              <a:t/>
+            </a:r>
+          </a:p>
+          <a:p xmlns:a="http://schemas.openxmlformats.org/drawingml/2006/main">
+            <a:r>
+              <a:t>Fala sugerida:</a:t>
+            </a:r>
+          </a:p>
+          <a:p xmlns:a="http://schemas.openxmlformats.org/drawingml/2006/main">
+            <a:r>
+              <a:t>A mensagem principal deste slide é: View, table e incremental trocam compute, storage e latência. Para tornar isso concreto, observe view: compute na leitura, Table: compute na construção e Incremental: estado e complexidade. Esses pontos devem ser entendidos em conjunto; não são funcionalidades isoladas. No projeto, essa combinação transforma uma convenção informal em algo que pode ser revisado, testado ou consumido de maneira consistente.</a:t>
+            </a:r>
+          </a:p>
+          <a:p xmlns:a="http://schemas.openxmlformats.org/drawingml/2006/main">
+            <a:r>
+              <a:t/>
+            </a:r>
+          </a:p>
+          <a:p xmlns:a="http://schemas.openxmlformats.org/drawingml/2006/main">
+            <a:r>
+              <a:t>O que destacar:</a:t>
+            </a:r>
+          </a:p>
+          <a:p xmlns:a="http://schemas.openxmlformats.org/drawingml/2006/main">
+            <a:r>
+              <a:t>- Comece pelo título, leia a afirmação abaixo dele e depois desenvolva os itens sem repetir o texto palavra por palavra.</a:t>
+            </a:r>
+          </a:p>
+          <a:p xmlns:a="http://schemas.openxmlformats.org/drawingml/2006/main">
+            <a:r>
+              <a:t/>
+            </a:r>
+          </a:p>
+          <a:p xmlns:a="http://schemas.openxmlformats.org/drawingml/2006/main">
+            <a:r>
+              <a:t>Transição:</a:t>
+            </a:r>
+          </a:p>
+          <a:p xmlns:a="http://schemas.openxmlformats.org/drawingml/2006/main">
+            <a:r>
+              <a:t>Com esse ponto estabelecido, avance para “Materialização muda o perfil de custo”.</a:t>
             </a:r>
           </a:p>
           <a:p xmlns:a="http://schemas.openxmlformats.org/drawingml/2006/main">
@@ -814,7 +964,57 @@
           <a:lstStyle xmlns:a="http://schemas.openxmlformats.org/drawingml/2006/main"/>
           <a:p xmlns:a="http://schemas.openxmlformats.org/drawingml/2006/main">
             <a:r>
-              <a:t>Use a composição para explicar visualmente: View, table e incremental trocam compute, storage e latência. View: compute na leitura Table: compute na construção Incremental: estado e complexidade</a:t>
+              <a:t>[Roteiro recomendado]</a:t>
+            </a:r>
+          </a:p>
+          <a:p xmlns:a="http://schemas.openxmlformats.org/drawingml/2006/main">
+            <a:r>
+              <a:t>[Tempo sugerido: 00:55]</a:t>
+            </a:r>
+          </a:p>
+          <a:p xmlns:a="http://schemas.openxmlformats.org/drawingml/2006/main">
+            <a:r>
+              <a:t/>
+            </a:r>
+          </a:p>
+          <a:p xmlns:a="http://schemas.openxmlformats.org/drawingml/2006/main">
+            <a:r>
+              <a:t>Fala sugerida:</a:t>
+            </a:r>
+          </a:p>
+          <a:p xmlns:a="http://schemas.openxmlformats.org/drawingml/2006/main">
+            <a:r>
+              <a:t>Agora vamos ler a ideia visualmente. View, table e incremental trocam compute, storage e latência. Siga a composição na ordem mostrada e conecte view, Table, View: compute na leitura, Table: compute na construção e Incremental: estado e complexidade. A imagem ou o fluxo não cria uma regra nova; ele torna visível a relação que acabamos de explicar. Use a disposição dos elementos para reforçar causa, dependência ou comparação.</a:t>
+            </a:r>
+          </a:p>
+          <a:p xmlns:a="http://schemas.openxmlformats.org/drawingml/2006/main">
+            <a:r>
+              <a:t/>
+            </a:r>
+          </a:p>
+          <a:p xmlns:a="http://schemas.openxmlformats.org/drawingml/2006/main">
+            <a:r>
+              <a:t>O que destacar:</a:t>
+            </a:r>
+          </a:p>
+          <a:p xmlns:a="http://schemas.openxmlformats.org/drawingml/2006/main">
+            <a:r>
+              <a:t>- Acompanhe o fluxo ou a comparação com o cursor e preserve a ordem de leitura do slide.</a:t>
+            </a:r>
+          </a:p>
+          <a:p xmlns:a="http://schemas.openxmlformats.org/drawingml/2006/main">
+            <a:r>
+              <a:t/>
+            </a:r>
+          </a:p>
+          <a:p xmlns:a="http://schemas.openxmlformats.org/drawingml/2006/main">
+            <a:r>
+              <a:t>Transição:</a:t>
+            </a:r>
+          </a:p>
+          <a:p xmlns:a="http://schemas.openxmlformats.org/drawingml/2006/main">
+            <a:r>
+              <a:t>Com esse ponto estabelecido, avance para “Benchmark precisa de correção funcional”.</a:t>
             </a:r>
           </a:p>
           <a:p xmlns:a="http://schemas.openxmlformats.org/drawingml/2006/main">
@@ -929,7 +1129,57 @@
           <a:lstStyle xmlns:a="http://schemas.openxmlformats.org/drawingml/2006/main"/>
           <a:p xmlns:a="http://schemas.openxmlformats.org/drawingml/2006/main">
             <a:r>
-              <a:t>Linhas e segundos só importam depois de reconciliar o ground truth. Desenvolva os pontos: Mesmo resultado; Menos linhas processadas; Duração normalizada.</a:t>
+              <a:t>[Roteiro recomendado]</a:t>
+            </a:r>
+          </a:p>
+          <a:p xmlns:a="http://schemas.openxmlformats.org/drawingml/2006/main">
+            <a:r>
+              <a:t>[Tempo sugerido: 01:10]</a:t>
+            </a:r>
+          </a:p>
+          <a:p xmlns:a="http://schemas.openxmlformats.org/drawingml/2006/main">
+            <a:r>
+              <a:t/>
+            </a:r>
+          </a:p>
+          <a:p xmlns:a="http://schemas.openxmlformats.org/drawingml/2006/main">
+            <a:r>
+              <a:t>Fala sugerida:</a:t>
+            </a:r>
+          </a:p>
+          <a:p xmlns:a="http://schemas.openxmlformats.org/drawingml/2006/main">
+            <a:r>
+              <a:t>A mensagem principal deste slide é: Linhas e segundos só importam depois de reconciliar o ground truth. Para tornar isso concreto, observe mesmo resultado, Menos linhas processadas e Duração normalizada. Esses pontos devem ser entendidos em conjunto; não são funcionalidades isoladas. No projeto, essa combinação transforma uma convenção informal em algo que pode ser revisado, testado ou consumido de maneira consistente.</a:t>
+            </a:r>
+          </a:p>
+          <a:p xmlns:a="http://schemas.openxmlformats.org/drawingml/2006/main">
+            <a:r>
+              <a:t/>
+            </a:r>
+          </a:p>
+          <a:p xmlns:a="http://schemas.openxmlformats.org/drawingml/2006/main">
+            <a:r>
+              <a:t>O que destacar:</a:t>
+            </a:r>
+          </a:p>
+          <a:p xmlns:a="http://schemas.openxmlformats.org/drawingml/2006/main">
+            <a:r>
+              <a:t>- Comece pelo título, leia a afirmação abaixo dele e depois desenvolva os itens sem repetir o texto palavra por palavra.</a:t>
+            </a:r>
+          </a:p>
+          <a:p xmlns:a="http://schemas.openxmlformats.org/drawingml/2006/main">
+            <a:r>
+              <a:t/>
+            </a:r>
+          </a:p>
+          <a:p xmlns:a="http://schemas.openxmlformats.org/drawingml/2006/main">
+            <a:r>
+              <a:t>Transição:</a:t>
+            </a:r>
+          </a:p>
+          <a:p xmlns:a="http://schemas.openxmlformats.org/drawingml/2006/main">
+            <a:r>
+              <a:t>Com esse ponto estabelecido, avance para “Benchmark precisa de correção funcional”.</a:t>
             </a:r>
           </a:p>
           <a:p xmlns:a="http://schemas.openxmlformats.org/drawingml/2006/main">
@@ -1044,7 +1294,57 @@
           <a:lstStyle xmlns:a="http://schemas.openxmlformats.org/drawingml/2006/main"/>
           <a:p xmlns:a="http://schemas.openxmlformats.org/drawingml/2006/main">
             <a:r>
-              <a:t>Use a composição para explicar visualmente: Linhas e segundos só importam depois de reconciliar o ground truth. Mesmo resultado Menos linhas processadas Duração normalizada</a:t>
+              <a:t>[Roteiro recomendado]</a:t>
+            </a:r>
+          </a:p>
+          <a:p xmlns:a="http://schemas.openxmlformats.org/drawingml/2006/main">
+            <a:r>
+              <a:t>[Tempo sugerido: 00:55]</a:t>
+            </a:r>
+          </a:p>
+          <a:p xmlns:a="http://schemas.openxmlformats.org/drawingml/2006/main">
+            <a:r>
+              <a:t/>
+            </a:r>
+          </a:p>
+          <a:p xmlns:a="http://schemas.openxmlformats.org/drawingml/2006/main">
+            <a:r>
+              <a:t>Fala sugerida:</a:t>
+            </a:r>
+          </a:p>
+          <a:p xmlns:a="http://schemas.openxmlformats.org/drawingml/2006/main">
+            <a:r>
+              <a:t>Agora vamos ler a ideia visualmente. Linhas e segundos só importam depois de reconciliar o ground truth. Siga a composição na ordem mostrada e conecte correção, Volume e Tempo. A imagem ou o fluxo não cria uma regra nova; ele torna visível a relação que acabamos de explicar. Use a disposição dos elementos para reforçar causa, dependência ou comparação.</a:t>
+            </a:r>
+          </a:p>
+          <a:p xmlns:a="http://schemas.openxmlformats.org/drawingml/2006/main">
+            <a:r>
+              <a:t/>
+            </a:r>
+          </a:p>
+          <a:p xmlns:a="http://schemas.openxmlformats.org/drawingml/2006/main">
+            <a:r>
+              <a:t>O que destacar:</a:t>
+            </a:r>
+          </a:p>
+          <a:p xmlns:a="http://schemas.openxmlformats.org/drawingml/2006/main">
+            <a:r>
+              <a:t>- Acompanhe o fluxo ou a comparação com o cursor e preserve a ordem de leitura do slide.</a:t>
+            </a:r>
+          </a:p>
+          <a:p xmlns:a="http://schemas.openxmlformats.org/drawingml/2006/main">
+            <a:r>
+              <a:t/>
+            </a:r>
+          </a:p>
+          <a:p xmlns:a="http://schemas.openxmlformats.org/drawingml/2006/main">
+            <a:r>
+              <a:t>Transição:</a:t>
+            </a:r>
+          </a:p>
+          <a:p xmlns:a="http://schemas.openxmlformats.org/drawingml/2006/main">
+            <a:r>
+              <a:t>Com esse ponto estabelecido, avance para “Demonstração — execute”.</a:t>
             </a:r>
           </a:p>
           <a:p xmlns:a="http://schemas.openxmlformats.org/drawingml/2006/main">
@@ -1159,7 +1459,57 @@
           <a:lstStyle xmlns:a="http://schemas.openxmlformats.org/drawingml/2006/main"/>
           <a:p xmlns:a="http://schemas.openxmlformats.org/drawingml/2006/main">
             <a:r>
-              <a:t>Execute python course.py checkpoint 10. Pause para o aluno acompanhar o terminal.</a:t>
+              <a:t>[Roteiro recomendado]</a:t>
+            </a:r>
+          </a:p>
+          <a:p xmlns:a="http://schemas.openxmlformats.org/drawingml/2006/main">
+            <a:r>
+              <a:t>[Tempo sugerido: 01:20]</a:t>
+            </a:r>
+          </a:p>
+          <a:p xmlns:a="http://schemas.openxmlformats.org/drawingml/2006/main">
+            <a:r>
+              <a:t/>
+            </a:r>
+          </a:p>
+          <a:p xmlns:a="http://schemas.openxmlformats.org/drawingml/2006/main">
+            <a:r>
+              <a:t>Fala sugerida:</a:t>
+            </a:r>
+          </a:p>
+          <a:p xmlns:a="http://schemas.openxmlformats.org/drawingml/2006/main">
+            <a:r>
+              <a:t>Agora vamos sair da explicação e comprovar o comportamento. Execute os comandos exatamente como aparecem: python course.py checkpoint 10. Não é necessário ativar o ambiente virtual manualmente; o launcher do curso seleciona o ambiente correto. Antes de avançar, confirme que o comando iniciou sem erro e dê tempo para o aluno acompanhar a mesma etapa.</a:t>
+            </a:r>
+          </a:p>
+          <a:p xmlns:a="http://schemas.openxmlformats.org/drawingml/2006/main">
+            <a:r>
+              <a:t/>
+            </a:r>
+          </a:p>
+          <a:p xmlns:a="http://schemas.openxmlformats.org/drawingml/2006/main">
+            <a:r>
+              <a:t>O que destacar:</a:t>
+            </a:r>
+          </a:p>
+          <a:p xmlns:a="http://schemas.openxmlformats.org/drawingml/2006/main">
+            <a:r>
+              <a:t>- Mostre o comando completo, execute uma linha por vez quando houver mais de uma e mantenha o terminal visível.</a:t>
+            </a:r>
+          </a:p>
+          <a:p xmlns:a="http://schemas.openxmlformats.org/drawingml/2006/main">
+            <a:r>
+              <a:t/>
+            </a:r>
+          </a:p>
+          <a:p xmlns:a="http://schemas.openxmlformats.org/drawingml/2006/main">
+            <a:r>
+              <a:t>Transição:</a:t>
+            </a:r>
+          </a:p>
+          <a:p xmlns:a="http://schemas.openxmlformats.org/drawingml/2006/main">
+            <a:r>
+              <a:t>Com esse ponto estabelecido, avance para “Demonstração — observe”.</a:t>
             </a:r>
           </a:p>
           <a:p xmlns:a="http://schemas.openxmlformats.org/drawingml/2006/main">
@@ -1274,7 +1624,57 @@
           <a:lstStyle xmlns:a="http://schemas.openxmlformats.org/drawingml/2006/main"/>
           <a:p xmlns:a="http://schemas.openxmlformats.org/drawingml/2006/main">
             <a:r>
-              <a:t>Durante a execução, destaque: Full build registrado; Incremental com lote novo; Resultados reconciliados.</a:t>
+              <a:t>[Roteiro recomendado]</a:t>
+            </a:r>
+          </a:p>
+          <a:p xmlns:a="http://schemas.openxmlformats.org/drawingml/2006/main">
+            <a:r>
+              <a:t>[Tempo sugerido: 01:10]</a:t>
+            </a:r>
+          </a:p>
+          <a:p xmlns:a="http://schemas.openxmlformats.org/drawingml/2006/main">
+            <a:r>
+              <a:t/>
+            </a:r>
+          </a:p>
+          <a:p xmlns:a="http://schemas.openxmlformats.org/drawingml/2006/main">
+            <a:r>
+              <a:t>Fala sugerida:</a:t>
+            </a:r>
+          </a:p>
+          <a:p xmlns:a="http://schemas.openxmlformats.org/drawingml/2006/main">
+            <a:r>
+              <a:t>Enquanto a execução acontece, não olhe apenas para a mensagem final. Observe full build registrado, Incremental com lote novo e Resultados reconciliados. Cada sinal responde a uma pergunta diferente sobre o pipeline. Se um deles divergir, interrompa a demonstração e investigue; o objetivo do hands-on é produzir evidência, não apenas chegar rapidamente a uma tela verde.</a:t>
+            </a:r>
+          </a:p>
+          <a:p xmlns:a="http://schemas.openxmlformats.org/drawingml/2006/main">
+            <a:r>
+              <a:t/>
+            </a:r>
+          </a:p>
+          <a:p xmlns:a="http://schemas.openxmlformats.org/drawingml/2006/main">
+            <a:r>
+              <a:t>O que destacar:</a:t>
+            </a:r>
+          </a:p>
+          <a:p xmlns:a="http://schemas.openxmlformats.org/drawingml/2006/main">
+            <a:r>
+              <a:t>- Marque cada observação quando ela aparecer no terminal ou no artifact correspondente.</a:t>
+            </a:r>
+          </a:p>
+          <a:p xmlns:a="http://schemas.openxmlformats.org/drawingml/2006/main">
+            <a:r>
+              <a:t/>
+            </a:r>
+          </a:p>
+          <a:p xmlns:a="http://schemas.openxmlformats.org/drawingml/2006/main">
+            <a:r>
+              <a:t>Transição:</a:t>
+            </a:r>
+          </a:p>
+          <a:p xmlns:a="http://schemas.openxmlformats.org/drawingml/2006/main">
+            <a:r>
+              <a:t>Com esse ponto estabelecido, avance para “RESULTADO ESPERADO”.</a:t>
             </a:r>
           </a:p>
           <a:p xmlns:a="http://schemas.openxmlformats.org/drawingml/2006/main">
@@ -1389,7 +1789,57 @@
           <a:lstStyle xmlns:a="http://schemas.openxmlformats.org/drawingml/2006/main"/>
           <a:p xmlns:a="http://schemas.openxmlformats.org/drawingml/2006/main">
             <a:r>
-              <a:t>Confirme o resultado esperado: Equivalência funcional + redução mensurável. Se o valor divergir, não avance sem investigar.</a:t>
+              <a:t>[Roteiro recomendado]</a:t>
+            </a:r>
+          </a:p>
+          <a:p xmlns:a="http://schemas.openxmlformats.org/drawingml/2006/main">
+            <a:r>
+              <a:t>[Tempo sugerido: 00:45]</a:t>
+            </a:r>
+          </a:p>
+          <a:p xmlns:a="http://schemas.openxmlformats.org/drawingml/2006/main">
+            <a:r>
+              <a:t/>
+            </a:r>
+          </a:p>
+          <a:p xmlns:a="http://schemas.openxmlformats.org/drawingml/2006/main">
+            <a:r>
+              <a:t>Fala sugerida:</a:t>
+            </a:r>
+          </a:p>
+          <a:p xmlns:a="http://schemas.openxmlformats.org/drawingml/2006/main">
+            <a:r>
+              <a:t>Este é o ponto de parada da demonstração: Equivalência funcional + redução mensurável. Esse resultado confirma que a etapa executada produziu a evidência esperada para o checkpoint 10. Se o valor, o status ou o artifact estiver diferente, não trate a divergência como detalhe de ambiente. Use o diagnóstico do curso e só avance quando a causa estiver compreendida.</a:t>
+            </a:r>
+          </a:p>
+          <a:p xmlns:a="http://schemas.openxmlformats.org/drawingml/2006/main">
+            <a:r>
+              <a:t/>
+            </a:r>
+          </a:p>
+          <a:p xmlns:a="http://schemas.openxmlformats.org/drawingml/2006/main">
+            <a:r>
+              <a:t>O que destacar:</a:t>
+            </a:r>
+          </a:p>
+          <a:p xmlns:a="http://schemas.openxmlformats.org/drawingml/2006/main">
+            <a:r>
+              <a:t>- Compare o resultado do terminal com a frase central do slide e registre a evidência antes de continuar.</a:t>
+            </a:r>
+          </a:p>
+          <a:p xmlns:a="http://schemas.openxmlformats.org/drawingml/2006/main">
+            <a:r>
+              <a:t/>
+            </a:r>
+          </a:p>
+          <a:p xmlns:a="http://schemas.openxmlformats.org/drawingml/2006/main">
+            <a:r>
+              <a:t>Transição:</a:t>
+            </a:r>
+          </a:p>
+          <a:p xmlns:a="http://schemas.openxmlformats.org/drawingml/2006/main">
+            <a:r>
+              <a:t>Com esse ponto estabelecido, avance para “O mesmo recurso afeta três decisões”.</a:t>
             </a:r>
           </a:p>
           <a:p xmlns:a="http://schemas.openxmlformats.org/drawingml/2006/main">
@@ -1504,7 +1954,57 @@
           <a:lstStyle xmlns:a="http://schemas.openxmlformats.org/drawingml/2006/main"/>
           <a:p xmlns:a="http://schemas.openxmlformats.org/drawingml/2006/main">
             <a:r>
-              <a:t>Conecte a técnica aos efeitos: Governança: regra testada; FinOps: custo observado; IA: tabela previsível. Não prometa economia sem medição.</a:t>
+              <a:t>[Roteiro recomendado]</a:t>
+            </a:r>
+          </a:p>
+          <a:p xmlns:a="http://schemas.openxmlformats.org/drawingml/2006/main">
+            <a:r>
+              <a:t>[Tempo sugerido: 01:00]</a:t>
+            </a:r>
+          </a:p>
+          <a:p xmlns:a="http://schemas.openxmlformats.org/drawingml/2006/main">
+            <a:r>
+              <a:t/>
+            </a:r>
+          </a:p>
+          <a:p xmlns:a="http://schemas.openxmlformats.org/drawingml/2006/main">
+            <a:r>
+              <a:t>Fala sugerida:</a:t>
+            </a:r>
+          </a:p>
+          <a:p xmlns:a="http://schemas.openxmlformats.org/drawingml/2006/main">
+            <a:r>
+              <a:t>Antes de seguir, conecte a técnica às decisões que ela afeta: Governança: regra testada, FinOps: custo observado e IA: tabela previsível. Governança define responsabilidade e consistência; FinOps pergunta quanto trabalho estamos repetindo; e IA depende do contexto que decidimos expor. A mesma implementação pode melhorar os três eixos, mas os ganhos devem ser medidos separadamente.</a:t>
+            </a:r>
+          </a:p>
+          <a:p xmlns:a="http://schemas.openxmlformats.org/drawingml/2006/main">
+            <a:r>
+              <a:t/>
+            </a:r>
+          </a:p>
+          <a:p xmlns:a="http://schemas.openxmlformats.org/drawingml/2006/main">
+            <a:r>
+              <a:t>O que destacar:</a:t>
+            </a:r>
+          </a:p>
+          <a:p xmlns:a="http://schemas.openxmlformats.org/drawingml/2006/main">
+            <a:r>
+              <a:t>- Percorra os três eixos e evite apresentar economia ou acurácia como consequência automática.</a:t>
+            </a:r>
+          </a:p>
+          <a:p xmlns:a="http://schemas.openxmlformats.org/drawingml/2006/main">
+            <a:r>
+              <a:t/>
+            </a:r>
+          </a:p>
+          <a:p xmlns:a="http://schemas.openxmlformats.org/drawingml/2006/main">
+            <a:r>
+              <a:t>Transição:</a:t>
+            </a:r>
+          </a:p>
+          <a:p xmlns:a="http://schemas.openxmlformats.org/drawingml/2006/main">
+            <a:r>
+              <a:t>Com esse ponto estabelecido, avance para “70%”.</a:t>
             </a:r>
           </a:p>
           <a:p xmlns:a="http://schemas.openxmlformats.org/drawingml/2006/main">
@@ -1619,7 +2119,57 @@
           <a:lstStyle xmlns:a="http://schemas.openxmlformats.org/drawingml/2006/main"/>
           <a:p xmlns:a="http://schemas.openxmlformats.org/drawingml/2006/main">
             <a:r>
-              <a:t>70%: redução de consumo reportada pela Symend. Resultado da empresa/dbt Labs; não é expectativa universal.</a:t>
+              <a:t>[Roteiro recomendado]</a:t>
+            </a:r>
+          </a:p>
+          <a:p xmlns:a="http://schemas.openxmlformats.org/drawingml/2006/main">
+            <a:r>
+              <a:t>[Tempo sugerido: 00:55]</a:t>
+            </a:r>
+          </a:p>
+          <a:p xmlns:a="http://schemas.openxmlformats.org/drawingml/2006/main">
+            <a:r>
+              <a:t/>
+            </a:r>
+          </a:p>
+          <a:p xmlns:a="http://schemas.openxmlformats.org/drawingml/2006/main">
+            <a:r>
+              <a:t>Fala sugerida:</a:t>
+            </a:r>
+          </a:p>
+          <a:p xmlns:a="http://schemas.openxmlformats.org/drawingml/2006/main">
+            <a:r>
+              <a:t>Aqui temos 70%: redução de consumo reportada pela Symend. O número ajuda a dimensionar o exemplo, mas precisa ser lido com a ressalva correta. Resultado da empresa/dbt Labs; não é expectativa universal. Use o case como evidência contextual e não como promessa de que outro projeto repetirá o mesmo resultado sem as mesmas condições.</a:t>
+            </a:r>
+          </a:p>
+          <a:p xmlns:a="http://schemas.openxmlformats.org/drawingml/2006/main">
+            <a:r>
+              <a:t/>
+            </a:r>
+          </a:p>
+          <a:p xmlns:a="http://schemas.openxmlformats.org/drawingml/2006/main">
+            <a:r>
+              <a:t>O que destacar:</a:t>
+            </a:r>
+          </a:p>
+          <a:p xmlns:a="http://schemas.openxmlformats.org/drawingml/2006/main">
+            <a:r>
+              <a:t>- Apresente primeiro o número, depois a definição e termine obrigatoriamente com a ressalva.</a:t>
+            </a:r>
+          </a:p>
+          <a:p xmlns:a="http://schemas.openxmlformats.org/drawingml/2006/main">
+            <a:r>
+              <a:t/>
+            </a:r>
+          </a:p>
+          <a:p xmlns:a="http://schemas.openxmlformats.org/drawingml/2006/main">
+            <a:r>
+              <a:t>Transição:</a:t>
+            </a:r>
+          </a:p>
+          <a:p xmlns:a="http://schemas.openxmlformats.org/drawingml/2006/main">
+            <a:r>
+              <a:t>Com esse ponto estabelecido, avance para “Limitações que precisam permanecer visíveis”.</a:t>
             </a:r>
           </a:p>
           <a:p xmlns:a="http://schemas.openxmlformats.org/drawingml/2006/main">
@@ -1734,7 +2284,57 @@
           <a:lstStyle xmlns:a="http://schemas.openxmlformats.org/drawingml/2006/main"/>
           <a:p xmlns:a="http://schemas.openxmlformats.org/drawingml/2006/main">
             <a:r>
-              <a:t>Otimização só é válida quando o resultado continua igual ao full build. Use o diagrama para antecipar o problema que será comprovado no laboratório.</a:t>
+              <a:t>[Roteiro recomendado]</a:t>
+            </a:r>
+          </a:p>
+          <a:p xmlns:a="http://schemas.openxmlformats.org/drawingml/2006/main">
+            <a:r>
+              <a:t>[Tempo sugerido: 01:00]</a:t>
+            </a:r>
+          </a:p>
+          <a:p xmlns:a="http://schemas.openxmlformats.org/drawingml/2006/main">
+            <a:r>
+              <a:t/>
+            </a:r>
+          </a:p>
+          <a:p xmlns:a="http://schemas.openxmlformats.org/drawingml/2006/main">
+            <a:r>
+              <a:t>Fala sugerida:</a:t>
+            </a:r>
+          </a:p>
+          <a:p xmlns:a="http://schemas.openxmlformats.org/drawingml/2006/main">
+            <a:r>
+              <a:t>Quero começar com uma provocação: Otimização só é válida quando o resultado continua igual ao full build. Essa pergunta orienta toda a aula. Em vez de aceitar uma afirmação porque ela parece correta, vamos procurar uma definição verificável e uma demonstração executável. Guarde essa tensão, porque voltaremos a ela quando compararmos o conceito com o resultado do laboratório.</a:t>
+            </a:r>
+          </a:p>
+          <a:p xmlns:a="http://schemas.openxmlformats.org/drawingml/2006/main">
+            <a:r>
+              <a:t/>
+            </a:r>
+          </a:p>
+          <a:p xmlns:a="http://schemas.openxmlformats.org/drawingml/2006/main">
+            <a:r>
+              <a:t>O que destacar:</a:t>
+            </a:r>
+          </a:p>
+          <a:p xmlns:a="http://schemas.openxmlformats.org/drawingml/2006/main">
+            <a:r>
+              <a:t>- Dê uma pausa depois da provocação e use o diagrama como mapa do problema, sem explicar todas as etapas ainda.</a:t>
+            </a:r>
+          </a:p>
+          <a:p xmlns:a="http://schemas.openxmlformats.org/drawingml/2006/main">
+            <a:r>
+              <a:t/>
+            </a:r>
+          </a:p>
+          <a:p xmlns:a="http://schemas.openxmlformats.org/drawingml/2006/main">
+            <a:r>
+              <a:t>Transição:</a:t>
+            </a:r>
+          </a:p>
+          <a:p xmlns:a="http://schemas.openxmlformats.org/drawingml/2006/main">
+            <a:r>
+              <a:t>Com esse ponto estabelecido, avance para “Ao final, você consegue...”.</a:t>
             </a:r>
           </a:p>
           <a:p xmlns:a="http://schemas.openxmlformats.org/drawingml/2006/main">
@@ -1849,7 +2449,57 @@
           <a:lstStyle xmlns:a="http://schemas.openxmlformats.org/drawingml/2006/main"/>
           <a:p xmlns:a="http://schemas.openxmlformats.org/drawingml/2006/main">
             <a:r>
-              <a:t>Apresente os limites sem minimizá-los: DuckDB não estima custo cloud; Microbatch adiciona complexidade; Benchmark varia por máquina.</a:t>
+              <a:t>[Roteiro recomendado]</a:t>
+            </a:r>
+          </a:p>
+          <a:p xmlns:a="http://schemas.openxmlformats.org/drawingml/2006/main">
+            <a:r>
+              <a:t>[Tempo sugerido: 01:00]</a:t>
+            </a:r>
+          </a:p>
+          <a:p xmlns:a="http://schemas.openxmlformats.org/drawingml/2006/main">
+            <a:r>
+              <a:t/>
+            </a:r>
+          </a:p>
+          <a:p xmlns:a="http://schemas.openxmlformats.org/drawingml/2006/main">
+            <a:r>
+              <a:t>Fala sugerida:</a:t>
+            </a:r>
+          </a:p>
+          <a:p xmlns:a="http://schemas.openxmlformats.org/drawingml/2006/main">
+            <a:r>
+              <a:t>Também precisamos declarar os limites da recomendação. Neste cenário, considere duckDB não estima custo cloud, Microbatch adiciona complexidade e Benchmark varia por máquina. Esses pontos não anulam a técnica; eles delimitam onde a demonstração é válida e quais condições precisam ser verificadas antes de levar o padrão para produção. Tratar limites como parte do design evita transformar uma boa prática em regra universal.</a:t>
+            </a:r>
+          </a:p>
+          <a:p xmlns:a="http://schemas.openxmlformats.org/drawingml/2006/main">
+            <a:r>
+              <a:t/>
+            </a:r>
+          </a:p>
+          <a:p xmlns:a="http://schemas.openxmlformats.org/drawingml/2006/main">
+            <a:r>
+              <a:t>O que destacar:</a:t>
+            </a:r>
+          </a:p>
+          <a:p xmlns:a="http://schemas.openxmlformats.org/drawingml/2006/main">
+            <a:r>
+              <a:t>- Leia os limites com o mesmo peso dado aos benefícios e diferencie restrição do laboratório de restrição do produto.</a:t>
+            </a:r>
+          </a:p>
+          <a:p xmlns:a="http://schemas.openxmlformats.org/drawingml/2006/main">
+            <a:r>
+              <a:t/>
+            </a:r>
+          </a:p>
+          <a:p xmlns:a="http://schemas.openxmlformats.org/drawingml/2006/main">
+            <a:r>
+              <a:t>Transição:</a:t>
+            </a:r>
+          </a:p>
+          <a:p xmlns:a="http://schemas.openxmlformats.org/drawingml/2006/main">
+            <a:r>
+              <a:t>Com esse ponto estabelecido, avance para “RADAR”.</a:t>
             </a:r>
           </a:p>
           <a:p xmlns:a="http://schemas.openxmlformats.org/drawingml/2006/main">
@@ -1964,7 +2614,57 @@
           <a:lstStyle xmlns:a="http://schemas.openxmlformats.org/drawingml/2006/main"/>
           <a:p xmlns:a="http://schemas.openxmlformats.org/drawingml/2006/main">
             <a:r>
-              <a:t>Materialization v2 e engines novas só entram depois de evidência estável. Reforce que beta e preview não fazem parte da aceitação.</a:t>
+              <a:t>[Roteiro recomendado]</a:t>
+            </a:r>
+          </a:p>
+          <a:p xmlns:a="http://schemas.openxmlformats.org/drawingml/2006/main">
+            <a:r>
+              <a:t>[Tempo sugerido: 00:55]</a:t>
+            </a:r>
+          </a:p>
+          <a:p xmlns:a="http://schemas.openxmlformats.org/drawingml/2006/main">
+            <a:r>
+              <a:t/>
+            </a:r>
+          </a:p>
+          <a:p xmlns:a="http://schemas.openxmlformats.org/drawingml/2006/main">
+            <a:r>
+              <a:t>Fala sugerida:</a:t>
+            </a:r>
+          </a:p>
+          <a:p xmlns:a="http://schemas.openxmlformats.org/drawingml/2006/main">
+            <a:r>
+              <a:t>Este é o nosso Radar: Materialization v2 e engines novas só entram depois de evidência estável. A intenção é mostrar a direção da ferramenta sem misturar preview com o caminho suportado da aula. Novidade observada não é recomendação de produção. Para adotar qualquer recurso futuro, confirme maturidade, adaptador, documentação e impacto sobre o projeto antes de alterar o baseline estável.</a:t>
+            </a:r>
+          </a:p>
+          <a:p xmlns:a="http://schemas.openxmlformats.org/drawingml/2006/main">
+            <a:r>
+              <a:t/>
+            </a:r>
+          </a:p>
+          <a:p xmlns:a="http://schemas.openxmlformats.org/drawingml/2006/main">
+            <a:r>
+              <a:t>O que destacar:</a:t>
+            </a:r>
+          </a:p>
+          <a:p xmlns:a="http://schemas.openxmlformats.org/drawingml/2006/main">
+            <a:r>
+              <a:t>- Reforce visualmente a regra do rodapé e não execute comandos beta ou preview como parte obrigatória da aula.</a:t>
+            </a:r>
+          </a:p>
+          <a:p xmlns:a="http://schemas.openxmlformats.org/drawingml/2006/main">
+            <a:r>
+              <a:t/>
+            </a:r>
+          </a:p>
+          <a:p xmlns:a="http://schemas.openxmlformats.org/drawingml/2006/main">
+            <a:r>
+              <a:t>Transição:</a:t>
+            </a:r>
+          </a:p>
+          <a:p xmlns:a="http://schemas.openxmlformats.org/drawingml/2006/main">
+            <a:r>
+              <a:t>Com esse ponto estabelecido, avance para “PRÓXIMO PASSO”.</a:t>
             </a:r>
           </a:p>
           <a:p xmlns:a="http://schemas.openxmlformats.org/drawingml/2006/main">
@@ -2079,7 +2779,57 @@
           <a:lstStyle xmlns:a="http://schemas.openxmlformats.org/drawingml/2006/main"/>
           <a:p xmlns:a="http://schemas.openxmlformats.org/drawingml/2006/main">
             <a:r>
-              <a:t>Compare full e incremental e prove igualdade antes de falar em economia. Encerre conectando a aula ao próximo checkpoint.</a:t>
+              <a:t>[Roteiro recomendado]</a:t>
+            </a:r>
+          </a:p>
+          <a:p xmlns:a="http://schemas.openxmlformats.org/drawingml/2006/main">
+            <a:r>
+              <a:t>[Tempo sugerido: 00:40]</a:t>
+            </a:r>
+          </a:p>
+          <a:p xmlns:a="http://schemas.openxmlformats.org/drawingml/2006/main">
+            <a:r>
+              <a:t/>
+            </a:r>
+          </a:p>
+          <a:p xmlns:a="http://schemas.openxmlformats.org/drawingml/2006/main">
+            <a:r>
+              <a:t>Fala sugerida:</a:t>
+            </a:r>
+          </a:p>
+          <a:p xmlns:a="http://schemas.openxmlformats.org/drawingml/2006/main">
+            <a:r>
+              <a:t>Compare full e incremental e prove igualdade antes de falar em economia. Faça essa etapa antes de seguir para o próximo episódio, porque o curso é cumulativo e o checkpoint atual se torna a base da aula seguinte. Se houver divergência, use o relatório de suporte e registre o que foi observado. O objetivo é avançar com um estado conhecido e reproduzível, não apenas assistir ao conteúdo.</a:t>
+            </a:r>
+          </a:p>
+          <a:p xmlns:a="http://schemas.openxmlformats.org/drawingml/2006/main">
+            <a:r>
+              <a:t/>
+            </a:r>
+          </a:p>
+          <a:p xmlns:a="http://schemas.openxmlformats.org/drawingml/2006/main">
+            <a:r>
+              <a:t>O que destacar:</a:t>
+            </a:r>
+          </a:p>
+          <a:p xmlns:a="http://schemas.openxmlformats.org/drawingml/2006/main">
+            <a:r>
+              <a:t>- Mostre o checkpoint e indique no repositório onde ficam o roteiro, os comandos e as referências da aula.</a:t>
+            </a:r>
+          </a:p>
+          <a:p xmlns:a="http://schemas.openxmlformats.org/drawingml/2006/main">
+            <a:r>
+              <a:t/>
+            </a:r>
+          </a:p>
+          <a:p xmlns:a="http://schemas.openxmlformats.org/drawingml/2006/main">
+            <a:r>
+              <a:t>Transição:</a:t>
+            </a:r>
+          </a:p>
+          <a:p xmlns:a="http://schemas.openxmlformats.org/drawingml/2006/main">
+            <a:r>
+              <a:t>Encerre retomando a pergunta inicial e confirme que o aluno sabe qual ação executar depois do episódio 10.</a:t>
             </a:r>
           </a:p>
           <a:p xmlns:a="http://schemas.openxmlformats.org/drawingml/2006/main">
@@ -2194,7 +2944,57 @@
           <a:lstStyle xmlns:a="http://schemas.openxmlformats.org/drawingml/2006/main"/>
           <a:p xmlns:a="http://schemas.openxmlformats.org/drawingml/2006/main">
             <a:r>
-              <a:t>Explique os três resultados observáveis da aula: Corrigir incremental; Medir linhas e duração; Usar microbatch somente quando fizer sentido.</a:t>
+              <a:t>[Roteiro recomendado]</a:t>
+            </a:r>
+          </a:p>
+          <a:p xmlns:a="http://schemas.openxmlformats.org/drawingml/2006/main">
+            <a:r>
+              <a:t>[Tempo sugerido: 01:00]</a:t>
+            </a:r>
+          </a:p>
+          <a:p xmlns:a="http://schemas.openxmlformats.org/drawingml/2006/main">
+            <a:r>
+              <a:t/>
+            </a:r>
+          </a:p>
+          <a:p xmlns:a="http://schemas.openxmlformats.org/drawingml/2006/main">
+            <a:r>
+              <a:t>Fala sugerida:</a:t>
+            </a:r>
+          </a:p>
+          <a:p xmlns:a="http://schemas.openxmlformats.org/drawingml/2006/main">
+            <a:r>
+              <a:t>Ao final desta aula, você deverá conseguir corrigir incremental, Medir linhas e duração e Usar microbatch somente quando fizer sentido. Esses resultados formam uma sequência: primeiro entendemos a regra, depois observamos sua representação no projeto e, por fim, comprovamos o comportamento no checkpoint. Se alguma dessas três partes não estiver clara, volte ao slide correspondente antes de executar a demonstração.</a:t>
+            </a:r>
+          </a:p>
+          <a:p xmlns:a="http://schemas.openxmlformats.org/drawingml/2006/main">
+            <a:r>
+              <a:t/>
+            </a:r>
+          </a:p>
+          <a:p xmlns:a="http://schemas.openxmlformats.org/drawingml/2006/main">
+            <a:r>
+              <a:t>O que destacar:</a:t>
+            </a:r>
+          </a:p>
+          <a:p xmlns:a="http://schemas.openxmlformats.org/drawingml/2006/main">
+            <a:r>
+              <a:t>- Percorra os objetivos da esquerda para a direita e apresente-os como resultados observáveis, não como uma agenda abstrata.</a:t>
+            </a:r>
+          </a:p>
+          <a:p xmlns:a="http://schemas.openxmlformats.org/drawingml/2006/main">
+            <a:r>
+              <a:t/>
+            </a:r>
+          </a:p>
+          <a:p xmlns:a="http://schemas.openxmlformats.org/drawingml/2006/main">
+            <a:r>
+              <a:t>Transição:</a:t>
+            </a:r>
+          </a:p>
+          <a:p xmlns:a="http://schemas.openxmlformats.org/drawingml/2006/main">
+            <a:r>
+              <a:t>Com esse ponto estabelecido, avance para “Custo precisa de uma equação”.</a:t>
             </a:r>
           </a:p>
           <a:p xmlns:a="http://schemas.openxmlformats.org/drawingml/2006/main">
@@ -2309,7 +3109,57 @@
           <a:lstStyle xmlns:a="http://schemas.openxmlformats.org/drawingml/2006/main"/>
           <a:p xmlns:a="http://schemas.openxmlformats.org/drawingml/2006/main">
             <a:r>
-              <a:t>Compute × tempo não é o único componente. Desenvolva os pontos: Compute e duração; Storage e orquestração; Retries e retrabalho.</a:t>
+              <a:t>[Roteiro recomendado]</a:t>
+            </a:r>
+          </a:p>
+          <a:p xmlns:a="http://schemas.openxmlformats.org/drawingml/2006/main">
+            <a:r>
+              <a:t>[Tempo sugerido: 01:10]</a:t>
+            </a:r>
+          </a:p>
+          <a:p xmlns:a="http://schemas.openxmlformats.org/drawingml/2006/main">
+            <a:r>
+              <a:t/>
+            </a:r>
+          </a:p>
+          <a:p xmlns:a="http://schemas.openxmlformats.org/drawingml/2006/main">
+            <a:r>
+              <a:t>Fala sugerida:</a:t>
+            </a:r>
+          </a:p>
+          <a:p xmlns:a="http://schemas.openxmlformats.org/drawingml/2006/main">
+            <a:r>
+              <a:t>A mensagem principal deste slide é: Compute × tempo não é o único componente. Para tornar isso concreto, observe compute e duração, Storage e orquestração e Retries e retrabalho. Esses pontos devem ser entendidos em conjunto; não são funcionalidades isoladas. No projeto, essa combinação transforma uma convenção informal em algo que pode ser revisado, testado ou consumido de maneira consistente.</a:t>
+            </a:r>
+          </a:p>
+          <a:p xmlns:a="http://schemas.openxmlformats.org/drawingml/2006/main">
+            <a:r>
+              <a:t/>
+            </a:r>
+          </a:p>
+          <a:p xmlns:a="http://schemas.openxmlformats.org/drawingml/2006/main">
+            <a:r>
+              <a:t>O que destacar:</a:t>
+            </a:r>
+          </a:p>
+          <a:p xmlns:a="http://schemas.openxmlformats.org/drawingml/2006/main">
+            <a:r>
+              <a:t>- Comece pelo título, leia a afirmação abaixo dele e depois desenvolva os itens sem repetir o texto palavra por palavra.</a:t>
+            </a:r>
+          </a:p>
+          <a:p xmlns:a="http://schemas.openxmlformats.org/drawingml/2006/main">
+            <a:r>
+              <a:t/>
+            </a:r>
+          </a:p>
+          <a:p xmlns:a="http://schemas.openxmlformats.org/drawingml/2006/main">
+            <a:r>
+              <a:t>Transição:</a:t>
+            </a:r>
+          </a:p>
+          <a:p xmlns:a="http://schemas.openxmlformats.org/drawingml/2006/main">
+            <a:r>
+              <a:t>Com esse ponto estabelecido, avance para “Incremental exige filtro e chave”.</a:t>
             </a:r>
           </a:p>
           <a:p xmlns:a="http://schemas.openxmlformats.org/drawingml/2006/main">
@@ -2424,7 +3274,57 @@
           <a:lstStyle xmlns:a="http://schemas.openxmlformats.org/drawingml/2006/main"/>
           <a:p xmlns:a="http://schemas.openxmlformats.org/drawingml/2006/main">
             <a:r>
-              <a:t>merge sem is_incremental() ainda lê todo o histórico. Desenvolva os pontos: unique_key; Filtro de candidatos; Equivalência com full refresh.</a:t>
+              <a:t>[Roteiro recomendado]</a:t>
+            </a:r>
+          </a:p>
+          <a:p xmlns:a="http://schemas.openxmlformats.org/drawingml/2006/main">
+            <a:r>
+              <a:t>[Tempo sugerido: 01:10]</a:t>
+            </a:r>
+          </a:p>
+          <a:p xmlns:a="http://schemas.openxmlformats.org/drawingml/2006/main">
+            <a:r>
+              <a:t/>
+            </a:r>
+          </a:p>
+          <a:p xmlns:a="http://schemas.openxmlformats.org/drawingml/2006/main">
+            <a:r>
+              <a:t>Fala sugerida:</a:t>
+            </a:r>
+          </a:p>
+          <a:p xmlns:a="http://schemas.openxmlformats.org/drawingml/2006/main">
+            <a:r>
+              <a:t>A mensagem principal deste slide é: merge sem is_incremental() ainda lê todo o histórico. Para tornar isso concreto, observe unique_key, Filtro de candidatos e Equivalência com full refresh. Esses pontos devem ser entendidos em conjunto; não são funcionalidades isoladas. No projeto, essa combinação transforma uma convenção informal em algo que pode ser revisado, testado ou consumido de maneira consistente.</a:t>
+            </a:r>
+          </a:p>
+          <a:p xmlns:a="http://schemas.openxmlformats.org/drawingml/2006/main">
+            <a:r>
+              <a:t/>
+            </a:r>
+          </a:p>
+          <a:p xmlns:a="http://schemas.openxmlformats.org/drawingml/2006/main">
+            <a:r>
+              <a:t>O que destacar:</a:t>
+            </a:r>
+          </a:p>
+          <a:p xmlns:a="http://schemas.openxmlformats.org/drawingml/2006/main">
+            <a:r>
+              <a:t>- Comece pelo título, leia a afirmação abaixo dele e depois desenvolva os itens sem repetir o texto palavra por palavra.</a:t>
+            </a:r>
+          </a:p>
+          <a:p xmlns:a="http://schemas.openxmlformats.org/drawingml/2006/main">
+            <a:r>
+              <a:t/>
+            </a:r>
+          </a:p>
+          <a:p xmlns:a="http://schemas.openxmlformats.org/drawingml/2006/main">
+            <a:r>
+              <a:t>Transição:</a:t>
+            </a:r>
+          </a:p>
+          <a:p xmlns:a="http://schemas.openxmlformats.org/drawingml/2006/main">
+            <a:r>
+              <a:t>Com esse ponto estabelecido, avance para “Incremental exige filtro e chave”.</a:t>
             </a:r>
           </a:p>
           <a:p xmlns:a="http://schemas.openxmlformats.org/drawingml/2006/main">
@@ -2539,7 +3439,57 @@
           <a:lstStyle xmlns:a="http://schemas.openxmlformats.org/drawingml/2006/main"/>
           <a:p xmlns:a="http://schemas.openxmlformats.org/drawingml/2006/main">
             <a:r>
-              <a:t>Use a composição para explicar visualmente: merge sem is_incremental() ainda lê todo o histórico. unique_key Filtro de candidatos Equivalência com full refresh</a:t>
+              <a:t>[Roteiro recomendado]</a:t>
+            </a:r>
+          </a:p>
+          <a:p xmlns:a="http://schemas.openxmlformats.org/drawingml/2006/main">
+            <a:r>
+              <a:t>[Tempo sugerido: 00:55]</a:t>
+            </a:r>
+          </a:p>
+          <a:p xmlns:a="http://schemas.openxmlformats.org/drawingml/2006/main">
+            <a:r>
+              <a:t/>
+            </a:r>
+          </a:p>
+          <a:p xmlns:a="http://schemas.openxmlformats.org/drawingml/2006/main">
+            <a:r>
+              <a:t>Fala sugerida:</a:t>
+            </a:r>
+          </a:p>
+          <a:p xmlns:a="http://schemas.openxmlformats.org/drawingml/2006/main">
+            <a:r>
+              <a:t>Agora vamos ler a ideia visualmente. merge sem is_incremental() ainda lê todo o histórico. Siga a composição na ordem mostrada e conecte fonte, Filtro, Merge e Tabela. A imagem ou o fluxo não cria uma regra nova; ele torna visível a relação que acabamos de explicar. Use a disposição dos elementos para reforçar causa, dependência ou comparação.</a:t>
+            </a:r>
+          </a:p>
+          <a:p xmlns:a="http://schemas.openxmlformats.org/drawingml/2006/main">
+            <a:r>
+              <a:t/>
+            </a:r>
+          </a:p>
+          <a:p xmlns:a="http://schemas.openxmlformats.org/drawingml/2006/main">
+            <a:r>
+              <a:t>O que destacar:</a:t>
+            </a:r>
+          </a:p>
+          <a:p xmlns:a="http://schemas.openxmlformats.org/drawingml/2006/main">
+            <a:r>
+              <a:t>- Acompanhe o fluxo ou a comparação com o cursor e preserve a ordem de leitura do slide.</a:t>
+            </a:r>
+          </a:p>
+          <a:p xmlns:a="http://schemas.openxmlformats.org/drawingml/2006/main">
+            <a:r>
+              <a:t/>
+            </a:r>
+          </a:p>
+          <a:p xmlns:a="http://schemas.openxmlformats.org/drawingml/2006/main">
+            <a:r>
+              <a:t>Transição:</a:t>
+            </a:r>
+          </a:p>
+          <a:p xmlns:a="http://schemas.openxmlformats.org/drawingml/2006/main">
+            <a:r>
+              <a:t>Com esse ponto estabelecido, avance para “O diagrama oficial mostra a redução de leitura”.</a:t>
             </a:r>
           </a:p>
           <a:p xmlns:a="http://schemas.openxmlformats.org/drawingml/2006/main">
@@ -2654,7 +3604,57 @@
           <a:lstStyle xmlns:a="http://schemas.openxmlformats.org/drawingml/2006/main"/>
           <a:p xmlns:a="http://schemas.openxmlformats.org/drawingml/2006/main">
             <a:r>
-              <a:t>Registros existentes permanecem; somente novos candidatos entram. Desenvolva os pontos: Estado existente; Novos registros; Resultado acumulado.</a:t>
+              <a:t>[Roteiro recomendado]</a:t>
+            </a:r>
+          </a:p>
+          <a:p xmlns:a="http://schemas.openxmlformats.org/drawingml/2006/main">
+            <a:r>
+              <a:t>[Tempo sugerido: 01:10]</a:t>
+            </a:r>
+          </a:p>
+          <a:p xmlns:a="http://schemas.openxmlformats.org/drawingml/2006/main">
+            <a:r>
+              <a:t/>
+            </a:r>
+          </a:p>
+          <a:p xmlns:a="http://schemas.openxmlformats.org/drawingml/2006/main">
+            <a:r>
+              <a:t>Fala sugerida:</a:t>
+            </a:r>
+          </a:p>
+          <a:p xmlns:a="http://schemas.openxmlformats.org/drawingml/2006/main">
+            <a:r>
+              <a:t>A mensagem principal deste slide é: Registros existentes permanecem; somente novos candidatos entram. Para tornar isso concreto, observe estado existente, Novos registros e Resultado acumulado. Esses pontos devem ser entendidos em conjunto; não são funcionalidades isoladas. No projeto, essa combinação transforma uma convenção informal em algo que pode ser revisado, testado ou consumido de maneira consistente.</a:t>
+            </a:r>
+          </a:p>
+          <a:p xmlns:a="http://schemas.openxmlformats.org/drawingml/2006/main">
+            <a:r>
+              <a:t/>
+            </a:r>
+          </a:p>
+          <a:p xmlns:a="http://schemas.openxmlformats.org/drawingml/2006/main">
+            <a:r>
+              <a:t>O que destacar:</a:t>
+            </a:r>
+          </a:p>
+          <a:p xmlns:a="http://schemas.openxmlformats.org/drawingml/2006/main">
+            <a:r>
+              <a:t>- Comece pelo título, leia a afirmação abaixo dele e depois desenvolva os itens sem repetir o texto palavra por palavra.</a:t>
+            </a:r>
+          </a:p>
+          <a:p xmlns:a="http://schemas.openxmlformats.org/drawingml/2006/main">
+            <a:r>
+              <a:t/>
+            </a:r>
+          </a:p>
+          <a:p xmlns:a="http://schemas.openxmlformats.org/drawingml/2006/main">
+            <a:r>
+              <a:t>Transição:</a:t>
+            </a:r>
+          </a:p>
+          <a:p xmlns:a="http://schemas.openxmlformats.org/drawingml/2006/main">
+            <a:r>
+              <a:t>Com esse ponto estabelecido, avance para “O diagrama oficial mostra a redução de leitura”.</a:t>
             </a:r>
           </a:p>
           <a:p xmlns:a="http://schemas.openxmlformats.org/drawingml/2006/main">
@@ -2769,7 +3769,57 @@
           <a:lstStyle xmlns:a="http://schemas.openxmlformats.org/drawingml/2006/main"/>
           <a:p xmlns:a="http://schemas.openxmlformats.org/drawingml/2006/main">
             <a:r>
-              <a:t>Use a composição para explicar visualmente: Registros existentes permanecem; somente novos candidatos entram. Estado existente Novos registros Resultado acumulado</a:t>
+              <a:t>[Roteiro recomendado]</a:t>
+            </a:r>
+          </a:p>
+          <a:p xmlns:a="http://schemas.openxmlformats.org/drawingml/2006/main">
+            <a:r>
+              <a:t>[Tempo sugerido: 00:55]</a:t>
+            </a:r>
+          </a:p>
+          <a:p xmlns:a="http://schemas.openxmlformats.org/drawingml/2006/main">
+            <a:r>
+              <a:t/>
+            </a:r>
+          </a:p>
+          <a:p xmlns:a="http://schemas.openxmlformats.org/drawingml/2006/main">
+            <a:r>
+              <a:t>Fala sugerida:</a:t>
+            </a:r>
+          </a:p>
+          <a:p xmlns:a="http://schemas.openxmlformats.org/drawingml/2006/main">
+            <a:r>
+              <a:t>Agora vamos ler a ideia visualmente. Registros existentes permanecem; somente novos candidatos entram. Siga a composição na ordem mostrada e conecte os elementos principais. A imagem ou o fluxo não cria uma regra nova; ele torna visível a relação que acabamos de explicar. A figura é identificada como figura oficial da documentação dbt — Apache 2.0</a:t>
+            </a:r>
+          </a:p>
+          <a:p xmlns:a="http://schemas.openxmlformats.org/drawingml/2006/main">
+            <a:r>
+              <a:t/>
+            </a:r>
+          </a:p>
+          <a:p xmlns:a="http://schemas.openxmlformats.org/drawingml/2006/main">
+            <a:r>
+              <a:t>O que destacar:</a:t>
+            </a:r>
+          </a:p>
+          <a:p xmlns:a="http://schemas.openxmlformats.org/drawingml/2006/main">
+            <a:r>
+              <a:t>- Aponte a legenda e deixe explícito quando a figura é oficial; as anotações do curso ficam fora da imagem.</a:t>
+            </a:r>
+          </a:p>
+          <a:p xmlns:a="http://schemas.openxmlformats.org/drawingml/2006/main">
+            <a:r>
+              <a:t/>
+            </a:r>
+          </a:p>
+          <a:p xmlns:a="http://schemas.openxmlformats.org/drawingml/2006/main">
+            <a:r>
+              <a:t>Transição:</a:t>
+            </a:r>
+          </a:p>
+          <a:p xmlns:a="http://schemas.openxmlformats.org/drawingml/2006/main">
+            <a:r>
+              <a:t>Com esse ponto estabelecido, avance para “Microbatch precisa de event_time”.</a:t>
             </a:r>
           </a:p>
           <a:p xmlns:a="http://schemas.openxmlformats.org/drawingml/2006/main">
@@ -2889,7 +3939,57 @@
           <a:lstStyle xmlns:a="http://schemas.openxmlformats.org/drawingml/2006/main"/>
           <a:p xmlns:a="http://schemas.openxmlformats.org/drawingml/2006/main">
             <a:r>
-              <a:t>Lotes temporais só ajudam quando evento, janela e backfill são mensuráveis. Desenvolva os pontos: event_time; batch_size; lookback.</a:t>
+              <a:t>[Roteiro recomendado]</a:t>
+            </a:r>
+          </a:p>
+          <a:p xmlns:a="http://schemas.openxmlformats.org/drawingml/2006/main">
+            <a:r>
+              <a:t>[Tempo sugerido: 01:10]</a:t>
+            </a:r>
+          </a:p>
+          <a:p xmlns:a="http://schemas.openxmlformats.org/drawingml/2006/main">
+            <a:r>
+              <a:t/>
+            </a:r>
+          </a:p>
+          <a:p xmlns:a="http://schemas.openxmlformats.org/drawingml/2006/main">
+            <a:r>
+              <a:t>Fala sugerida:</a:t>
+            </a:r>
+          </a:p>
+          <a:p xmlns:a="http://schemas.openxmlformats.org/drawingml/2006/main">
+            <a:r>
+              <a:t>A mensagem principal deste slide é: Lotes temporais só ajudam quando evento, janela e backfill são mensuráveis. Para tornar isso concreto, observe event_time, batch_size e lookback. Esses pontos devem ser entendidos em conjunto; não são funcionalidades isoladas. No projeto, essa combinação transforma uma convenção informal em algo que pode ser revisado, testado ou consumido de maneira consistente.</a:t>
+            </a:r>
+          </a:p>
+          <a:p xmlns:a="http://schemas.openxmlformats.org/drawingml/2006/main">
+            <a:r>
+              <a:t/>
+            </a:r>
+          </a:p>
+          <a:p xmlns:a="http://schemas.openxmlformats.org/drawingml/2006/main">
+            <a:r>
+              <a:t>O que destacar:</a:t>
+            </a:r>
+          </a:p>
+          <a:p xmlns:a="http://schemas.openxmlformats.org/drawingml/2006/main">
+            <a:r>
+              <a:t>- Comece pelo título, leia a afirmação abaixo dele e depois desenvolva os itens sem repetir o texto palavra por palavra.</a:t>
+            </a:r>
+          </a:p>
+          <a:p xmlns:a="http://schemas.openxmlformats.org/drawingml/2006/main">
+            <a:r>
+              <a:t/>
+            </a:r>
+          </a:p>
+          <a:p xmlns:a="http://schemas.openxmlformats.org/drawingml/2006/main">
+            <a:r>
+              <a:t>Transição:</a:t>
+            </a:r>
+          </a:p>
+          <a:p xmlns:a="http://schemas.openxmlformats.org/drawingml/2006/main">
+            <a:r>
+              <a:t>Com esse ponto estabelecido, avance para “Microbatch precisa de event_time”.</a:t>
             </a:r>
           </a:p>
           <a:p xmlns:a="http://schemas.openxmlformats.org/drawingml/2006/main">
@@ -3036,7 +4136,7 @@
   </p:cSld>
   <p:clrMap bg1="lt1" tx1="dk1" bg2="lt2" tx2="dk2" accent1="accent1" accent2="accent2" accent3="accent3" accent4="accent4" accent5="accent5" accent6="accent6" hlink="hlink" folHlink="folHlink"/>
   <p:sldLayoutIdLst>
-    <p:sldLayoutId xmlns:r="http://schemas.openxmlformats.org/officeDocument/2006/relationships" id="2147483649" r:id="R20b6fcd11d0d43c1"/>
+    <p:sldLayoutId xmlns:r="http://schemas.openxmlformats.org/officeDocument/2006/relationships" id="2147483649" r:id="Ref4e6e9ec0314d53"/>
   </p:sldLayoutIdLst>
   <p:txStyles>
     <p:titleStyle>
@@ -3334,8 +4434,8 @@
   </p:cSld>
   <p:clrMap bg1="lt1" tx1="dk1" bg2="lt2" tx2="dk2" accent1="accent1" accent2="accent2" accent3="accent3" accent4="accent4" accent5="accent5" accent6="accent6" hlink="hlink" folHlink="folHlink"/>
   <p:sldLayoutIdLst>
-    <p:sldLayoutId xmlns:r="http://schemas.openxmlformats.org/officeDocument/2006/relationships" id="2147483651" r:id="R85d56b6d48574d7a"/>
-    <p:sldLayoutId xmlns:r="http://schemas.openxmlformats.org/officeDocument/2006/relationships" id="2147483652" r:id="R15e067f0c96d41c4"/>
+    <p:sldLayoutId xmlns:r="http://schemas.openxmlformats.org/officeDocument/2006/relationships" id="2147483651" r:id="R6737aea872b0460a"/>
+    <p:sldLayoutId xmlns:r="http://schemas.openxmlformats.org/officeDocument/2006/relationships" id="2147483652" r:id="Rad32440c782d4510"/>
   </p:sldLayoutIdLst>
 </p:sldMaster>
 </file>
@@ -3859,14 +4959,14 @@
       </p:grpSpPr>
       <p:pic>
         <p:nvPicPr>
-          <p:cNvPr id="9" name="" descr="Ilustração conceitual autoral da capa: EPISÓDIO 10 — FinOps do pipeline."/>
+          <p:cNvPr id="10" name="" descr="Ilustração conceitual autoral da capa: EPISÓDIO 10 — FinOps do pipeline."/>
           <p:cNvPicPr>
             <a:picLocks xmlns:a="http://schemas.openxmlformats.org/drawingml/2006/main" noChangeAspect="1"/>
           </p:cNvPicPr>
           <p:nvPr/>
         </p:nvPicPr>
         <p:blipFill>
-          <a:blip xmlns:r="http://schemas.openxmlformats.org/officeDocument/2006/relationships" xmlns:a="http://schemas.openxmlformats.org/drawingml/2006/main" r:embed="R42a77ea8cd244095"/>
+          <a:blip xmlns:r="http://schemas.openxmlformats.org/officeDocument/2006/relationships" xmlns:a="http://schemas.openxmlformats.org/drawingml/2006/main" r:embed="R2c32f6bcbe0b495c"/>
           <a:srcRect xmlns:a="http://schemas.openxmlformats.org/drawingml/2006/main" l="19785" t="0" r="19785" b="0"/>
           <a:stretch xmlns:a="http://schemas.openxmlformats.org/drawingml/2006/main">
             <a:fillRect l="0" t="0" r="0" b="0"/>
@@ -3979,6 +5079,7 @@
           <a:lstStyle xmlns:a="http://schemas.openxmlformats.org/drawingml/2006/main"/>
           <a:p xmlns:a="http://schemas.openxmlformats.org/drawingml/2006/main">
             <a:pPr>
+              <a:buNone/>
               <a:defRPr sz="1350" b="1">
                 <a:solidFill>
                   <a:srgbClr val="1EC5FF"/>
@@ -4029,6 +5130,7 @@
           <a:lstStyle xmlns:a="http://schemas.openxmlformats.org/drawingml/2006/main"/>
           <a:p xmlns:a="http://schemas.openxmlformats.org/drawingml/2006/main">
             <a:pPr>
+              <a:buNone/>
               <a:defRPr sz="3225" b="1">
                 <a:solidFill>
                   <a:srgbClr val="FFFFFF"/>
@@ -4079,6 +5181,7 @@
           <a:lstStyle xmlns:a="http://schemas.openxmlformats.org/drawingml/2006/main"/>
           <a:p xmlns:a="http://schemas.openxmlformats.org/drawingml/2006/main">
             <a:pPr>
+              <a:buNone/>
               <a:defRPr sz="1800">
                 <a:solidFill>
                   <a:srgbClr val="E2F2FF"/>
@@ -4160,6 +5263,7 @@
           <a:lstStyle xmlns:a="http://schemas.openxmlformats.org/drawingml/2006/main"/>
           <a:p xmlns:a="http://schemas.openxmlformats.org/drawingml/2006/main">
             <a:pPr>
+              <a:buNone/>
               <a:defRPr sz="1200" b="1">
                 <a:solidFill>
                   <a:srgbClr val="FFFFFF">
@@ -4251,6 +5355,7 @@
           <a:lstStyle xmlns:a="http://schemas.openxmlformats.org/drawingml/2006/main"/>
           <a:p xmlns:a="http://schemas.openxmlformats.org/drawingml/2006/main">
             <a:pPr>
+              <a:buNone/>
               <a:defRPr sz="2925" b="1">
                 <a:solidFill>
                   <a:srgbClr val="FFFFFF"/>
@@ -4301,6 +5406,7 @@
           <a:lstStyle xmlns:a="http://schemas.openxmlformats.org/drawingml/2006/main"/>
           <a:p xmlns:a="http://schemas.openxmlformats.org/drawingml/2006/main">
             <a:pPr>
+              <a:buNone/>
               <a:defRPr sz="1950" b="1">
                 <a:solidFill>
                   <a:srgbClr val="FFFFFF"/>
@@ -4357,14 +5463,14 @@
       </p:sp>
       <p:pic>
         <p:nvPicPr>
-          <p:cNvPr id="13" name="" descr="Figura oficial da documentação dbt usada para explicar: Microbatch precisa de event_time — Lotes temporais só ajudam quando evento, janela e backfill são mensuráveis.."/>
+          <p:cNvPr id="15" name="" descr="Figura oficial da documentação dbt usada para explicar: Microbatch precisa de event_time — Lotes temporais só ajudam quando evento, janela e backfill são mensuráveis.."/>
           <p:cNvPicPr>
             <a:picLocks xmlns:a="http://schemas.openxmlformats.org/drawingml/2006/main" noChangeAspect="1"/>
           </p:cNvPicPr>
           <p:nvPr/>
         </p:nvPicPr>
         <p:blipFill>
-          <a:blip xmlns:r="http://schemas.openxmlformats.org/officeDocument/2006/relationships" xmlns:a="http://schemas.openxmlformats.org/drawingml/2006/main" r:embed="Rb25c254fb5824f9e"/>
+          <a:blip xmlns:r="http://schemas.openxmlformats.org/officeDocument/2006/relationships" xmlns:a="http://schemas.openxmlformats.org/drawingml/2006/main" r:embed="R0d08636cb9654076"/>
           <a:stretch xmlns:a="http://schemas.openxmlformats.org/drawingml/2006/main"/>
         </p:blipFill>
         <p:spPr>
@@ -4410,6 +5516,7 @@
           <a:lstStyle xmlns:a="http://schemas.openxmlformats.org/drawingml/2006/main"/>
           <a:p xmlns:a="http://schemas.openxmlformats.org/drawingml/2006/main">
             <a:pPr>
+              <a:buNone/>
               <a:defRPr sz="900" i="1">
                 <a:solidFill>
                   <a:srgbClr val="5C6F86"/>
@@ -4460,6 +5567,7 @@
           <a:lstStyle xmlns:a="http://schemas.openxmlformats.org/drawingml/2006/main"/>
           <a:p xmlns:a="http://schemas.openxmlformats.org/drawingml/2006/main">
             <a:pPr>
+              <a:buNone/>
               <a:defRPr sz="1050" b="1">
                 <a:solidFill>
                   <a:srgbClr val="1EC5FF"/>
@@ -4543,6 +5651,7 @@
           <a:lstStyle xmlns:a="http://schemas.openxmlformats.org/drawingml/2006/main"/>
           <a:p xmlns:a="http://schemas.openxmlformats.org/drawingml/2006/main">
             <a:pPr>
+              <a:buNone/>
               <a:defRPr sz="825">
                 <a:solidFill>
                   <a:srgbClr val="FFFFFF">
@@ -4597,6 +5706,7 @@
           <a:lstStyle xmlns:a="http://schemas.openxmlformats.org/drawingml/2006/main"/>
           <a:p xmlns:a="http://schemas.openxmlformats.org/drawingml/2006/main">
             <a:pPr algn="r">
+              <a:buNone/>
               <a:defRPr sz="825" b="1">
                 <a:solidFill>
                   <a:srgbClr val="FFFFFF">
@@ -4688,6 +5798,7 @@
           <a:lstStyle xmlns:a="http://schemas.openxmlformats.org/drawingml/2006/main"/>
           <a:p xmlns:a="http://schemas.openxmlformats.org/drawingml/2006/main">
             <a:pPr>
+              <a:buNone/>
               <a:defRPr sz="2925" b="1">
                 <a:solidFill>
                   <a:srgbClr val="FFFFFF"/>
@@ -4738,6 +5849,7 @@
           <a:lstStyle xmlns:a="http://schemas.openxmlformats.org/drawingml/2006/main"/>
           <a:p xmlns:a="http://schemas.openxmlformats.org/drawingml/2006/main">
             <a:pPr>
+              <a:buNone/>
               <a:defRPr sz="1650">
                 <a:solidFill>
                   <a:srgbClr val="E2F2FF"/>
@@ -4788,6 +5900,7 @@
           <a:lstStyle xmlns:a="http://schemas.openxmlformats.org/drawingml/2006/main"/>
           <a:p xmlns:a="http://schemas.openxmlformats.org/drawingml/2006/main">
             <a:pPr>
+              <a:buNone/>
               <a:defRPr sz="1800">
                 <a:solidFill>
                   <a:srgbClr val="FFFFFF"/>
@@ -4805,6 +5918,7 @@
           </a:p>
           <a:p xmlns:a="http://schemas.openxmlformats.org/drawingml/2006/main">
             <a:pPr>
+              <a:buNone/>
               <a:defRPr sz="1800">
                 <a:solidFill>
                   <a:srgbClr val="FFFFFF"/>
@@ -4822,6 +5936,7 @@
           </a:p>
           <a:p xmlns:a="http://schemas.openxmlformats.org/drawingml/2006/main">
             <a:pPr>
+              <a:buNone/>
               <a:defRPr sz="1800">
                 <a:solidFill>
                   <a:srgbClr val="FFFFFF"/>
@@ -4946,6 +6061,7 @@
           <a:lstStyle xmlns:a="http://schemas.openxmlformats.org/drawingml/2006/main"/>
           <a:p xmlns:a="http://schemas.openxmlformats.org/drawingml/2006/main">
             <a:pPr algn="ctr">
+              <a:buNone/>
               <a:defRPr sz="4650" b="1">
                 <a:solidFill>
                   <a:srgbClr val="1EC5FF"/>
@@ -4996,6 +6112,7 @@
           <a:lstStyle xmlns:a="http://schemas.openxmlformats.org/drawingml/2006/main"/>
           <a:p xmlns:a="http://schemas.openxmlformats.org/drawingml/2006/main">
             <a:pPr>
+              <a:buNone/>
               <a:defRPr sz="1050" b="1">
                 <a:solidFill>
                   <a:srgbClr val="1EC5FF"/>
@@ -5079,6 +6196,7 @@
           <a:lstStyle xmlns:a="http://schemas.openxmlformats.org/drawingml/2006/main"/>
           <a:p xmlns:a="http://schemas.openxmlformats.org/drawingml/2006/main">
             <a:pPr>
+              <a:buNone/>
               <a:defRPr sz="825">
                 <a:solidFill>
                   <a:srgbClr val="FFFFFF">
@@ -5133,6 +6251,7 @@
           <a:lstStyle xmlns:a="http://schemas.openxmlformats.org/drawingml/2006/main"/>
           <a:p xmlns:a="http://schemas.openxmlformats.org/drawingml/2006/main">
             <a:pPr algn="r">
+              <a:buNone/>
               <a:defRPr sz="825" b="1">
                 <a:solidFill>
                   <a:srgbClr val="FFFFFF">
@@ -5216,6 +6335,7 @@
           <a:lstStyle xmlns:a="http://schemas.openxmlformats.org/drawingml/2006/main"/>
           <a:p xmlns:a="http://schemas.openxmlformats.org/drawingml/2006/main">
             <a:pPr>
+              <a:buNone/>
               <a:defRPr sz="2925" b="1">
                 <a:solidFill>
                   <a:srgbClr val="0B1F3A"/>
@@ -5266,6 +6386,7 @@
           <a:lstStyle xmlns:a="http://schemas.openxmlformats.org/drawingml/2006/main"/>
           <a:p xmlns:a="http://schemas.openxmlformats.org/drawingml/2006/main">
             <a:pPr>
+              <a:buNone/>
               <a:defRPr sz="2100" b="1">
                 <a:solidFill>
                   <a:srgbClr val="1565C0"/>
@@ -5316,6 +6437,7 @@
           <a:lstStyle xmlns:a="http://schemas.openxmlformats.org/drawingml/2006/main"/>
           <a:p xmlns:a="http://schemas.openxmlformats.org/drawingml/2006/main">
             <a:pPr>
+              <a:buNone/>
               <a:defRPr sz="2100" b="1">
                 <a:solidFill>
                   <a:srgbClr val="1565C0"/>
@@ -5397,6 +6519,7 @@
           <a:lstStyle xmlns:a="http://schemas.openxmlformats.org/drawingml/2006/main"/>
           <a:p xmlns:a="http://schemas.openxmlformats.org/drawingml/2006/main">
             <a:pPr>
+              <a:buNone/>
               <a:defRPr sz="1650">
                 <a:solidFill>
                   <a:srgbClr val="0B1F3A"/>
@@ -5414,6 +6537,7 @@
           </a:p>
           <a:p xmlns:a="http://schemas.openxmlformats.org/drawingml/2006/main">
             <a:pPr>
+              <a:buNone/>
               <a:defRPr sz="1650">
                 <a:solidFill>
                   <a:srgbClr val="0B1F3A"/>
@@ -5464,6 +6588,7 @@
           <a:lstStyle xmlns:a="http://schemas.openxmlformats.org/drawingml/2006/main"/>
           <a:p xmlns:a="http://schemas.openxmlformats.org/drawingml/2006/main">
             <a:pPr>
+              <a:buNone/>
               <a:defRPr sz="1650">
                 <a:solidFill>
                   <a:srgbClr val="0B1F3A"/>
@@ -5514,6 +6639,7 @@
           <a:lstStyle xmlns:a="http://schemas.openxmlformats.org/drawingml/2006/main"/>
           <a:p xmlns:a="http://schemas.openxmlformats.org/drawingml/2006/main">
             <a:pPr>
+              <a:buNone/>
               <a:defRPr sz="1050" b="1">
                 <a:solidFill>
                   <a:srgbClr val="1565C0"/>
@@ -5597,6 +6723,7 @@
           <a:lstStyle xmlns:a="http://schemas.openxmlformats.org/drawingml/2006/main"/>
           <a:p xmlns:a="http://schemas.openxmlformats.org/drawingml/2006/main">
             <a:pPr>
+              <a:buNone/>
               <a:defRPr sz="825">
                 <a:solidFill>
                   <a:srgbClr val="0B1F3A">
@@ -5651,6 +6778,7 @@
           <a:lstStyle xmlns:a="http://schemas.openxmlformats.org/drawingml/2006/main"/>
           <a:p xmlns:a="http://schemas.openxmlformats.org/drawingml/2006/main">
             <a:pPr algn="r">
+              <a:buNone/>
               <a:defRPr sz="825" b="1">
                 <a:solidFill>
                   <a:srgbClr val="0B1F3A">
@@ -5734,6 +6862,7 @@
           <a:lstStyle xmlns:a="http://schemas.openxmlformats.org/drawingml/2006/main"/>
           <a:p xmlns:a="http://schemas.openxmlformats.org/drawingml/2006/main">
             <a:pPr>
+              <a:buNone/>
               <a:defRPr sz="2925" b="1">
                 <a:solidFill>
                   <a:srgbClr val="0B1F3A"/>
@@ -5784,6 +6913,7 @@
           <a:lstStyle xmlns:a="http://schemas.openxmlformats.org/drawingml/2006/main"/>
           <a:p xmlns:a="http://schemas.openxmlformats.org/drawingml/2006/main">
             <a:pPr>
+              <a:buNone/>
               <a:defRPr sz="1650">
                 <a:solidFill>
                   <a:srgbClr val="5C6F86"/>
@@ -5834,6 +6964,7 @@
           <a:lstStyle xmlns:a="http://schemas.openxmlformats.org/drawingml/2006/main"/>
           <a:p xmlns:a="http://schemas.openxmlformats.org/drawingml/2006/main">
             <a:pPr>
+              <a:buNone/>
               <a:defRPr sz="1800">
                 <a:solidFill>
                   <a:srgbClr val="0B1F3A"/>
@@ -5851,6 +6982,7 @@
           </a:p>
           <a:p xmlns:a="http://schemas.openxmlformats.org/drawingml/2006/main">
             <a:pPr>
+              <a:buNone/>
               <a:defRPr sz="1800">
                 <a:solidFill>
                   <a:srgbClr val="0B1F3A"/>
@@ -5868,6 +7000,7 @@
           </a:p>
           <a:p xmlns:a="http://schemas.openxmlformats.org/drawingml/2006/main">
             <a:pPr>
+              <a:buNone/>
               <a:defRPr sz="1800">
                 <a:solidFill>
                   <a:srgbClr val="0B1F3A"/>
@@ -5992,6 +7125,7 @@
           <a:lstStyle xmlns:a="http://schemas.openxmlformats.org/drawingml/2006/main"/>
           <a:p xmlns:a="http://schemas.openxmlformats.org/drawingml/2006/main">
             <a:pPr algn="ctr">
+              <a:buNone/>
               <a:defRPr sz="4650" b="1">
                 <a:solidFill>
                   <a:srgbClr val="1565C0"/>
@@ -6042,6 +7176,7 @@
           <a:lstStyle xmlns:a="http://schemas.openxmlformats.org/drawingml/2006/main"/>
           <a:p xmlns:a="http://schemas.openxmlformats.org/drawingml/2006/main">
             <a:pPr>
+              <a:buNone/>
               <a:defRPr sz="1050" b="1">
                 <a:solidFill>
                   <a:srgbClr val="1565C0"/>
@@ -6125,6 +7260,7 @@
           <a:lstStyle xmlns:a="http://schemas.openxmlformats.org/drawingml/2006/main"/>
           <a:p xmlns:a="http://schemas.openxmlformats.org/drawingml/2006/main">
             <a:pPr>
+              <a:buNone/>
               <a:defRPr sz="825">
                 <a:solidFill>
                   <a:srgbClr val="0B1F3A">
@@ -6179,6 +7315,7 @@
           <a:lstStyle xmlns:a="http://schemas.openxmlformats.org/drawingml/2006/main"/>
           <a:p xmlns:a="http://schemas.openxmlformats.org/drawingml/2006/main">
             <a:pPr algn="r">
+              <a:buNone/>
               <a:defRPr sz="825" b="1">
                 <a:solidFill>
                   <a:srgbClr val="0B1F3A">
@@ -6270,6 +7407,7 @@
           <a:lstStyle xmlns:a="http://schemas.openxmlformats.org/drawingml/2006/main"/>
           <a:p xmlns:a="http://schemas.openxmlformats.org/drawingml/2006/main">
             <a:pPr>
+              <a:buNone/>
               <a:defRPr sz="2925" b="1">
                 <a:solidFill>
                   <a:srgbClr val="FFFFFF"/>
@@ -6353,6 +7491,7 @@
           <a:lstStyle xmlns:a="http://schemas.openxmlformats.org/drawingml/2006/main"/>
           <a:p xmlns:a="http://schemas.openxmlformats.org/drawingml/2006/main">
             <a:pPr algn="ctr">
+              <a:buNone/>
               <a:defRPr sz="1575" b="1">
                 <a:solidFill>
                   <a:srgbClr val="FFFFFF"/>
@@ -6436,6 +7575,7 @@
           <a:lstStyle xmlns:a="http://schemas.openxmlformats.org/drawingml/2006/main"/>
           <a:p xmlns:a="http://schemas.openxmlformats.org/drawingml/2006/main">
             <a:pPr algn="ctr">
+              <a:buNone/>
               <a:defRPr sz="1575" b="1">
                 <a:solidFill>
                   <a:srgbClr val="FFFFFF"/>
@@ -6519,6 +7659,7 @@
           <a:lstStyle xmlns:a="http://schemas.openxmlformats.org/drawingml/2006/main"/>
           <a:p xmlns:a="http://schemas.openxmlformats.org/drawingml/2006/main">
             <a:pPr algn="ctr">
+              <a:buNone/>
               <a:defRPr sz="1575" b="1">
                 <a:solidFill>
                   <a:srgbClr val="FFFFFF"/>
@@ -6569,6 +7710,7 @@
           <a:lstStyle xmlns:a="http://schemas.openxmlformats.org/drawingml/2006/main"/>
           <a:p xmlns:a="http://schemas.openxmlformats.org/drawingml/2006/main">
             <a:pPr>
+              <a:buNone/>
               <a:defRPr sz="1050" b="1">
                 <a:solidFill>
                   <a:srgbClr val="1EC5FF"/>
@@ -6652,6 +7794,7 @@
           <a:lstStyle xmlns:a="http://schemas.openxmlformats.org/drawingml/2006/main"/>
           <a:p xmlns:a="http://schemas.openxmlformats.org/drawingml/2006/main">
             <a:pPr>
+              <a:buNone/>
               <a:defRPr sz="825">
                 <a:solidFill>
                   <a:srgbClr val="FFFFFF">
@@ -6706,6 +7849,7 @@
           <a:lstStyle xmlns:a="http://schemas.openxmlformats.org/drawingml/2006/main"/>
           <a:p xmlns:a="http://schemas.openxmlformats.org/drawingml/2006/main">
             <a:pPr algn="r">
+              <a:buNone/>
               <a:defRPr sz="825" b="1">
                 <a:solidFill>
                   <a:srgbClr val="FFFFFF">
@@ -6797,6 +7941,7 @@
           <a:lstStyle xmlns:a="http://schemas.openxmlformats.org/drawingml/2006/main"/>
           <a:p xmlns:a="http://schemas.openxmlformats.org/drawingml/2006/main">
             <a:pPr>
+              <a:buNone/>
               <a:defRPr sz="2925" b="1">
                 <a:solidFill>
                   <a:srgbClr val="FFFFFF"/>
@@ -6882,6 +8027,7 @@
           <a:lstStyle xmlns:a="http://schemas.openxmlformats.org/drawingml/2006/main"/>
           <a:p xmlns:a="http://schemas.openxmlformats.org/drawingml/2006/main">
             <a:pPr>
+              <a:buNone/>
               <a:defRPr sz="1875" b="1">
                 <a:solidFill>
                   <a:srgbClr val="1EC5FF"/>
@@ -6932,6 +8078,7 @@
           <a:lstStyle xmlns:a="http://schemas.openxmlformats.org/drawingml/2006/main"/>
           <a:p xmlns:a="http://schemas.openxmlformats.org/drawingml/2006/main">
             <a:pPr>
+              <a:buNone/>
               <a:defRPr sz="1425">
                 <a:solidFill>
                   <a:srgbClr val="E2F2FF"/>
@@ -6982,6 +8129,7 @@
           <a:lstStyle xmlns:a="http://schemas.openxmlformats.org/drawingml/2006/main"/>
           <a:p xmlns:a="http://schemas.openxmlformats.org/drawingml/2006/main">
             <a:pPr>
+              <a:buNone/>
               <a:defRPr sz="1050" b="1">
                 <a:solidFill>
                   <a:srgbClr val="1EC5FF"/>
@@ -7065,6 +8213,7 @@
           <a:lstStyle xmlns:a="http://schemas.openxmlformats.org/drawingml/2006/main"/>
           <a:p xmlns:a="http://schemas.openxmlformats.org/drawingml/2006/main">
             <a:pPr>
+              <a:buNone/>
               <a:defRPr sz="825">
                 <a:solidFill>
                   <a:srgbClr val="FFFFFF">
@@ -7119,6 +8268,7 @@
           <a:lstStyle xmlns:a="http://schemas.openxmlformats.org/drawingml/2006/main"/>
           <a:p xmlns:a="http://schemas.openxmlformats.org/drawingml/2006/main">
             <a:pPr algn="r">
+              <a:buNone/>
               <a:defRPr sz="825" b="1">
                 <a:solidFill>
                   <a:srgbClr val="FFFFFF">
@@ -7202,6 +8352,7 @@
           <a:lstStyle xmlns:a="http://schemas.openxmlformats.org/drawingml/2006/main"/>
           <a:p xmlns:a="http://schemas.openxmlformats.org/drawingml/2006/main">
             <a:pPr>
+              <a:buNone/>
               <a:defRPr sz="2925" b="1">
                 <a:solidFill>
                   <a:srgbClr val="0B1F3A"/>
@@ -7252,6 +8403,7 @@
           <a:lstStyle xmlns:a="http://schemas.openxmlformats.org/drawingml/2006/main"/>
           <a:p xmlns:a="http://schemas.openxmlformats.org/drawingml/2006/main">
             <a:pPr>
+              <a:buNone/>
               <a:defRPr sz="3450" b="1">
                 <a:solidFill>
                   <a:srgbClr val="1565C0"/>
@@ -7302,6 +8454,7 @@
           <a:lstStyle xmlns:a="http://schemas.openxmlformats.org/drawingml/2006/main"/>
           <a:p xmlns:a="http://schemas.openxmlformats.org/drawingml/2006/main">
             <a:pPr>
+              <a:buNone/>
               <a:defRPr sz="1575" b="1">
                 <a:solidFill>
                   <a:srgbClr val="0B1F3A"/>
@@ -7383,6 +8536,7 @@
           <a:lstStyle xmlns:a="http://schemas.openxmlformats.org/drawingml/2006/main"/>
           <a:p xmlns:a="http://schemas.openxmlformats.org/drawingml/2006/main">
             <a:pPr>
+              <a:buNone/>
               <a:defRPr sz="3450" b="1">
                 <a:solidFill>
                   <a:srgbClr val="1565C0"/>
@@ -7433,6 +8587,7 @@
           <a:lstStyle xmlns:a="http://schemas.openxmlformats.org/drawingml/2006/main"/>
           <a:p xmlns:a="http://schemas.openxmlformats.org/drawingml/2006/main">
             <a:pPr>
+              <a:buNone/>
               <a:defRPr sz="1575" b="1">
                 <a:solidFill>
                   <a:srgbClr val="0B1F3A"/>
@@ -7514,6 +8669,7 @@
           <a:lstStyle xmlns:a="http://schemas.openxmlformats.org/drawingml/2006/main"/>
           <a:p xmlns:a="http://schemas.openxmlformats.org/drawingml/2006/main">
             <a:pPr>
+              <a:buNone/>
               <a:defRPr sz="3450" b="1">
                 <a:solidFill>
                   <a:srgbClr val="1565C0"/>
@@ -7564,6 +8720,7 @@
           <a:lstStyle xmlns:a="http://schemas.openxmlformats.org/drawingml/2006/main"/>
           <a:p xmlns:a="http://schemas.openxmlformats.org/drawingml/2006/main">
             <a:pPr>
+              <a:buNone/>
               <a:defRPr sz="1575" b="1">
                 <a:solidFill>
                   <a:srgbClr val="0B1F3A"/>
@@ -7614,6 +8771,7 @@
           <a:lstStyle xmlns:a="http://schemas.openxmlformats.org/drawingml/2006/main"/>
           <a:p xmlns:a="http://schemas.openxmlformats.org/drawingml/2006/main">
             <a:pPr>
+              <a:buNone/>
               <a:defRPr sz="1050" b="1">
                 <a:solidFill>
                   <a:srgbClr val="1565C0"/>
@@ -7697,6 +8855,7 @@
           <a:lstStyle xmlns:a="http://schemas.openxmlformats.org/drawingml/2006/main"/>
           <a:p xmlns:a="http://schemas.openxmlformats.org/drawingml/2006/main">
             <a:pPr>
+              <a:buNone/>
               <a:defRPr sz="825">
                 <a:solidFill>
                   <a:srgbClr val="0B1F3A">
@@ -7751,6 +8910,7 @@
           <a:lstStyle xmlns:a="http://schemas.openxmlformats.org/drawingml/2006/main"/>
           <a:p xmlns:a="http://schemas.openxmlformats.org/drawingml/2006/main">
             <a:pPr algn="r">
+              <a:buNone/>
               <a:defRPr sz="825" b="1">
                 <a:solidFill>
                   <a:srgbClr val="0B1F3A">
@@ -7842,6 +9002,7 @@
           <a:lstStyle xmlns:a="http://schemas.openxmlformats.org/drawingml/2006/main"/>
           <a:p xmlns:a="http://schemas.openxmlformats.org/drawingml/2006/main">
             <a:pPr>
+              <a:buNone/>
               <a:defRPr sz="1350" b="1">
                 <a:solidFill>
                   <a:srgbClr val="1EC5FF"/>
@@ -7892,6 +9053,7 @@
           <a:lstStyle xmlns:a="http://schemas.openxmlformats.org/drawingml/2006/main"/>
           <a:p xmlns:a="http://schemas.openxmlformats.org/drawingml/2006/main">
             <a:pPr>
+              <a:buNone/>
               <a:defRPr sz="3450" b="1">
                 <a:solidFill>
                   <a:srgbClr val="FFFFFF"/>
@@ -7942,6 +9104,7 @@
           <a:lstStyle xmlns:a="http://schemas.openxmlformats.org/drawingml/2006/main"/>
           <a:p xmlns:a="http://schemas.openxmlformats.org/drawingml/2006/main">
             <a:pPr>
+              <a:buNone/>
               <a:defRPr sz="1650">
                 <a:solidFill>
                   <a:srgbClr val="E2F2FF"/>
@@ -8066,6 +9229,7 @@
           <a:lstStyle xmlns:a="http://schemas.openxmlformats.org/drawingml/2006/main"/>
           <a:p xmlns:a="http://schemas.openxmlformats.org/drawingml/2006/main">
             <a:pPr>
+              <a:buNone/>
               <a:defRPr sz="1050" b="1">
                 <a:solidFill>
                   <a:srgbClr val="1EC5FF"/>
@@ -8149,6 +9313,7 @@
           <a:lstStyle xmlns:a="http://schemas.openxmlformats.org/drawingml/2006/main"/>
           <a:p xmlns:a="http://schemas.openxmlformats.org/drawingml/2006/main">
             <a:pPr>
+              <a:buNone/>
               <a:defRPr sz="825">
                 <a:solidFill>
                   <a:srgbClr val="FFFFFF">
@@ -8203,6 +9368,7 @@
           <a:lstStyle xmlns:a="http://schemas.openxmlformats.org/drawingml/2006/main"/>
           <a:p xmlns:a="http://schemas.openxmlformats.org/drawingml/2006/main">
             <a:pPr algn="r">
+              <a:buNone/>
               <a:defRPr sz="825" b="1">
                 <a:solidFill>
                   <a:srgbClr val="FFFFFF">
@@ -8286,6 +9452,7 @@
           <a:lstStyle xmlns:a="http://schemas.openxmlformats.org/drawingml/2006/main"/>
           <a:p xmlns:a="http://schemas.openxmlformats.org/drawingml/2006/main">
             <a:pPr>
+              <a:buNone/>
               <a:defRPr sz="2925" b="1">
                 <a:solidFill>
                   <a:srgbClr val="0B1F3A"/>
@@ -8336,6 +9503,7 @@
           <a:lstStyle xmlns:a="http://schemas.openxmlformats.org/drawingml/2006/main"/>
           <a:p xmlns:a="http://schemas.openxmlformats.org/drawingml/2006/main">
             <a:pPr>
+              <a:buNone/>
               <a:defRPr sz="3450" b="1">
                 <a:solidFill>
                   <a:srgbClr val="1565C0"/>
@@ -8386,6 +9554,7 @@
           <a:lstStyle xmlns:a="http://schemas.openxmlformats.org/drawingml/2006/main"/>
           <a:p xmlns:a="http://schemas.openxmlformats.org/drawingml/2006/main">
             <a:pPr>
+              <a:buNone/>
               <a:defRPr sz="1575" b="1">
                 <a:solidFill>
                   <a:srgbClr val="0B1F3A"/>
@@ -8467,6 +9636,7 @@
           <a:lstStyle xmlns:a="http://schemas.openxmlformats.org/drawingml/2006/main"/>
           <a:p xmlns:a="http://schemas.openxmlformats.org/drawingml/2006/main">
             <a:pPr>
+              <a:buNone/>
               <a:defRPr sz="3450" b="1">
                 <a:solidFill>
                   <a:srgbClr val="1565C0"/>
@@ -8517,6 +9687,7 @@
           <a:lstStyle xmlns:a="http://schemas.openxmlformats.org/drawingml/2006/main"/>
           <a:p xmlns:a="http://schemas.openxmlformats.org/drawingml/2006/main">
             <a:pPr>
+              <a:buNone/>
               <a:defRPr sz="1575" b="1">
                 <a:solidFill>
                   <a:srgbClr val="0B1F3A"/>
@@ -8598,6 +9769,7 @@
           <a:lstStyle xmlns:a="http://schemas.openxmlformats.org/drawingml/2006/main"/>
           <a:p xmlns:a="http://schemas.openxmlformats.org/drawingml/2006/main">
             <a:pPr>
+              <a:buNone/>
               <a:defRPr sz="3450" b="1">
                 <a:solidFill>
                   <a:srgbClr val="1565C0"/>
@@ -8648,6 +9820,7 @@
           <a:lstStyle xmlns:a="http://schemas.openxmlformats.org/drawingml/2006/main"/>
           <a:p xmlns:a="http://schemas.openxmlformats.org/drawingml/2006/main">
             <a:pPr>
+              <a:buNone/>
               <a:defRPr sz="1575" b="1">
                 <a:solidFill>
                   <a:srgbClr val="0B1F3A"/>
@@ -8698,6 +9871,7 @@
           <a:lstStyle xmlns:a="http://schemas.openxmlformats.org/drawingml/2006/main"/>
           <a:p xmlns:a="http://schemas.openxmlformats.org/drawingml/2006/main">
             <a:pPr>
+              <a:buNone/>
               <a:defRPr sz="1050" b="1">
                 <a:solidFill>
                   <a:srgbClr val="1565C0"/>
@@ -8781,6 +9955,7 @@
           <a:lstStyle xmlns:a="http://schemas.openxmlformats.org/drawingml/2006/main"/>
           <a:p xmlns:a="http://schemas.openxmlformats.org/drawingml/2006/main">
             <a:pPr>
+              <a:buNone/>
               <a:defRPr sz="825">
                 <a:solidFill>
                   <a:srgbClr val="0B1F3A">
@@ -8835,6 +10010,7 @@
           <a:lstStyle xmlns:a="http://schemas.openxmlformats.org/drawingml/2006/main"/>
           <a:p xmlns:a="http://schemas.openxmlformats.org/drawingml/2006/main">
             <a:pPr algn="r">
+              <a:buNone/>
               <a:defRPr sz="825" b="1">
                 <a:solidFill>
                   <a:srgbClr val="0B1F3A">
@@ -8926,6 +10102,7 @@
           <a:lstStyle xmlns:a="http://schemas.openxmlformats.org/drawingml/2006/main"/>
           <a:p xmlns:a="http://schemas.openxmlformats.org/drawingml/2006/main">
             <a:pPr>
+              <a:buNone/>
               <a:defRPr sz="5550" b="1">
                 <a:solidFill>
                   <a:srgbClr val="1EC5FF"/>
@@ -8976,6 +10153,7 @@
           <a:lstStyle xmlns:a="http://schemas.openxmlformats.org/drawingml/2006/main"/>
           <a:p xmlns:a="http://schemas.openxmlformats.org/drawingml/2006/main">
             <a:pPr>
+              <a:buNone/>
               <a:defRPr sz="2250" b="1">
                 <a:solidFill>
                   <a:srgbClr val="FFFFFF"/>
@@ -9059,6 +10237,7 @@
           <a:lstStyle xmlns:a="http://schemas.openxmlformats.org/drawingml/2006/main"/>
           <a:p xmlns:a="http://schemas.openxmlformats.org/drawingml/2006/main">
             <a:pPr>
+              <a:buNone/>
               <a:defRPr sz="1800">
                 <a:solidFill>
                   <a:srgbClr val="E2F2FF"/>
@@ -9109,6 +10288,7 @@
           <a:lstStyle xmlns:a="http://schemas.openxmlformats.org/drawingml/2006/main"/>
           <a:p xmlns:a="http://schemas.openxmlformats.org/drawingml/2006/main">
             <a:pPr>
+              <a:buNone/>
               <a:defRPr sz="1050" b="1">
                 <a:solidFill>
                   <a:srgbClr val="1EC5FF"/>
@@ -9192,6 +10372,7 @@
           <a:lstStyle xmlns:a="http://schemas.openxmlformats.org/drawingml/2006/main"/>
           <a:p xmlns:a="http://schemas.openxmlformats.org/drawingml/2006/main">
             <a:pPr>
+              <a:buNone/>
               <a:defRPr sz="825">
                 <a:solidFill>
                   <a:srgbClr val="FFFFFF">
@@ -9246,6 +10427,7 @@
           <a:lstStyle xmlns:a="http://schemas.openxmlformats.org/drawingml/2006/main"/>
           <a:p xmlns:a="http://schemas.openxmlformats.org/drawingml/2006/main">
             <a:pPr algn="r">
+              <a:buNone/>
               <a:defRPr sz="825" b="1">
                 <a:solidFill>
                   <a:srgbClr val="FFFFFF">
@@ -9329,6 +10511,7 @@
           <a:lstStyle xmlns:a="http://schemas.openxmlformats.org/drawingml/2006/main"/>
           <a:p xmlns:a="http://schemas.openxmlformats.org/drawingml/2006/main">
             <a:pPr>
+              <a:buNone/>
               <a:defRPr sz="2850" b="1">
                 <a:solidFill>
                   <a:srgbClr val="0B1F3A"/>
@@ -9410,6 +10593,7 @@
           <a:lstStyle xmlns:a="http://schemas.openxmlformats.org/drawingml/2006/main"/>
           <a:p xmlns:a="http://schemas.openxmlformats.org/drawingml/2006/main">
             <a:pPr>
+              <a:buNone/>
               <a:defRPr sz="1425" b="1">
                 <a:solidFill>
                   <a:srgbClr val="1565C0"/>
@@ -9464,14 +10648,14 @@
       </p:sp>
       <p:pic>
         <p:nvPicPr>
-          <p:cNvPr id="14" name="" descr="Diagrama didático autoral que apresenta: Otimização só é válida quando o resultado continua igual ao full build. — A pergunta que guia a aula."/>
+          <p:cNvPr id="16" name="" descr="Diagrama didático autoral que apresenta: Otimização só é válida quando o resultado continua igual ao full build. — A pergunta que guia a aula."/>
           <p:cNvPicPr>
             <a:picLocks xmlns:a="http://schemas.openxmlformats.org/drawingml/2006/main" noChangeAspect="1"/>
           </p:cNvPicPr>
           <p:nvPr/>
         </p:nvPicPr>
         <p:blipFill>
-          <a:blip xmlns:r="http://schemas.openxmlformats.org/officeDocument/2006/relationships" xmlns:a="http://schemas.openxmlformats.org/drawingml/2006/main" r:embed="R0e70a50becd24cd3"/>
+          <a:blip xmlns:r="http://schemas.openxmlformats.org/officeDocument/2006/relationships" xmlns:a="http://schemas.openxmlformats.org/drawingml/2006/main" r:embed="R7e3ca47b4c5a4f2a"/>
           <a:stretch xmlns:a="http://schemas.openxmlformats.org/drawingml/2006/main"/>
         </p:blipFill>
         <p:spPr>
@@ -9517,6 +10701,7 @@
           <a:lstStyle xmlns:a="http://schemas.openxmlformats.org/drawingml/2006/main"/>
           <a:p xmlns:a="http://schemas.openxmlformats.org/drawingml/2006/main">
             <a:pPr>
+              <a:buNone/>
               <a:defRPr sz="1050" b="1">
                 <a:solidFill>
                   <a:srgbClr val="1565C0"/>
@@ -9600,6 +10785,7 @@
           <a:lstStyle xmlns:a="http://schemas.openxmlformats.org/drawingml/2006/main"/>
           <a:p xmlns:a="http://schemas.openxmlformats.org/drawingml/2006/main">
             <a:pPr>
+              <a:buNone/>
               <a:defRPr sz="825">
                 <a:solidFill>
                   <a:srgbClr val="0B1F3A">
@@ -9654,6 +10840,7 @@
           <a:lstStyle xmlns:a="http://schemas.openxmlformats.org/drawingml/2006/main"/>
           <a:p xmlns:a="http://schemas.openxmlformats.org/drawingml/2006/main">
             <a:pPr algn="r">
+              <a:buNone/>
               <a:defRPr sz="825" b="1">
                 <a:solidFill>
                   <a:srgbClr val="0B1F3A">
@@ -9737,6 +10924,7 @@
           <a:lstStyle xmlns:a="http://schemas.openxmlformats.org/drawingml/2006/main"/>
           <a:p xmlns:a="http://schemas.openxmlformats.org/drawingml/2006/main">
             <a:pPr>
+              <a:buNone/>
               <a:defRPr sz="2925" b="1">
                 <a:solidFill>
                   <a:srgbClr val="0B1F3A"/>
@@ -9787,6 +10975,7 @@
           <a:lstStyle xmlns:a="http://schemas.openxmlformats.org/drawingml/2006/main"/>
           <a:p xmlns:a="http://schemas.openxmlformats.org/drawingml/2006/main">
             <a:pPr>
+              <a:buNone/>
               <a:defRPr sz="1950">
                 <a:solidFill>
                   <a:srgbClr val="0B1F3A"/>
@@ -9804,6 +10993,7 @@
           </a:p>
           <a:p xmlns:a="http://schemas.openxmlformats.org/drawingml/2006/main">
             <a:pPr>
+              <a:buNone/>
               <a:defRPr sz="1950">
                 <a:solidFill>
                   <a:srgbClr val="0B1F3A"/>
@@ -9821,6 +11011,7 @@
           </a:p>
           <a:p xmlns:a="http://schemas.openxmlformats.org/drawingml/2006/main">
             <a:pPr>
+              <a:buNone/>
               <a:defRPr sz="1950">
                 <a:solidFill>
                   <a:srgbClr val="0B1F3A"/>
@@ -9871,6 +11062,7 @@
           <a:lstStyle xmlns:a="http://schemas.openxmlformats.org/drawingml/2006/main"/>
           <a:p xmlns:a="http://schemas.openxmlformats.org/drawingml/2006/main">
             <a:pPr>
+              <a:buNone/>
               <a:defRPr sz="1050" b="1">
                 <a:solidFill>
                   <a:srgbClr val="1565C0"/>
@@ -9954,6 +11146,7 @@
           <a:lstStyle xmlns:a="http://schemas.openxmlformats.org/drawingml/2006/main"/>
           <a:p xmlns:a="http://schemas.openxmlformats.org/drawingml/2006/main">
             <a:pPr>
+              <a:buNone/>
               <a:defRPr sz="825">
                 <a:solidFill>
                   <a:srgbClr val="0B1F3A">
@@ -10008,6 +11201,7 @@
           <a:lstStyle xmlns:a="http://schemas.openxmlformats.org/drawingml/2006/main"/>
           <a:p xmlns:a="http://schemas.openxmlformats.org/drawingml/2006/main">
             <a:pPr algn="r">
+              <a:buNone/>
               <a:defRPr sz="825" b="1">
                 <a:solidFill>
                   <a:srgbClr val="0B1F3A">
@@ -10099,6 +11293,7 @@
           <a:lstStyle xmlns:a="http://schemas.openxmlformats.org/drawingml/2006/main"/>
           <a:p xmlns:a="http://schemas.openxmlformats.org/drawingml/2006/main">
             <a:pPr>
+              <a:buNone/>
               <a:defRPr sz="1500" b="1">
                 <a:solidFill>
                   <a:srgbClr val="1EC5FF"/>
@@ -10149,6 +11344,7 @@
           <a:lstStyle xmlns:a="http://schemas.openxmlformats.org/drawingml/2006/main"/>
           <a:p xmlns:a="http://schemas.openxmlformats.org/drawingml/2006/main">
             <a:pPr>
+              <a:buNone/>
               <a:defRPr sz="2850" b="1">
                 <a:solidFill>
                   <a:srgbClr val="FFFFFF"/>
@@ -10199,6 +11395,7 @@
           <a:lstStyle xmlns:a="http://schemas.openxmlformats.org/drawingml/2006/main"/>
           <a:p xmlns:a="http://schemas.openxmlformats.org/drawingml/2006/main">
             <a:pPr>
+              <a:buNone/>
               <a:defRPr sz="1500">
                 <a:solidFill>
                   <a:srgbClr val="E2F2FF"/>
@@ -10323,6 +11520,7 @@
           <a:lstStyle xmlns:a="http://schemas.openxmlformats.org/drawingml/2006/main"/>
           <a:p xmlns:a="http://schemas.openxmlformats.org/drawingml/2006/main">
             <a:pPr>
+              <a:buNone/>
               <a:defRPr sz="1050" b="1">
                 <a:solidFill>
                   <a:srgbClr val="1EC5FF"/>
@@ -10406,6 +11604,7 @@
           <a:lstStyle xmlns:a="http://schemas.openxmlformats.org/drawingml/2006/main"/>
           <a:p xmlns:a="http://schemas.openxmlformats.org/drawingml/2006/main">
             <a:pPr>
+              <a:buNone/>
               <a:defRPr sz="825">
                 <a:solidFill>
                   <a:srgbClr val="FFFFFF">
@@ -10460,6 +11659,7 @@
           <a:lstStyle xmlns:a="http://schemas.openxmlformats.org/drawingml/2006/main"/>
           <a:p xmlns:a="http://schemas.openxmlformats.org/drawingml/2006/main">
             <a:pPr algn="r">
+              <a:buNone/>
               <a:defRPr sz="825" b="1">
                 <a:solidFill>
                   <a:srgbClr val="FFFFFF">
@@ -10543,6 +11743,7 @@
           <a:lstStyle xmlns:a="http://schemas.openxmlformats.org/drawingml/2006/main"/>
           <a:p xmlns:a="http://schemas.openxmlformats.org/drawingml/2006/main">
             <a:pPr>
+              <a:buNone/>
               <a:defRPr sz="1350" b="1">
                 <a:solidFill>
                   <a:srgbClr val="1565C0"/>
@@ -10593,6 +11794,7 @@
           <a:lstStyle xmlns:a="http://schemas.openxmlformats.org/drawingml/2006/main"/>
           <a:p xmlns:a="http://schemas.openxmlformats.org/drawingml/2006/main">
             <a:pPr>
+              <a:buNone/>
               <a:defRPr sz="3300" b="1">
                 <a:solidFill>
                   <a:srgbClr val="0B1F3A"/>
@@ -10643,6 +11845,7 @@
           <a:lstStyle xmlns:a="http://schemas.openxmlformats.org/drawingml/2006/main"/>
           <a:p xmlns:a="http://schemas.openxmlformats.org/drawingml/2006/main">
             <a:pPr>
+              <a:buNone/>
               <a:defRPr sz="1500">
                 <a:solidFill>
                   <a:srgbClr val="5C6F86"/>
@@ -10693,6 +11896,7 @@
           <a:lstStyle xmlns:a="http://schemas.openxmlformats.org/drawingml/2006/main"/>
           <a:p xmlns:a="http://schemas.openxmlformats.org/drawingml/2006/main">
             <a:pPr>
+              <a:buNone/>
               <a:defRPr sz="1050" b="1">
                 <a:solidFill>
                   <a:srgbClr val="1565C0"/>
@@ -10776,6 +11980,7 @@
           <a:lstStyle xmlns:a="http://schemas.openxmlformats.org/drawingml/2006/main"/>
           <a:p xmlns:a="http://schemas.openxmlformats.org/drawingml/2006/main">
             <a:pPr>
+              <a:buNone/>
               <a:defRPr sz="825">
                 <a:solidFill>
                   <a:srgbClr val="0B1F3A">
@@ -10830,6 +12035,7 @@
           <a:lstStyle xmlns:a="http://schemas.openxmlformats.org/drawingml/2006/main"/>
           <a:p xmlns:a="http://schemas.openxmlformats.org/drawingml/2006/main">
             <a:pPr algn="r">
+              <a:buNone/>
               <a:defRPr sz="825" b="1">
                 <a:solidFill>
                   <a:srgbClr val="0B1F3A">
@@ -10921,6 +12127,7 @@
           <a:lstStyle xmlns:a="http://schemas.openxmlformats.org/drawingml/2006/main"/>
           <a:p xmlns:a="http://schemas.openxmlformats.org/drawingml/2006/main">
             <a:pPr>
+              <a:buNone/>
               <a:defRPr sz="2925" b="1">
                 <a:solidFill>
                   <a:srgbClr val="FFFFFF"/>
@@ -10971,6 +12178,7 @@
           <a:lstStyle xmlns:a="http://schemas.openxmlformats.org/drawingml/2006/main"/>
           <a:p xmlns:a="http://schemas.openxmlformats.org/drawingml/2006/main">
             <a:pPr>
+              <a:buNone/>
               <a:defRPr sz="3450" b="1">
                 <a:solidFill>
                   <a:srgbClr val="1EC5FF"/>
@@ -11021,6 +12229,7 @@
           <a:lstStyle xmlns:a="http://schemas.openxmlformats.org/drawingml/2006/main"/>
           <a:p xmlns:a="http://schemas.openxmlformats.org/drawingml/2006/main">
             <a:pPr>
+              <a:buNone/>
               <a:defRPr sz="1575" b="1">
                 <a:solidFill>
                   <a:srgbClr val="FFFFFF"/>
@@ -11102,6 +12311,7 @@
           <a:lstStyle xmlns:a="http://schemas.openxmlformats.org/drawingml/2006/main"/>
           <a:p xmlns:a="http://schemas.openxmlformats.org/drawingml/2006/main">
             <a:pPr>
+              <a:buNone/>
               <a:defRPr sz="3450" b="1">
                 <a:solidFill>
                   <a:srgbClr val="1EC5FF"/>
@@ -11152,6 +12362,7 @@
           <a:lstStyle xmlns:a="http://schemas.openxmlformats.org/drawingml/2006/main"/>
           <a:p xmlns:a="http://schemas.openxmlformats.org/drawingml/2006/main">
             <a:pPr>
+              <a:buNone/>
               <a:defRPr sz="1575" b="1">
                 <a:solidFill>
                   <a:srgbClr val="FFFFFF"/>
@@ -11233,6 +12444,7 @@
           <a:lstStyle xmlns:a="http://schemas.openxmlformats.org/drawingml/2006/main"/>
           <a:p xmlns:a="http://schemas.openxmlformats.org/drawingml/2006/main">
             <a:pPr>
+              <a:buNone/>
               <a:defRPr sz="3450" b="1">
                 <a:solidFill>
                   <a:srgbClr val="1EC5FF"/>
@@ -11283,6 +12495,7 @@
           <a:lstStyle xmlns:a="http://schemas.openxmlformats.org/drawingml/2006/main"/>
           <a:p xmlns:a="http://schemas.openxmlformats.org/drawingml/2006/main">
             <a:pPr>
+              <a:buNone/>
               <a:defRPr sz="1575" b="1">
                 <a:solidFill>
                   <a:srgbClr val="FFFFFF"/>
@@ -11333,6 +12546,7 @@
           <a:lstStyle xmlns:a="http://schemas.openxmlformats.org/drawingml/2006/main"/>
           <a:p xmlns:a="http://schemas.openxmlformats.org/drawingml/2006/main">
             <a:pPr>
+              <a:buNone/>
               <a:defRPr sz="1050" b="1">
                 <a:solidFill>
                   <a:srgbClr val="1EC5FF"/>
@@ -11416,6 +12630,7 @@
           <a:lstStyle xmlns:a="http://schemas.openxmlformats.org/drawingml/2006/main"/>
           <a:p xmlns:a="http://schemas.openxmlformats.org/drawingml/2006/main">
             <a:pPr>
+              <a:buNone/>
               <a:defRPr sz="825">
                 <a:solidFill>
                   <a:srgbClr val="FFFFFF">
@@ -11470,6 +12685,7 @@
           <a:lstStyle xmlns:a="http://schemas.openxmlformats.org/drawingml/2006/main"/>
           <a:p xmlns:a="http://schemas.openxmlformats.org/drawingml/2006/main">
             <a:pPr algn="r">
+              <a:buNone/>
               <a:defRPr sz="825" b="1">
                 <a:solidFill>
                   <a:srgbClr val="FFFFFF">
@@ -11561,6 +12777,7 @@
           <a:lstStyle xmlns:a="http://schemas.openxmlformats.org/drawingml/2006/main"/>
           <a:p xmlns:a="http://schemas.openxmlformats.org/drawingml/2006/main">
             <a:pPr>
+              <a:buNone/>
               <a:defRPr sz="2925" b="1">
                 <a:solidFill>
                   <a:srgbClr val="FFFFFF"/>
@@ -11611,6 +12828,7 @@
           <a:lstStyle xmlns:a="http://schemas.openxmlformats.org/drawingml/2006/main"/>
           <a:p xmlns:a="http://schemas.openxmlformats.org/drawingml/2006/main">
             <a:pPr>
+              <a:buNone/>
               <a:defRPr sz="1650">
                 <a:solidFill>
                   <a:srgbClr val="E2F2FF"/>
@@ -11661,6 +12879,7 @@
           <a:lstStyle xmlns:a="http://schemas.openxmlformats.org/drawingml/2006/main"/>
           <a:p xmlns:a="http://schemas.openxmlformats.org/drawingml/2006/main">
             <a:pPr>
+              <a:buNone/>
               <a:defRPr sz="1800">
                 <a:solidFill>
                   <a:srgbClr val="FFFFFF"/>
@@ -11678,6 +12897,7 @@
           </a:p>
           <a:p xmlns:a="http://schemas.openxmlformats.org/drawingml/2006/main">
             <a:pPr>
+              <a:buNone/>
               <a:defRPr sz="1800">
                 <a:solidFill>
                   <a:srgbClr val="FFFFFF"/>
@@ -11695,6 +12915,7 @@
           </a:p>
           <a:p xmlns:a="http://schemas.openxmlformats.org/drawingml/2006/main">
             <a:pPr>
+              <a:buNone/>
               <a:defRPr sz="1800">
                 <a:solidFill>
                   <a:srgbClr val="FFFFFF"/>
@@ -11819,6 +13040,7 @@
           <a:lstStyle xmlns:a="http://schemas.openxmlformats.org/drawingml/2006/main"/>
           <a:p xmlns:a="http://schemas.openxmlformats.org/drawingml/2006/main">
             <a:pPr algn="ctr">
+              <a:buNone/>
               <a:defRPr sz="4650" b="1">
                 <a:solidFill>
                   <a:srgbClr val="1EC5FF"/>
@@ -11869,6 +13091,7 @@
           <a:lstStyle xmlns:a="http://schemas.openxmlformats.org/drawingml/2006/main"/>
           <a:p xmlns:a="http://schemas.openxmlformats.org/drawingml/2006/main">
             <a:pPr>
+              <a:buNone/>
               <a:defRPr sz="1050" b="1">
                 <a:solidFill>
                   <a:srgbClr val="1EC5FF"/>
@@ -11952,6 +13175,7 @@
           <a:lstStyle xmlns:a="http://schemas.openxmlformats.org/drawingml/2006/main"/>
           <a:p xmlns:a="http://schemas.openxmlformats.org/drawingml/2006/main">
             <a:pPr>
+              <a:buNone/>
               <a:defRPr sz="825">
                 <a:solidFill>
                   <a:srgbClr val="FFFFFF">
@@ -12006,6 +13230,7 @@
           <a:lstStyle xmlns:a="http://schemas.openxmlformats.org/drawingml/2006/main"/>
           <a:p xmlns:a="http://schemas.openxmlformats.org/drawingml/2006/main">
             <a:pPr algn="r">
+              <a:buNone/>
               <a:defRPr sz="825" b="1">
                 <a:solidFill>
                   <a:srgbClr val="FFFFFF">
@@ -12089,6 +13314,7 @@
           <a:lstStyle xmlns:a="http://schemas.openxmlformats.org/drawingml/2006/main"/>
           <a:p xmlns:a="http://schemas.openxmlformats.org/drawingml/2006/main">
             <a:pPr>
+              <a:buNone/>
               <a:defRPr sz="2925" b="1">
                 <a:solidFill>
                   <a:srgbClr val="0B1F3A"/>
@@ -12139,6 +13365,7 @@
           <a:lstStyle xmlns:a="http://schemas.openxmlformats.org/drawingml/2006/main"/>
           <a:p xmlns:a="http://schemas.openxmlformats.org/drawingml/2006/main">
             <a:pPr>
+              <a:buNone/>
               <a:defRPr sz="1650">
                 <a:solidFill>
                   <a:srgbClr val="5C6F86"/>
@@ -12189,6 +13416,7 @@
           <a:lstStyle xmlns:a="http://schemas.openxmlformats.org/drawingml/2006/main"/>
           <a:p xmlns:a="http://schemas.openxmlformats.org/drawingml/2006/main">
             <a:pPr>
+              <a:buNone/>
               <a:defRPr sz="1800">
                 <a:solidFill>
                   <a:srgbClr val="0B1F3A"/>
@@ -12206,6 +13434,7 @@
           </a:p>
           <a:p xmlns:a="http://schemas.openxmlformats.org/drawingml/2006/main">
             <a:pPr>
+              <a:buNone/>
               <a:defRPr sz="1800">
                 <a:solidFill>
                   <a:srgbClr val="0B1F3A"/>
@@ -12223,6 +13452,7 @@
           </a:p>
           <a:p xmlns:a="http://schemas.openxmlformats.org/drawingml/2006/main">
             <a:pPr>
+              <a:buNone/>
               <a:defRPr sz="1800">
                 <a:solidFill>
                   <a:srgbClr val="0B1F3A"/>
@@ -12347,6 +13577,7 @@
           <a:lstStyle xmlns:a="http://schemas.openxmlformats.org/drawingml/2006/main"/>
           <a:p xmlns:a="http://schemas.openxmlformats.org/drawingml/2006/main">
             <a:pPr algn="ctr">
+              <a:buNone/>
               <a:defRPr sz="4650" b="1">
                 <a:solidFill>
                   <a:srgbClr val="1565C0"/>
@@ -12397,6 +13628,7 @@
           <a:lstStyle xmlns:a="http://schemas.openxmlformats.org/drawingml/2006/main"/>
           <a:p xmlns:a="http://schemas.openxmlformats.org/drawingml/2006/main">
             <a:pPr>
+              <a:buNone/>
               <a:defRPr sz="1050" b="1">
                 <a:solidFill>
                   <a:srgbClr val="1565C0"/>
@@ -12480,6 +13712,7 @@
           <a:lstStyle xmlns:a="http://schemas.openxmlformats.org/drawingml/2006/main"/>
           <a:p xmlns:a="http://schemas.openxmlformats.org/drawingml/2006/main">
             <a:pPr>
+              <a:buNone/>
               <a:defRPr sz="825">
                 <a:solidFill>
                   <a:srgbClr val="0B1F3A">
@@ -12534,6 +13767,7 @@
           <a:lstStyle xmlns:a="http://schemas.openxmlformats.org/drawingml/2006/main"/>
           <a:p xmlns:a="http://schemas.openxmlformats.org/drawingml/2006/main">
             <a:pPr algn="r">
+              <a:buNone/>
               <a:defRPr sz="825" b="1">
                 <a:solidFill>
                   <a:srgbClr val="0B1F3A">
@@ -12625,6 +13859,7 @@
           <a:lstStyle xmlns:a="http://schemas.openxmlformats.org/drawingml/2006/main"/>
           <a:p xmlns:a="http://schemas.openxmlformats.org/drawingml/2006/main">
             <a:pPr>
+              <a:buNone/>
               <a:defRPr sz="2925" b="1">
                 <a:solidFill>
                   <a:srgbClr val="FFFFFF"/>
@@ -12681,6 +13916,7 @@
           <a:lstStyle xmlns:a="http://schemas.openxmlformats.org/drawingml/2006/main"/>
           <a:p xmlns:a="http://schemas.openxmlformats.org/drawingml/2006/main">
             <a:pPr algn="ctr">
+              <a:buNone/>
               <a:defRPr sz="1575" b="1">
                 <a:solidFill>
                   <a:srgbClr val="FFFFFF"/>
@@ -12737,6 +13973,7 @@
           <a:lstStyle xmlns:a="http://schemas.openxmlformats.org/drawingml/2006/main"/>
           <a:p xmlns:a="http://schemas.openxmlformats.org/drawingml/2006/main">
             <a:pPr algn="ctr">
+              <a:buNone/>
               <a:defRPr sz="1575" b="1">
                 <a:solidFill>
                   <a:srgbClr val="FFFFFF"/>
@@ -12793,6 +14030,7 @@
           <a:lstStyle xmlns:a="http://schemas.openxmlformats.org/drawingml/2006/main"/>
           <a:p xmlns:a="http://schemas.openxmlformats.org/drawingml/2006/main">
             <a:pPr algn="ctr">
+              <a:buNone/>
               <a:defRPr sz="1575" b="1">
                 <a:solidFill>
                   <a:srgbClr val="FFFFFF"/>
@@ -12849,6 +14087,7 @@
           <a:lstStyle xmlns:a="http://schemas.openxmlformats.org/drawingml/2006/main"/>
           <a:p xmlns:a="http://schemas.openxmlformats.org/drawingml/2006/main">
             <a:pPr algn="ctr">
+              <a:buNone/>
               <a:defRPr sz="1575" b="1">
                 <a:solidFill>
                   <a:srgbClr val="FFFFFF"/>
@@ -12868,7 +14107,7 @@
       </p:sp>
       <p:cxnSp>
         <p:nvCxnSpPr>
-          <p:cNvPr id="18" name=""/>
+          <p:cNvPr id="26" name=""/>
           <p:cNvCxnSpPr>
             <a:stCxn xmlns:a="http://schemas.openxmlformats.org/drawingml/2006/main" id="2" idx="3"/>
             <a:endCxn xmlns:a="http://schemas.openxmlformats.org/drawingml/2006/main" id="3" idx="1"/>
@@ -12894,7 +14133,7 @@
       </p:cxnSp>
       <p:cxnSp>
         <p:nvCxnSpPr>
-          <p:cNvPr id="19" name=""/>
+          <p:cNvPr id="27" name=""/>
           <p:cNvCxnSpPr>
             <a:stCxn xmlns:a="http://schemas.openxmlformats.org/drawingml/2006/main" id="3" idx="3"/>
             <a:endCxn xmlns:a="http://schemas.openxmlformats.org/drawingml/2006/main" id="4" idx="1"/>
@@ -12920,7 +14159,7 @@
       </p:cxnSp>
       <p:cxnSp>
         <p:nvCxnSpPr>
-          <p:cNvPr id="20" name=""/>
+          <p:cNvPr id="28" name=""/>
           <p:cNvCxnSpPr>
             <a:stCxn xmlns:a="http://schemas.openxmlformats.org/drawingml/2006/main" id="4" idx="3"/>
             <a:endCxn xmlns:a="http://schemas.openxmlformats.org/drawingml/2006/main" id="5" idx="1"/>
@@ -12977,6 +14216,7 @@
           <a:lstStyle xmlns:a="http://schemas.openxmlformats.org/drawingml/2006/main"/>
           <a:p xmlns:a="http://schemas.openxmlformats.org/drawingml/2006/main">
             <a:pPr>
+              <a:buNone/>
               <a:defRPr sz="1050" b="1">
                 <a:solidFill>
                   <a:srgbClr val="1EC5FF"/>
@@ -13060,6 +14300,7 @@
           <a:lstStyle xmlns:a="http://schemas.openxmlformats.org/drawingml/2006/main"/>
           <a:p xmlns:a="http://schemas.openxmlformats.org/drawingml/2006/main">
             <a:pPr>
+              <a:buNone/>
               <a:defRPr sz="825">
                 <a:solidFill>
                   <a:srgbClr val="FFFFFF">
@@ -13114,6 +14355,7 @@
           <a:lstStyle xmlns:a="http://schemas.openxmlformats.org/drawingml/2006/main"/>
           <a:p xmlns:a="http://schemas.openxmlformats.org/drawingml/2006/main">
             <a:pPr algn="r">
+              <a:buNone/>
               <a:defRPr sz="825" b="1">
                 <a:solidFill>
                   <a:srgbClr val="FFFFFF">
@@ -13205,6 +14447,7 @@
           <a:lstStyle xmlns:a="http://schemas.openxmlformats.org/drawingml/2006/main"/>
           <a:p xmlns:a="http://schemas.openxmlformats.org/drawingml/2006/main">
             <a:pPr>
+              <a:buNone/>
               <a:defRPr sz="2925" b="1">
                 <a:solidFill>
                   <a:srgbClr val="FFFFFF"/>
@@ -13255,6 +14498,7 @@
           <a:lstStyle xmlns:a="http://schemas.openxmlformats.org/drawingml/2006/main"/>
           <a:p xmlns:a="http://schemas.openxmlformats.org/drawingml/2006/main">
             <a:pPr>
+              <a:buNone/>
               <a:defRPr sz="1650">
                 <a:solidFill>
                   <a:srgbClr val="E2F2FF"/>
@@ -13305,6 +14549,7 @@
           <a:lstStyle xmlns:a="http://schemas.openxmlformats.org/drawingml/2006/main"/>
           <a:p xmlns:a="http://schemas.openxmlformats.org/drawingml/2006/main">
             <a:pPr>
+              <a:buNone/>
               <a:defRPr sz="1800">
                 <a:solidFill>
                   <a:srgbClr val="FFFFFF"/>
@@ -13322,6 +14567,7 @@
           </a:p>
           <a:p xmlns:a="http://schemas.openxmlformats.org/drawingml/2006/main">
             <a:pPr>
+              <a:buNone/>
               <a:defRPr sz="1800">
                 <a:solidFill>
                   <a:srgbClr val="FFFFFF"/>
@@ -13339,6 +14585,7 @@
           </a:p>
           <a:p xmlns:a="http://schemas.openxmlformats.org/drawingml/2006/main">
             <a:pPr>
+              <a:buNone/>
               <a:defRPr sz="1800">
                 <a:solidFill>
                   <a:srgbClr val="FFFFFF"/>
@@ -13463,6 +14710,7 @@
           <a:lstStyle xmlns:a="http://schemas.openxmlformats.org/drawingml/2006/main"/>
           <a:p xmlns:a="http://schemas.openxmlformats.org/drawingml/2006/main">
             <a:pPr algn="ctr">
+              <a:buNone/>
               <a:defRPr sz="4650" b="1">
                 <a:solidFill>
                   <a:srgbClr val="1EC5FF"/>
@@ -13513,6 +14761,7 @@
           <a:lstStyle xmlns:a="http://schemas.openxmlformats.org/drawingml/2006/main"/>
           <a:p xmlns:a="http://schemas.openxmlformats.org/drawingml/2006/main">
             <a:pPr>
+              <a:buNone/>
               <a:defRPr sz="1050" b="1">
                 <a:solidFill>
                   <a:srgbClr val="1EC5FF"/>
@@ -13596,6 +14845,7 @@
           <a:lstStyle xmlns:a="http://schemas.openxmlformats.org/drawingml/2006/main"/>
           <a:p xmlns:a="http://schemas.openxmlformats.org/drawingml/2006/main">
             <a:pPr>
+              <a:buNone/>
               <a:defRPr sz="825">
                 <a:solidFill>
                   <a:srgbClr val="FFFFFF">
@@ -13650,6 +14900,7 @@
           <a:lstStyle xmlns:a="http://schemas.openxmlformats.org/drawingml/2006/main"/>
           <a:p xmlns:a="http://schemas.openxmlformats.org/drawingml/2006/main">
             <a:pPr algn="r">
+              <a:buNone/>
               <a:defRPr sz="825" b="1">
                 <a:solidFill>
                   <a:srgbClr val="FFFFFF">
@@ -13733,6 +14984,7 @@
           <a:lstStyle xmlns:a="http://schemas.openxmlformats.org/drawingml/2006/main"/>
           <a:p xmlns:a="http://schemas.openxmlformats.org/drawingml/2006/main">
             <a:pPr>
+              <a:buNone/>
               <a:defRPr sz="2925" b="1">
                 <a:solidFill>
                   <a:srgbClr val="0B1F3A"/>
@@ -13783,6 +15035,7 @@
           <a:lstStyle xmlns:a="http://schemas.openxmlformats.org/drawingml/2006/main"/>
           <a:p xmlns:a="http://schemas.openxmlformats.org/drawingml/2006/main">
             <a:pPr>
+              <a:buNone/>
               <a:defRPr sz="1950" b="1">
                 <a:solidFill>
                   <a:srgbClr val="0B1F3A"/>
@@ -13837,14 +15090,14 @@
       </p:sp>
       <p:pic>
         <p:nvPicPr>
-          <p:cNvPr id="13" name="" descr="Figura oficial da documentação dbt usada para explicar: O diagrama oficial mostra a redução de leitura — Registros existentes permanecem; somente novos candidatos entram.."/>
+          <p:cNvPr id="15" name="" descr="Figura oficial da documentação dbt usada para explicar: O diagrama oficial mostra a redução de leitura — Registros existentes permanecem; somente novos candidatos entram.."/>
           <p:cNvPicPr>
             <a:picLocks xmlns:a="http://schemas.openxmlformats.org/drawingml/2006/main" noChangeAspect="1"/>
           </p:cNvPicPr>
           <p:nvPr/>
         </p:nvPicPr>
         <p:blipFill>
-          <a:blip xmlns:r="http://schemas.openxmlformats.org/officeDocument/2006/relationships" xmlns:a="http://schemas.openxmlformats.org/drawingml/2006/main" r:embed="R8098c2cfd7644c4c"/>
+          <a:blip xmlns:r="http://schemas.openxmlformats.org/officeDocument/2006/relationships" xmlns:a="http://schemas.openxmlformats.org/drawingml/2006/main" r:embed="R0c1fff735bff4118"/>
           <a:stretch xmlns:a="http://schemas.openxmlformats.org/drawingml/2006/main"/>
         </p:blipFill>
         <p:spPr>
@@ -13890,6 +15143,7 @@
           <a:lstStyle xmlns:a="http://schemas.openxmlformats.org/drawingml/2006/main"/>
           <a:p xmlns:a="http://schemas.openxmlformats.org/drawingml/2006/main">
             <a:pPr>
+              <a:buNone/>
               <a:defRPr sz="900" i="1">
                 <a:solidFill>
                   <a:srgbClr val="5C6F86"/>
@@ -13940,6 +15194,7 @@
           <a:lstStyle xmlns:a="http://schemas.openxmlformats.org/drawingml/2006/main"/>
           <a:p xmlns:a="http://schemas.openxmlformats.org/drawingml/2006/main">
             <a:pPr>
+              <a:buNone/>
               <a:defRPr sz="1050" b="1">
                 <a:solidFill>
                   <a:srgbClr val="1565C0"/>
@@ -14023,6 +15278,7 @@
           <a:lstStyle xmlns:a="http://schemas.openxmlformats.org/drawingml/2006/main"/>
           <a:p xmlns:a="http://schemas.openxmlformats.org/drawingml/2006/main">
             <a:pPr>
+              <a:buNone/>
               <a:defRPr sz="825">
                 <a:solidFill>
                   <a:srgbClr val="0B1F3A">
@@ -14077,6 +15333,7 @@
           <a:lstStyle xmlns:a="http://schemas.openxmlformats.org/drawingml/2006/main"/>
           <a:p xmlns:a="http://schemas.openxmlformats.org/drawingml/2006/main">
             <a:pPr algn="r">
+              <a:buNone/>
               <a:defRPr sz="825" b="1">
                 <a:solidFill>
                   <a:srgbClr val="0B1F3A">
@@ -14160,6 +15417,7 @@
           <a:lstStyle xmlns:a="http://schemas.openxmlformats.org/drawingml/2006/main"/>
           <a:p xmlns:a="http://schemas.openxmlformats.org/drawingml/2006/main">
             <a:pPr>
+              <a:buNone/>
               <a:defRPr sz="2925" b="1">
                 <a:solidFill>
                   <a:srgbClr val="0B1F3A"/>
@@ -14210,6 +15468,7 @@
           <a:lstStyle xmlns:a="http://schemas.openxmlformats.org/drawingml/2006/main"/>
           <a:p xmlns:a="http://schemas.openxmlformats.org/drawingml/2006/main">
             <a:pPr>
+              <a:buNone/>
               <a:defRPr sz="1650">
                 <a:solidFill>
                   <a:srgbClr val="5C6F86"/>
@@ -14260,6 +15519,7 @@
           <a:lstStyle xmlns:a="http://schemas.openxmlformats.org/drawingml/2006/main"/>
           <a:p xmlns:a="http://schemas.openxmlformats.org/drawingml/2006/main">
             <a:pPr>
+              <a:buNone/>
               <a:defRPr sz="1800">
                 <a:solidFill>
                   <a:srgbClr val="0B1F3A"/>
@@ -14277,6 +15537,7 @@
           </a:p>
           <a:p xmlns:a="http://schemas.openxmlformats.org/drawingml/2006/main">
             <a:pPr>
+              <a:buNone/>
               <a:defRPr sz="1800">
                 <a:solidFill>
                   <a:srgbClr val="0B1F3A"/>
@@ -14294,6 +15555,7 @@
           </a:p>
           <a:p xmlns:a="http://schemas.openxmlformats.org/drawingml/2006/main">
             <a:pPr>
+              <a:buNone/>
               <a:defRPr sz="1800">
                 <a:solidFill>
                   <a:srgbClr val="0B1F3A"/>
@@ -14418,6 +15680,7 @@
           <a:lstStyle xmlns:a="http://schemas.openxmlformats.org/drawingml/2006/main"/>
           <a:p xmlns:a="http://schemas.openxmlformats.org/drawingml/2006/main">
             <a:pPr algn="ctr">
+              <a:buNone/>
               <a:defRPr sz="4650" b="1">
                 <a:solidFill>
                   <a:srgbClr val="1565C0"/>
@@ -14468,6 +15731,7 @@
           <a:lstStyle xmlns:a="http://schemas.openxmlformats.org/drawingml/2006/main"/>
           <a:p xmlns:a="http://schemas.openxmlformats.org/drawingml/2006/main">
             <a:pPr>
+              <a:buNone/>
               <a:defRPr sz="1050" b="1">
                 <a:solidFill>
                   <a:srgbClr val="1565C0"/>
@@ -14551,6 +15815,7 @@
           <a:lstStyle xmlns:a="http://schemas.openxmlformats.org/drawingml/2006/main"/>
           <a:p xmlns:a="http://schemas.openxmlformats.org/drawingml/2006/main">
             <a:pPr>
+              <a:buNone/>
               <a:defRPr sz="825">
                 <a:solidFill>
                   <a:srgbClr val="0B1F3A">
@@ -14605,6 +15870,7 @@
           <a:lstStyle xmlns:a="http://schemas.openxmlformats.org/drawingml/2006/main"/>
           <a:p xmlns:a="http://schemas.openxmlformats.org/drawingml/2006/main">
             <a:pPr algn="r">
+              <a:buNone/>
               <a:defRPr sz="825" b="1">
                 <a:solidFill>
                   <a:srgbClr val="0B1F3A">

--- a/assets/decks/episodio-10-finops-pipeline.pptx
+++ b/assets/decks/episodio-10-finops-pipeline.pptx
@@ -2,35 +2,35 @@
 <file path=ppt/presentation.xml><?xml version="1.0" encoding="utf-8"?>
 <p:presentation xmlns:p="http://schemas.openxmlformats.org/presentationml/2006/main">
   <p:sldMasterIdLst>
-    <p:sldMasterId xmlns:r="http://schemas.openxmlformats.org/officeDocument/2006/relationships" id="2147483648" r:id="Rca8d62246a954a22"/>
-    <p:sldMasterId xmlns:r="http://schemas.openxmlformats.org/officeDocument/2006/relationships" id="2147483650" r:id="R443c689da1b343ae"/>
+    <p:sldMasterId xmlns:r="http://schemas.openxmlformats.org/officeDocument/2006/relationships" id="2147483648" r:id="R4dcc5784bd914de2"/>
+    <p:sldMasterId xmlns:r="http://schemas.openxmlformats.org/officeDocument/2006/relationships" id="2147483650" r:id="R146c89d00e4a4d5d"/>
   </p:sldMasterIdLst>
   <p:notesMasterIdLst>
-    <p:notesMasterId xmlns:r="http://schemas.openxmlformats.org/officeDocument/2006/relationships" r:id="Rd82b453678a74515"/>
+    <p:notesMasterId xmlns:r="http://schemas.openxmlformats.org/officeDocument/2006/relationships" r:id="R423b7b5b37e447b6"/>
   </p:notesMasterIdLst>
   <p:sldIdLst>
-    <p:sldId xmlns:r="http://schemas.openxmlformats.org/officeDocument/2006/relationships" id="256" r:id="Rfb6c515c6de84430"/>
-    <p:sldId xmlns:r="http://schemas.openxmlformats.org/officeDocument/2006/relationships" id="257" r:id="Rd918bb1fa4464ea9"/>
-    <p:sldId xmlns:r="http://schemas.openxmlformats.org/officeDocument/2006/relationships" id="258" r:id="R884acb4d99234a22"/>
-    <p:sldId xmlns:r="http://schemas.openxmlformats.org/officeDocument/2006/relationships" id="259" r:id="R8530de53985e4628"/>
-    <p:sldId xmlns:r="http://schemas.openxmlformats.org/officeDocument/2006/relationships" id="260" r:id="R2580510c809d443c"/>
-    <p:sldId xmlns:r="http://schemas.openxmlformats.org/officeDocument/2006/relationships" id="261" r:id="R632889db0f634444"/>
-    <p:sldId xmlns:r="http://schemas.openxmlformats.org/officeDocument/2006/relationships" id="262" r:id="R579f9a8ae80b4d68"/>
-    <p:sldId xmlns:r="http://schemas.openxmlformats.org/officeDocument/2006/relationships" id="263" r:id="R39fb049636414065"/>
-    <p:sldId xmlns:r="http://schemas.openxmlformats.org/officeDocument/2006/relationships" id="264" r:id="R0bc5da2b1460480a"/>
-    <p:sldId xmlns:r="http://schemas.openxmlformats.org/officeDocument/2006/relationships" id="265" r:id="R0dc613b51a7945cd"/>
-    <p:sldId xmlns:r="http://schemas.openxmlformats.org/officeDocument/2006/relationships" id="266" r:id="Raef75c9bca0a4a81"/>
-    <p:sldId xmlns:r="http://schemas.openxmlformats.org/officeDocument/2006/relationships" id="267" r:id="R65ecca36c10645f4"/>
-    <p:sldId xmlns:r="http://schemas.openxmlformats.org/officeDocument/2006/relationships" id="268" r:id="R055940522a9f4039"/>
-    <p:sldId xmlns:r="http://schemas.openxmlformats.org/officeDocument/2006/relationships" id="269" r:id="Re9b907ebf1034f4e"/>
-    <p:sldId xmlns:r="http://schemas.openxmlformats.org/officeDocument/2006/relationships" id="270" r:id="R6522adc8f03d4a5c"/>
-    <p:sldId xmlns:r="http://schemas.openxmlformats.org/officeDocument/2006/relationships" id="271" r:id="Rbd309bb1fdb048d3"/>
-    <p:sldId xmlns:r="http://schemas.openxmlformats.org/officeDocument/2006/relationships" id="272" r:id="Rbb5420352356486b"/>
-    <p:sldId xmlns:r="http://schemas.openxmlformats.org/officeDocument/2006/relationships" id="273" r:id="R5007ffdd45a24d61"/>
-    <p:sldId xmlns:r="http://schemas.openxmlformats.org/officeDocument/2006/relationships" id="274" r:id="Rfb722ff50b5d4ce6"/>
-    <p:sldId xmlns:r="http://schemas.openxmlformats.org/officeDocument/2006/relationships" id="275" r:id="Rfaff8812516c438e"/>
-    <p:sldId xmlns:r="http://schemas.openxmlformats.org/officeDocument/2006/relationships" id="276" r:id="Re2c11f50abdc45c6"/>
-    <p:sldId xmlns:r="http://schemas.openxmlformats.org/officeDocument/2006/relationships" id="277" r:id="Rac00fab375c94cba"/>
+    <p:sldId xmlns:r="http://schemas.openxmlformats.org/officeDocument/2006/relationships" id="256" r:id="R5b517d6b4ecf4014"/>
+    <p:sldId xmlns:r="http://schemas.openxmlformats.org/officeDocument/2006/relationships" id="257" r:id="R2d16a34c6ea946c4"/>
+    <p:sldId xmlns:r="http://schemas.openxmlformats.org/officeDocument/2006/relationships" id="258" r:id="R220c8cd35911480e"/>
+    <p:sldId xmlns:r="http://schemas.openxmlformats.org/officeDocument/2006/relationships" id="259" r:id="Ra711c43d30714896"/>
+    <p:sldId xmlns:r="http://schemas.openxmlformats.org/officeDocument/2006/relationships" id="260" r:id="R9096ecd09e764305"/>
+    <p:sldId xmlns:r="http://schemas.openxmlformats.org/officeDocument/2006/relationships" id="261" r:id="R931908e9c0e04b59"/>
+    <p:sldId xmlns:r="http://schemas.openxmlformats.org/officeDocument/2006/relationships" id="262" r:id="R90ff8ffe580c41c7"/>
+    <p:sldId xmlns:r="http://schemas.openxmlformats.org/officeDocument/2006/relationships" id="263" r:id="R7514c4d88d674470"/>
+    <p:sldId xmlns:r="http://schemas.openxmlformats.org/officeDocument/2006/relationships" id="264" r:id="R0eb055e0fdee4d44"/>
+    <p:sldId xmlns:r="http://schemas.openxmlformats.org/officeDocument/2006/relationships" id="265" r:id="R9bbed69e6c47413f"/>
+    <p:sldId xmlns:r="http://schemas.openxmlformats.org/officeDocument/2006/relationships" id="266" r:id="R11202249e53f4e41"/>
+    <p:sldId xmlns:r="http://schemas.openxmlformats.org/officeDocument/2006/relationships" id="267" r:id="Rfb903e984ad6484a"/>
+    <p:sldId xmlns:r="http://schemas.openxmlformats.org/officeDocument/2006/relationships" id="268" r:id="R1c75df71f02c4c6d"/>
+    <p:sldId xmlns:r="http://schemas.openxmlformats.org/officeDocument/2006/relationships" id="269" r:id="R8524042747114ed5"/>
+    <p:sldId xmlns:r="http://schemas.openxmlformats.org/officeDocument/2006/relationships" id="270" r:id="Rc226036a34944a47"/>
+    <p:sldId xmlns:r="http://schemas.openxmlformats.org/officeDocument/2006/relationships" id="271" r:id="R6585b55fadac41c1"/>
+    <p:sldId xmlns:r="http://schemas.openxmlformats.org/officeDocument/2006/relationships" id="272" r:id="R8ea1864755c84be5"/>
+    <p:sldId xmlns:r="http://schemas.openxmlformats.org/officeDocument/2006/relationships" id="273" r:id="R53d2b8f1884c4a6d"/>
+    <p:sldId xmlns:r="http://schemas.openxmlformats.org/officeDocument/2006/relationships" id="274" r:id="R4fe4dabb8f5942af"/>
+    <p:sldId xmlns:r="http://schemas.openxmlformats.org/officeDocument/2006/relationships" id="275" r:id="R6ef66fa662ba45a3"/>
+    <p:sldId xmlns:r="http://schemas.openxmlformats.org/officeDocument/2006/relationships" id="276" r:id="R50ad4c077ee34bf7"/>
+    <p:sldId xmlns:r="http://schemas.openxmlformats.org/officeDocument/2006/relationships" id="277" r:id="R476aa7f7aa884f68"/>
   </p:sldIdLst>
   <p:sldSz cx="12192000" cy="6858000"/>
   <p:notesSz cx="6858000" cy="9144000"/>
@@ -544,6 +544,11 @@
           </a:p>
           <a:p xmlns:a="http://schemas.openxmlformats.org/drawingml/2006/main">
             <a:r>
+              <a:t>- https://rescuepoint.com.br/assets/img/logo.png</a:t>
+            </a:r>
+          </a:p>
+          <a:p xmlns:a="http://schemas.openxmlformats.org/drawingml/2006/main">
+            <a:r>
               <a:t>- https://github.com/AnselmoBorges/dbt-moderno-na-pratica/blob/main/roteiros/10-finops-pipeline.md</a:t>
             </a:r>
           </a:p>
@@ -709,6 +714,11 @@
           </a:p>
           <a:p xmlns:a="http://schemas.openxmlformats.org/drawingml/2006/main">
             <a:r>
+              <a:t>- https://rescuepoint.com.br/assets/img/logo.png</a:t>
+            </a:r>
+          </a:p>
+          <a:p xmlns:a="http://schemas.openxmlformats.org/drawingml/2006/main">
+            <a:r>
               <a:t>- https://github.com/AnselmoBorges/dbt-moderno-na-pratica/blob/main/roteiros/10-finops-pipeline.md</a:t>
             </a:r>
           </a:p>
@@ -879,6 +889,11 @@
           </a:p>
           <a:p xmlns:a="http://schemas.openxmlformats.org/drawingml/2006/main">
             <a:r>
+              <a:t>- https://rescuepoint.com.br/assets/img/logo.png</a:t>
+            </a:r>
+          </a:p>
+          <a:p xmlns:a="http://schemas.openxmlformats.org/drawingml/2006/main">
+            <a:r>
               <a:t>- https://github.com/AnselmoBorges/dbt-moderno-na-pratica/blob/main/roteiros/10-finops-pipeline.md</a:t>
             </a:r>
           </a:p>
@@ -1044,6 +1059,11 @@
           </a:p>
           <a:p xmlns:a="http://schemas.openxmlformats.org/drawingml/2006/main">
             <a:r>
+              <a:t>- https://rescuepoint.com.br/assets/img/logo.png</a:t>
+            </a:r>
+          </a:p>
+          <a:p xmlns:a="http://schemas.openxmlformats.org/drawingml/2006/main">
+            <a:r>
               <a:t>- https://github.com/AnselmoBorges/dbt-moderno-na-pratica/blob/main/roteiros/10-finops-pipeline.md</a:t>
             </a:r>
           </a:p>
@@ -1209,6 +1229,11 @@
           </a:p>
           <a:p xmlns:a="http://schemas.openxmlformats.org/drawingml/2006/main">
             <a:r>
+              <a:t>- https://rescuepoint.com.br/assets/img/logo.png</a:t>
+            </a:r>
+          </a:p>
+          <a:p xmlns:a="http://schemas.openxmlformats.org/drawingml/2006/main">
+            <a:r>
               <a:t>- https://github.com/AnselmoBorges/dbt-moderno-na-pratica/blob/main/roteiros/10-finops-pipeline.md</a:t>
             </a:r>
           </a:p>
@@ -1374,6 +1399,11 @@
           </a:p>
           <a:p xmlns:a="http://schemas.openxmlformats.org/drawingml/2006/main">
             <a:r>
+              <a:t>- https://rescuepoint.com.br/assets/img/logo.png</a:t>
+            </a:r>
+          </a:p>
+          <a:p xmlns:a="http://schemas.openxmlformats.org/drawingml/2006/main">
+            <a:r>
               <a:t>- https://github.com/AnselmoBorges/dbt-moderno-na-pratica/blob/main/roteiros/10-finops-pipeline.md</a:t>
             </a:r>
           </a:p>
@@ -1539,6 +1569,11 @@
           </a:p>
           <a:p xmlns:a="http://schemas.openxmlformats.org/drawingml/2006/main">
             <a:r>
+              <a:t>- https://rescuepoint.com.br/assets/img/logo.png</a:t>
+            </a:r>
+          </a:p>
+          <a:p xmlns:a="http://schemas.openxmlformats.org/drawingml/2006/main">
+            <a:r>
               <a:t>- https://github.com/AnselmoBorges/dbt-moderno-na-pratica/blob/main/roteiros/10-finops-pipeline.md</a:t>
             </a:r>
           </a:p>
@@ -1704,6 +1739,11 @@
           </a:p>
           <a:p xmlns:a="http://schemas.openxmlformats.org/drawingml/2006/main">
             <a:r>
+              <a:t>- https://rescuepoint.com.br/assets/img/logo.png</a:t>
+            </a:r>
+          </a:p>
+          <a:p xmlns:a="http://schemas.openxmlformats.org/drawingml/2006/main">
+            <a:r>
               <a:t>- https://github.com/AnselmoBorges/dbt-moderno-na-pratica/blob/main/roteiros/10-finops-pipeline.md</a:t>
             </a:r>
           </a:p>
@@ -1869,6 +1909,11 @@
           </a:p>
           <a:p xmlns:a="http://schemas.openxmlformats.org/drawingml/2006/main">
             <a:r>
+              <a:t>- https://rescuepoint.com.br/assets/img/logo.png</a:t>
+            </a:r>
+          </a:p>
+          <a:p xmlns:a="http://schemas.openxmlformats.org/drawingml/2006/main">
+            <a:r>
               <a:t>- https://github.com/AnselmoBorges/dbt-moderno-na-pratica/blob/main/roteiros/10-finops-pipeline.md</a:t>
             </a:r>
           </a:p>
@@ -2034,6 +2079,11 @@
           </a:p>
           <a:p xmlns:a="http://schemas.openxmlformats.org/drawingml/2006/main">
             <a:r>
+              <a:t>- https://rescuepoint.com.br/assets/img/logo.png</a:t>
+            </a:r>
+          </a:p>
+          <a:p xmlns:a="http://schemas.openxmlformats.org/drawingml/2006/main">
+            <a:r>
               <a:t>- https://github.com/AnselmoBorges/dbt-moderno-na-pratica/blob/main/roteiros/10-finops-pipeline.md</a:t>
             </a:r>
           </a:p>
@@ -2199,6 +2249,11 @@
           </a:p>
           <a:p xmlns:a="http://schemas.openxmlformats.org/drawingml/2006/main">
             <a:r>
+              <a:t>- https://rescuepoint.com.br/assets/img/logo.png</a:t>
+            </a:r>
+          </a:p>
+          <a:p xmlns:a="http://schemas.openxmlformats.org/drawingml/2006/main">
+            <a:r>
               <a:t>- https://github.com/AnselmoBorges/dbt-moderno-na-pratica/blob/main/roteiros/10-finops-pipeline.md</a:t>
             </a:r>
           </a:p>
@@ -2364,6 +2419,11 @@
           </a:p>
           <a:p xmlns:a="http://schemas.openxmlformats.org/drawingml/2006/main">
             <a:r>
+              <a:t>- https://rescuepoint.com.br/assets/img/logo.png</a:t>
+            </a:r>
+          </a:p>
+          <a:p xmlns:a="http://schemas.openxmlformats.org/drawingml/2006/main">
+            <a:r>
               <a:t>- https://github.com/AnselmoBorges/dbt-moderno-na-pratica/blob/main/roteiros/10-finops-pipeline.md</a:t>
             </a:r>
           </a:p>
@@ -2529,6 +2589,11 @@
           </a:p>
           <a:p xmlns:a="http://schemas.openxmlformats.org/drawingml/2006/main">
             <a:r>
+              <a:t>- https://rescuepoint.com.br/assets/img/logo.png</a:t>
+            </a:r>
+          </a:p>
+          <a:p xmlns:a="http://schemas.openxmlformats.org/drawingml/2006/main">
+            <a:r>
               <a:t>- https://github.com/AnselmoBorges/dbt-moderno-na-pratica/blob/main/roteiros/10-finops-pipeline.md</a:t>
             </a:r>
           </a:p>
@@ -2694,6 +2759,11 @@
           </a:p>
           <a:p xmlns:a="http://schemas.openxmlformats.org/drawingml/2006/main">
             <a:r>
+              <a:t>- https://rescuepoint.com.br/assets/img/logo.png</a:t>
+            </a:r>
+          </a:p>
+          <a:p xmlns:a="http://schemas.openxmlformats.org/drawingml/2006/main">
+            <a:r>
               <a:t>- https://github.com/AnselmoBorges/dbt-moderno-na-pratica/blob/main/roteiros/10-finops-pipeline.md</a:t>
             </a:r>
           </a:p>
@@ -2859,6 +2929,11 @@
           </a:p>
           <a:p xmlns:a="http://schemas.openxmlformats.org/drawingml/2006/main">
             <a:r>
+              <a:t>- https://rescuepoint.com.br/assets/img/logo.png</a:t>
+            </a:r>
+          </a:p>
+          <a:p xmlns:a="http://schemas.openxmlformats.org/drawingml/2006/main">
+            <a:r>
               <a:t>- https://github.com/AnselmoBorges/dbt-moderno-na-pratica/blob/main/roteiros/10-finops-pipeline.md</a:t>
             </a:r>
           </a:p>
@@ -3024,6 +3099,11 @@
           </a:p>
           <a:p xmlns:a="http://schemas.openxmlformats.org/drawingml/2006/main">
             <a:r>
+              <a:t>- https://rescuepoint.com.br/assets/img/logo.png</a:t>
+            </a:r>
+          </a:p>
+          <a:p xmlns:a="http://schemas.openxmlformats.org/drawingml/2006/main">
+            <a:r>
               <a:t>- https://github.com/AnselmoBorges/dbt-moderno-na-pratica/blob/main/roteiros/10-finops-pipeline.md</a:t>
             </a:r>
           </a:p>
@@ -3189,6 +3269,11 @@
           </a:p>
           <a:p xmlns:a="http://schemas.openxmlformats.org/drawingml/2006/main">
             <a:r>
+              <a:t>- https://rescuepoint.com.br/assets/img/logo.png</a:t>
+            </a:r>
+          </a:p>
+          <a:p xmlns:a="http://schemas.openxmlformats.org/drawingml/2006/main">
+            <a:r>
               <a:t>- https://github.com/AnselmoBorges/dbt-moderno-na-pratica/blob/main/roteiros/10-finops-pipeline.md</a:t>
             </a:r>
           </a:p>
@@ -3354,6 +3439,11 @@
           </a:p>
           <a:p xmlns:a="http://schemas.openxmlformats.org/drawingml/2006/main">
             <a:r>
+              <a:t>- https://rescuepoint.com.br/assets/img/logo.png</a:t>
+            </a:r>
+          </a:p>
+          <a:p xmlns:a="http://schemas.openxmlformats.org/drawingml/2006/main">
+            <a:r>
               <a:t>- https://github.com/AnselmoBorges/dbt-moderno-na-pratica/blob/main/roteiros/10-finops-pipeline.md</a:t>
             </a:r>
           </a:p>
@@ -3519,6 +3609,11 @@
           </a:p>
           <a:p xmlns:a="http://schemas.openxmlformats.org/drawingml/2006/main">
             <a:r>
+              <a:t>- https://rescuepoint.com.br/assets/img/logo.png</a:t>
+            </a:r>
+          </a:p>
+          <a:p xmlns:a="http://schemas.openxmlformats.org/drawingml/2006/main">
+            <a:r>
               <a:t>- https://github.com/AnselmoBorges/dbt-moderno-na-pratica/blob/main/roteiros/10-finops-pipeline.md</a:t>
             </a:r>
           </a:p>
@@ -3684,6 +3779,11 @@
           </a:p>
           <a:p xmlns:a="http://schemas.openxmlformats.org/drawingml/2006/main">
             <a:r>
+              <a:t>- https://rescuepoint.com.br/assets/img/logo.png</a:t>
+            </a:r>
+          </a:p>
+          <a:p xmlns:a="http://schemas.openxmlformats.org/drawingml/2006/main">
+            <a:r>
               <a:t>- https://github.com/AnselmoBorges/dbt-moderno-na-pratica/blob/main/roteiros/10-finops-pipeline.md</a:t>
             </a:r>
           </a:p>
@@ -3849,6 +3949,11 @@
           </a:p>
           <a:p xmlns:a="http://schemas.openxmlformats.org/drawingml/2006/main">
             <a:r>
+              <a:t>- https://rescuepoint.com.br/assets/img/logo.png</a:t>
+            </a:r>
+          </a:p>
+          <a:p xmlns:a="http://schemas.openxmlformats.org/drawingml/2006/main">
+            <a:r>
               <a:t>- https://github.com/AnselmoBorges/dbt-moderno-na-pratica/blob/main/roteiros/10-finops-pipeline.md</a:t>
             </a:r>
           </a:p>
@@ -4015,6 +4120,11 @@
           <a:p xmlns:a="http://schemas.openxmlformats.org/drawingml/2006/main">
             <a:r>
               <a:t>- https://www.getdbt.com/case-studies/symend</a:t>
+            </a:r>
+          </a:p>
+          <a:p xmlns:a="http://schemas.openxmlformats.org/drawingml/2006/main">
+            <a:r>
+              <a:t>- https://rescuepoint.com.br/assets/img/logo.png</a:t>
             </a:r>
           </a:p>
           <a:p xmlns:a="http://schemas.openxmlformats.org/drawingml/2006/main">
@@ -4136,7 +4246,7 @@
   </p:cSld>
   <p:clrMap bg1="lt1" tx1="dk1" bg2="lt2" tx2="dk2" accent1="accent1" accent2="accent2" accent3="accent3" accent4="accent4" accent5="accent5" accent6="accent6" hlink="hlink" folHlink="folHlink"/>
   <p:sldLayoutIdLst>
-    <p:sldLayoutId xmlns:r="http://schemas.openxmlformats.org/officeDocument/2006/relationships" id="2147483649" r:id="Ref4e6e9ec0314d53"/>
+    <p:sldLayoutId xmlns:r="http://schemas.openxmlformats.org/officeDocument/2006/relationships" id="2147483649" r:id="Rec693b0831994458"/>
   </p:sldLayoutIdLst>
   <p:txStyles>
     <p:titleStyle>
@@ -4434,8 +4544,8 @@
   </p:cSld>
   <p:clrMap bg1="lt1" tx1="dk1" bg2="lt2" tx2="dk2" accent1="accent1" accent2="accent2" accent3="accent3" accent4="accent4" accent5="accent5" accent6="accent6" hlink="hlink" folHlink="folHlink"/>
   <p:sldLayoutIdLst>
-    <p:sldLayoutId xmlns:r="http://schemas.openxmlformats.org/officeDocument/2006/relationships" id="2147483651" r:id="R6737aea872b0460a"/>
-    <p:sldLayoutId xmlns:r="http://schemas.openxmlformats.org/officeDocument/2006/relationships" id="2147483652" r:id="Rad32440c782d4510"/>
+    <p:sldLayoutId xmlns:r="http://schemas.openxmlformats.org/officeDocument/2006/relationships" id="2147483651" r:id="R69a28ffb351e4788"/>
+    <p:sldLayoutId xmlns:r="http://schemas.openxmlformats.org/officeDocument/2006/relationships" id="2147483652" r:id="R6ce0972fb4fd48c0"/>
   </p:sldLayoutIdLst>
 </p:sldMaster>
 </file>
@@ -4959,14 +5069,14 @@
       </p:grpSpPr>
       <p:pic>
         <p:nvPicPr>
-          <p:cNvPr id="10" name="" descr="Ilustração conceitual autoral da capa: EPISÓDIO 10 — FinOps do pipeline."/>
+          <p:cNvPr id="13" name="" descr="Ilustração conceitual autoral da capa: EPISÓDIO 10 — FinOps do pipeline."/>
           <p:cNvPicPr>
             <a:picLocks xmlns:a="http://schemas.openxmlformats.org/drawingml/2006/main" noChangeAspect="1"/>
           </p:cNvPicPr>
           <p:nvPr/>
         </p:nvPicPr>
         <p:blipFill>
-          <a:blip xmlns:r="http://schemas.openxmlformats.org/officeDocument/2006/relationships" xmlns:a="http://schemas.openxmlformats.org/drawingml/2006/main" r:embed="R2c32f6bcbe0b495c"/>
+          <a:blip xmlns:r="http://schemas.openxmlformats.org/officeDocument/2006/relationships" xmlns:a="http://schemas.openxmlformats.org/drawingml/2006/main" r:embed="R6fdedd458ce540bc"/>
           <a:srcRect xmlns:a="http://schemas.openxmlformats.org/drawingml/2006/main" l="19785" t="0" r="19785" b="0"/>
           <a:stretch xmlns:a="http://schemas.openxmlformats.org/drawingml/2006/main">
             <a:fillRect l="0" t="0" r="0" b="0"/>
@@ -4987,7 +5097,7 @@
           <p:cNvPr id="2" name="cover-text-surface">
             <a:extLst xmlns:a="http://schemas.openxmlformats.org/drawingml/2006/main">
               <a:ext uri="{FF2B5EF4-FFF2-40B4-BE49-F238E27FC236}">
-                <a16:creationId xmlns:a16="http://schemas.microsoft.com/office/drawing/2014/main" id="{D4C28502-6DA9-4A07-9E34-EDBF73D55DAB}"/>
+                <a16:creationId xmlns:a16="http://schemas.microsoft.com/office/drawing/2014/main" id="{95075E77-85E1-43B2-927A-FB11177E7592}"/>
               </a:ext>
             </a:extLst>
           </p:cNvPr>
@@ -5020,7 +5130,7 @@
           <p:cNvPr id="3" name="cover-divider">
             <a:extLst xmlns:a="http://schemas.openxmlformats.org/drawingml/2006/main">
               <a:ext uri="{FF2B5EF4-FFF2-40B4-BE49-F238E27FC236}">
-                <a16:creationId xmlns:a16="http://schemas.microsoft.com/office/drawing/2014/main" id="{FBF92D2C-6EE2-490D-9378-2D07A298D455}"/>
+                <a16:creationId xmlns:a16="http://schemas.microsoft.com/office/drawing/2014/main" id="{9E0C4CD0-3D2A-45A6-AAAC-68C2D763338C}"/>
               </a:ext>
             </a:extLst>
           </p:cNvPr>
@@ -5051,7 +5161,7 @@
           <p:cNvPr id="4" name="cover-episode">
             <a:extLst xmlns:a="http://schemas.openxmlformats.org/drawingml/2006/main">
               <a:ext uri="{FF2B5EF4-FFF2-40B4-BE49-F238E27FC236}">
-                <a16:creationId xmlns:a16="http://schemas.microsoft.com/office/drawing/2014/main" id="{A8E18D91-9C5A-4CEC-95C0-B05F3DEC48C8}"/>
+                <a16:creationId xmlns:a16="http://schemas.microsoft.com/office/drawing/2014/main" id="{7FC87B0D-02D6-4D5A-9886-F53037C74E99}"/>
               </a:ext>
             </a:extLst>
           </p:cNvPr>
@@ -5099,10 +5209,69 @@
       </p:sp>
       <p:sp>
         <p:nvSpPr>
-          <p:cNvPr id="5" name="cover-title">
-            <a:extLst xmlns:a="http://schemas.openxmlformats.org/drawingml/2006/main">
-              <a:ext uri="{FF2B5EF4-FFF2-40B4-BE49-F238E27FC236}">
-                <a16:creationId xmlns:a16="http://schemas.microsoft.com/office/drawing/2014/main" id="{2E78DF95-92A0-49FB-B05C-4540B3A0FC55}"/>
+          <p:cNvPr id="5" name="rescue-point-logo-background">
+            <a:extLst xmlns:a="http://schemas.openxmlformats.org/drawingml/2006/main">
+              <a:ext uri="{FF2B5EF4-FFF2-40B4-BE49-F238E27FC236}">
+                <a16:creationId xmlns:a16="http://schemas.microsoft.com/office/drawing/2014/main" id="{B3CC556D-74DB-4FBE-B582-F7C1EE0A9CEC}"/>
+              </a:ext>
+            </a:extLst>
+          </p:cNvPr>
+          <p:cNvSpPr>
+            <a:spLocks xmlns:a="http://schemas.openxmlformats.org/drawingml/2006/main" noGrp="1"/>
+          </p:cNvSpPr>
+          <p:nvPr/>
+        </p:nvSpPr>
+        <p:spPr>
+          <a:xfrm xmlns:a="http://schemas.openxmlformats.org/drawingml/2006/main">
+            <a:off x="9772650" y="133350"/>
+            <a:ext cx="1733550" cy="457200"/>
+          </a:xfrm>
+          <a:prstGeom xmlns:a="http://schemas.openxmlformats.org/drawingml/2006/main" prst="roundRect">
+            <a:avLst>
+              <a:gd name="adj" fmla="val 16667"/>
+            </a:avLst>
+          </a:prstGeom>
+          <a:solidFill xmlns:a="http://schemas.openxmlformats.org/drawingml/2006/main">
+            <a:srgbClr val="06142E"/>
+          </a:solidFill>
+          <a:ln xmlns:a="http://schemas.openxmlformats.org/drawingml/2006/main" w="9525">
+            <a:solidFill>
+              <a:srgbClr val="1EC5FF">
+                <a:alpha val="33333"/>
+              </a:srgbClr>
+            </a:solidFill>
+            <a:prstDash val="solid"/>
+          </a:ln>
+        </p:spPr>
+      </p:sp>
+      <p:pic>
+        <p:nvPicPr>
+          <p:cNvPr id="18" name="" descr="Ilustração conceitual autoral da capa: EPISÓDIO 10 — FinOps do pipeline."/>
+          <p:cNvPicPr>
+            <a:picLocks xmlns:a="http://schemas.openxmlformats.org/drawingml/2006/main" noChangeAspect="1"/>
+          </p:cNvPicPr>
+          <p:nvPr/>
+        </p:nvPicPr>
+        <p:blipFill>
+          <a:blip xmlns:r="http://schemas.openxmlformats.org/officeDocument/2006/relationships" xmlns:a="http://schemas.openxmlformats.org/drawingml/2006/main" r:embed="Rc095eb5088c24f29"/>
+          <a:stretch xmlns:a="http://schemas.openxmlformats.org/drawingml/2006/main"/>
+        </p:blipFill>
+        <p:spPr>
+          <a:xfrm xmlns:a="http://schemas.openxmlformats.org/drawingml/2006/main">
+            <a:off x="9893718" y="209550"/>
+            <a:ext cx="1491414" cy="323850"/>
+          </a:xfrm>
+          <a:prstGeom xmlns:a="http://schemas.openxmlformats.org/drawingml/2006/main" prst="rect">
+            <a:avLst/>
+          </a:prstGeom>
+        </p:spPr>
+      </p:pic>
+      <p:sp>
+        <p:nvSpPr>
+          <p:cNvPr id="7" name="cover-title">
+            <a:extLst xmlns:a="http://schemas.openxmlformats.org/drawingml/2006/main">
+              <a:ext uri="{FF2B5EF4-FFF2-40B4-BE49-F238E27FC236}">
+                <a16:creationId xmlns:a16="http://schemas.microsoft.com/office/drawing/2014/main" id="{D4439576-92EF-48CD-B2D1-38F63F1FA76C}"/>
               </a:ext>
             </a:extLst>
           </p:cNvPr>
@@ -5150,10 +5319,10 @@
       </p:sp>
       <p:sp>
         <p:nvSpPr>
-          <p:cNvPr id="6" name="cover-subtitle">
-            <a:extLst xmlns:a="http://schemas.openxmlformats.org/drawingml/2006/main">
-              <a:ext uri="{FF2B5EF4-FFF2-40B4-BE49-F238E27FC236}">
-                <a16:creationId xmlns:a16="http://schemas.microsoft.com/office/drawing/2014/main" id="{619FC323-D5FF-4BC9-9D47-A36A96BB1012}"/>
+          <p:cNvPr id="8" name="cover-subtitle">
+            <a:extLst xmlns:a="http://schemas.openxmlformats.org/drawingml/2006/main">
+              <a:ext uri="{FF2B5EF4-FFF2-40B4-BE49-F238E27FC236}">
+                <a16:creationId xmlns:a16="http://schemas.microsoft.com/office/drawing/2014/main" id="{A1D6B50E-E2BE-4289-BDA0-E38158AECD65}"/>
               </a:ext>
             </a:extLst>
           </p:cNvPr>
@@ -5201,10 +5370,10 @@
       </p:sp>
       <p:sp>
         <p:nvSpPr>
-          <p:cNvPr id="7" name="cover-accent">
-            <a:extLst xmlns:a="http://schemas.openxmlformats.org/drawingml/2006/main">
-              <a:ext uri="{FF2B5EF4-FFF2-40B4-BE49-F238E27FC236}">
-                <a16:creationId xmlns:a16="http://schemas.microsoft.com/office/drawing/2014/main" id="{39A885C6-955F-41A2-A559-4D538C429820}"/>
+          <p:cNvPr id="9" name="cover-accent">
+            <a:extLst xmlns:a="http://schemas.openxmlformats.org/drawingml/2006/main">
+              <a:ext uri="{FF2B5EF4-FFF2-40B4-BE49-F238E27FC236}">
+                <a16:creationId xmlns:a16="http://schemas.microsoft.com/office/drawing/2014/main" id="{8A2C9B85-0E94-4C17-BC23-103C52EAC63B}"/>
               </a:ext>
             </a:extLst>
           </p:cNvPr>
@@ -5232,10 +5401,10 @@
       </p:sp>
       <p:sp>
         <p:nvSpPr>
-          <p:cNvPr id="8" name="cover-meta">
-            <a:extLst xmlns:a="http://schemas.openxmlformats.org/drawingml/2006/main">
-              <a:ext uri="{FF2B5EF4-FFF2-40B4-BE49-F238E27FC236}">
-                <a16:creationId xmlns:a16="http://schemas.microsoft.com/office/drawing/2014/main" id="{D67CB472-1D61-498C-A13E-EAE5F1C49F65}"/>
+          <p:cNvPr id="10" name="cover-meta">
+            <a:extLst xmlns:a="http://schemas.openxmlformats.org/drawingml/2006/main">
+              <a:ext uri="{FF2B5EF4-FFF2-40B4-BE49-F238E27FC236}">
+                <a16:creationId xmlns:a16="http://schemas.microsoft.com/office/drawing/2014/main" id="{5286F77C-9446-46CE-AFBD-3E5B327CF53D}"/>
               </a:ext>
             </a:extLst>
           </p:cNvPr>
@@ -5288,7 +5457,7 @@
     </p:spTree>
     <p:extLst>
       <p:ext uri="{BB962C8B-B14F-4D97-AF65-F5344CB8AC3E}">
-        <p14:creationId xmlns:p14="http://schemas.microsoft.com/office/powerpoint/2010/main" val="12368713"/>
+        <p14:creationId xmlns:p14="http://schemas.microsoft.com/office/powerpoint/2010/main" val="1315045296"/>
       </p:ext>
     </p:extLst>
   </p:cSld>
@@ -5324,10 +5493,10 @@
       </p:grpSpPr>
       <p:sp>
         <p:nvSpPr>
-          <p:cNvPr id="10" name="slide-title">
-            <a:extLst xmlns:a="http://schemas.openxmlformats.org/drawingml/2006/main">
-              <a:ext uri="{FF2B5EF4-FFF2-40B4-BE49-F238E27FC236}">
-                <a16:creationId xmlns:a16="http://schemas.microsoft.com/office/drawing/2014/main" id="{7952FE4A-AD79-4E7D-8A67-F56DE1C45FEE}"/>
+          <p:cNvPr id="12" name="slide-title">
+            <a:extLst xmlns:a="http://schemas.openxmlformats.org/drawingml/2006/main">
+              <a:ext uri="{FF2B5EF4-FFF2-40B4-BE49-F238E27FC236}">
+                <a16:creationId xmlns:a16="http://schemas.microsoft.com/office/drawing/2014/main" id="{AADE750D-C480-4D05-97BA-874A1517A1B7}"/>
               </a:ext>
             </a:extLst>
           </p:cNvPr>
@@ -5378,7 +5547,7 @@
           <p:cNvPr id="2" name="visual-claim">
             <a:extLst xmlns:a="http://schemas.openxmlformats.org/drawingml/2006/main">
               <a:ext uri="{FF2B5EF4-FFF2-40B4-BE49-F238E27FC236}">
-                <a16:creationId xmlns:a16="http://schemas.microsoft.com/office/drawing/2014/main" id="{D2028751-86C7-4A18-AB31-7F88A851FF57}"/>
+                <a16:creationId xmlns:a16="http://schemas.microsoft.com/office/drawing/2014/main" id="{9CE594AC-5516-4AED-AD93-B39615603D4F}"/>
               </a:ext>
             </a:extLst>
           </p:cNvPr>
@@ -5429,7 +5598,7 @@
           <p:cNvPr id="3" name="image-surface">
             <a:extLst xmlns:a="http://schemas.openxmlformats.org/drawingml/2006/main">
               <a:ext uri="{FF2B5EF4-FFF2-40B4-BE49-F238E27FC236}">
-                <a16:creationId xmlns:a16="http://schemas.microsoft.com/office/drawing/2014/main" id="{D114820B-DA54-4A37-9F7A-2CD810614618}"/>
+                <a16:creationId xmlns:a16="http://schemas.microsoft.com/office/drawing/2014/main" id="{A9FC3762-0FB5-4D17-8704-C48790D7F74D}"/>
               </a:ext>
             </a:extLst>
           </p:cNvPr>
@@ -5463,14 +5632,14 @@
       </p:sp>
       <p:pic>
         <p:nvPicPr>
-          <p:cNvPr id="15" name="" descr="Figura oficial da documentação dbt usada para explicar: Microbatch precisa de event_time — Lotes temporais só ajudam quando evento, janela e backfill são mensuráveis.."/>
+          <p:cNvPr id="18" name="" descr="Figura oficial da documentação dbt usada para explicar: Microbatch precisa de event_time — Lotes temporais só ajudam quando evento, janela e backfill são mensuráveis.."/>
           <p:cNvPicPr>
             <a:picLocks xmlns:a="http://schemas.openxmlformats.org/drawingml/2006/main" noChangeAspect="1"/>
           </p:cNvPicPr>
           <p:nvPr/>
         </p:nvPicPr>
         <p:blipFill>
-          <a:blip xmlns:r="http://schemas.openxmlformats.org/officeDocument/2006/relationships" xmlns:a="http://schemas.openxmlformats.org/drawingml/2006/main" r:embed="R0d08636cb9654076"/>
+          <a:blip xmlns:r="http://schemas.openxmlformats.org/officeDocument/2006/relationships" xmlns:a="http://schemas.openxmlformats.org/drawingml/2006/main" r:embed="R9494e7c4ec2a4d2d"/>
           <a:stretch xmlns:a="http://schemas.openxmlformats.org/drawingml/2006/main"/>
         </p:blipFill>
         <p:spPr>
@@ -5488,7 +5657,7 @@
           <p:cNvPr id="5" name="image-caption">
             <a:extLst xmlns:a="http://schemas.openxmlformats.org/drawingml/2006/main">
               <a:ext uri="{FF2B5EF4-FFF2-40B4-BE49-F238E27FC236}">
-                <a16:creationId xmlns:a16="http://schemas.microsoft.com/office/drawing/2014/main" id="{6AD6A755-0CF4-4668-9FB8-8169ECD1E8D6}"/>
+                <a16:creationId xmlns:a16="http://schemas.microsoft.com/office/drawing/2014/main" id="{E8D81677-404A-41BB-AA59-B9592A2B8EAD}"/>
               </a:ext>
             </a:extLst>
           </p:cNvPr>
@@ -5539,7 +5708,7 @@
           <p:cNvPr id="6" name="eyebrow">
             <a:extLst xmlns:a="http://schemas.openxmlformats.org/drawingml/2006/main">
               <a:ext uri="{FF2B5EF4-FFF2-40B4-BE49-F238E27FC236}">
-                <a16:creationId xmlns:a16="http://schemas.microsoft.com/office/drawing/2014/main" id="{FF102AC4-BC5B-4AE4-BEF6-F1776CEBCAFC}"/>
+                <a16:creationId xmlns:a16="http://schemas.microsoft.com/office/drawing/2014/main" id="{DDDEA0CE-2BF4-46E4-B3FD-9DFEE68823E1}"/>
               </a:ext>
             </a:extLst>
           </p:cNvPr>
@@ -5587,10 +5756,69 @@
       </p:sp>
       <p:sp>
         <p:nvSpPr>
-          <p:cNvPr id="7" name="footer-rule">
-            <a:extLst xmlns:a="http://schemas.openxmlformats.org/drawingml/2006/main">
-              <a:ext uri="{FF2B5EF4-FFF2-40B4-BE49-F238E27FC236}">
-                <a16:creationId xmlns:a16="http://schemas.microsoft.com/office/drawing/2014/main" id="{7380EC3C-6605-4E98-9F4C-91A43C9C1F80}"/>
+          <p:cNvPr id="7" name="rescue-point-logo-background">
+            <a:extLst xmlns:a="http://schemas.openxmlformats.org/drawingml/2006/main">
+              <a:ext uri="{FF2B5EF4-FFF2-40B4-BE49-F238E27FC236}">
+                <a16:creationId xmlns:a16="http://schemas.microsoft.com/office/drawing/2014/main" id="{0B106F74-4462-488E-9CBA-CCB3915F4330}"/>
+              </a:ext>
+            </a:extLst>
+          </p:cNvPr>
+          <p:cNvSpPr>
+            <a:spLocks xmlns:a="http://schemas.openxmlformats.org/drawingml/2006/main" noGrp="1"/>
+          </p:cNvSpPr>
+          <p:nvPr/>
+        </p:nvSpPr>
+        <p:spPr>
+          <a:xfrm xmlns:a="http://schemas.openxmlformats.org/drawingml/2006/main">
+            <a:off x="9772650" y="133350"/>
+            <a:ext cx="1733550" cy="457200"/>
+          </a:xfrm>
+          <a:prstGeom xmlns:a="http://schemas.openxmlformats.org/drawingml/2006/main" prst="roundRect">
+            <a:avLst>
+              <a:gd name="adj" fmla="val 16667"/>
+            </a:avLst>
+          </a:prstGeom>
+          <a:solidFill xmlns:a="http://schemas.openxmlformats.org/drawingml/2006/main">
+            <a:srgbClr val="06142E"/>
+          </a:solidFill>
+          <a:ln xmlns:a="http://schemas.openxmlformats.org/drawingml/2006/main" w="9525">
+            <a:solidFill>
+              <a:srgbClr val="1EC5FF">
+                <a:alpha val="33333"/>
+              </a:srgbClr>
+            </a:solidFill>
+            <a:prstDash val="solid"/>
+          </a:ln>
+        </p:spPr>
+      </p:sp>
+      <p:pic>
+        <p:nvPicPr>
+          <p:cNvPr id="22" name="" descr="Figura oficial da documentação dbt usada para explicar: Microbatch precisa de event_time — Lotes temporais só ajudam quando evento, janela e backfill são mensuráveis.."/>
+          <p:cNvPicPr>
+            <a:picLocks xmlns:a="http://schemas.openxmlformats.org/drawingml/2006/main" noChangeAspect="1"/>
+          </p:cNvPicPr>
+          <p:nvPr/>
+        </p:nvPicPr>
+        <p:blipFill>
+          <a:blip xmlns:r="http://schemas.openxmlformats.org/officeDocument/2006/relationships" xmlns:a="http://schemas.openxmlformats.org/drawingml/2006/main" r:embed="R25bd3fe998244f58"/>
+          <a:stretch xmlns:a="http://schemas.openxmlformats.org/drawingml/2006/main"/>
+        </p:blipFill>
+        <p:spPr>
+          <a:xfrm xmlns:a="http://schemas.openxmlformats.org/drawingml/2006/main">
+            <a:off x="9893718" y="209550"/>
+            <a:ext cx="1491414" cy="323850"/>
+          </a:xfrm>
+          <a:prstGeom xmlns:a="http://schemas.openxmlformats.org/drawingml/2006/main" prst="rect">
+            <a:avLst/>
+          </a:prstGeom>
+        </p:spPr>
+      </p:pic>
+      <p:sp>
+        <p:nvSpPr>
+          <p:cNvPr id="9" name="footer-rule">
+            <a:extLst xmlns:a="http://schemas.openxmlformats.org/drawingml/2006/main">
+              <a:ext uri="{FF2B5EF4-FFF2-40B4-BE49-F238E27FC236}">
+                <a16:creationId xmlns:a16="http://schemas.microsoft.com/office/drawing/2014/main" id="{DB2F55F0-7BE1-41C5-9125-78BDC4ACE310}"/>
               </a:ext>
             </a:extLst>
           </p:cNvPr>
@@ -5620,10 +5848,10 @@
       </p:sp>
       <p:sp>
         <p:nvSpPr>
-          <p:cNvPr id="8" name="footer">
-            <a:extLst xmlns:a="http://schemas.openxmlformats.org/drawingml/2006/main">
-              <a:ext uri="{FF2B5EF4-FFF2-40B4-BE49-F238E27FC236}">
-                <a16:creationId xmlns:a16="http://schemas.microsoft.com/office/drawing/2014/main" id="{B08828F9-0C96-45D9-8A8D-79C10254BA7D}"/>
+          <p:cNvPr id="10" name="footer">
+            <a:extLst xmlns:a="http://schemas.openxmlformats.org/drawingml/2006/main">
+              <a:ext uri="{FF2B5EF4-FFF2-40B4-BE49-F238E27FC236}">
+                <a16:creationId xmlns:a16="http://schemas.microsoft.com/office/drawing/2014/main" id="{98DEE10E-6A5B-4B30-A7FD-03A78F64F52D}"/>
               </a:ext>
             </a:extLst>
           </p:cNvPr>
@@ -5675,10 +5903,10 @@
       </p:sp>
       <p:sp>
         <p:nvSpPr>
-          <p:cNvPr id="9" name="page-number">
-            <a:extLst xmlns:a="http://schemas.openxmlformats.org/drawingml/2006/main">
-              <a:ext uri="{FF2B5EF4-FFF2-40B4-BE49-F238E27FC236}">
-                <a16:creationId xmlns:a16="http://schemas.microsoft.com/office/drawing/2014/main" id="{341EDFA5-7091-4005-A5BC-3915F14E22A4}"/>
+          <p:cNvPr id="11" name="page-number">
+            <a:extLst xmlns:a="http://schemas.openxmlformats.org/drawingml/2006/main">
+              <a:ext uri="{FF2B5EF4-FFF2-40B4-BE49-F238E27FC236}">
+                <a16:creationId xmlns:a16="http://schemas.microsoft.com/office/drawing/2014/main" id="{2ADB8EB7-0BB2-4B56-AE45-013A99E012D3}"/>
               </a:ext>
             </a:extLst>
           </p:cNvPr>
@@ -5731,7 +5959,7 @@
     </p:spTree>
     <p:extLst>
       <p:ext uri="{BB962C8B-B14F-4D97-AF65-F5344CB8AC3E}">
-        <p14:creationId xmlns:p14="http://schemas.microsoft.com/office/powerpoint/2010/main" val="2022419238"/>
+        <p14:creationId xmlns:p14="http://schemas.microsoft.com/office/powerpoint/2010/main" val="958676886"/>
       </p:ext>
     </p:extLst>
   </p:cSld>
@@ -5767,10 +5995,10 @@
       </p:grpSpPr>
       <p:sp>
         <p:nvSpPr>
-          <p:cNvPr id="11" name="slide-title">
-            <a:extLst xmlns:a="http://schemas.openxmlformats.org/drawingml/2006/main">
-              <a:ext uri="{FF2B5EF4-FFF2-40B4-BE49-F238E27FC236}">
-                <a16:creationId xmlns:a16="http://schemas.microsoft.com/office/drawing/2014/main" id="{2D85E939-88DB-47D6-974F-5652FE1C3C57}"/>
+          <p:cNvPr id="13" name="slide-title">
+            <a:extLst xmlns:a="http://schemas.openxmlformats.org/drawingml/2006/main">
+              <a:ext uri="{FF2B5EF4-FFF2-40B4-BE49-F238E27FC236}">
+                <a16:creationId xmlns:a16="http://schemas.microsoft.com/office/drawing/2014/main" id="{37F8071F-DEBB-4632-B0F8-DB503697CA39}"/>
               </a:ext>
             </a:extLst>
           </p:cNvPr>
@@ -5821,7 +6049,7 @@
           <p:cNvPr id="2" name="slide-subtitle">
             <a:extLst xmlns:a="http://schemas.openxmlformats.org/drawingml/2006/main">
               <a:ext uri="{FF2B5EF4-FFF2-40B4-BE49-F238E27FC236}">
-                <a16:creationId xmlns:a16="http://schemas.microsoft.com/office/drawing/2014/main" id="{AD9B1018-9DDD-4A0E-B81F-7C428380B428}"/>
+                <a16:creationId xmlns:a16="http://schemas.microsoft.com/office/drawing/2014/main" id="{4ED59B47-A128-4ADB-8B01-460AB765973F}"/>
               </a:ext>
             </a:extLst>
           </p:cNvPr>
@@ -5872,7 +6100,7 @@
           <p:cNvPr id="3" name="bullets">
             <a:extLst xmlns:a="http://schemas.openxmlformats.org/drawingml/2006/main">
               <a:ext uri="{FF2B5EF4-FFF2-40B4-BE49-F238E27FC236}">
-                <a16:creationId xmlns:a16="http://schemas.microsoft.com/office/drawing/2014/main" id="{1DB3B402-4D76-4F51-B5AE-39C178607AD5}"/>
+                <a16:creationId xmlns:a16="http://schemas.microsoft.com/office/drawing/2014/main" id="{B0465788-356E-43A4-9003-0948B8A7C8D8}"/>
               </a:ext>
             </a:extLst>
           </p:cNvPr>
@@ -5959,7 +6187,7 @@
           <p:cNvPr id="4" name="ambient-glow">
             <a:extLst xmlns:a="http://schemas.openxmlformats.org/drawingml/2006/main">
               <a:ext uri="{FF2B5EF4-FFF2-40B4-BE49-F238E27FC236}">
-                <a16:creationId xmlns:a16="http://schemas.microsoft.com/office/drawing/2014/main" id="{41D53A66-4B7E-4FB8-B345-1B79D4B41B19}"/>
+                <a16:creationId xmlns:a16="http://schemas.microsoft.com/office/drawing/2014/main" id="{F3768D73-195A-4836-8FA1-DE19BD5E6D5C}"/>
               </a:ext>
             </a:extLst>
           </p:cNvPr>
@@ -5996,7 +6224,7 @@
           <p:cNvPr id="5" name="ambient-core">
             <a:extLst xmlns:a="http://schemas.openxmlformats.org/drawingml/2006/main">
               <a:ext uri="{FF2B5EF4-FFF2-40B4-BE49-F238E27FC236}">
-                <a16:creationId xmlns:a16="http://schemas.microsoft.com/office/drawing/2014/main" id="{8598C4B9-B666-4356-A1BC-384C2D0762E3}"/>
+                <a16:creationId xmlns:a16="http://schemas.microsoft.com/office/drawing/2014/main" id="{B42236BA-7C9E-4731-9801-0539A297297E}"/>
               </a:ext>
             </a:extLst>
           </p:cNvPr>
@@ -6033,7 +6261,7 @@
           <p:cNvPr id="6" name="section-number">
             <a:extLst xmlns:a="http://schemas.openxmlformats.org/drawingml/2006/main">
               <a:ext uri="{FF2B5EF4-FFF2-40B4-BE49-F238E27FC236}">
-                <a16:creationId xmlns:a16="http://schemas.microsoft.com/office/drawing/2014/main" id="{05B50050-8EB9-465D-A850-6265DF3C03EE}"/>
+                <a16:creationId xmlns:a16="http://schemas.microsoft.com/office/drawing/2014/main" id="{703ADF92-796B-44F8-AA5B-467417D318FC}"/>
               </a:ext>
             </a:extLst>
           </p:cNvPr>
@@ -6084,7 +6312,7 @@
           <p:cNvPr id="7" name="eyebrow">
             <a:extLst xmlns:a="http://schemas.openxmlformats.org/drawingml/2006/main">
               <a:ext uri="{FF2B5EF4-FFF2-40B4-BE49-F238E27FC236}">
-                <a16:creationId xmlns:a16="http://schemas.microsoft.com/office/drawing/2014/main" id="{ED5C76CF-7358-4AEF-AD4E-BA7C7374DA3B}"/>
+                <a16:creationId xmlns:a16="http://schemas.microsoft.com/office/drawing/2014/main" id="{148C5F88-EE05-4EDF-B1DC-46B5F3613417}"/>
               </a:ext>
             </a:extLst>
           </p:cNvPr>
@@ -6132,10 +6360,69 @@
       </p:sp>
       <p:sp>
         <p:nvSpPr>
-          <p:cNvPr id="8" name="footer-rule">
-            <a:extLst xmlns:a="http://schemas.openxmlformats.org/drawingml/2006/main">
-              <a:ext uri="{FF2B5EF4-FFF2-40B4-BE49-F238E27FC236}">
-                <a16:creationId xmlns:a16="http://schemas.microsoft.com/office/drawing/2014/main" id="{8ACBEA5E-A1CD-4ABF-87EF-C099A60B63F4}"/>
+          <p:cNvPr id="8" name="rescue-point-logo-background">
+            <a:extLst xmlns:a="http://schemas.openxmlformats.org/drawingml/2006/main">
+              <a:ext uri="{FF2B5EF4-FFF2-40B4-BE49-F238E27FC236}">
+                <a16:creationId xmlns:a16="http://schemas.microsoft.com/office/drawing/2014/main" id="{1D032198-1B35-4459-B8F3-D2F9F31C0643}"/>
+              </a:ext>
+            </a:extLst>
+          </p:cNvPr>
+          <p:cNvSpPr>
+            <a:spLocks xmlns:a="http://schemas.openxmlformats.org/drawingml/2006/main" noGrp="1"/>
+          </p:cNvSpPr>
+          <p:nvPr/>
+        </p:nvSpPr>
+        <p:spPr>
+          <a:xfrm xmlns:a="http://schemas.openxmlformats.org/drawingml/2006/main">
+            <a:off x="9772650" y="133350"/>
+            <a:ext cx="1733550" cy="457200"/>
+          </a:xfrm>
+          <a:prstGeom xmlns:a="http://schemas.openxmlformats.org/drawingml/2006/main" prst="roundRect">
+            <a:avLst>
+              <a:gd name="adj" fmla="val 16667"/>
+            </a:avLst>
+          </a:prstGeom>
+          <a:solidFill xmlns:a="http://schemas.openxmlformats.org/drawingml/2006/main">
+            <a:srgbClr val="06142E"/>
+          </a:solidFill>
+          <a:ln xmlns:a="http://schemas.openxmlformats.org/drawingml/2006/main" w="9525">
+            <a:solidFill>
+              <a:srgbClr val="1EC5FF">
+                <a:alpha val="33333"/>
+              </a:srgbClr>
+            </a:solidFill>
+            <a:prstDash val="solid"/>
+          </a:ln>
+        </p:spPr>
+      </p:sp>
+      <p:pic>
+        <p:nvPicPr>
+          <p:cNvPr id="23" name="" descr="Figura oficial da documentação dbt usada para explicar: Materialização muda o perfil de custo — View, table e incremental trocam compute, storage e latência.."/>
+          <p:cNvPicPr>
+            <a:picLocks xmlns:a="http://schemas.openxmlformats.org/drawingml/2006/main" noChangeAspect="1"/>
+          </p:cNvPicPr>
+          <p:nvPr/>
+        </p:nvPicPr>
+        <p:blipFill>
+          <a:blip xmlns:r="http://schemas.openxmlformats.org/officeDocument/2006/relationships" xmlns:a="http://schemas.openxmlformats.org/drawingml/2006/main" r:embed="R7c7889ef90f04684"/>
+          <a:stretch xmlns:a="http://schemas.openxmlformats.org/drawingml/2006/main"/>
+        </p:blipFill>
+        <p:spPr>
+          <a:xfrm xmlns:a="http://schemas.openxmlformats.org/drawingml/2006/main">
+            <a:off x="9893718" y="209550"/>
+            <a:ext cx="1491414" cy="323850"/>
+          </a:xfrm>
+          <a:prstGeom xmlns:a="http://schemas.openxmlformats.org/drawingml/2006/main" prst="rect">
+            <a:avLst/>
+          </a:prstGeom>
+        </p:spPr>
+      </p:pic>
+      <p:sp>
+        <p:nvSpPr>
+          <p:cNvPr id="10" name="footer-rule">
+            <a:extLst xmlns:a="http://schemas.openxmlformats.org/drawingml/2006/main">
+              <a:ext uri="{FF2B5EF4-FFF2-40B4-BE49-F238E27FC236}">
+                <a16:creationId xmlns:a16="http://schemas.microsoft.com/office/drawing/2014/main" id="{FB18F6F5-BC07-4D3D-9AC3-8EAC0507FB88}"/>
               </a:ext>
             </a:extLst>
           </p:cNvPr>
@@ -6165,10 +6452,10 @@
       </p:sp>
       <p:sp>
         <p:nvSpPr>
-          <p:cNvPr id="9" name="footer">
-            <a:extLst xmlns:a="http://schemas.openxmlformats.org/drawingml/2006/main">
-              <a:ext uri="{FF2B5EF4-FFF2-40B4-BE49-F238E27FC236}">
-                <a16:creationId xmlns:a16="http://schemas.microsoft.com/office/drawing/2014/main" id="{F0F8875E-8A8A-4A83-B24E-CCFEF3DC523E}"/>
+          <p:cNvPr id="11" name="footer">
+            <a:extLst xmlns:a="http://schemas.openxmlformats.org/drawingml/2006/main">
+              <a:ext uri="{FF2B5EF4-FFF2-40B4-BE49-F238E27FC236}">
+                <a16:creationId xmlns:a16="http://schemas.microsoft.com/office/drawing/2014/main" id="{0401F8FC-806E-42CC-8A26-17599A8C824A}"/>
               </a:ext>
             </a:extLst>
           </p:cNvPr>
@@ -6220,10 +6507,10 @@
       </p:sp>
       <p:sp>
         <p:nvSpPr>
-          <p:cNvPr id="10" name="page-number">
-            <a:extLst xmlns:a="http://schemas.openxmlformats.org/drawingml/2006/main">
-              <a:ext uri="{FF2B5EF4-FFF2-40B4-BE49-F238E27FC236}">
-                <a16:creationId xmlns:a16="http://schemas.microsoft.com/office/drawing/2014/main" id="{FE059C16-1B07-4AFD-8DFB-A460EF3E860A}"/>
+          <p:cNvPr id="12" name="page-number">
+            <a:extLst xmlns:a="http://schemas.openxmlformats.org/drawingml/2006/main">
+              <a:ext uri="{FF2B5EF4-FFF2-40B4-BE49-F238E27FC236}">
+                <a16:creationId xmlns:a16="http://schemas.microsoft.com/office/drawing/2014/main" id="{D1CD96CE-A28B-46FD-86F0-5DBA4C0F2DEA}"/>
               </a:ext>
             </a:extLst>
           </p:cNvPr>
@@ -6276,7 +6563,7 @@
     </p:spTree>
     <p:extLst>
       <p:ext uri="{BB962C8B-B14F-4D97-AF65-F5344CB8AC3E}">
-        <p14:creationId xmlns:p14="http://schemas.microsoft.com/office/powerpoint/2010/main" val="1950454843"/>
+        <p14:creationId xmlns:p14="http://schemas.microsoft.com/office/powerpoint/2010/main" val="239258760"/>
       </p:ext>
     </p:extLst>
   </p:cSld>
@@ -6304,10 +6591,10 @@
       </p:grpSpPr>
       <p:sp>
         <p:nvSpPr>
-          <p:cNvPr id="11" name="slide-title">
-            <a:extLst xmlns:a="http://schemas.openxmlformats.org/drawingml/2006/main">
-              <a:ext uri="{FF2B5EF4-FFF2-40B4-BE49-F238E27FC236}">
-                <a16:creationId xmlns:a16="http://schemas.microsoft.com/office/drawing/2014/main" id="{62792F34-FD28-4437-96DD-3EA9BE416632}"/>
+          <p:cNvPr id="13" name="slide-title">
+            <a:extLst xmlns:a="http://schemas.openxmlformats.org/drawingml/2006/main">
+              <a:ext uri="{FF2B5EF4-FFF2-40B4-BE49-F238E27FC236}">
+                <a16:creationId xmlns:a16="http://schemas.microsoft.com/office/drawing/2014/main" id="{B2A3B25F-99CE-4E77-9E61-011771B97ED4}"/>
               </a:ext>
             </a:extLst>
           </p:cNvPr>
@@ -6358,7 +6645,7 @@
           <p:cNvPr id="2" name="compare-left-title">
             <a:extLst xmlns:a="http://schemas.openxmlformats.org/drawingml/2006/main">
               <a:ext uri="{FF2B5EF4-FFF2-40B4-BE49-F238E27FC236}">
-                <a16:creationId xmlns:a16="http://schemas.microsoft.com/office/drawing/2014/main" id="{32A56356-C4C3-4378-909B-5791B3B1B7E9}"/>
+                <a16:creationId xmlns:a16="http://schemas.microsoft.com/office/drawing/2014/main" id="{735FC51C-C6A1-4B61-B6E4-1A7A821B0DB6}"/>
               </a:ext>
             </a:extLst>
           </p:cNvPr>
@@ -6409,7 +6696,7 @@
           <p:cNvPr id="3" name="compare-right-title">
             <a:extLst xmlns:a="http://schemas.openxmlformats.org/drawingml/2006/main">
               <a:ext uri="{FF2B5EF4-FFF2-40B4-BE49-F238E27FC236}">
-                <a16:creationId xmlns:a16="http://schemas.microsoft.com/office/drawing/2014/main" id="{1F549B81-28F8-4897-A3CE-CACEBEC41F61}"/>
+                <a16:creationId xmlns:a16="http://schemas.microsoft.com/office/drawing/2014/main" id="{E1F46959-49D8-4D7F-8DDD-3469A536159E}"/>
               </a:ext>
             </a:extLst>
           </p:cNvPr>
@@ -6460,7 +6747,7 @@
           <p:cNvPr id="4" name="compare-divider">
             <a:extLst xmlns:a="http://schemas.openxmlformats.org/drawingml/2006/main">
               <a:ext uri="{FF2B5EF4-FFF2-40B4-BE49-F238E27FC236}">
-                <a16:creationId xmlns:a16="http://schemas.microsoft.com/office/drawing/2014/main" id="{F97FA1A3-E762-4280-9D5E-C7A3DC821054}"/>
+                <a16:creationId xmlns:a16="http://schemas.microsoft.com/office/drawing/2014/main" id="{8D65DB49-446A-4993-914E-14DD98D78261}"/>
               </a:ext>
             </a:extLst>
           </p:cNvPr>
@@ -6491,7 +6778,7 @@
           <p:cNvPr id="5" name="bullets">
             <a:extLst xmlns:a="http://schemas.openxmlformats.org/drawingml/2006/main">
               <a:ext uri="{FF2B5EF4-FFF2-40B4-BE49-F238E27FC236}">
-                <a16:creationId xmlns:a16="http://schemas.microsoft.com/office/drawing/2014/main" id="{D99D0F94-A883-40AF-B8F9-63F7E81774F1}"/>
+                <a16:creationId xmlns:a16="http://schemas.microsoft.com/office/drawing/2014/main" id="{6F4BEF23-907F-4231-9C5A-91FD4F7CF39C}"/>
               </a:ext>
             </a:extLst>
           </p:cNvPr>
@@ -6560,7 +6847,7 @@
           <p:cNvPr id="6" name="bullets">
             <a:extLst xmlns:a="http://schemas.openxmlformats.org/drawingml/2006/main">
               <a:ext uri="{FF2B5EF4-FFF2-40B4-BE49-F238E27FC236}">
-                <a16:creationId xmlns:a16="http://schemas.microsoft.com/office/drawing/2014/main" id="{60DBDE4B-6E32-4514-90C0-5590C87E1438}"/>
+                <a16:creationId xmlns:a16="http://schemas.microsoft.com/office/drawing/2014/main" id="{A4B3A9C6-5DA4-4095-B276-234BF499CBE6}"/>
               </a:ext>
             </a:extLst>
           </p:cNvPr>
@@ -6611,7 +6898,7 @@
           <p:cNvPr id="7" name="eyebrow">
             <a:extLst xmlns:a="http://schemas.openxmlformats.org/drawingml/2006/main">
               <a:ext uri="{FF2B5EF4-FFF2-40B4-BE49-F238E27FC236}">
-                <a16:creationId xmlns:a16="http://schemas.microsoft.com/office/drawing/2014/main" id="{806B2890-D264-457F-94B0-92CB7B652D2D}"/>
+                <a16:creationId xmlns:a16="http://schemas.microsoft.com/office/drawing/2014/main" id="{0C07E8C1-B74A-45D7-977E-715A56C0B5B9}"/>
               </a:ext>
             </a:extLst>
           </p:cNvPr>
@@ -6659,10 +6946,69 @@
       </p:sp>
       <p:sp>
         <p:nvSpPr>
-          <p:cNvPr id="8" name="footer-rule">
-            <a:extLst xmlns:a="http://schemas.openxmlformats.org/drawingml/2006/main">
-              <a:ext uri="{FF2B5EF4-FFF2-40B4-BE49-F238E27FC236}">
-                <a16:creationId xmlns:a16="http://schemas.microsoft.com/office/drawing/2014/main" id="{172897CB-AFF6-408F-A8D5-CB66238E286F}"/>
+          <p:cNvPr id="8" name="rescue-point-logo-background">
+            <a:extLst xmlns:a="http://schemas.openxmlformats.org/drawingml/2006/main">
+              <a:ext uri="{FF2B5EF4-FFF2-40B4-BE49-F238E27FC236}">
+                <a16:creationId xmlns:a16="http://schemas.microsoft.com/office/drawing/2014/main" id="{325AC925-5209-4E05-82E9-09A0C472231F}"/>
+              </a:ext>
+            </a:extLst>
+          </p:cNvPr>
+          <p:cNvSpPr>
+            <a:spLocks xmlns:a="http://schemas.openxmlformats.org/drawingml/2006/main" noGrp="1"/>
+          </p:cNvSpPr>
+          <p:nvPr/>
+        </p:nvSpPr>
+        <p:spPr>
+          <a:xfrm xmlns:a="http://schemas.openxmlformats.org/drawingml/2006/main">
+            <a:off x="9772650" y="133350"/>
+            <a:ext cx="1733550" cy="457200"/>
+          </a:xfrm>
+          <a:prstGeom xmlns:a="http://schemas.openxmlformats.org/drawingml/2006/main" prst="roundRect">
+            <a:avLst>
+              <a:gd name="adj" fmla="val 16667"/>
+            </a:avLst>
+          </a:prstGeom>
+          <a:solidFill xmlns:a="http://schemas.openxmlformats.org/drawingml/2006/main">
+            <a:srgbClr val="06142E"/>
+          </a:solidFill>
+          <a:ln xmlns:a="http://schemas.openxmlformats.org/drawingml/2006/main" w="9525">
+            <a:solidFill>
+              <a:srgbClr val="1EC5FF">
+                <a:alpha val="33333"/>
+              </a:srgbClr>
+            </a:solidFill>
+            <a:prstDash val="solid"/>
+          </a:ln>
+        </p:spPr>
+      </p:sp>
+      <p:pic>
+        <p:nvPicPr>
+          <p:cNvPr id="23" name="" descr="Figura oficial da documentação dbt usada para explicar: Materialização muda o perfil de custo — View."/>
+          <p:cNvPicPr>
+            <a:picLocks xmlns:a="http://schemas.openxmlformats.org/drawingml/2006/main" noChangeAspect="1"/>
+          </p:cNvPicPr>
+          <p:nvPr/>
+        </p:nvPicPr>
+        <p:blipFill>
+          <a:blip xmlns:r="http://schemas.openxmlformats.org/officeDocument/2006/relationships" xmlns:a="http://schemas.openxmlformats.org/drawingml/2006/main" r:embed="R916a6f0ed96f4969"/>
+          <a:stretch xmlns:a="http://schemas.openxmlformats.org/drawingml/2006/main"/>
+        </p:blipFill>
+        <p:spPr>
+          <a:xfrm xmlns:a="http://schemas.openxmlformats.org/drawingml/2006/main">
+            <a:off x="9893718" y="209550"/>
+            <a:ext cx="1491414" cy="323850"/>
+          </a:xfrm>
+          <a:prstGeom xmlns:a="http://schemas.openxmlformats.org/drawingml/2006/main" prst="rect">
+            <a:avLst/>
+          </a:prstGeom>
+        </p:spPr>
+      </p:pic>
+      <p:sp>
+        <p:nvSpPr>
+          <p:cNvPr id="10" name="footer-rule">
+            <a:extLst xmlns:a="http://schemas.openxmlformats.org/drawingml/2006/main">
+              <a:ext uri="{FF2B5EF4-FFF2-40B4-BE49-F238E27FC236}">
+                <a16:creationId xmlns:a16="http://schemas.microsoft.com/office/drawing/2014/main" id="{A97A0183-4857-4D7D-A114-42EC31FD5A9D}"/>
               </a:ext>
             </a:extLst>
           </p:cNvPr>
@@ -6692,10 +7038,10 @@
       </p:sp>
       <p:sp>
         <p:nvSpPr>
-          <p:cNvPr id="9" name="footer">
-            <a:extLst xmlns:a="http://schemas.openxmlformats.org/drawingml/2006/main">
-              <a:ext uri="{FF2B5EF4-FFF2-40B4-BE49-F238E27FC236}">
-                <a16:creationId xmlns:a16="http://schemas.microsoft.com/office/drawing/2014/main" id="{05402EE2-76A4-4AF9-AAAA-25D6ACB56797}"/>
+          <p:cNvPr id="11" name="footer">
+            <a:extLst xmlns:a="http://schemas.openxmlformats.org/drawingml/2006/main">
+              <a:ext uri="{FF2B5EF4-FFF2-40B4-BE49-F238E27FC236}">
+                <a16:creationId xmlns:a16="http://schemas.microsoft.com/office/drawing/2014/main" id="{F476B8CD-0B20-476D-836B-2C77BC73D8EE}"/>
               </a:ext>
             </a:extLst>
           </p:cNvPr>
@@ -6747,10 +7093,10 @@
       </p:sp>
       <p:sp>
         <p:nvSpPr>
-          <p:cNvPr id="10" name="page-number">
-            <a:extLst xmlns:a="http://schemas.openxmlformats.org/drawingml/2006/main">
-              <a:ext uri="{FF2B5EF4-FFF2-40B4-BE49-F238E27FC236}">
-                <a16:creationId xmlns:a16="http://schemas.microsoft.com/office/drawing/2014/main" id="{5597470B-179D-45C6-8F96-27B619CE8F7F}"/>
+          <p:cNvPr id="12" name="page-number">
+            <a:extLst xmlns:a="http://schemas.openxmlformats.org/drawingml/2006/main">
+              <a:ext uri="{FF2B5EF4-FFF2-40B4-BE49-F238E27FC236}">
+                <a16:creationId xmlns:a16="http://schemas.microsoft.com/office/drawing/2014/main" id="{6A9025DE-0041-49D7-84B9-720D3586A18F}"/>
               </a:ext>
             </a:extLst>
           </p:cNvPr>
@@ -6803,7 +7149,7 @@
     </p:spTree>
     <p:extLst>
       <p:ext uri="{BB962C8B-B14F-4D97-AF65-F5344CB8AC3E}">
-        <p14:creationId xmlns:p14="http://schemas.microsoft.com/office/powerpoint/2010/main" val="189728354"/>
+        <p14:creationId xmlns:p14="http://schemas.microsoft.com/office/powerpoint/2010/main" val="1237319677"/>
       </p:ext>
     </p:extLst>
   </p:cSld>
@@ -6831,10 +7177,10 @@
       </p:grpSpPr>
       <p:sp>
         <p:nvSpPr>
-          <p:cNvPr id="11" name="slide-title">
-            <a:extLst xmlns:a="http://schemas.openxmlformats.org/drawingml/2006/main">
-              <a:ext uri="{FF2B5EF4-FFF2-40B4-BE49-F238E27FC236}">
-                <a16:creationId xmlns:a16="http://schemas.microsoft.com/office/drawing/2014/main" id="{62216483-0C69-4B4D-B00A-A9BA6B7D75EC}"/>
+          <p:cNvPr id="13" name="slide-title">
+            <a:extLst xmlns:a="http://schemas.openxmlformats.org/drawingml/2006/main">
+              <a:ext uri="{FF2B5EF4-FFF2-40B4-BE49-F238E27FC236}">
+                <a16:creationId xmlns:a16="http://schemas.microsoft.com/office/drawing/2014/main" id="{1C7F7017-B5D7-44A0-B60B-43980D3E69C1}"/>
               </a:ext>
             </a:extLst>
           </p:cNvPr>
@@ -6885,7 +7231,7 @@
           <p:cNvPr id="2" name="slide-subtitle">
             <a:extLst xmlns:a="http://schemas.openxmlformats.org/drawingml/2006/main">
               <a:ext uri="{FF2B5EF4-FFF2-40B4-BE49-F238E27FC236}">
-                <a16:creationId xmlns:a16="http://schemas.microsoft.com/office/drawing/2014/main" id="{90BA3880-5358-4575-B2AD-0161F8FA4114}"/>
+                <a16:creationId xmlns:a16="http://schemas.microsoft.com/office/drawing/2014/main" id="{2B47CCCE-1B79-4407-A761-F138F27F5051}"/>
               </a:ext>
             </a:extLst>
           </p:cNvPr>
@@ -6936,7 +7282,7 @@
           <p:cNvPr id="3" name="bullets">
             <a:extLst xmlns:a="http://schemas.openxmlformats.org/drawingml/2006/main">
               <a:ext uri="{FF2B5EF4-FFF2-40B4-BE49-F238E27FC236}">
-                <a16:creationId xmlns:a16="http://schemas.microsoft.com/office/drawing/2014/main" id="{EC30FD88-BC8C-4EED-B08B-C0A9F7A3D09D}"/>
+                <a16:creationId xmlns:a16="http://schemas.microsoft.com/office/drawing/2014/main" id="{9E18AE79-81E6-49E1-A507-F140BAB6A455}"/>
               </a:ext>
             </a:extLst>
           </p:cNvPr>
@@ -7023,7 +7369,7 @@
           <p:cNvPr id="4" name="ambient-glow">
             <a:extLst xmlns:a="http://schemas.openxmlformats.org/drawingml/2006/main">
               <a:ext uri="{FF2B5EF4-FFF2-40B4-BE49-F238E27FC236}">
-                <a16:creationId xmlns:a16="http://schemas.microsoft.com/office/drawing/2014/main" id="{BC393655-E7A6-49F6-9CAF-C54B54EC3EB5}"/>
+                <a16:creationId xmlns:a16="http://schemas.microsoft.com/office/drawing/2014/main" id="{90A63E23-CDC9-4E3D-BCAA-673879B978A5}"/>
               </a:ext>
             </a:extLst>
           </p:cNvPr>
@@ -7060,7 +7406,7 @@
           <p:cNvPr id="5" name="ambient-core">
             <a:extLst xmlns:a="http://schemas.openxmlformats.org/drawingml/2006/main">
               <a:ext uri="{FF2B5EF4-FFF2-40B4-BE49-F238E27FC236}">
-                <a16:creationId xmlns:a16="http://schemas.microsoft.com/office/drawing/2014/main" id="{C508996D-7794-480A-8821-2196B7D9C355}"/>
+                <a16:creationId xmlns:a16="http://schemas.microsoft.com/office/drawing/2014/main" id="{E51F33E3-DE7E-4EB3-9F12-6F1F96A3EFA3}"/>
               </a:ext>
             </a:extLst>
           </p:cNvPr>
@@ -7097,7 +7443,7 @@
           <p:cNvPr id="6" name="section-number">
             <a:extLst xmlns:a="http://schemas.openxmlformats.org/drawingml/2006/main">
               <a:ext uri="{FF2B5EF4-FFF2-40B4-BE49-F238E27FC236}">
-                <a16:creationId xmlns:a16="http://schemas.microsoft.com/office/drawing/2014/main" id="{B229F9E6-61DD-4AE3-B298-99AA59939859}"/>
+                <a16:creationId xmlns:a16="http://schemas.microsoft.com/office/drawing/2014/main" id="{8CED90D8-6A02-4639-92A7-FEBD298A910D}"/>
               </a:ext>
             </a:extLst>
           </p:cNvPr>
@@ -7148,7 +7494,7 @@
           <p:cNvPr id="7" name="eyebrow">
             <a:extLst xmlns:a="http://schemas.openxmlformats.org/drawingml/2006/main">
               <a:ext uri="{FF2B5EF4-FFF2-40B4-BE49-F238E27FC236}">
-                <a16:creationId xmlns:a16="http://schemas.microsoft.com/office/drawing/2014/main" id="{E4AB1399-35F0-4B49-A570-025962689DA7}"/>
+                <a16:creationId xmlns:a16="http://schemas.microsoft.com/office/drawing/2014/main" id="{2729D228-86CE-41E7-8C02-4F96D8C5295A}"/>
               </a:ext>
             </a:extLst>
           </p:cNvPr>
@@ -7196,10 +7542,69 @@
       </p:sp>
       <p:sp>
         <p:nvSpPr>
-          <p:cNvPr id="8" name="footer-rule">
-            <a:extLst xmlns:a="http://schemas.openxmlformats.org/drawingml/2006/main">
-              <a:ext uri="{FF2B5EF4-FFF2-40B4-BE49-F238E27FC236}">
-                <a16:creationId xmlns:a16="http://schemas.microsoft.com/office/drawing/2014/main" id="{9FBF0C19-7F2C-4BF1-BCC6-3210E7836746}"/>
+          <p:cNvPr id="8" name="rescue-point-logo-background">
+            <a:extLst xmlns:a="http://schemas.openxmlformats.org/drawingml/2006/main">
+              <a:ext uri="{FF2B5EF4-FFF2-40B4-BE49-F238E27FC236}">
+                <a16:creationId xmlns:a16="http://schemas.microsoft.com/office/drawing/2014/main" id="{2C8D7E5F-3901-4BDF-A5C2-992672B66CA0}"/>
+              </a:ext>
+            </a:extLst>
+          </p:cNvPr>
+          <p:cNvSpPr>
+            <a:spLocks xmlns:a="http://schemas.openxmlformats.org/drawingml/2006/main" noGrp="1"/>
+          </p:cNvSpPr>
+          <p:nvPr/>
+        </p:nvSpPr>
+        <p:spPr>
+          <a:xfrm xmlns:a="http://schemas.openxmlformats.org/drawingml/2006/main">
+            <a:off x="9772650" y="133350"/>
+            <a:ext cx="1733550" cy="457200"/>
+          </a:xfrm>
+          <a:prstGeom xmlns:a="http://schemas.openxmlformats.org/drawingml/2006/main" prst="roundRect">
+            <a:avLst>
+              <a:gd name="adj" fmla="val 16667"/>
+            </a:avLst>
+          </a:prstGeom>
+          <a:solidFill xmlns:a="http://schemas.openxmlformats.org/drawingml/2006/main">
+            <a:srgbClr val="06142E"/>
+          </a:solidFill>
+          <a:ln xmlns:a="http://schemas.openxmlformats.org/drawingml/2006/main" w="9525">
+            <a:solidFill>
+              <a:srgbClr val="1EC5FF">
+                <a:alpha val="33333"/>
+              </a:srgbClr>
+            </a:solidFill>
+            <a:prstDash val="solid"/>
+          </a:ln>
+        </p:spPr>
+      </p:sp>
+      <p:pic>
+        <p:nvPicPr>
+          <p:cNvPr id="23" name="" descr="Figura oficial da documentação dbt usada para explicar: Benchmark precisa de correção funcional — Linhas e segundos só importam depois de reconciliar o ground truth.."/>
+          <p:cNvPicPr>
+            <a:picLocks xmlns:a="http://schemas.openxmlformats.org/drawingml/2006/main" noChangeAspect="1"/>
+          </p:cNvPicPr>
+          <p:nvPr/>
+        </p:nvPicPr>
+        <p:blipFill>
+          <a:blip xmlns:r="http://schemas.openxmlformats.org/officeDocument/2006/relationships" xmlns:a="http://schemas.openxmlformats.org/drawingml/2006/main" r:embed="R4817b4c3d24d4651"/>
+          <a:stretch xmlns:a="http://schemas.openxmlformats.org/drawingml/2006/main"/>
+        </p:blipFill>
+        <p:spPr>
+          <a:xfrm xmlns:a="http://schemas.openxmlformats.org/drawingml/2006/main">
+            <a:off x="9893718" y="209550"/>
+            <a:ext cx="1491414" cy="323850"/>
+          </a:xfrm>
+          <a:prstGeom xmlns:a="http://schemas.openxmlformats.org/drawingml/2006/main" prst="rect">
+            <a:avLst/>
+          </a:prstGeom>
+        </p:spPr>
+      </p:pic>
+      <p:sp>
+        <p:nvSpPr>
+          <p:cNvPr id="10" name="footer-rule">
+            <a:extLst xmlns:a="http://schemas.openxmlformats.org/drawingml/2006/main">
+              <a:ext uri="{FF2B5EF4-FFF2-40B4-BE49-F238E27FC236}">
+                <a16:creationId xmlns:a16="http://schemas.microsoft.com/office/drawing/2014/main" id="{4988B5DB-F93C-4C05-AD8C-1F6FC730E82F}"/>
               </a:ext>
             </a:extLst>
           </p:cNvPr>
@@ -7229,10 +7634,10 @@
       </p:sp>
       <p:sp>
         <p:nvSpPr>
-          <p:cNvPr id="9" name="footer">
-            <a:extLst xmlns:a="http://schemas.openxmlformats.org/drawingml/2006/main">
-              <a:ext uri="{FF2B5EF4-FFF2-40B4-BE49-F238E27FC236}">
-                <a16:creationId xmlns:a16="http://schemas.microsoft.com/office/drawing/2014/main" id="{56340167-8FBE-4052-847A-D9B999E507BE}"/>
+          <p:cNvPr id="11" name="footer">
+            <a:extLst xmlns:a="http://schemas.openxmlformats.org/drawingml/2006/main">
+              <a:ext uri="{FF2B5EF4-FFF2-40B4-BE49-F238E27FC236}">
+                <a16:creationId xmlns:a16="http://schemas.microsoft.com/office/drawing/2014/main" id="{40200F9B-9E41-46BF-B19C-1CBC52BAA173}"/>
               </a:ext>
             </a:extLst>
           </p:cNvPr>
@@ -7284,10 +7689,10 @@
       </p:sp>
       <p:sp>
         <p:nvSpPr>
-          <p:cNvPr id="10" name="page-number">
-            <a:extLst xmlns:a="http://schemas.openxmlformats.org/drawingml/2006/main">
-              <a:ext uri="{FF2B5EF4-FFF2-40B4-BE49-F238E27FC236}">
-                <a16:creationId xmlns:a16="http://schemas.microsoft.com/office/drawing/2014/main" id="{79EFBF44-1575-407D-8397-E4ED9B645BD9}"/>
+          <p:cNvPr id="12" name="page-number">
+            <a:extLst xmlns:a="http://schemas.openxmlformats.org/drawingml/2006/main">
+              <a:ext uri="{FF2B5EF4-FFF2-40B4-BE49-F238E27FC236}">
+                <a16:creationId xmlns:a16="http://schemas.microsoft.com/office/drawing/2014/main" id="{808FB047-A567-4A22-9E92-39611BFF182E}"/>
               </a:ext>
             </a:extLst>
           </p:cNvPr>
@@ -7340,7 +7745,7 @@
     </p:spTree>
     <p:extLst>
       <p:ext uri="{BB962C8B-B14F-4D97-AF65-F5344CB8AC3E}">
-        <p14:creationId xmlns:p14="http://schemas.microsoft.com/office/powerpoint/2010/main" val="317628379"/>
+        <p14:creationId xmlns:p14="http://schemas.microsoft.com/office/powerpoint/2010/main" val="215778454"/>
       </p:ext>
     </p:extLst>
   </p:cSld>
@@ -7376,10 +7781,10 @@
       </p:grpSpPr>
       <p:sp>
         <p:nvSpPr>
-          <p:cNvPr id="12" name="slide-title">
-            <a:extLst xmlns:a="http://schemas.openxmlformats.org/drawingml/2006/main">
-              <a:ext uri="{FF2B5EF4-FFF2-40B4-BE49-F238E27FC236}">
-                <a16:creationId xmlns:a16="http://schemas.microsoft.com/office/drawing/2014/main" id="{5E09DF22-E118-44AC-8581-1575758D2970}"/>
+          <p:cNvPr id="14" name="slide-title">
+            <a:extLst xmlns:a="http://schemas.openxmlformats.org/drawingml/2006/main">
+              <a:ext uri="{FF2B5EF4-FFF2-40B4-BE49-F238E27FC236}">
+                <a16:creationId xmlns:a16="http://schemas.microsoft.com/office/drawing/2014/main" id="{F775C226-B713-4C7B-9F70-7E7338E17C3B}"/>
               </a:ext>
             </a:extLst>
           </p:cNvPr>
@@ -7430,7 +7835,7 @@
           <p:cNvPr id="2" name="status-dot-1">
             <a:extLst xmlns:a="http://schemas.openxmlformats.org/drawingml/2006/main">
               <a:ext uri="{FF2B5EF4-FFF2-40B4-BE49-F238E27FC236}">
-                <a16:creationId xmlns:a16="http://schemas.microsoft.com/office/drawing/2014/main" id="{3C7EBD5C-E05A-49A3-AB93-D2DAD19FC200}"/>
+                <a16:creationId xmlns:a16="http://schemas.microsoft.com/office/drawing/2014/main" id="{64807E41-E0AB-4F1A-AD61-EC9694D3F892}"/>
               </a:ext>
             </a:extLst>
           </p:cNvPr>
@@ -7463,7 +7868,7 @@
           <p:cNvPr id="3" name="status-label-1">
             <a:extLst xmlns:a="http://schemas.openxmlformats.org/drawingml/2006/main">
               <a:ext uri="{FF2B5EF4-FFF2-40B4-BE49-F238E27FC236}">
-                <a16:creationId xmlns:a16="http://schemas.microsoft.com/office/drawing/2014/main" id="{C5E8AC33-EB19-4ABB-AEFE-470EB3B9EBCE}"/>
+                <a16:creationId xmlns:a16="http://schemas.microsoft.com/office/drawing/2014/main" id="{9C5055AE-A30C-455F-8F69-6172B414ACD9}"/>
               </a:ext>
             </a:extLst>
           </p:cNvPr>
@@ -7514,7 +7919,7 @@
           <p:cNvPr id="4" name="status-dot-2">
             <a:extLst xmlns:a="http://schemas.openxmlformats.org/drawingml/2006/main">
               <a:ext uri="{FF2B5EF4-FFF2-40B4-BE49-F238E27FC236}">
-                <a16:creationId xmlns:a16="http://schemas.microsoft.com/office/drawing/2014/main" id="{D1A21D9E-486B-4E81-B808-FC169F84DB4D}"/>
+                <a16:creationId xmlns:a16="http://schemas.microsoft.com/office/drawing/2014/main" id="{828F9C1F-3805-4BF7-958E-B60055E01E22}"/>
               </a:ext>
             </a:extLst>
           </p:cNvPr>
@@ -7547,7 +7952,7 @@
           <p:cNvPr id="5" name="status-label-2">
             <a:extLst xmlns:a="http://schemas.openxmlformats.org/drawingml/2006/main">
               <a:ext uri="{FF2B5EF4-FFF2-40B4-BE49-F238E27FC236}">
-                <a16:creationId xmlns:a16="http://schemas.microsoft.com/office/drawing/2014/main" id="{B9C51219-A685-470C-9CF8-0EA36031A7B2}"/>
+                <a16:creationId xmlns:a16="http://schemas.microsoft.com/office/drawing/2014/main" id="{959928D8-591D-49C5-9952-A85415C6C203}"/>
               </a:ext>
             </a:extLst>
           </p:cNvPr>
@@ -7598,7 +8003,7 @@
           <p:cNvPr id="6" name="status-dot-3">
             <a:extLst xmlns:a="http://schemas.openxmlformats.org/drawingml/2006/main">
               <a:ext uri="{FF2B5EF4-FFF2-40B4-BE49-F238E27FC236}">
-                <a16:creationId xmlns:a16="http://schemas.microsoft.com/office/drawing/2014/main" id="{41350C7B-9503-4AB7-B08D-8A74FA9E1CD1}"/>
+                <a16:creationId xmlns:a16="http://schemas.microsoft.com/office/drawing/2014/main" id="{FD66B997-D463-495B-81E7-3DA09220EBBF}"/>
               </a:ext>
             </a:extLst>
           </p:cNvPr>
@@ -7631,7 +8036,7 @@
           <p:cNvPr id="7" name="status-label-3">
             <a:extLst xmlns:a="http://schemas.openxmlformats.org/drawingml/2006/main">
               <a:ext uri="{FF2B5EF4-FFF2-40B4-BE49-F238E27FC236}">
-                <a16:creationId xmlns:a16="http://schemas.microsoft.com/office/drawing/2014/main" id="{D3E4EB94-7A4D-4A2A-8385-712E4719E014}"/>
+                <a16:creationId xmlns:a16="http://schemas.microsoft.com/office/drawing/2014/main" id="{20BBCEB9-28D8-4039-B566-2A4FA29E9908}"/>
               </a:ext>
             </a:extLst>
           </p:cNvPr>
@@ -7682,7 +8087,7 @@
           <p:cNvPr id="8" name="eyebrow">
             <a:extLst xmlns:a="http://schemas.openxmlformats.org/drawingml/2006/main">
               <a:ext uri="{FF2B5EF4-FFF2-40B4-BE49-F238E27FC236}">
-                <a16:creationId xmlns:a16="http://schemas.microsoft.com/office/drawing/2014/main" id="{7550AF76-E41A-4670-9874-7170FA6CE50A}"/>
+                <a16:creationId xmlns:a16="http://schemas.microsoft.com/office/drawing/2014/main" id="{2FE280EE-6772-4440-8D6C-C8A08E9669B2}"/>
               </a:ext>
             </a:extLst>
           </p:cNvPr>
@@ -7730,10 +8135,69 @@
       </p:sp>
       <p:sp>
         <p:nvSpPr>
-          <p:cNvPr id="9" name="footer-rule">
-            <a:extLst xmlns:a="http://schemas.openxmlformats.org/drawingml/2006/main">
-              <a:ext uri="{FF2B5EF4-FFF2-40B4-BE49-F238E27FC236}">
-                <a16:creationId xmlns:a16="http://schemas.microsoft.com/office/drawing/2014/main" id="{82EA7A0D-4E37-4195-A623-41CBD6634B9C}"/>
+          <p:cNvPr id="9" name="rescue-point-logo-background">
+            <a:extLst xmlns:a="http://schemas.openxmlformats.org/drawingml/2006/main">
+              <a:ext uri="{FF2B5EF4-FFF2-40B4-BE49-F238E27FC236}">
+                <a16:creationId xmlns:a16="http://schemas.microsoft.com/office/drawing/2014/main" id="{B37A5A38-A549-44B6-A0F0-F429901FA7F8}"/>
+              </a:ext>
+            </a:extLst>
+          </p:cNvPr>
+          <p:cNvSpPr>
+            <a:spLocks xmlns:a="http://schemas.openxmlformats.org/drawingml/2006/main" noGrp="1"/>
+          </p:cNvSpPr>
+          <p:nvPr/>
+        </p:nvSpPr>
+        <p:spPr>
+          <a:xfrm xmlns:a="http://schemas.openxmlformats.org/drawingml/2006/main">
+            <a:off x="9772650" y="133350"/>
+            <a:ext cx="1733550" cy="457200"/>
+          </a:xfrm>
+          <a:prstGeom xmlns:a="http://schemas.openxmlformats.org/drawingml/2006/main" prst="roundRect">
+            <a:avLst>
+              <a:gd name="adj" fmla="val 16667"/>
+            </a:avLst>
+          </a:prstGeom>
+          <a:solidFill xmlns:a="http://schemas.openxmlformats.org/drawingml/2006/main">
+            <a:srgbClr val="06142E"/>
+          </a:solidFill>
+          <a:ln xmlns:a="http://schemas.openxmlformats.org/drawingml/2006/main" w="9525">
+            <a:solidFill>
+              <a:srgbClr val="1EC5FF">
+                <a:alpha val="33333"/>
+              </a:srgbClr>
+            </a:solidFill>
+            <a:prstDash val="solid"/>
+          </a:ln>
+        </p:spPr>
+      </p:sp>
+      <p:pic>
+        <p:nvPicPr>
+          <p:cNvPr id="25" name="" descr="Figura oficial da documentação dbt usada para explicar: Benchmark precisa de correção funcional — Correção."/>
+          <p:cNvPicPr>
+            <a:picLocks xmlns:a="http://schemas.openxmlformats.org/drawingml/2006/main" noChangeAspect="1"/>
+          </p:cNvPicPr>
+          <p:nvPr/>
+        </p:nvPicPr>
+        <p:blipFill>
+          <a:blip xmlns:r="http://schemas.openxmlformats.org/officeDocument/2006/relationships" xmlns:a="http://schemas.openxmlformats.org/drawingml/2006/main" r:embed="R6306d09c013c447e"/>
+          <a:stretch xmlns:a="http://schemas.openxmlformats.org/drawingml/2006/main"/>
+        </p:blipFill>
+        <p:spPr>
+          <a:xfrm xmlns:a="http://schemas.openxmlformats.org/drawingml/2006/main">
+            <a:off x="9893718" y="209550"/>
+            <a:ext cx="1491414" cy="323850"/>
+          </a:xfrm>
+          <a:prstGeom xmlns:a="http://schemas.openxmlformats.org/drawingml/2006/main" prst="rect">
+            <a:avLst/>
+          </a:prstGeom>
+        </p:spPr>
+      </p:pic>
+      <p:sp>
+        <p:nvSpPr>
+          <p:cNvPr id="11" name="footer-rule">
+            <a:extLst xmlns:a="http://schemas.openxmlformats.org/drawingml/2006/main">
+              <a:ext uri="{FF2B5EF4-FFF2-40B4-BE49-F238E27FC236}">
+                <a16:creationId xmlns:a16="http://schemas.microsoft.com/office/drawing/2014/main" id="{04ED028A-CAB4-4D31-8935-EF699FC63592}"/>
               </a:ext>
             </a:extLst>
           </p:cNvPr>
@@ -7763,10 +8227,10 @@
       </p:sp>
       <p:sp>
         <p:nvSpPr>
-          <p:cNvPr id="10" name="footer">
-            <a:extLst xmlns:a="http://schemas.openxmlformats.org/drawingml/2006/main">
-              <a:ext uri="{FF2B5EF4-FFF2-40B4-BE49-F238E27FC236}">
-                <a16:creationId xmlns:a16="http://schemas.microsoft.com/office/drawing/2014/main" id="{CA0132AE-BAF1-4E37-8832-7C265DCC37A5}"/>
+          <p:cNvPr id="12" name="footer">
+            <a:extLst xmlns:a="http://schemas.openxmlformats.org/drawingml/2006/main">
+              <a:ext uri="{FF2B5EF4-FFF2-40B4-BE49-F238E27FC236}">
+                <a16:creationId xmlns:a16="http://schemas.microsoft.com/office/drawing/2014/main" id="{195E7E61-5AAA-42F0-91BD-69F435F0BC91}"/>
               </a:ext>
             </a:extLst>
           </p:cNvPr>
@@ -7818,10 +8282,10 @@
       </p:sp>
       <p:sp>
         <p:nvSpPr>
-          <p:cNvPr id="11" name="page-number">
-            <a:extLst xmlns:a="http://schemas.openxmlformats.org/drawingml/2006/main">
-              <a:ext uri="{FF2B5EF4-FFF2-40B4-BE49-F238E27FC236}">
-                <a16:creationId xmlns:a16="http://schemas.microsoft.com/office/drawing/2014/main" id="{F6EFDD7C-EF35-4BCE-B9E4-4486846F5FAD}"/>
+          <p:cNvPr id="13" name="page-number">
+            <a:extLst xmlns:a="http://schemas.openxmlformats.org/drawingml/2006/main">
+              <a:ext uri="{FF2B5EF4-FFF2-40B4-BE49-F238E27FC236}">
+                <a16:creationId xmlns:a16="http://schemas.microsoft.com/office/drawing/2014/main" id="{2D6D5E82-14EA-4AAA-900F-050FD0CDA5EB}"/>
               </a:ext>
             </a:extLst>
           </p:cNvPr>
@@ -7874,7 +8338,7 @@
     </p:spTree>
     <p:extLst>
       <p:ext uri="{BB962C8B-B14F-4D97-AF65-F5344CB8AC3E}">
-        <p14:creationId xmlns:p14="http://schemas.microsoft.com/office/powerpoint/2010/main" val="904542808"/>
+        <p14:creationId xmlns:p14="http://schemas.microsoft.com/office/powerpoint/2010/main" val="1669332043"/>
       </p:ext>
     </p:extLst>
   </p:cSld>
@@ -7910,10 +8374,10 @@
       </p:grpSpPr>
       <p:sp>
         <p:nvSpPr>
-          <p:cNvPr id="9" name="slide-title">
-            <a:extLst xmlns:a="http://schemas.openxmlformats.org/drawingml/2006/main">
-              <a:ext uri="{FF2B5EF4-FFF2-40B4-BE49-F238E27FC236}">
-                <a16:creationId xmlns:a16="http://schemas.microsoft.com/office/drawing/2014/main" id="{A1F166BF-84B8-44D1-B911-38FBCADC5359}"/>
+          <p:cNvPr id="11" name="slide-title">
+            <a:extLst xmlns:a="http://schemas.openxmlformats.org/drawingml/2006/main">
+              <a:ext uri="{FF2B5EF4-FFF2-40B4-BE49-F238E27FC236}">
+                <a16:creationId xmlns:a16="http://schemas.microsoft.com/office/drawing/2014/main" id="{2EE8C4A0-FD21-4AA8-932B-F25BD66D4C87}"/>
               </a:ext>
             </a:extLst>
           </p:cNvPr>
@@ -7964,7 +8428,7 @@
           <p:cNvPr id="2" name="code-surface">
             <a:extLst xmlns:a="http://schemas.openxmlformats.org/drawingml/2006/main">
               <a:ext uri="{FF2B5EF4-FFF2-40B4-BE49-F238E27FC236}">
-                <a16:creationId xmlns:a16="http://schemas.microsoft.com/office/drawing/2014/main" id="{69DB6B6A-7478-4157-B068-2DE562DAAA4D}"/>
+                <a16:creationId xmlns:a16="http://schemas.microsoft.com/office/drawing/2014/main" id="{ACA4A9B8-CD48-438C-BC4E-F209203DE806}"/>
               </a:ext>
             </a:extLst>
           </p:cNvPr>
@@ -7999,7 +8463,7 @@
           <p:cNvPr id="3" name="command">
             <a:extLst xmlns:a="http://schemas.openxmlformats.org/drawingml/2006/main">
               <a:ext uri="{FF2B5EF4-FFF2-40B4-BE49-F238E27FC236}">
-                <a16:creationId xmlns:a16="http://schemas.microsoft.com/office/drawing/2014/main" id="{A6C100D9-0F08-4CE1-A60C-86AE7D50FDD4}"/>
+                <a16:creationId xmlns:a16="http://schemas.microsoft.com/office/drawing/2014/main" id="{52703AA5-521B-4062-8BBB-0C0EC16C83CC}"/>
               </a:ext>
             </a:extLst>
           </p:cNvPr>
@@ -8050,7 +8514,7 @@
           <p:cNvPr id="4" name="command-help">
             <a:extLst xmlns:a="http://schemas.openxmlformats.org/drawingml/2006/main">
               <a:ext uri="{FF2B5EF4-FFF2-40B4-BE49-F238E27FC236}">
-                <a16:creationId xmlns:a16="http://schemas.microsoft.com/office/drawing/2014/main" id="{36E8C122-87CC-43D3-9FF5-A6D797A0D2A8}"/>
+                <a16:creationId xmlns:a16="http://schemas.microsoft.com/office/drawing/2014/main" id="{1568DEAC-6EFA-4A05-8901-6E4845C0A2CC}"/>
               </a:ext>
             </a:extLst>
           </p:cNvPr>
@@ -8101,7 +8565,7 @@
           <p:cNvPr id="5" name="eyebrow">
             <a:extLst xmlns:a="http://schemas.openxmlformats.org/drawingml/2006/main">
               <a:ext uri="{FF2B5EF4-FFF2-40B4-BE49-F238E27FC236}">
-                <a16:creationId xmlns:a16="http://schemas.microsoft.com/office/drawing/2014/main" id="{8FADCF13-D020-445B-BCB7-F069B7DAA7C9}"/>
+                <a16:creationId xmlns:a16="http://schemas.microsoft.com/office/drawing/2014/main" id="{56A3791C-744B-4CFA-9DC3-5E664594EDA2}"/>
               </a:ext>
             </a:extLst>
           </p:cNvPr>
@@ -8149,10 +8613,69 @@
       </p:sp>
       <p:sp>
         <p:nvSpPr>
-          <p:cNvPr id="6" name="footer-rule">
-            <a:extLst xmlns:a="http://schemas.openxmlformats.org/drawingml/2006/main">
-              <a:ext uri="{FF2B5EF4-FFF2-40B4-BE49-F238E27FC236}">
-                <a16:creationId xmlns:a16="http://schemas.microsoft.com/office/drawing/2014/main" id="{B7D2DA61-8B29-49DF-90E4-AD7AB26D235B}"/>
+          <p:cNvPr id="6" name="rescue-point-logo-background">
+            <a:extLst xmlns:a="http://schemas.openxmlformats.org/drawingml/2006/main">
+              <a:ext uri="{FF2B5EF4-FFF2-40B4-BE49-F238E27FC236}">
+                <a16:creationId xmlns:a16="http://schemas.microsoft.com/office/drawing/2014/main" id="{25373254-080F-442A-A4B6-C0634EE9AD44}"/>
+              </a:ext>
+            </a:extLst>
+          </p:cNvPr>
+          <p:cNvSpPr>
+            <a:spLocks xmlns:a="http://schemas.openxmlformats.org/drawingml/2006/main" noGrp="1"/>
+          </p:cNvSpPr>
+          <p:nvPr/>
+        </p:nvSpPr>
+        <p:spPr>
+          <a:xfrm xmlns:a="http://schemas.openxmlformats.org/drawingml/2006/main">
+            <a:off x="9772650" y="133350"/>
+            <a:ext cx="1733550" cy="457200"/>
+          </a:xfrm>
+          <a:prstGeom xmlns:a="http://schemas.openxmlformats.org/drawingml/2006/main" prst="roundRect">
+            <a:avLst>
+              <a:gd name="adj" fmla="val 16667"/>
+            </a:avLst>
+          </a:prstGeom>
+          <a:solidFill xmlns:a="http://schemas.openxmlformats.org/drawingml/2006/main">
+            <a:srgbClr val="06142E"/>
+          </a:solidFill>
+          <a:ln xmlns:a="http://schemas.openxmlformats.org/drawingml/2006/main" w="9525">
+            <a:solidFill>
+              <a:srgbClr val="1EC5FF">
+                <a:alpha val="33333"/>
+              </a:srgbClr>
+            </a:solidFill>
+            <a:prstDash val="solid"/>
+          </a:ln>
+        </p:spPr>
+      </p:sp>
+      <p:pic>
+        <p:nvPicPr>
+          <p:cNvPr id="19" name="" descr="Figura oficial da documentação dbt usada para explicar: Demonstração — execute — python course.py checkpoint 10."/>
+          <p:cNvPicPr>
+            <a:picLocks xmlns:a="http://schemas.openxmlformats.org/drawingml/2006/main" noChangeAspect="1"/>
+          </p:cNvPicPr>
+          <p:nvPr/>
+        </p:nvPicPr>
+        <p:blipFill>
+          <a:blip xmlns:r="http://schemas.openxmlformats.org/officeDocument/2006/relationships" xmlns:a="http://schemas.openxmlformats.org/drawingml/2006/main" r:embed="R039b58d1bc894554"/>
+          <a:stretch xmlns:a="http://schemas.openxmlformats.org/drawingml/2006/main"/>
+        </p:blipFill>
+        <p:spPr>
+          <a:xfrm xmlns:a="http://schemas.openxmlformats.org/drawingml/2006/main">
+            <a:off x="9893718" y="209550"/>
+            <a:ext cx="1491414" cy="323850"/>
+          </a:xfrm>
+          <a:prstGeom xmlns:a="http://schemas.openxmlformats.org/drawingml/2006/main" prst="rect">
+            <a:avLst/>
+          </a:prstGeom>
+        </p:spPr>
+      </p:pic>
+      <p:sp>
+        <p:nvSpPr>
+          <p:cNvPr id="8" name="footer-rule">
+            <a:extLst xmlns:a="http://schemas.openxmlformats.org/drawingml/2006/main">
+              <a:ext uri="{FF2B5EF4-FFF2-40B4-BE49-F238E27FC236}">
+                <a16:creationId xmlns:a16="http://schemas.microsoft.com/office/drawing/2014/main" id="{147D7B19-1281-437F-9291-370985CECF3C}"/>
               </a:ext>
             </a:extLst>
           </p:cNvPr>
@@ -8182,10 +8705,10 @@
       </p:sp>
       <p:sp>
         <p:nvSpPr>
-          <p:cNvPr id="7" name="footer">
-            <a:extLst xmlns:a="http://schemas.openxmlformats.org/drawingml/2006/main">
-              <a:ext uri="{FF2B5EF4-FFF2-40B4-BE49-F238E27FC236}">
-                <a16:creationId xmlns:a16="http://schemas.microsoft.com/office/drawing/2014/main" id="{CD61B986-ECAA-4472-9341-1C81DD4E387B}"/>
+          <p:cNvPr id="9" name="footer">
+            <a:extLst xmlns:a="http://schemas.openxmlformats.org/drawingml/2006/main">
+              <a:ext uri="{FF2B5EF4-FFF2-40B4-BE49-F238E27FC236}">
+                <a16:creationId xmlns:a16="http://schemas.microsoft.com/office/drawing/2014/main" id="{45B8F670-20B9-4BAB-A77C-7171F98A9E6F}"/>
               </a:ext>
             </a:extLst>
           </p:cNvPr>
@@ -8237,10 +8760,10 @@
       </p:sp>
       <p:sp>
         <p:nvSpPr>
-          <p:cNvPr id="8" name="page-number">
-            <a:extLst xmlns:a="http://schemas.openxmlformats.org/drawingml/2006/main">
-              <a:ext uri="{FF2B5EF4-FFF2-40B4-BE49-F238E27FC236}">
-                <a16:creationId xmlns:a16="http://schemas.microsoft.com/office/drawing/2014/main" id="{9D6C522F-248B-4A48-BFC9-1C7F56645DEE}"/>
+          <p:cNvPr id="10" name="page-number">
+            <a:extLst xmlns:a="http://schemas.openxmlformats.org/drawingml/2006/main">
+              <a:ext uri="{FF2B5EF4-FFF2-40B4-BE49-F238E27FC236}">
+                <a16:creationId xmlns:a16="http://schemas.microsoft.com/office/drawing/2014/main" id="{2DF6B953-8A35-43E6-B286-3D4EC2EA1C80}"/>
               </a:ext>
             </a:extLst>
           </p:cNvPr>
@@ -8293,7 +8816,7 @@
     </p:spTree>
     <p:extLst>
       <p:ext uri="{BB962C8B-B14F-4D97-AF65-F5344CB8AC3E}">
-        <p14:creationId xmlns:p14="http://schemas.microsoft.com/office/powerpoint/2010/main" val="285151087"/>
+        <p14:creationId xmlns:p14="http://schemas.microsoft.com/office/powerpoint/2010/main" val="265766336"/>
       </p:ext>
     </p:extLst>
   </p:cSld>
@@ -8321,10 +8844,10 @@
       </p:grpSpPr>
       <p:sp>
         <p:nvSpPr>
-          <p:cNvPr id="14" name="slide-title">
-            <a:extLst xmlns:a="http://schemas.openxmlformats.org/drawingml/2006/main">
-              <a:ext uri="{FF2B5EF4-FFF2-40B4-BE49-F238E27FC236}">
-                <a16:creationId xmlns:a16="http://schemas.microsoft.com/office/drawing/2014/main" id="{7F0E7993-6BD0-428F-BAB3-1D74C15622A9}"/>
+          <p:cNvPr id="16" name="slide-title">
+            <a:extLst xmlns:a="http://schemas.openxmlformats.org/drawingml/2006/main">
+              <a:ext uri="{FF2B5EF4-FFF2-40B4-BE49-F238E27FC236}">
+                <a16:creationId xmlns:a16="http://schemas.microsoft.com/office/drawing/2014/main" id="{143555AB-C37E-401A-AA8A-5B6CDAB606A8}"/>
               </a:ext>
             </a:extLst>
           </p:cNvPr>
@@ -8375,7 +8898,7 @@
           <p:cNvPr id="2" name="step-num-1">
             <a:extLst xmlns:a="http://schemas.openxmlformats.org/drawingml/2006/main">
               <a:ext uri="{FF2B5EF4-FFF2-40B4-BE49-F238E27FC236}">
-                <a16:creationId xmlns:a16="http://schemas.microsoft.com/office/drawing/2014/main" id="{3A97AEF0-474D-44C6-82EA-A0CDBBCC6419}"/>
+                <a16:creationId xmlns:a16="http://schemas.microsoft.com/office/drawing/2014/main" id="{B44810FD-A503-4C4F-BF34-769B2A85C21B}"/>
               </a:ext>
             </a:extLst>
           </p:cNvPr>
@@ -8426,7 +8949,7 @@
           <p:cNvPr id="3" name="step-label-1">
             <a:extLst xmlns:a="http://schemas.openxmlformats.org/drawingml/2006/main">
               <a:ext uri="{FF2B5EF4-FFF2-40B4-BE49-F238E27FC236}">
-                <a16:creationId xmlns:a16="http://schemas.microsoft.com/office/drawing/2014/main" id="{7F6AD425-2984-4E91-8C1C-122E752A4682}"/>
+                <a16:creationId xmlns:a16="http://schemas.microsoft.com/office/drawing/2014/main" id="{564D13F7-3CEB-4DB7-BC2A-1BC1740042DD}"/>
               </a:ext>
             </a:extLst>
           </p:cNvPr>
@@ -8477,7 +9000,7 @@
           <p:cNvPr id="4" name="step-line-1">
             <a:extLst xmlns:a="http://schemas.openxmlformats.org/drawingml/2006/main">
               <a:ext uri="{FF2B5EF4-FFF2-40B4-BE49-F238E27FC236}">
-                <a16:creationId xmlns:a16="http://schemas.microsoft.com/office/drawing/2014/main" id="{D03A9CE1-1B7B-4D3E-A872-F4173F4B1DED}"/>
+                <a16:creationId xmlns:a16="http://schemas.microsoft.com/office/drawing/2014/main" id="{162E2153-113A-4B68-8E62-5B90FA2C12F3}"/>
               </a:ext>
             </a:extLst>
           </p:cNvPr>
@@ -8508,7 +9031,7 @@
           <p:cNvPr id="5" name="step-num-2">
             <a:extLst xmlns:a="http://schemas.openxmlformats.org/drawingml/2006/main">
               <a:ext uri="{FF2B5EF4-FFF2-40B4-BE49-F238E27FC236}">
-                <a16:creationId xmlns:a16="http://schemas.microsoft.com/office/drawing/2014/main" id="{8EF53E6F-7C07-47A5-BD44-6D27504A1DB7}"/>
+                <a16:creationId xmlns:a16="http://schemas.microsoft.com/office/drawing/2014/main" id="{62030101-07F5-490D-9B8F-148444A7C562}"/>
               </a:ext>
             </a:extLst>
           </p:cNvPr>
@@ -8559,7 +9082,7 @@
           <p:cNvPr id="6" name="step-label-2">
             <a:extLst xmlns:a="http://schemas.openxmlformats.org/drawingml/2006/main">
               <a:ext uri="{FF2B5EF4-FFF2-40B4-BE49-F238E27FC236}">
-                <a16:creationId xmlns:a16="http://schemas.microsoft.com/office/drawing/2014/main" id="{264C93B9-6E56-420F-9A50-6625E083EA87}"/>
+                <a16:creationId xmlns:a16="http://schemas.microsoft.com/office/drawing/2014/main" id="{00A2037F-A6D4-46C0-A794-06FB7D180492}"/>
               </a:ext>
             </a:extLst>
           </p:cNvPr>
@@ -8610,7 +9133,7 @@
           <p:cNvPr id="7" name="step-line-2">
             <a:extLst xmlns:a="http://schemas.openxmlformats.org/drawingml/2006/main">
               <a:ext uri="{FF2B5EF4-FFF2-40B4-BE49-F238E27FC236}">
-                <a16:creationId xmlns:a16="http://schemas.microsoft.com/office/drawing/2014/main" id="{DD3B8267-54C6-4089-A01C-FB5EF17B9C34}"/>
+                <a16:creationId xmlns:a16="http://schemas.microsoft.com/office/drawing/2014/main" id="{B3812073-4DB4-44C8-9397-428C1458AEB6}"/>
               </a:ext>
             </a:extLst>
           </p:cNvPr>
@@ -8641,7 +9164,7 @@
           <p:cNvPr id="8" name="step-num-3">
             <a:extLst xmlns:a="http://schemas.openxmlformats.org/drawingml/2006/main">
               <a:ext uri="{FF2B5EF4-FFF2-40B4-BE49-F238E27FC236}">
-                <a16:creationId xmlns:a16="http://schemas.microsoft.com/office/drawing/2014/main" id="{C3780800-29B8-4920-AFDD-A8C66A06B7C3}"/>
+                <a16:creationId xmlns:a16="http://schemas.microsoft.com/office/drawing/2014/main" id="{B181DE7C-E84E-4F4C-A919-45CFE1B49899}"/>
               </a:ext>
             </a:extLst>
           </p:cNvPr>
@@ -8692,7 +9215,7 @@
           <p:cNvPr id="9" name="step-label-3">
             <a:extLst xmlns:a="http://schemas.openxmlformats.org/drawingml/2006/main">
               <a:ext uri="{FF2B5EF4-FFF2-40B4-BE49-F238E27FC236}">
-                <a16:creationId xmlns:a16="http://schemas.microsoft.com/office/drawing/2014/main" id="{625643D9-E957-4746-8DD1-B56E975EBD7C}"/>
+                <a16:creationId xmlns:a16="http://schemas.microsoft.com/office/drawing/2014/main" id="{A06FE43C-3065-4FDF-88D7-8EC83CCA9DD7}"/>
               </a:ext>
             </a:extLst>
           </p:cNvPr>
@@ -8743,7 +9266,7 @@
           <p:cNvPr id="10" name="eyebrow">
             <a:extLst xmlns:a="http://schemas.openxmlformats.org/drawingml/2006/main">
               <a:ext uri="{FF2B5EF4-FFF2-40B4-BE49-F238E27FC236}">
-                <a16:creationId xmlns:a16="http://schemas.microsoft.com/office/drawing/2014/main" id="{15562275-650A-47BA-87F0-13EBC4E96156}"/>
+                <a16:creationId xmlns:a16="http://schemas.microsoft.com/office/drawing/2014/main" id="{EE275B14-6231-47F8-9A38-B057327748CD}"/>
               </a:ext>
             </a:extLst>
           </p:cNvPr>
@@ -8791,10 +9314,69 @@
       </p:sp>
       <p:sp>
         <p:nvSpPr>
-          <p:cNvPr id="11" name="footer-rule">
-            <a:extLst xmlns:a="http://schemas.openxmlformats.org/drawingml/2006/main">
-              <a:ext uri="{FF2B5EF4-FFF2-40B4-BE49-F238E27FC236}">
-                <a16:creationId xmlns:a16="http://schemas.microsoft.com/office/drawing/2014/main" id="{612F756B-15BB-46D6-B20B-035A04B07E52}"/>
+          <p:cNvPr id="11" name="rescue-point-logo-background">
+            <a:extLst xmlns:a="http://schemas.openxmlformats.org/drawingml/2006/main">
+              <a:ext uri="{FF2B5EF4-FFF2-40B4-BE49-F238E27FC236}">
+                <a16:creationId xmlns:a16="http://schemas.microsoft.com/office/drawing/2014/main" id="{C002D08D-B952-4D19-AB11-693AE58C560A}"/>
+              </a:ext>
+            </a:extLst>
+          </p:cNvPr>
+          <p:cNvSpPr>
+            <a:spLocks xmlns:a="http://schemas.openxmlformats.org/drawingml/2006/main" noGrp="1"/>
+          </p:cNvSpPr>
+          <p:nvPr/>
+        </p:nvSpPr>
+        <p:spPr>
+          <a:xfrm xmlns:a="http://schemas.openxmlformats.org/drawingml/2006/main">
+            <a:off x="9772650" y="133350"/>
+            <a:ext cx="1733550" cy="457200"/>
+          </a:xfrm>
+          <a:prstGeom xmlns:a="http://schemas.openxmlformats.org/drawingml/2006/main" prst="roundRect">
+            <a:avLst>
+              <a:gd name="adj" fmla="val 16667"/>
+            </a:avLst>
+          </a:prstGeom>
+          <a:solidFill xmlns:a="http://schemas.openxmlformats.org/drawingml/2006/main">
+            <a:srgbClr val="06142E"/>
+          </a:solidFill>
+          <a:ln xmlns:a="http://schemas.openxmlformats.org/drawingml/2006/main" w="9525">
+            <a:solidFill>
+              <a:srgbClr val="1EC5FF">
+                <a:alpha val="33333"/>
+              </a:srgbClr>
+            </a:solidFill>
+            <a:prstDash val="solid"/>
+          </a:ln>
+        </p:spPr>
+      </p:sp>
+      <p:pic>
+        <p:nvPicPr>
+          <p:cNvPr id="29" name="" descr="Figura oficial da documentação dbt usada para explicar: Demonstração — observe — 01."/>
+          <p:cNvPicPr>
+            <a:picLocks xmlns:a="http://schemas.openxmlformats.org/drawingml/2006/main" noChangeAspect="1"/>
+          </p:cNvPicPr>
+          <p:nvPr/>
+        </p:nvPicPr>
+        <p:blipFill>
+          <a:blip xmlns:r="http://schemas.openxmlformats.org/officeDocument/2006/relationships" xmlns:a="http://schemas.openxmlformats.org/drawingml/2006/main" r:embed="R0719cb0aa258429e"/>
+          <a:stretch xmlns:a="http://schemas.openxmlformats.org/drawingml/2006/main"/>
+        </p:blipFill>
+        <p:spPr>
+          <a:xfrm xmlns:a="http://schemas.openxmlformats.org/drawingml/2006/main">
+            <a:off x="9893718" y="209550"/>
+            <a:ext cx="1491414" cy="323850"/>
+          </a:xfrm>
+          <a:prstGeom xmlns:a="http://schemas.openxmlformats.org/drawingml/2006/main" prst="rect">
+            <a:avLst/>
+          </a:prstGeom>
+        </p:spPr>
+      </p:pic>
+      <p:sp>
+        <p:nvSpPr>
+          <p:cNvPr id="13" name="footer-rule">
+            <a:extLst xmlns:a="http://schemas.openxmlformats.org/drawingml/2006/main">
+              <a:ext uri="{FF2B5EF4-FFF2-40B4-BE49-F238E27FC236}">
+                <a16:creationId xmlns:a16="http://schemas.microsoft.com/office/drawing/2014/main" id="{9E2245C6-26B1-429A-9513-CE03BA11B03C}"/>
               </a:ext>
             </a:extLst>
           </p:cNvPr>
@@ -8824,10 +9406,10 @@
       </p:sp>
       <p:sp>
         <p:nvSpPr>
-          <p:cNvPr id="12" name="footer">
-            <a:extLst xmlns:a="http://schemas.openxmlformats.org/drawingml/2006/main">
-              <a:ext uri="{FF2B5EF4-FFF2-40B4-BE49-F238E27FC236}">
-                <a16:creationId xmlns:a16="http://schemas.microsoft.com/office/drawing/2014/main" id="{62682A48-19C8-4E36-8BB4-67BA5ACB5A37}"/>
+          <p:cNvPr id="14" name="footer">
+            <a:extLst xmlns:a="http://schemas.openxmlformats.org/drawingml/2006/main">
+              <a:ext uri="{FF2B5EF4-FFF2-40B4-BE49-F238E27FC236}">
+                <a16:creationId xmlns:a16="http://schemas.microsoft.com/office/drawing/2014/main" id="{0F1274FD-AB56-4549-AFBB-DC8A3A48BDE3}"/>
               </a:ext>
             </a:extLst>
           </p:cNvPr>
@@ -8879,10 +9461,10 @@
       </p:sp>
       <p:sp>
         <p:nvSpPr>
-          <p:cNvPr id="13" name="page-number">
-            <a:extLst xmlns:a="http://schemas.openxmlformats.org/drawingml/2006/main">
-              <a:ext uri="{FF2B5EF4-FFF2-40B4-BE49-F238E27FC236}">
-                <a16:creationId xmlns:a16="http://schemas.microsoft.com/office/drawing/2014/main" id="{727E1367-58F1-4971-B414-DF078AD6634D}"/>
+          <p:cNvPr id="15" name="page-number">
+            <a:extLst xmlns:a="http://schemas.openxmlformats.org/drawingml/2006/main">
+              <a:ext uri="{FF2B5EF4-FFF2-40B4-BE49-F238E27FC236}">
+                <a16:creationId xmlns:a16="http://schemas.microsoft.com/office/drawing/2014/main" id="{435A2F6A-A473-4D2D-ACEE-1F6BC2D4B9D7}"/>
               </a:ext>
             </a:extLst>
           </p:cNvPr>
@@ -8935,7 +9517,7 @@
     </p:spTree>
     <p:extLst>
       <p:ext uri="{BB962C8B-B14F-4D97-AF65-F5344CB8AC3E}">
-        <p14:creationId xmlns:p14="http://schemas.microsoft.com/office/powerpoint/2010/main" val="502931057"/>
+        <p14:creationId xmlns:p14="http://schemas.microsoft.com/office/powerpoint/2010/main" val="304561916"/>
       </p:ext>
     </p:extLst>
   </p:cSld>
@@ -8971,10 +9553,10 @@
       </p:grpSpPr>
       <p:sp>
         <p:nvSpPr>
-          <p:cNvPr id="10" name="result-label">
-            <a:extLst xmlns:a="http://schemas.openxmlformats.org/drawingml/2006/main">
-              <a:ext uri="{FF2B5EF4-FFF2-40B4-BE49-F238E27FC236}">
-                <a16:creationId xmlns:a16="http://schemas.microsoft.com/office/drawing/2014/main" id="{63AC5CC9-6B54-4596-B087-1B403BE4163E}"/>
+          <p:cNvPr id="12" name="result-label">
+            <a:extLst xmlns:a="http://schemas.openxmlformats.org/drawingml/2006/main">
+              <a:ext uri="{FF2B5EF4-FFF2-40B4-BE49-F238E27FC236}">
+                <a16:creationId xmlns:a16="http://schemas.microsoft.com/office/drawing/2014/main" id="{AAF3C16F-650A-4D9E-BB1F-138BB34C8DBE}"/>
               </a:ext>
             </a:extLst>
           </p:cNvPr>
@@ -9025,7 +9607,7 @@
           <p:cNvPr id="2" name="result">
             <a:extLst xmlns:a="http://schemas.openxmlformats.org/drawingml/2006/main">
               <a:ext uri="{FF2B5EF4-FFF2-40B4-BE49-F238E27FC236}">
-                <a16:creationId xmlns:a16="http://schemas.microsoft.com/office/drawing/2014/main" id="{0D6CA88A-B3A0-46F5-8E94-991A4289DB8C}"/>
+                <a16:creationId xmlns:a16="http://schemas.microsoft.com/office/drawing/2014/main" id="{E3703C86-40EC-419C-A494-F19658EF54AA}"/>
               </a:ext>
             </a:extLst>
           </p:cNvPr>
@@ -9076,7 +9658,7 @@
           <p:cNvPr id="3" name="result-meta">
             <a:extLst xmlns:a="http://schemas.openxmlformats.org/drawingml/2006/main">
               <a:ext uri="{FF2B5EF4-FFF2-40B4-BE49-F238E27FC236}">
-                <a16:creationId xmlns:a16="http://schemas.microsoft.com/office/drawing/2014/main" id="{7281ED2C-D13F-4BC9-8053-643DFA638D37}"/>
+                <a16:creationId xmlns:a16="http://schemas.microsoft.com/office/drawing/2014/main" id="{97BBFD34-8A90-44CC-906C-5A3298742D90}"/>
               </a:ext>
             </a:extLst>
           </p:cNvPr>
@@ -9127,7 +9709,7 @@
           <p:cNvPr id="4" name="ambient-glow">
             <a:extLst xmlns:a="http://schemas.openxmlformats.org/drawingml/2006/main">
               <a:ext uri="{FF2B5EF4-FFF2-40B4-BE49-F238E27FC236}">
-                <a16:creationId xmlns:a16="http://schemas.microsoft.com/office/drawing/2014/main" id="{590A31A6-B2C2-43D4-9774-B7AB7FB157EA}"/>
+                <a16:creationId xmlns:a16="http://schemas.microsoft.com/office/drawing/2014/main" id="{315BDC88-A36D-410F-9B72-796A47BB5347}"/>
               </a:ext>
             </a:extLst>
           </p:cNvPr>
@@ -9164,7 +9746,7 @@
           <p:cNvPr id="5" name="ambient-core">
             <a:extLst xmlns:a="http://schemas.openxmlformats.org/drawingml/2006/main">
               <a:ext uri="{FF2B5EF4-FFF2-40B4-BE49-F238E27FC236}">
-                <a16:creationId xmlns:a16="http://schemas.microsoft.com/office/drawing/2014/main" id="{10F7CABA-A43C-4ABE-B244-469D1C3B87FD}"/>
+                <a16:creationId xmlns:a16="http://schemas.microsoft.com/office/drawing/2014/main" id="{65878062-B1FA-4A38-87A1-915BCE1DE703}"/>
               </a:ext>
             </a:extLst>
           </p:cNvPr>
@@ -9201,7 +9783,7 @@
           <p:cNvPr id="6" name="eyebrow">
             <a:extLst xmlns:a="http://schemas.openxmlformats.org/drawingml/2006/main">
               <a:ext uri="{FF2B5EF4-FFF2-40B4-BE49-F238E27FC236}">
-                <a16:creationId xmlns:a16="http://schemas.microsoft.com/office/drawing/2014/main" id="{AE8C6591-373E-4F26-9292-0367E3AA6725}"/>
+                <a16:creationId xmlns:a16="http://schemas.microsoft.com/office/drawing/2014/main" id="{5B2B87BF-53FE-4D8E-9192-7DFE10B171EF}"/>
               </a:ext>
             </a:extLst>
           </p:cNvPr>
@@ -9249,10 +9831,69 @@
       </p:sp>
       <p:sp>
         <p:nvSpPr>
-          <p:cNvPr id="7" name="footer-rule">
-            <a:extLst xmlns:a="http://schemas.openxmlformats.org/drawingml/2006/main">
-              <a:ext uri="{FF2B5EF4-FFF2-40B4-BE49-F238E27FC236}">
-                <a16:creationId xmlns:a16="http://schemas.microsoft.com/office/drawing/2014/main" id="{4B9A3134-8AC4-4986-9196-E21111300FB3}"/>
+          <p:cNvPr id="7" name="rescue-point-logo-background">
+            <a:extLst xmlns:a="http://schemas.openxmlformats.org/drawingml/2006/main">
+              <a:ext uri="{FF2B5EF4-FFF2-40B4-BE49-F238E27FC236}">
+                <a16:creationId xmlns:a16="http://schemas.microsoft.com/office/drawing/2014/main" id="{818E29F0-7CDF-4779-B0A5-2441C885B839}"/>
+              </a:ext>
+            </a:extLst>
+          </p:cNvPr>
+          <p:cNvSpPr>
+            <a:spLocks xmlns:a="http://schemas.openxmlformats.org/drawingml/2006/main" noGrp="1"/>
+          </p:cNvSpPr>
+          <p:nvPr/>
+        </p:nvSpPr>
+        <p:spPr>
+          <a:xfrm xmlns:a="http://schemas.openxmlformats.org/drawingml/2006/main">
+            <a:off x="9772650" y="133350"/>
+            <a:ext cx="1733550" cy="457200"/>
+          </a:xfrm>
+          <a:prstGeom xmlns:a="http://schemas.openxmlformats.org/drawingml/2006/main" prst="roundRect">
+            <a:avLst>
+              <a:gd name="adj" fmla="val 16667"/>
+            </a:avLst>
+          </a:prstGeom>
+          <a:solidFill xmlns:a="http://schemas.openxmlformats.org/drawingml/2006/main">
+            <a:srgbClr val="06142E"/>
+          </a:solidFill>
+          <a:ln xmlns:a="http://schemas.openxmlformats.org/drawingml/2006/main" w="9525">
+            <a:solidFill>
+              <a:srgbClr val="1EC5FF">
+                <a:alpha val="33333"/>
+              </a:srgbClr>
+            </a:solidFill>
+            <a:prstDash val="solid"/>
+          </a:ln>
+        </p:spPr>
+      </p:sp>
+      <p:pic>
+        <p:nvPicPr>
+          <p:cNvPr id="21" name="" descr="Figura oficial da documentação dbt usada para explicar: RESULTADO ESPERADO — Equivalência funcional + redução mensurável."/>
+          <p:cNvPicPr>
+            <a:picLocks xmlns:a="http://schemas.openxmlformats.org/drawingml/2006/main" noChangeAspect="1"/>
+          </p:cNvPicPr>
+          <p:nvPr/>
+        </p:nvPicPr>
+        <p:blipFill>
+          <a:blip xmlns:r="http://schemas.openxmlformats.org/officeDocument/2006/relationships" xmlns:a="http://schemas.openxmlformats.org/drawingml/2006/main" r:embed="R2dd9129137db4aa8"/>
+          <a:stretch xmlns:a="http://schemas.openxmlformats.org/drawingml/2006/main"/>
+        </p:blipFill>
+        <p:spPr>
+          <a:xfrm xmlns:a="http://schemas.openxmlformats.org/drawingml/2006/main">
+            <a:off x="9893718" y="209550"/>
+            <a:ext cx="1491414" cy="323850"/>
+          </a:xfrm>
+          <a:prstGeom xmlns:a="http://schemas.openxmlformats.org/drawingml/2006/main" prst="rect">
+            <a:avLst/>
+          </a:prstGeom>
+        </p:spPr>
+      </p:pic>
+      <p:sp>
+        <p:nvSpPr>
+          <p:cNvPr id="9" name="footer-rule">
+            <a:extLst xmlns:a="http://schemas.openxmlformats.org/drawingml/2006/main">
+              <a:ext uri="{FF2B5EF4-FFF2-40B4-BE49-F238E27FC236}">
+                <a16:creationId xmlns:a16="http://schemas.microsoft.com/office/drawing/2014/main" id="{E02DD8C5-9227-45B8-B068-DCF16154AEB7}"/>
               </a:ext>
             </a:extLst>
           </p:cNvPr>
@@ -9282,10 +9923,10 @@
       </p:sp>
       <p:sp>
         <p:nvSpPr>
-          <p:cNvPr id="8" name="footer">
-            <a:extLst xmlns:a="http://schemas.openxmlformats.org/drawingml/2006/main">
-              <a:ext uri="{FF2B5EF4-FFF2-40B4-BE49-F238E27FC236}">
-                <a16:creationId xmlns:a16="http://schemas.microsoft.com/office/drawing/2014/main" id="{8905631E-4985-4BC3-AC86-C151512D172D}"/>
+          <p:cNvPr id="10" name="footer">
+            <a:extLst xmlns:a="http://schemas.openxmlformats.org/drawingml/2006/main">
+              <a:ext uri="{FF2B5EF4-FFF2-40B4-BE49-F238E27FC236}">
+                <a16:creationId xmlns:a16="http://schemas.microsoft.com/office/drawing/2014/main" id="{54D01FCF-2D9E-4454-9B7A-085714FEB1AF}"/>
               </a:ext>
             </a:extLst>
           </p:cNvPr>
@@ -9337,10 +9978,10 @@
       </p:sp>
       <p:sp>
         <p:nvSpPr>
-          <p:cNvPr id="9" name="page-number">
-            <a:extLst xmlns:a="http://schemas.openxmlformats.org/drawingml/2006/main">
-              <a:ext uri="{FF2B5EF4-FFF2-40B4-BE49-F238E27FC236}">
-                <a16:creationId xmlns:a16="http://schemas.microsoft.com/office/drawing/2014/main" id="{1BAE5C96-413E-45AD-A292-C05BE8239BBC}"/>
+          <p:cNvPr id="11" name="page-number">
+            <a:extLst xmlns:a="http://schemas.openxmlformats.org/drawingml/2006/main">
+              <a:ext uri="{FF2B5EF4-FFF2-40B4-BE49-F238E27FC236}">
+                <a16:creationId xmlns:a16="http://schemas.microsoft.com/office/drawing/2014/main" id="{64F990DB-FBFE-4CE3-BE0D-F25DA629B7EA}"/>
               </a:ext>
             </a:extLst>
           </p:cNvPr>
@@ -9393,7 +10034,7 @@
     </p:spTree>
     <p:extLst>
       <p:ext uri="{BB962C8B-B14F-4D97-AF65-F5344CB8AC3E}">
-        <p14:creationId xmlns:p14="http://schemas.microsoft.com/office/powerpoint/2010/main" val="162951689"/>
+        <p14:creationId xmlns:p14="http://schemas.microsoft.com/office/powerpoint/2010/main" val="1086568889"/>
       </p:ext>
     </p:extLst>
   </p:cSld>
@@ -9421,10 +10062,10 @@
       </p:grpSpPr>
       <p:sp>
         <p:nvSpPr>
-          <p:cNvPr id="14" name="slide-title">
-            <a:extLst xmlns:a="http://schemas.openxmlformats.org/drawingml/2006/main">
-              <a:ext uri="{FF2B5EF4-FFF2-40B4-BE49-F238E27FC236}">
-                <a16:creationId xmlns:a16="http://schemas.microsoft.com/office/drawing/2014/main" id="{C3B5A0CF-FF44-4AD7-8011-0268F5063368}"/>
+          <p:cNvPr id="16" name="slide-title">
+            <a:extLst xmlns:a="http://schemas.openxmlformats.org/drawingml/2006/main">
+              <a:ext uri="{FF2B5EF4-FFF2-40B4-BE49-F238E27FC236}">
+                <a16:creationId xmlns:a16="http://schemas.microsoft.com/office/drawing/2014/main" id="{FE3223B2-41FE-417D-B0EF-2A1038DFCD83}"/>
               </a:ext>
             </a:extLst>
           </p:cNvPr>
@@ -9475,7 +10116,7 @@
           <p:cNvPr id="2" name="step-num-1">
             <a:extLst xmlns:a="http://schemas.openxmlformats.org/drawingml/2006/main">
               <a:ext uri="{FF2B5EF4-FFF2-40B4-BE49-F238E27FC236}">
-                <a16:creationId xmlns:a16="http://schemas.microsoft.com/office/drawing/2014/main" id="{79F0D88B-0FEB-451D-A350-42F2B80C7B72}"/>
+                <a16:creationId xmlns:a16="http://schemas.microsoft.com/office/drawing/2014/main" id="{A5C3D0DC-492C-403A-AFA7-948C738942AB}"/>
               </a:ext>
             </a:extLst>
           </p:cNvPr>
@@ -9526,7 +10167,7 @@
           <p:cNvPr id="3" name="step-label-1">
             <a:extLst xmlns:a="http://schemas.openxmlformats.org/drawingml/2006/main">
               <a:ext uri="{FF2B5EF4-FFF2-40B4-BE49-F238E27FC236}">
-                <a16:creationId xmlns:a16="http://schemas.microsoft.com/office/drawing/2014/main" id="{7E482F7F-7DCB-4D04-BBCA-FCE203BC4063}"/>
+                <a16:creationId xmlns:a16="http://schemas.microsoft.com/office/drawing/2014/main" id="{1F9A650A-CED6-4B34-8B0D-B89EFEC9947F}"/>
               </a:ext>
             </a:extLst>
           </p:cNvPr>
@@ -9577,7 +10218,7 @@
           <p:cNvPr id="4" name="step-line-1">
             <a:extLst xmlns:a="http://schemas.openxmlformats.org/drawingml/2006/main">
               <a:ext uri="{FF2B5EF4-FFF2-40B4-BE49-F238E27FC236}">
-                <a16:creationId xmlns:a16="http://schemas.microsoft.com/office/drawing/2014/main" id="{DE70DE8C-A513-4876-8874-F48EE8A0B70E}"/>
+                <a16:creationId xmlns:a16="http://schemas.microsoft.com/office/drawing/2014/main" id="{9799F90B-5013-4001-8BD0-42787F8DFD4C}"/>
               </a:ext>
             </a:extLst>
           </p:cNvPr>
@@ -9608,7 +10249,7 @@
           <p:cNvPr id="5" name="step-num-2">
             <a:extLst xmlns:a="http://schemas.openxmlformats.org/drawingml/2006/main">
               <a:ext uri="{FF2B5EF4-FFF2-40B4-BE49-F238E27FC236}">
-                <a16:creationId xmlns:a16="http://schemas.microsoft.com/office/drawing/2014/main" id="{4CE0124F-5739-4310-8377-5A21E6FDE03F}"/>
+                <a16:creationId xmlns:a16="http://schemas.microsoft.com/office/drawing/2014/main" id="{9DB41B53-3173-4476-A94C-899105051A5C}"/>
               </a:ext>
             </a:extLst>
           </p:cNvPr>
@@ -9659,7 +10300,7 @@
           <p:cNvPr id="6" name="step-label-2">
             <a:extLst xmlns:a="http://schemas.openxmlformats.org/drawingml/2006/main">
               <a:ext uri="{FF2B5EF4-FFF2-40B4-BE49-F238E27FC236}">
-                <a16:creationId xmlns:a16="http://schemas.microsoft.com/office/drawing/2014/main" id="{D60AF19C-7788-4B0F-A384-DBE814E6BB24}"/>
+                <a16:creationId xmlns:a16="http://schemas.microsoft.com/office/drawing/2014/main" id="{33B44122-6B6B-4CC1-99B2-D6713E623A27}"/>
               </a:ext>
             </a:extLst>
           </p:cNvPr>
@@ -9710,7 +10351,7 @@
           <p:cNvPr id="7" name="step-line-2">
             <a:extLst xmlns:a="http://schemas.openxmlformats.org/drawingml/2006/main">
               <a:ext uri="{FF2B5EF4-FFF2-40B4-BE49-F238E27FC236}">
-                <a16:creationId xmlns:a16="http://schemas.microsoft.com/office/drawing/2014/main" id="{BDEB23C5-22C4-4A30-A330-C7571A6893E3}"/>
+                <a16:creationId xmlns:a16="http://schemas.microsoft.com/office/drawing/2014/main" id="{116F5197-86F5-4E51-98C9-27B83E01502D}"/>
               </a:ext>
             </a:extLst>
           </p:cNvPr>
@@ -9741,7 +10382,7 @@
           <p:cNvPr id="8" name="step-num-3">
             <a:extLst xmlns:a="http://schemas.openxmlformats.org/drawingml/2006/main">
               <a:ext uri="{FF2B5EF4-FFF2-40B4-BE49-F238E27FC236}">
-                <a16:creationId xmlns:a16="http://schemas.microsoft.com/office/drawing/2014/main" id="{40E06905-DCE3-40B7-8B92-288C3761DC53}"/>
+                <a16:creationId xmlns:a16="http://schemas.microsoft.com/office/drawing/2014/main" id="{E5BB6DA0-D5A7-4781-8390-A19864BD6F7A}"/>
               </a:ext>
             </a:extLst>
           </p:cNvPr>
@@ -9792,7 +10433,7 @@
           <p:cNvPr id="9" name="step-label-3">
             <a:extLst xmlns:a="http://schemas.openxmlformats.org/drawingml/2006/main">
               <a:ext uri="{FF2B5EF4-FFF2-40B4-BE49-F238E27FC236}">
-                <a16:creationId xmlns:a16="http://schemas.microsoft.com/office/drawing/2014/main" id="{AB285426-2B74-4EF2-A5A8-ED1971E0385D}"/>
+                <a16:creationId xmlns:a16="http://schemas.microsoft.com/office/drawing/2014/main" id="{FB6527D9-EA96-491C-9D10-5AF1973EE449}"/>
               </a:ext>
             </a:extLst>
           </p:cNvPr>
@@ -9843,7 +10484,7 @@
           <p:cNvPr id="10" name="eyebrow">
             <a:extLst xmlns:a="http://schemas.openxmlformats.org/drawingml/2006/main">
               <a:ext uri="{FF2B5EF4-FFF2-40B4-BE49-F238E27FC236}">
-                <a16:creationId xmlns:a16="http://schemas.microsoft.com/office/drawing/2014/main" id="{AB2ADC7F-51FE-48FE-BE41-661467651852}"/>
+                <a16:creationId xmlns:a16="http://schemas.microsoft.com/office/drawing/2014/main" id="{DA797E74-56CF-461F-859D-401F4947FAD4}"/>
               </a:ext>
             </a:extLst>
           </p:cNvPr>
@@ -9891,10 +10532,69 @@
       </p:sp>
       <p:sp>
         <p:nvSpPr>
-          <p:cNvPr id="11" name="footer-rule">
-            <a:extLst xmlns:a="http://schemas.openxmlformats.org/drawingml/2006/main">
-              <a:ext uri="{FF2B5EF4-FFF2-40B4-BE49-F238E27FC236}">
-                <a16:creationId xmlns:a16="http://schemas.microsoft.com/office/drawing/2014/main" id="{7D00C434-3D04-431A-BCC9-CD91E1383845}"/>
+          <p:cNvPr id="11" name="rescue-point-logo-background">
+            <a:extLst xmlns:a="http://schemas.openxmlformats.org/drawingml/2006/main">
+              <a:ext uri="{FF2B5EF4-FFF2-40B4-BE49-F238E27FC236}">
+                <a16:creationId xmlns:a16="http://schemas.microsoft.com/office/drawing/2014/main" id="{73E11D8B-40CA-429F-848E-6E90D34666DF}"/>
+              </a:ext>
+            </a:extLst>
+          </p:cNvPr>
+          <p:cNvSpPr>
+            <a:spLocks xmlns:a="http://schemas.openxmlformats.org/drawingml/2006/main" noGrp="1"/>
+          </p:cNvSpPr>
+          <p:nvPr/>
+        </p:nvSpPr>
+        <p:spPr>
+          <a:xfrm xmlns:a="http://schemas.openxmlformats.org/drawingml/2006/main">
+            <a:off x="9772650" y="133350"/>
+            <a:ext cx="1733550" cy="457200"/>
+          </a:xfrm>
+          <a:prstGeom xmlns:a="http://schemas.openxmlformats.org/drawingml/2006/main" prst="roundRect">
+            <a:avLst>
+              <a:gd name="adj" fmla="val 16667"/>
+            </a:avLst>
+          </a:prstGeom>
+          <a:solidFill xmlns:a="http://schemas.openxmlformats.org/drawingml/2006/main">
+            <a:srgbClr val="06142E"/>
+          </a:solidFill>
+          <a:ln xmlns:a="http://schemas.openxmlformats.org/drawingml/2006/main" w="9525">
+            <a:solidFill>
+              <a:srgbClr val="1EC5FF">
+                <a:alpha val="33333"/>
+              </a:srgbClr>
+            </a:solidFill>
+            <a:prstDash val="solid"/>
+          </a:ln>
+        </p:spPr>
+      </p:sp>
+      <p:pic>
+        <p:nvPicPr>
+          <p:cNvPr id="29" name="" descr="Figura oficial da documentação dbt usada para explicar: O mesmo recurso afeta três decisões — 01."/>
+          <p:cNvPicPr>
+            <a:picLocks xmlns:a="http://schemas.openxmlformats.org/drawingml/2006/main" noChangeAspect="1"/>
+          </p:cNvPicPr>
+          <p:nvPr/>
+        </p:nvPicPr>
+        <p:blipFill>
+          <a:blip xmlns:r="http://schemas.openxmlformats.org/officeDocument/2006/relationships" xmlns:a="http://schemas.openxmlformats.org/drawingml/2006/main" r:embed="Ra3b2ae68b865453e"/>
+          <a:stretch xmlns:a="http://schemas.openxmlformats.org/drawingml/2006/main"/>
+        </p:blipFill>
+        <p:spPr>
+          <a:xfrm xmlns:a="http://schemas.openxmlformats.org/drawingml/2006/main">
+            <a:off x="9893718" y="209550"/>
+            <a:ext cx="1491414" cy="323850"/>
+          </a:xfrm>
+          <a:prstGeom xmlns:a="http://schemas.openxmlformats.org/drawingml/2006/main" prst="rect">
+            <a:avLst/>
+          </a:prstGeom>
+        </p:spPr>
+      </p:pic>
+      <p:sp>
+        <p:nvSpPr>
+          <p:cNvPr id="13" name="footer-rule">
+            <a:extLst xmlns:a="http://schemas.openxmlformats.org/drawingml/2006/main">
+              <a:ext uri="{FF2B5EF4-FFF2-40B4-BE49-F238E27FC236}">
+                <a16:creationId xmlns:a16="http://schemas.microsoft.com/office/drawing/2014/main" id="{773D66DC-0935-4402-A5DE-5A4BA921184C}"/>
               </a:ext>
             </a:extLst>
           </p:cNvPr>
@@ -9924,10 +10624,10 @@
       </p:sp>
       <p:sp>
         <p:nvSpPr>
-          <p:cNvPr id="12" name="footer">
-            <a:extLst xmlns:a="http://schemas.openxmlformats.org/drawingml/2006/main">
-              <a:ext uri="{FF2B5EF4-FFF2-40B4-BE49-F238E27FC236}">
-                <a16:creationId xmlns:a16="http://schemas.microsoft.com/office/drawing/2014/main" id="{9EC68425-0EEF-418A-9960-928BAC7DD9A7}"/>
+          <p:cNvPr id="14" name="footer">
+            <a:extLst xmlns:a="http://schemas.openxmlformats.org/drawingml/2006/main">
+              <a:ext uri="{FF2B5EF4-FFF2-40B4-BE49-F238E27FC236}">
+                <a16:creationId xmlns:a16="http://schemas.microsoft.com/office/drawing/2014/main" id="{6C7F2F70-EDF7-4F69-A101-AF78F8937DE7}"/>
               </a:ext>
             </a:extLst>
           </p:cNvPr>
@@ -9979,10 +10679,10 @@
       </p:sp>
       <p:sp>
         <p:nvSpPr>
-          <p:cNvPr id="13" name="page-number">
-            <a:extLst xmlns:a="http://schemas.openxmlformats.org/drawingml/2006/main">
-              <a:ext uri="{FF2B5EF4-FFF2-40B4-BE49-F238E27FC236}">
-                <a16:creationId xmlns:a16="http://schemas.microsoft.com/office/drawing/2014/main" id="{0D552D3B-50C3-43CF-B4DD-12B9EE2B4E59}"/>
+          <p:cNvPr id="15" name="page-number">
+            <a:extLst xmlns:a="http://schemas.openxmlformats.org/drawingml/2006/main">
+              <a:ext uri="{FF2B5EF4-FFF2-40B4-BE49-F238E27FC236}">
+                <a16:creationId xmlns:a16="http://schemas.microsoft.com/office/drawing/2014/main" id="{CBCE91BF-D389-4507-A201-FF688E9D8263}"/>
               </a:ext>
             </a:extLst>
           </p:cNvPr>
@@ -10035,7 +10735,7 @@
     </p:spTree>
     <p:extLst>
       <p:ext uri="{BB962C8B-B14F-4D97-AF65-F5344CB8AC3E}">
-        <p14:creationId xmlns:p14="http://schemas.microsoft.com/office/powerpoint/2010/main" val="725361534"/>
+        <p14:creationId xmlns:p14="http://schemas.microsoft.com/office/powerpoint/2010/main" val="1451388168"/>
       </p:ext>
     </p:extLst>
   </p:cSld>
@@ -10071,10 +10771,10 @@
       </p:grpSpPr>
       <p:sp>
         <p:nvSpPr>
-          <p:cNvPr id="9" name="case-number">
-            <a:extLst xmlns:a="http://schemas.openxmlformats.org/drawingml/2006/main">
-              <a:ext uri="{FF2B5EF4-FFF2-40B4-BE49-F238E27FC236}">
-                <a16:creationId xmlns:a16="http://schemas.microsoft.com/office/drawing/2014/main" id="{1D4C2FBB-66C4-4EC8-9E4D-67C8C4DE4821}"/>
+          <p:cNvPr id="11" name="case-number">
+            <a:extLst xmlns:a="http://schemas.openxmlformats.org/drawingml/2006/main">
+              <a:ext uri="{FF2B5EF4-FFF2-40B4-BE49-F238E27FC236}">
+                <a16:creationId xmlns:a16="http://schemas.microsoft.com/office/drawing/2014/main" id="{36A87EC6-C7F0-49C7-BD54-9D14E4DA20C6}"/>
               </a:ext>
             </a:extLst>
           </p:cNvPr>
@@ -10125,7 +10825,7 @@
           <p:cNvPr id="2" name="case-label">
             <a:extLst xmlns:a="http://schemas.openxmlformats.org/drawingml/2006/main">
               <a:ext uri="{FF2B5EF4-FFF2-40B4-BE49-F238E27FC236}">
-                <a16:creationId xmlns:a16="http://schemas.microsoft.com/office/drawing/2014/main" id="{B974E194-D11A-4584-8441-1ABA556A04A5}"/>
+                <a16:creationId xmlns:a16="http://schemas.microsoft.com/office/drawing/2014/main" id="{AC895115-01E3-471A-BB23-97AAB9DD4B9D}"/>
               </a:ext>
             </a:extLst>
           </p:cNvPr>
@@ -10176,7 +10876,7 @@
           <p:cNvPr id="3" name="case-divider">
             <a:extLst xmlns:a="http://schemas.openxmlformats.org/drawingml/2006/main">
               <a:ext uri="{FF2B5EF4-FFF2-40B4-BE49-F238E27FC236}">
-                <a16:creationId xmlns:a16="http://schemas.microsoft.com/office/drawing/2014/main" id="{0633A0D0-58BE-48BD-A474-06DA2A248378}"/>
+                <a16:creationId xmlns:a16="http://schemas.microsoft.com/office/drawing/2014/main" id="{96702B3A-E892-4B61-8553-DD13BB0A3727}"/>
               </a:ext>
             </a:extLst>
           </p:cNvPr>
@@ -10209,7 +10909,7 @@
           <p:cNvPr id="4" name="case-caveat">
             <a:extLst xmlns:a="http://schemas.openxmlformats.org/drawingml/2006/main">
               <a:ext uri="{FF2B5EF4-FFF2-40B4-BE49-F238E27FC236}">
-                <a16:creationId xmlns:a16="http://schemas.microsoft.com/office/drawing/2014/main" id="{51FEB013-6CAB-4842-A583-844BF403657F}"/>
+                <a16:creationId xmlns:a16="http://schemas.microsoft.com/office/drawing/2014/main" id="{CF56BDE1-FBB7-41F2-9C7E-0E319A669967}"/>
               </a:ext>
             </a:extLst>
           </p:cNvPr>
@@ -10260,7 +10960,7 @@
           <p:cNvPr id="5" name="eyebrow">
             <a:extLst xmlns:a="http://schemas.openxmlformats.org/drawingml/2006/main">
               <a:ext uri="{FF2B5EF4-FFF2-40B4-BE49-F238E27FC236}">
-                <a16:creationId xmlns:a16="http://schemas.microsoft.com/office/drawing/2014/main" id="{47D86AF1-297A-4863-9BBA-787BDBB558B6}"/>
+                <a16:creationId xmlns:a16="http://schemas.microsoft.com/office/drawing/2014/main" id="{2EF1294B-D99D-4B5F-A9EA-A2DD60C44CFE}"/>
               </a:ext>
             </a:extLst>
           </p:cNvPr>
@@ -10308,10 +11008,69 @@
       </p:sp>
       <p:sp>
         <p:nvSpPr>
-          <p:cNvPr id="6" name="footer-rule">
-            <a:extLst xmlns:a="http://schemas.openxmlformats.org/drawingml/2006/main">
-              <a:ext uri="{FF2B5EF4-FFF2-40B4-BE49-F238E27FC236}">
-                <a16:creationId xmlns:a16="http://schemas.microsoft.com/office/drawing/2014/main" id="{C3FC959D-FC09-433A-AFB4-40A724AF6963}"/>
+          <p:cNvPr id="6" name="rescue-point-logo-background">
+            <a:extLst xmlns:a="http://schemas.openxmlformats.org/drawingml/2006/main">
+              <a:ext uri="{FF2B5EF4-FFF2-40B4-BE49-F238E27FC236}">
+                <a16:creationId xmlns:a16="http://schemas.microsoft.com/office/drawing/2014/main" id="{D46B3B93-0474-434C-B38A-5D9A93809B57}"/>
+              </a:ext>
+            </a:extLst>
+          </p:cNvPr>
+          <p:cNvSpPr>
+            <a:spLocks xmlns:a="http://schemas.openxmlformats.org/drawingml/2006/main" noGrp="1"/>
+          </p:cNvSpPr>
+          <p:nvPr/>
+        </p:nvSpPr>
+        <p:spPr>
+          <a:xfrm xmlns:a="http://schemas.openxmlformats.org/drawingml/2006/main">
+            <a:off x="9772650" y="133350"/>
+            <a:ext cx="1733550" cy="457200"/>
+          </a:xfrm>
+          <a:prstGeom xmlns:a="http://schemas.openxmlformats.org/drawingml/2006/main" prst="roundRect">
+            <a:avLst>
+              <a:gd name="adj" fmla="val 16667"/>
+            </a:avLst>
+          </a:prstGeom>
+          <a:solidFill xmlns:a="http://schemas.openxmlformats.org/drawingml/2006/main">
+            <a:srgbClr val="06142E"/>
+          </a:solidFill>
+          <a:ln xmlns:a="http://schemas.openxmlformats.org/drawingml/2006/main" w="9525">
+            <a:solidFill>
+              <a:srgbClr val="1EC5FF">
+                <a:alpha val="33333"/>
+              </a:srgbClr>
+            </a:solidFill>
+            <a:prstDash val="solid"/>
+          </a:ln>
+        </p:spPr>
+      </p:sp>
+      <p:pic>
+        <p:nvPicPr>
+          <p:cNvPr id="19" name="" descr="Figura oficial da documentação dbt usada para explicar: 70% — redução de consumo reportada pela Symend."/>
+          <p:cNvPicPr>
+            <a:picLocks xmlns:a="http://schemas.openxmlformats.org/drawingml/2006/main" noChangeAspect="1"/>
+          </p:cNvPicPr>
+          <p:nvPr/>
+        </p:nvPicPr>
+        <p:blipFill>
+          <a:blip xmlns:r="http://schemas.openxmlformats.org/officeDocument/2006/relationships" xmlns:a="http://schemas.openxmlformats.org/drawingml/2006/main" r:embed="Re083481719094372"/>
+          <a:stretch xmlns:a="http://schemas.openxmlformats.org/drawingml/2006/main"/>
+        </p:blipFill>
+        <p:spPr>
+          <a:xfrm xmlns:a="http://schemas.openxmlformats.org/drawingml/2006/main">
+            <a:off x="9893718" y="209550"/>
+            <a:ext cx="1491414" cy="323850"/>
+          </a:xfrm>
+          <a:prstGeom xmlns:a="http://schemas.openxmlformats.org/drawingml/2006/main" prst="rect">
+            <a:avLst/>
+          </a:prstGeom>
+        </p:spPr>
+      </p:pic>
+      <p:sp>
+        <p:nvSpPr>
+          <p:cNvPr id="8" name="footer-rule">
+            <a:extLst xmlns:a="http://schemas.openxmlformats.org/drawingml/2006/main">
+              <a:ext uri="{FF2B5EF4-FFF2-40B4-BE49-F238E27FC236}">
+                <a16:creationId xmlns:a16="http://schemas.microsoft.com/office/drawing/2014/main" id="{7121531A-294D-4E12-A577-046A3A2CD5BF}"/>
               </a:ext>
             </a:extLst>
           </p:cNvPr>
@@ -10341,10 +11100,10 @@
       </p:sp>
       <p:sp>
         <p:nvSpPr>
-          <p:cNvPr id="7" name="footer">
-            <a:extLst xmlns:a="http://schemas.openxmlformats.org/drawingml/2006/main">
-              <a:ext uri="{FF2B5EF4-FFF2-40B4-BE49-F238E27FC236}">
-                <a16:creationId xmlns:a16="http://schemas.microsoft.com/office/drawing/2014/main" id="{8CC27FFE-C87A-45CD-B52B-240B442837A5}"/>
+          <p:cNvPr id="9" name="footer">
+            <a:extLst xmlns:a="http://schemas.openxmlformats.org/drawingml/2006/main">
+              <a:ext uri="{FF2B5EF4-FFF2-40B4-BE49-F238E27FC236}">
+                <a16:creationId xmlns:a16="http://schemas.microsoft.com/office/drawing/2014/main" id="{A79AC38A-43F9-4BFC-B63F-712C76B8AEF4}"/>
               </a:ext>
             </a:extLst>
           </p:cNvPr>
@@ -10396,10 +11155,10 @@
       </p:sp>
       <p:sp>
         <p:nvSpPr>
-          <p:cNvPr id="8" name="page-number">
-            <a:extLst xmlns:a="http://schemas.openxmlformats.org/drawingml/2006/main">
-              <a:ext uri="{FF2B5EF4-FFF2-40B4-BE49-F238E27FC236}">
-                <a16:creationId xmlns:a16="http://schemas.microsoft.com/office/drawing/2014/main" id="{5FDAF308-1C68-4FA0-9FD2-8048003C8704}"/>
+          <p:cNvPr id="10" name="page-number">
+            <a:extLst xmlns:a="http://schemas.openxmlformats.org/drawingml/2006/main">
+              <a:ext uri="{FF2B5EF4-FFF2-40B4-BE49-F238E27FC236}">
+                <a16:creationId xmlns:a16="http://schemas.microsoft.com/office/drawing/2014/main" id="{51E9FB65-B161-48CB-92E9-A31B69C2800A}"/>
               </a:ext>
             </a:extLst>
           </p:cNvPr>
@@ -10452,7 +11211,7 @@
     </p:spTree>
     <p:extLst>
       <p:ext uri="{BB962C8B-B14F-4D97-AF65-F5344CB8AC3E}">
-        <p14:creationId xmlns:p14="http://schemas.microsoft.com/office/powerpoint/2010/main" val="1545882364"/>
+        <p14:creationId xmlns:p14="http://schemas.microsoft.com/office/powerpoint/2010/main" val="1391451272"/>
       </p:ext>
     </p:extLst>
   </p:cSld>
@@ -10480,10 +11239,10 @@
       </p:grpSpPr>
       <p:sp>
         <p:nvSpPr>
-          <p:cNvPr id="10" name="hook">
-            <a:extLst xmlns:a="http://schemas.openxmlformats.org/drawingml/2006/main">
-              <a:ext uri="{FF2B5EF4-FFF2-40B4-BE49-F238E27FC236}">
-                <a16:creationId xmlns:a16="http://schemas.microsoft.com/office/drawing/2014/main" id="{AAF904CD-AC4A-4A89-AD97-25BC8387FBB9}"/>
+          <p:cNvPr id="12" name="hook">
+            <a:extLst xmlns:a="http://schemas.openxmlformats.org/drawingml/2006/main">
+              <a:ext uri="{FF2B5EF4-FFF2-40B4-BE49-F238E27FC236}">
+                <a16:creationId xmlns:a16="http://schemas.microsoft.com/office/drawing/2014/main" id="{F1D3824D-0ABD-4460-8431-F0DD8EE9E95D}"/>
               </a:ext>
             </a:extLst>
           </p:cNvPr>
@@ -10534,7 +11293,7 @@
           <p:cNvPr id="2" name="hook-rule">
             <a:extLst xmlns:a="http://schemas.openxmlformats.org/drawingml/2006/main">
               <a:ext uri="{FF2B5EF4-FFF2-40B4-BE49-F238E27FC236}">
-                <a16:creationId xmlns:a16="http://schemas.microsoft.com/office/drawing/2014/main" id="{A945E2EE-8CC9-4549-AE6A-EAEC0BC1A5CB}"/>
+                <a16:creationId xmlns:a16="http://schemas.microsoft.com/office/drawing/2014/main" id="{E8F17DC4-03D8-4794-86BA-275E6B38BB9D}"/>
               </a:ext>
             </a:extLst>
           </p:cNvPr>
@@ -10565,7 +11324,7 @@
           <p:cNvPr id="3" name="hook-label">
             <a:extLst xmlns:a="http://schemas.openxmlformats.org/drawingml/2006/main">
               <a:ext uri="{FF2B5EF4-FFF2-40B4-BE49-F238E27FC236}">
-                <a16:creationId xmlns:a16="http://schemas.microsoft.com/office/drawing/2014/main" id="{DF925489-E54C-4888-BFFC-5A4A3BBF740F}"/>
+                <a16:creationId xmlns:a16="http://schemas.microsoft.com/office/drawing/2014/main" id="{5B57F211-363B-4DFB-B09A-B5841B0C6518}"/>
               </a:ext>
             </a:extLst>
           </p:cNvPr>
@@ -10616,7 +11375,7 @@
           <p:cNvPr id="4" name="diagram-surface">
             <a:extLst xmlns:a="http://schemas.openxmlformats.org/drawingml/2006/main">
               <a:ext uri="{FF2B5EF4-FFF2-40B4-BE49-F238E27FC236}">
-                <a16:creationId xmlns:a16="http://schemas.microsoft.com/office/drawing/2014/main" id="{D5D56D53-E218-4DD8-BBC9-FF4C75F31CCA}"/>
+                <a16:creationId xmlns:a16="http://schemas.microsoft.com/office/drawing/2014/main" id="{FDC90EBA-5552-471B-A66A-6A1467207458}"/>
               </a:ext>
             </a:extLst>
           </p:cNvPr>
@@ -10648,14 +11407,14 @@
       </p:sp>
       <p:pic>
         <p:nvPicPr>
-          <p:cNvPr id="16" name="" descr="Diagrama didático autoral que apresenta: Otimização só é válida quando o resultado continua igual ao full build. — A pergunta que guia a aula."/>
+          <p:cNvPr id="19" name="" descr="Diagrama didático autoral que apresenta: Otimização só é válida quando o resultado continua igual ao full build. — A pergunta que guia a aula."/>
           <p:cNvPicPr>
             <a:picLocks xmlns:a="http://schemas.openxmlformats.org/drawingml/2006/main" noChangeAspect="1"/>
           </p:cNvPicPr>
           <p:nvPr/>
         </p:nvPicPr>
         <p:blipFill>
-          <a:blip xmlns:r="http://schemas.openxmlformats.org/officeDocument/2006/relationships" xmlns:a="http://schemas.openxmlformats.org/drawingml/2006/main" r:embed="R7e3ca47b4c5a4f2a"/>
+          <a:blip xmlns:r="http://schemas.openxmlformats.org/officeDocument/2006/relationships" xmlns:a="http://schemas.openxmlformats.org/drawingml/2006/main" r:embed="R0f0c07f2d5b24acf"/>
           <a:stretch xmlns:a="http://schemas.openxmlformats.org/drawingml/2006/main"/>
         </p:blipFill>
         <p:spPr>
@@ -10673,7 +11432,7 @@
           <p:cNvPr id="6" name="eyebrow">
             <a:extLst xmlns:a="http://schemas.openxmlformats.org/drawingml/2006/main">
               <a:ext uri="{FF2B5EF4-FFF2-40B4-BE49-F238E27FC236}">
-                <a16:creationId xmlns:a16="http://schemas.microsoft.com/office/drawing/2014/main" id="{77FC2C49-B1F7-40B0-8A24-FD2341AEA9E6}"/>
+                <a16:creationId xmlns:a16="http://schemas.microsoft.com/office/drawing/2014/main" id="{025CCBCB-3FFC-4D7A-AB5C-D8586DF16604}"/>
               </a:ext>
             </a:extLst>
           </p:cNvPr>
@@ -10721,10 +11480,69 @@
       </p:sp>
       <p:sp>
         <p:nvSpPr>
-          <p:cNvPr id="7" name="footer-rule">
-            <a:extLst xmlns:a="http://schemas.openxmlformats.org/drawingml/2006/main">
-              <a:ext uri="{FF2B5EF4-FFF2-40B4-BE49-F238E27FC236}">
-                <a16:creationId xmlns:a16="http://schemas.microsoft.com/office/drawing/2014/main" id="{711CB813-60C2-47BF-A54A-56901DE3187F}"/>
+          <p:cNvPr id="7" name="rescue-point-logo-background">
+            <a:extLst xmlns:a="http://schemas.openxmlformats.org/drawingml/2006/main">
+              <a:ext uri="{FF2B5EF4-FFF2-40B4-BE49-F238E27FC236}">
+                <a16:creationId xmlns:a16="http://schemas.microsoft.com/office/drawing/2014/main" id="{CE451DE3-55C5-44AD-88E3-C6C832AFB8B1}"/>
+              </a:ext>
+            </a:extLst>
+          </p:cNvPr>
+          <p:cNvSpPr>
+            <a:spLocks xmlns:a="http://schemas.openxmlformats.org/drawingml/2006/main" noGrp="1"/>
+          </p:cNvSpPr>
+          <p:nvPr/>
+        </p:nvSpPr>
+        <p:spPr>
+          <a:xfrm xmlns:a="http://schemas.openxmlformats.org/drawingml/2006/main">
+            <a:off x="9772650" y="133350"/>
+            <a:ext cx="1733550" cy="457200"/>
+          </a:xfrm>
+          <a:prstGeom xmlns:a="http://schemas.openxmlformats.org/drawingml/2006/main" prst="roundRect">
+            <a:avLst>
+              <a:gd name="adj" fmla="val 16667"/>
+            </a:avLst>
+          </a:prstGeom>
+          <a:solidFill xmlns:a="http://schemas.openxmlformats.org/drawingml/2006/main">
+            <a:srgbClr val="06142E"/>
+          </a:solidFill>
+          <a:ln xmlns:a="http://schemas.openxmlformats.org/drawingml/2006/main" w="9525">
+            <a:solidFill>
+              <a:srgbClr val="1EC5FF">
+                <a:alpha val="33333"/>
+              </a:srgbClr>
+            </a:solidFill>
+            <a:prstDash val="solid"/>
+          </a:ln>
+        </p:spPr>
+      </p:sp>
+      <p:pic>
+        <p:nvPicPr>
+          <p:cNvPr id="22" name="" descr="Diagrama didático autoral que apresenta: Otimização só é válida quando o resultado continua igual ao full build. — A pergunta que guia a aula."/>
+          <p:cNvPicPr>
+            <a:picLocks xmlns:a="http://schemas.openxmlformats.org/drawingml/2006/main" noChangeAspect="1"/>
+          </p:cNvPicPr>
+          <p:nvPr/>
+        </p:nvPicPr>
+        <p:blipFill>
+          <a:blip xmlns:r="http://schemas.openxmlformats.org/officeDocument/2006/relationships" xmlns:a="http://schemas.openxmlformats.org/drawingml/2006/main" r:embed="R06bb8612f71a42df"/>
+          <a:stretch xmlns:a="http://schemas.openxmlformats.org/drawingml/2006/main"/>
+        </p:blipFill>
+        <p:spPr>
+          <a:xfrm xmlns:a="http://schemas.openxmlformats.org/drawingml/2006/main">
+            <a:off x="9893718" y="209550"/>
+            <a:ext cx="1491414" cy="323850"/>
+          </a:xfrm>
+          <a:prstGeom xmlns:a="http://schemas.openxmlformats.org/drawingml/2006/main" prst="rect">
+            <a:avLst/>
+          </a:prstGeom>
+        </p:spPr>
+      </p:pic>
+      <p:sp>
+        <p:nvSpPr>
+          <p:cNvPr id="9" name="footer-rule">
+            <a:extLst xmlns:a="http://schemas.openxmlformats.org/drawingml/2006/main">
+              <a:ext uri="{FF2B5EF4-FFF2-40B4-BE49-F238E27FC236}">
+                <a16:creationId xmlns:a16="http://schemas.microsoft.com/office/drawing/2014/main" id="{7F3A340C-C746-420B-B5F0-644C9D8D621B}"/>
               </a:ext>
             </a:extLst>
           </p:cNvPr>
@@ -10754,10 +11572,10 @@
       </p:sp>
       <p:sp>
         <p:nvSpPr>
-          <p:cNvPr id="8" name="footer">
-            <a:extLst xmlns:a="http://schemas.openxmlformats.org/drawingml/2006/main">
-              <a:ext uri="{FF2B5EF4-FFF2-40B4-BE49-F238E27FC236}">
-                <a16:creationId xmlns:a16="http://schemas.microsoft.com/office/drawing/2014/main" id="{2242055E-5B34-4BD9-900A-D702A795FD10}"/>
+          <p:cNvPr id="10" name="footer">
+            <a:extLst xmlns:a="http://schemas.openxmlformats.org/drawingml/2006/main">
+              <a:ext uri="{FF2B5EF4-FFF2-40B4-BE49-F238E27FC236}">
+                <a16:creationId xmlns:a16="http://schemas.microsoft.com/office/drawing/2014/main" id="{83685053-B162-43CE-9422-97E4528F6706}"/>
               </a:ext>
             </a:extLst>
           </p:cNvPr>
@@ -10809,10 +11627,10 @@
       </p:sp>
       <p:sp>
         <p:nvSpPr>
-          <p:cNvPr id="9" name="page-number">
-            <a:extLst xmlns:a="http://schemas.openxmlformats.org/drawingml/2006/main">
-              <a:ext uri="{FF2B5EF4-FFF2-40B4-BE49-F238E27FC236}">
-                <a16:creationId xmlns:a16="http://schemas.microsoft.com/office/drawing/2014/main" id="{A337730B-0014-4CF2-9FF8-21222821909F}"/>
+          <p:cNvPr id="11" name="page-number">
+            <a:extLst xmlns:a="http://schemas.openxmlformats.org/drawingml/2006/main">
+              <a:ext uri="{FF2B5EF4-FFF2-40B4-BE49-F238E27FC236}">
+                <a16:creationId xmlns:a16="http://schemas.microsoft.com/office/drawing/2014/main" id="{C1DEAEB7-4A9F-426A-9450-678C4BBB18F8}"/>
               </a:ext>
             </a:extLst>
           </p:cNvPr>
@@ -10865,7 +11683,7 @@
     </p:spTree>
     <p:extLst>
       <p:ext uri="{BB962C8B-B14F-4D97-AF65-F5344CB8AC3E}">
-        <p14:creationId xmlns:p14="http://schemas.microsoft.com/office/powerpoint/2010/main" val="92130975"/>
+        <p14:creationId xmlns:p14="http://schemas.microsoft.com/office/powerpoint/2010/main" val="468466969"/>
       </p:ext>
     </p:extLst>
   </p:cSld>
@@ -10893,10 +11711,10 @@
       </p:grpSpPr>
       <p:sp>
         <p:nvSpPr>
-          <p:cNvPr id="7" name="slide-title">
-            <a:extLst xmlns:a="http://schemas.openxmlformats.org/drawingml/2006/main">
-              <a:ext uri="{FF2B5EF4-FFF2-40B4-BE49-F238E27FC236}">
-                <a16:creationId xmlns:a16="http://schemas.microsoft.com/office/drawing/2014/main" id="{A7459095-8D71-4A6A-9D47-3F9CF707A001}"/>
+          <p:cNvPr id="9" name="slide-title">
+            <a:extLst xmlns:a="http://schemas.openxmlformats.org/drawingml/2006/main">
+              <a:ext uri="{FF2B5EF4-FFF2-40B4-BE49-F238E27FC236}">
+                <a16:creationId xmlns:a16="http://schemas.microsoft.com/office/drawing/2014/main" id="{051FC3BC-8F0F-4B8A-8A1C-E21F51AC4175}"/>
               </a:ext>
             </a:extLst>
           </p:cNvPr>
@@ -10947,7 +11765,7 @@
           <p:cNvPr id="2" name="bullets">
             <a:extLst xmlns:a="http://schemas.openxmlformats.org/drawingml/2006/main">
               <a:ext uri="{FF2B5EF4-FFF2-40B4-BE49-F238E27FC236}">
-                <a16:creationId xmlns:a16="http://schemas.microsoft.com/office/drawing/2014/main" id="{9D7B24C1-11B4-429A-91BD-A4B99E98A208}"/>
+                <a16:creationId xmlns:a16="http://schemas.microsoft.com/office/drawing/2014/main" id="{D0CD5D47-BD0C-4432-8114-290E6DDEBBA3}"/>
               </a:ext>
             </a:extLst>
           </p:cNvPr>
@@ -11034,7 +11852,7 @@
           <p:cNvPr id="3" name="eyebrow">
             <a:extLst xmlns:a="http://schemas.openxmlformats.org/drawingml/2006/main">
               <a:ext uri="{FF2B5EF4-FFF2-40B4-BE49-F238E27FC236}">
-                <a16:creationId xmlns:a16="http://schemas.microsoft.com/office/drawing/2014/main" id="{C6EFDBE8-3DAE-4517-AE22-748812B88FBC}"/>
+                <a16:creationId xmlns:a16="http://schemas.microsoft.com/office/drawing/2014/main" id="{4376FD98-8A07-46B2-ADDD-FBCA094BB08E}"/>
               </a:ext>
             </a:extLst>
           </p:cNvPr>
@@ -11082,10 +11900,69 @@
       </p:sp>
       <p:sp>
         <p:nvSpPr>
-          <p:cNvPr id="4" name="footer-rule">
-            <a:extLst xmlns:a="http://schemas.openxmlformats.org/drawingml/2006/main">
-              <a:ext uri="{FF2B5EF4-FFF2-40B4-BE49-F238E27FC236}">
-                <a16:creationId xmlns:a16="http://schemas.microsoft.com/office/drawing/2014/main" id="{8EE179A0-D8F8-4107-856C-F40361297085}"/>
+          <p:cNvPr id="4" name="rescue-point-logo-background">
+            <a:extLst xmlns:a="http://schemas.openxmlformats.org/drawingml/2006/main">
+              <a:ext uri="{FF2B5EF4-FFF2-40B4-BE49-F238E27FC236}">
+                <a16:creationId xmlns:a16="http://schemas.microsoft.com/office/drawing/2014/main" id="{AE1C85F8-AA02-4BB3-BCDA-A15A6B565D2C}"/>
+              </a:ext>
+            </a:extLst>
+          </p:cNvPr>
+          <p:cNvSpPr>
+            <a:spLocks xmlns:a="http://schemas.openxmlformats.org/drawingml/2006/main" noGrp="1"/>
+          </p:cNvSpPr>
+          <p:nvPr/>
+        </p:nvSpPr>
+        <p:spPr>
+          <a:xfrm xmlns:a="http://schemas.openxmlformats.org/drawingml/2006/main">
+            <a:off x="9772650" y="133350"/>
+            <a:ext cx="1733550" cy="457200"/>
+          </a:xfrm>
+          <a:prstGeom xmlns:a="http://schemas.openxmlformats.org/drawingml/2006/main" prst="roundRect">
+            <a:avLst>
+              <a:gd name="adj" fmla="val 16667"/>
+            </a:avLst>
+          </a:prstGeom>
+          <a:solidFill xmlns:a="http://schemas.openxmlformats.org/drawingml/2006/main">
+            <a:srgbClr val="06142E"/>
+          </a:solidFill>
+          <a:ln xmlns:a="http://schemas.openxmlformats.org/drawingml/2006/main" w="9525">
+            <a:solidFill>
+              <a:srgbClr val="1EC5FF">
+                <a:alpha val="33333"/>
+              </a:srgbClr>
+            </a:solidFill>
+            <a:prstDash val="solid"/>
+          </a:ln>
+        </p:spPr>
+      </p:sp>
+      <p:pic>
+        <p:nvPicPr>
+          <p:cNvPr id="15" name="" descr="Figura oficial da documentação dbt usada para explicar: Limitações que precisam permanecer visíveis — • DuckDB não estima custo cloud."/>
+          <p:cNvPicPr>
+            <a:picLocks xmlns:a="http://schemas.openxmlformats.org/drawingml/2006/main" noChangeAspect="1"/>
+          </p:cNvPicPr>
+          <p:nvPr/>
+        </p:nvPicPr>
+        <p:blipFill>
+          <a:blip xmlns:r="http://schemas.openxmlformats.org/officeDocument/2006/relationships" xmlns:a="http://schemas.openxmlformats.org/drawingml/2006/main" r:embed="Rededb16b6842472a"/>
+          <a:stretch xmlns:a="http://schemas.openxmlformats.org/drawingml/2006/main"/>
+        </p:blipFill>
+        <p:spPr>
+          <a:xfrm xmlns:a="http://schemas.openxmlformats.org/drawingml/2006/main">
+            <a:off x="9893718" y="209550"/>
+            <a:ext cx="1491414" cy="323850"/>
+          </a:xfrm>
+          <a:prstGeom xmlns:a="http://schemas.openxmlformats.org/drawingml/2006/main" prst="rect">
+            <a:avLst/>
+          </a:prstGeom>
+        </p:spPr>
+      </p:pic>
+      <p:sp>
+        <p:nvSpPr>
+          <p:cNvPr id="6" name="footer-rule">
+            <a:extLst xmlns:a="http://schemas.openxmlformats.org/drawingml/2006/main">
+              <a:ext uri="{FF2B5EF4-FFF2-40B4-BE49-F238E27FC236}">
+                <a16:creationId xmlns:a16="http://schemas.microsoft.com/office/drawing/2014/main" id="{50D35D3F-C882-4846-82E2-7A755CF0F506}"/>
               </a:ext>
             </a:extLst>
           </p:cNvPr>
@@ -11115,10 +11992,10 @@
       </p:sp>
       <p:sp>
         <p:nvSpPr>
-          <p:cNvPr id="5" name="footer">
-            <a:extLst xmlns:a="http://schemas.openxmlformats.org/drawingml/2006/main">
-              <a:ext uri="{FF2B5EF4-FFF2-40B4-BE49-F238E27FC236}">
-                <a16:creationId xmlns:a16="http://schemas.microsoft.com/office/drawing/2014/main" id="{D8524021-7238-4AB2-B0D5-E6B3F77B2A6E}"/>
+          <p:cNvPr id="7" name="footer">
+            <a:extLst xmlns:a="http://schemas.openxmlformats.org/drawingml/2006/main">
+              <a:ext uri="{FF2B5EF4-FFF2-40B4-BE49-F238E27FC236}">
+                <a16:creationId xmlns:a16="http://schemas.microsoft.com/office/drawing/2014/main" id="{7B9CB43F-2EDB-43B7-9D46-4B59BA1B6A7B}"/>
               </a:ext>
             </a:extLst>
           </p:cNvPr>
@@ -11170,10 +12047,10 @@
       </p:sp>
       <p:sp>
         <p:nvSpPr>
-          <p:cNvPr id="6" name="page-number">
-            <a:extLst xmlns:a="http://schemas.openxmlformats.org/drawingml/2006/main">
-              <a:ext uri="{FF2B5EF4-FFF2-40B4-BE49-F238E27FC236}">
-                <a16:creationId xmlns:a16="http://schemas.microsoft.com/office/drawing/2014/main" id="{49863B5D-02FB-4CEE-89D3-6B2D59EEDC50}"/>
+          <p:cNvPr id="8" name="page-number">
+            <a:extLst xmlns:a="http://schemas.openxmlformats.org/drawingml/2006/main">
+              <a:ext uri="{FF2B5EF4-FFF2-40B4-BE49-F238E27FC236}">
+                <a16:creationId xmlns:a16="http://schemas.microsoft.com/office/drawing/2014/main" id="{053C48EC-A5A6-4C93-B3B8-52AF9AA26B6B}"/>
               </a:ext>
             </a:extLst>
           </p:cNvPr>
@@ -11226,7 +12103,7 @@
     </p:spTree>
     <p:extLst>
       <p:ext uri="{BB962C8B-B14F-4D97-AF65-F5344CB8AC3E}">
-        <p14:creationId xmlns:p14="http://schemas.microsoft.com/office/powerpoint/2010/main" val="881463942"/>
+        <p14:creationId xmlns:p14="http://schemas.microsoft.com/office/powerpoint/2010/main" val="1925218540"/>
       </p:ext>
     </p:extLst>
   </p:cSld>
@@ -11262,10 +12139,10 @@
       </p:grpSpPr>
       <p:sp>
         <p:nvSpPr>
-          <p:cNvPr id="10" name="radar-label">
-            <a:extLst xmlns:a="http://schemas.openxmlformats.org/drawingml/2006/main">
-              <a:ext uri="{FF2B5EF4-FFF2-40B4-BE49-F238E27FC236}">
-                <a16:creationId xmlns:a16="http://schemas.microsoft.com/office/drawing/2014/main" id="{A8A4FD78-4562-4524-BAA7-53A2F95AD7C8}"/>
+          <p:cNvPr id="12" name="radar-label">
+            <a:extLst xmlns:a="http://schemas.openxmlformats.org/drawingml/2006/main">
+              <a:ext uri="{FF2B5EF4-FFF2-40B4-BE49-F238E27FC236}">
+                <a16:creationId xmlns:a16="http://schemas.microsoft.com/office/drawing/2014/main" id="{E7D076C6-314C-4534-82B8-9C31E25086F5}"/>
               </a:ext>
             </a:extLst>
           </p:cNvPr>
@@ -11316,7 +12193,7 @@
           <p:cNvPr id="2" name="radar-text">
             <a:extLst xmlns:a="http://schemas.openxmlformats.org/drawingml/2006/main">
               <a:ext uri="{FF2B5EF4-FFF2-40B4-BE49-F238E27FC236}">
-                <a16:creationId xmlns:a16="http://schemas.microsoft.com/office/drawing/2014/main" id="{715DD9F3-E0E1-45A0-8A08-64508F8CCE81}"/>
+                <a16:creationId xmlns:a16="http://schemas.microsoft.com/office/drawing/2014/main" id="{4C6C4B3C-84BD-45A0-8691-21C9ACA26AFB}"/>
               </a:ext>
             </a:extLst>
           </p:cNvPr>
@@ -11367,7 +12244,7 @@
           <p:cNvPr id="3" name="radar-rule">
             <a:extLst xmlns:a="http://schemas.openxmlformats.org/drawingml/2006/main">
               <a:ext uri="{FF2B5EF4-FFF2-40B4-BE49-F238E27FC236}">
-                <a16:creationId xmlns:a16="http://schemas.microsoft.com/office/drawing/2014/main" id="{2BAA0F2B-D6DF-4F6E-A029-0DBB5DBA7006}"/>
+                <a16:creationId xmlns:a16="http://schemas.microsoft.com/office/drawing/2014/main" id="{94E2079E-3E9A-4C2B-8385-AB947F3F5A88}"/>
               </a:ext>
             </a:extLst>
           </p:cNvPr>
@@ -11418,7 +12295,7 @@
           <p:cNvPr id="4" name="ambient-glow">
             <a:extLst xmlns:a="http://schemas.openxmlformats.org/drawingml/2006/main">
               <a:ext uri="{FF2B5EF4-FFF2-40B4-BE49-F238E27FC236}">
-                <a16:creationId xmlns:a16="http://schemas.microsoft.com/office/drawing/2014/main" id="{01AE2F7C-CB06-4415-96A0-608F3C4B0D34}"/>
+                <a16:creationId xmlns:a16="http://schemas.microsoft.com/office/drawing/2014/main" id="{B5CF633A-FFCA-430B-9AE5-D5EFC97B1641}"/>
               </a:ext>
             </a:extLst>
           </p:cNvPr>
@@ -11455,7 +12332,7 @@
           <p:cNvPr id="5" name="ambient-core">
             <a:extLst xmlns:a="http://schemas.openxmlformats.org/drawingml/2006/main">
               <a:ext uri="{FF2B5EF4-FFF2-40B4-BE49-F238E27FC236}">
-                <a16:creationId xmlns:a16="http://schemas.microsoft.com/office/drawing/2014/main" id="{6C0A72B4-431D-4CAA-9E57-43F6CA4E3B9B}"/>
+                <a16:creationId xmlns:a16="http://schemas.microsoft.com/office/drawing/2014/main" id="{FB866D85-CB35-4307-B24F-6C234EB4C918}"/>
               </a:ext>
             </a:extLst>
           </p:cNvPr>
@@ -11492,7 +12369,7 @@
           <p:cNvPr id="6" name="eyebrow">
             <a:extLst xmlns:a="http://schemas.openxmlformats.org/drawingml/2006/main">
               <a:ext uri="{FF2B5EF4-FFF2-40B4-BE49-F238E27FC236}">
-                <a16:creationId xmlns:a16="http://schemas.microsoft.com/office/drawing/2014/main" id="{CE86453E-7017-47BE-8F46-0160EE26FA65}"/>
+                <a16:creationId xmlns:a16="http://schemas.microsoft.com/office/drawing/2014/main" id="{53C7C0FF-56CF-414F-B0CC-7EB6685C94A8}"/>
               </a:ext>
             </a:extLst>
           </p:cNvPr>
@@ -11540,10 +12417,69 @@
       </p:sp>
       <p:sp>
         <p:nvSpPr>
-          <p:cNvPr id="7" name="footer-rule">
-            <a:extLst xmlns:a="http://schemas.openxmlformats.org/drawingml/2006/main">
-              <a:ext uri="{FF2B5EF4-FFF2-40B4-BE49-F238E27FC236}">
-                <a16:creationId xmlns:a16="http://schemas.microsoft.com/office/drawing/2014/main" id="{DED33D0E-1F6E-4D87-8F1D-E36F1DD66485}"/>
+          <p:cNvPr id="7" name="rescue-point-logo-background">
+            <a:extLst xmlns:a="http://schemas.openxmlformats.org/drawingml/2006/main">
+              <a:ext uri="{FF2B5EF4-FFF2-40B4-BE49-F238E27FC236}">
+                <a16:creationId xmlns:a16="http://schemas.microsoft.com/office/drawing/2014/main" id="{803C01F6-BFFA-4AD4-B5E8-6919737F186E}"/>
+              </a:ext>
+            </a:extLst>
+          </p:cNvPr>
+          <p:cNvSpPr>
+            <a:spLocks xmlns:a="http://schemas.openxmlformats.org/drawingml/2006/main" noGrp="1"/>
+          </p:cNvSpPr>
+          <p:nvPr/>
+        </p:nvSpPr>
+        <p:spPr>
+          <a:xfrm xmlns:a="http://schemas.openxmlformats.org/drawingml/2006/main">
+            <a:off x="9772650" y="133350"/>
+            <a:ext cx="1733550" cy="457200"/>
+          </a:xfrm>
+          <a:prstGeom xmlns:a="http://schemas.openxmlformats.org/drawingml/2006/main" prst="roundRect">
+            <a:avLst>
+              <a:gd name="adj" fmla="val 16667"/>
+            </a:avLst>
+          </a:prstGeom>
+          <a:solidFill xmlns:a="http://schemas.openxmlformats.org/drawingml/2006/main">
+            <a:srgbClr val="06142E"/>
+          </a:solidFill>
+          <a:ln xmlns:a="http://schemas.openxmlformats.org/drawingml/2006/main" w="9525">
+            <a:solidFill>
+              <a:srgbClr val="1EC5FF">
+                <a:alpha val="33333"/>
+              </a:srgbClr>
+            </a:solidFill>
+            <a:prstDash val="solid"/>
+          </a:ln>
+        </p:spPr>
+      </p:sp>
+      <p:pic>
+        <p:nvPicPr>
+          <p:cNvPr id="21" name="" descr="Figura oficial da documentação dbt usada para explicar: RADAR — Materialization v2 e engines novas só entram depois de evidência estável.."/>
+          <p:cNvPicPr>
+            <a:picLocks xmlns:a="http://schemas.openxmlformats.org/drawingml/2006/main" noChangeAspect="1"/>
+          </p:cNvPicPr>
+          <p:nvPr/>
+        </p:nvPicPr>
+        <p:blipFill>
+          <a:blip xmlns:r="http://schemas.openxmlformats.org/officeDocument/2006/relationships" xmlns:a="http://schemas.openxmlformats.org/drawingml/2006/main" r:embed="R42702b827bad4218"/>
+          <a:stretch xmlns:a="http://schemas.openxmlformats.org/drawingml/2006/main"/>
+        </p:blipFill>
+        <p:spPr>
+          <a:xfrm xmlns:a="http://schemas.openxmlformats.org/drawingml/2006/main">
+            <a:off x="9893718" y="209550"/>
+            <a:ext cx="1491414" cy="323850"/>
+          </a:xfrm>
+          <a:prstGeom xmlns:a="http://schemas.openxmlformats.org/drawingml/2006/main" prst="rect">
+            <a:avLst/>
+          </a:prstGeom>
+        </p:spPr>
+      </p:pic>
+      <p:sp>
+        <p:nvSpPr>
+          <p:cNvPr id="9" name="footer-rule">
+            <a:extLst xmlns:a="http://schemas.openxmlformats.org/drawingml/2006/main">
+              <a:ext uri="{FF2B5EF4-FFF2-40B4-BE49-F238E27FC236}">
+                <a16:creationId xmlns:a16="http://schemas.microsoft.com/office/drawing/2014/main" id="{C38EB80E-23CC-49AC-B80B-CB7273370EC1}"/>
               </a:ext>
             </a:extLst>
           </p:cNvPr>
@@ -11573,10 +12509,10 @@
       </p:sp>
       <p:sp>
         <p:nvSpPr>
-          <p:cNvPr id="8" name="footer">
-            <a:extLst xmlns:a="http://schemas.openxmlformats.org/drawingml/2006/main">
-              <a:ext uri="{FF2B5EF4-FFF2-40B4-BE49-F238E27FC236}">
-                <a16:creationId xmlns:a16="http://schemas.microsoft.com/office/drawing/2014/main" id="{D34460DC-AD99-43F9-AC5F-68B5618D9EFC}"/>
+          <p:cNvPr id="10" name="footer">
+            <a:extLst xmlns:a="http://schemas.openxmlformats.org/drawingml/2006/main">
+              <a:ext uri="{FF2B5EF4-FFF2-40B4-BE49-F238E27FC236}">
+                <a16:creationId xmlns:a16="http://schemas.microsoft.com/office/drawing/2014/main" id="{047F63E1-44A0-4D22-BBEB-A5A61D885C61}"/>
               </a:ext>
             </a:extLst>
           </p:cNvPr>
@@ -11628,10 +12564,10 @@
       </p:sp>
       <p:sp>
         <p:nvSpPr>
-          <p:cNvPr id="9" name="page-number">
-            <a:extLst xmlns:a="http://schemas.openxmlformats.org/drawingml/2006/main">
-              <a:ext uri="{FF2B5EF4-FFF2-40B4-BE49-F238E27FC236}">
-                <a16:creationId xmlns:a16="http://schemas.microsoft.com/office/drawing/2014/main" id="{0260CA24-A199-441F-BC1C-E02BE6D56FC0}"/>
+          <p:cNvPr id="11" name="page-number">
+            <a:extLst xmlns:a="http://schemas.openxmlformats.org/drawingml/2006/main">
+              <a:ext uri="{FF2B5EF4-FFF2-40B4-BE49-F238E27FC236}">
+                <a16:creationId xmlns:a16="http://schemas.microsoft.com/office/drawing/2014/main" id="{81915017-3E07-466E-8EC0-F55030F101B1}"/>
               </a:ext>
             </a:extLst>
           </p:cNvPr>
@@ -11684,7 +12620,7 @@
     </p:spTree>
     <p:extLst>
       <p:ext uri="{BB962C8B-B14F-4D97-AF65-F5344CB8AC3E}">
-        <p14:creationId xmlns:p14="http://schemas.microsoft.com/office/powerpoint/2010/main" val="1881967664"/>
+        <p14:creationId xmlns:p14="http://schemas.microsoft.com/office/powerpoint/2010/main" val="1534359541"/>
       </p:ext>
     </p:extLst>
   </p:cSld>
@@ -11712,10 +12648,10 @@
       </p:grpSpPr>
       <p:sp>
         <p:nvSpPr>
-          <p:cNvPr id="8" name="cta-label">
-            <a:extLst xmlns:a="http://schemas.openxmlformats.org/drawingml/2006/main">
-              <a:ext uri="{FF2B5EF4-FFF2-40B4-BE49-F238E27FC236}">
-                <a16:creationId xmlns:a16="http://schemas.microsoft.com/office/drawing/2014/main" id="{7FADF8CE-0EDD-4EA4-91CD-53C0D4CBCDDF}"/>
+          <p:cNvPr id="10" name="cta-label">
+            <a:extLst xmlns:a="http://schemas.openxmlformats.org/drawingml/2006/main">
+              <a:ext uri="{FF2B5EF4-FFF2-40B4-BE49-F238E27FC236}">
+                <a16:creationId xmlns:a16="http://schemas.microsoft.com/office/drawing/2014/main" id="{419CF8C7-B289-48E0-A6C2-2A7B7F2A190A}"/>
               </a:ext>
             </a:extLst>
           </p:cNvPr>
@@ -11766,7 +12702,7 @@
           <p:cNvPr id="2" name="cta">
             <a:extLst xmlns:a="http://schemas.openxmlformats.org/drawingml/2006/main">
               <a:ext uri="{FF2B5EF4-FFF2-40B4-BE49-F238E27FC236}">
-                <a16:creationId xmlns:a16="http://schemas.microsoft.com/office/drawing/2014/main" id="{EE6C00F0-A446-4CF6-B9A9-B091142760B8}"/>
+                <a16:creationId xmlns:a16="http://schemas.microsoft.com/office/drawing/2014/main" id="{5DF47198-20D6-44A9-BB54-C7F6A749E8B5}"/>
               </a:ext>
             </a:extLst>
           </p:cNvPr>
@@ -11817,7 +12753,7 @@
           <p:cNvPr id="3" name="cta-meta">
             <a:extLst xmlns:a="http://schemas.openxmlformats.org/drawingml/2006/main">
               <a:ext uri="{FF2B5EF4-FFF2-40B4-BE49-F238E27FC236}">
-                <a16:creationId xmlns:a16="http://schemas.microsoft.com/office/drawing/2014/main" id="{57765856-B71A-4FAD-8D19-3E08A96667B2}"/>
+                <a16:creationId xmlns:a16="http://schemas.microsoft.com/office/drawing/2014/main" id="{599ADBA7-F34F-4970-8BE6-43EC94BBE93D}"/>
               </a:ext>
             </a:extLst>
           </p:cNvPr>
@@ -11868,7 +12804,7 @@
           <p:cNvPr id="4" name="eyebrow">
             <a:extLst xmlns:a="http://schemas.openxmlformats.org/drawingml/2006/main">
               <a:ext uri="{FF2B5EF4-FFF2-40B4-BE49-F238E27FC236}">
-                <a16:creationId xmlns:a16="http://schemas.microsoft.com/office/drawing/2014/main" id="{9C95AB62-9AC6-4AD0-8225-E7F2B82B0234}"/>
+                <a16:creationId xmlns:a16="http://schemas.microsoft.com/office/drawing/2014/main" id="{8FD5C7AA-983E-4850-A05D-BB2D85214834}"/>
               </a:ext>
             </a:extLst>
           </p:cNvPr>
@@ -11916,10 +12852,69 @@
       </p:sp>
       <p:sp>
         <p:nvSpPr>
-          <p:cNvPr id="5" name="footer-rule">
-            <a:extLst xmlns:a="http://schemas.openxmlformats.org/drawingml/2006/main">
-              <a:ext uri="{FF2B5EF4-FFF2-40B4-BE49-F238E27FC236}">
-                <a16:creationId xmlns:a16="http://schemas.microsoft.com/office/drawing/2014/main" id="{77106AA0-8028-45CF-BD60-8304CA7AD05F}"/>
+          <p:cNvPr id="5" name="rescue-point-logo-background">
+            <a:extLst xmlns:a="http://schemas.openxmlformats.org/drawingml/2006/main">
+              <a:ext uri="{FF2B5EF4-FFF2-40B4-BE49-F238E27FC236}">
+                <a16:creationId xmlns:a16="http://schemas.microsoft.com/office/drawing/2014/main" id="{7F6EA5A5-DF7C-4D60-A71E-828F48E29BEA}"/>
+              </a:ext>
+            </a:extLst>
+          </p:cNvPr>
+          <p:cNvSpPr>
+            <a:spLocks xmlns:a="http://schemas.openxmlformats.org/drawingml/2006/main" noGrp="1"/>
+          </p:cNvSpPr>
+          <p:nvPr/>
+        </p:nvSpPr>
+        <p:spPr>
+          <a:xfrm xmlns:a="http://schemas.openxmlformats.org/drawingml/2006/main">
+            <a:off x="9772650" y="133350"/>
+            <a:ext cx="1733550" cy="457200"/>
+          </a:xfrm>
+          <a:prstGeom xmlns:a="http://schemas.openxmlformats.org/drawingml/2006/main" prst="roundRect">
+            <a:avLst>
+              <a:gd name="adj" fmla="val 16667"/>
+            </a:avLst>
+          </a:prstGeom>
+          <a:solidFill xmlns:a="http://schemas.openxmlformats.org/drawingml/2006/main">
+            <a:srgbClr val="06142E"/>
+          </a:solidFill>
+          <a:ln xmlns:a="http://schemas.openxmlformats.org/drawingml/2006/main" w="9525">
+            <a:solidFill>
+              <a:srgbClr val="1EC5FF">
+                <a:alpha val="33333"/>
+              </a:srgbClr>
+            </a:solidFill>
+            <a:prstDash val="solid"/>
+          </a:ln>
+        </p:spPr>
+      </p:sp>
+      <p:pic>
+        <p:nvPicPr>
+          <p:cNvPr id="17" name="" descr="Figura oficial da documentação dbt usada para explicar: PRÓXIMO PASSO — Compare full e incremental e prove igualdade antes de falar em economia.."/>
+          <p:cNvPicPr>
+            <a:picLocks xmlns:a="http://schemas.openxmlformats.org/drawingml/2006/main" noChangeAspect="1"/>
+          </p:cNvPicPr>
+          <p:nvPr/>
+        </p:nvPicPr>
+        <p:blipFill>
+          <a:blip xmlns:r="http://schemas.openxmlformats.org/officeDocument/2006/relationships" xmlns:a="http://schemas.openxmlformats.org/drawingml/2006/main" r:embed="Rab71f4af0f134c21"/>
+          <a:stretch xmlns:a="http://schemas.openxmlformats.org/drawingml/2006/main"/>
+        </p:blipFill>
+        <p:spPr>
+          <a:xfrm xmlns:a="http://schemas.openxmlformats.org/drawingml/2006/main">
+            <a:off x="9893718" y="209550"/>
+            <a:ext cx="1491414" cy="323850"/>
+          </a:xfrm>
+          <a:prstGeom xmlns:a="http://schemas.openxmlformats.org/drawingml/2006/main" prst="rect">
+            <a:avLst/>
+          </a:prstGeom>
+        </p:spPr>
+      </p:pic>
+      <p:sp>
+        <p:nvSpPr>
+          <p:cNvPr id="7" name="footer-rule">
+            <a:extLst xmlns:a="http://schemas.openxmlformats.org/drawingml/2006/main">
+              <a:ext uri="{FF2B5EF4-FFF2-40B4-BE49-F238E27FC236}">
+                <a16:creationId xmlns:a16="http://schemas.microsoft.com/office/drawing/2014/main" id="{D7F9F463-D591-42D9-984E-E05BC63CD926}"/>
               </a:ext>
             </a:extLst>
           </p:cNvPr>
@@ -11949,10 +12944,10 @@
       </p:sp>
       <p:sp>
         <p:nvSpPr>
-          <p:cNvPr id="6" name="footer">
-            <a:extLst xmlns:a="http://schemas.openxmlformats.org/drawingml/2006/main">
-              <a:ext uri="{FF2B5EF4-FFF2-40B4-BE49-F238E27FC236}">
-                <a16:creationId xmlns:a16="http://schemas.microsoft.com/office/drawing/2014/main" id="{18741BCB-EE46-42C3-8AA5-12E9F2F2DFD1}"/>
+          <p:cNvPr id="8" name="footer">
+            <a:extLst xmlns:a="http://schemas.openxmlformats.org/drawingml/2006/main">
+              <a:ext uri="{FF2B5EF4-FFF2-40B4-BE49-F238E27FC236}">
+                <a16:creationId xmlns:a16="http://schemas.microsoft.com/office/drawing/2014/main" id="{029D0700-AC28-430A-A347-B737D90A34C0}"/>
               </a:ext>
             </a:extLst>
           </p:cNvPr>
@@ -12004,10 +12999,10 @@
       </p:sp>
       <p:sp>
         <p:nvSpPr>
-          <p:cNvPr id="7" name="page-number">
-            <a:extLst xmlns:a="http://schemas.openxmlformats.org/drawingml/2006/main">
-              <a:ext uri="{FF2B5EF4-FFF2-40B4-BE49-F238E27FC236}">
-                <a16:creationId xmlns:a16="http://schemas.microsoft.com/office/drawing/2014/main" id="{D6228019-C2D8-4EA1-9135-FFDA6478831B}"/>
+          <p:cNvPr id="9" name="page-number">
+            <a:extLst xmlns:a="http://schemas.openxmlformats.org/drawingml/2006/main">
+              <a:ext uri="{FF2B5EF4-FFF2-40B4-BE49-F238E27FC236}">
+                <a16:creationId xmlns:a16="http://schemas.microsoft.com/office/drawing/2014/main" id="{AB357DF4-B888-419E-A6D0-C5B0A04644B2}"/>
               </a:ext>
             </a:extLst>
           </p:cNvPr>
@@ -12060,7 +13055,7 @@
     </p:spTree>
     <p:extLst>
       <p:ext uri="{BB962C8B-B14F-4D97-AF65-F5344CB8AC3E}">
-        <p14:creationId xmlns:p14="http://schemas.microsoft.com/office/powerpoint/2010/main" val="317182892"/>
+        <p14:creationId xmlns:p14="http://schemas.microsoft.com/office/powerpoint/2010/main" val="1055191086"/>
       </p:ext>
     </p:extLst>
   </p:cSld>
@@ -12096,10 +13091,10 @@
       </p:grpSpPr>
       <p:sp>
         <p:nvSpPr>
-          <p:cNvPr id="14" name="slide-title">
-            <a:extLst xmlns:a="http://schemas.openxmlformats.org/drawingml/2006/main">
-              <a:ext uri="{FF2B5EF4-FFF2-40B4-BE49-F238E27FC236}">
-                <a16:creationId xmlns:a16="http://schemas.microsoft.com/office/drawing/2014/main" id="{9420B0CA-A47C-4526-B8B7-F73D8F0329DE}"/>
+          <p:cNvPr id="16" name="slide-title">
+            <a:extLst xmlns:a="http://schemas.openxmlformats.org/drawingml/2006/main">
+              <a:ext uri="{FF2B5EF4-FFF2-40B4-BE49-F238E27FC236}">
+                <a16:creationId xmlns:a16="http://schemas.microsoft.com/office/drawing/2014/main" id="{0BD01879-83D4-4BD3-BF3D-5C04E5EEE9DD}"/>
               </a:ext>
             </a:extLst>
           </p:cNvPr>
@@ -12150,7 +13145,7 @@
           <p:cNvPr id="2" name="step-num-1">
             <a:extLst xmlns:a="http://schemas.openxmlformats.org/drawingml/2006/main">
               <a:ext uri="{FF2B5EF4-FFF2-40B4-BE49-F238E27FC236}">
-                <a16:creationId xmlns:a16="http://schemas.microsoft.com/office/drawing/2014/main" id="{887B24F4-A6FF-4DFA-9888-C564CB6598CA}"/>
+                <a16:creationId xmlns:a16="http://schemas.microsoft.com/office/drawing/2014/main" id="{2E494A49-17D0-4007-95DF-6E8BFF8A0900}"/>
               </a:ext>
             </a:extLst>
           </p:cNvPr>
@@ -12201,7 +13196,7 @@
           <p:cNvPr id="3" name="step-label-1">
             <a:extLst xmlns:a="http://schemas.openxmlformats.org/drawingml/2006/main">
               <a:ext uri="{FF2B5EF4-FFF2-40B4-BE49-F238E27FC236}">
-                <a16:creationId xmlns:a16="http://schemas.microsoft.com/office/drawing/2014/main" id="{C2949C5E-7983-40E8-8061-15F2B94CA408}"/>
+                <a16:creationId xmlns:a16="http://schemas.microsoft.com/office/drawing/2014/main" id="{506EFC47-12E1-47FE-9A3B-8F207A667338}"/>
               </a:ext>
             </a:extLst>
           </p:cNvPr>
@@ -12252,7 +13247,7 @@
           <p:cNvPr id="4" name="step-line-1">
             <a:extLst xmlns:a="http://schemas.openxmlformats.org/drawingml/2006/main">
               <a:ext uri="{FF2B5EF4-FFF2-40B4-BE49-F238E27FC236}">
-                <a16:creationId xmlns:a16="http://schemas.microsoft.com/office/drawing/2014/main" id="{5FCEE315-5809-4C13-9198-2E42C625DFD8}"/>
+                <a16:creationId xmlns:a16="http://schemas.microsoft.com/office/drawing/2014/main" id="{8722C23F-7608-4F00-B3DB-5941CAFA6DE4}"/>
               </a:ext>
             </a:extLst>
           </p:cNvPr>
@@ -12283,7 +13278,7 @@
           <p:cNvPr id="5" name="step-num-2">
             <a:extLst xmlns:a="http://schemas.openxmlformats.org/drawingml/2006/main">
               <a:ext uri="{FF2B5EF4-FFF2-40B4-BE49-F238E27FC236}">
-                <a16:creationId xmlns:a16="http://schemas.microsoft.com/office/drawing/2014/main" id="{7C393D53-C7A1-454C-B9CE-F58770D5481A}"/>
+                <a16:creationId xmlns:a16="http://schemas.microsoft.com/office/drawing/2014/main" id="{2797BE57-EE22-439A-A873-73428BD494C8}"/>
               </a:ext>
             </a:extLst>
           </p:cNvPr>
@@ -12334,7 +13329,7 @@
           <p:cNvPr id="6" name="step-label-2">
             <a:extLst xmlns:a="http://schemas.openxmlformats.org/drawingml/2006/main">
               <a:ext uri="{FF2B5EF4-FFF2-40B4-BE49-F238E27FC236}">
-                <a16:creationId xmlns:a16="http://schemas.microsoft.com/office/drawing/2014/main" id="{00AC1751-3706-473D-B2AC-0544BA1CB344}"/>
+                <a16:creationId xmlns:a16="http://schemas.microsoft.com/office/drawing/2014/main" id="{B9BEAC34-EBB2-4430-98A5-BEE0921C12C8}"/>
               </a:ext>
             </a:extLst>
           </p:cNvPr>
@@ -12385,7 +13380,7 @@
           <p:cNvPr id="7" name="step-line-2">
             <a:extLst xmlns:a="http://schemas.openxmlformats.org/drawingml/2006/main">
               <a:ext uri="{FF2B5EF4-FFF2-40B4-BE49-F238E27FC236}">
-                <a16:creationId xmlns:a16="http://schemas.microsoft.com/office/drawing/2014/main" id="{196AE5D3-05E5-4F77-8606-B4116B78D941}"/>
+                <a16:creationId xmlns:a16="http://schemas.microsoft.com/office/drawing/2014/main" id="{C6401E3B-90FE-4E9B-A130-B46DFBED9265}"/>
               </a:ext>
             </a:extLst>
           </p:cNvPr>
@@ -12416,7 +13411,7 @@
           <p:cNvPr id="8" name="step-num-3">
             <a:extLst xmlns:a="http://schemas.openxmlformats.org/drawingml/2006/main">
               <a:ext uri="{FF2B5EF4-FFF2-40B4-BE49-F238E27FC236}">
-                <a16:creationId xmlns:a16="http://schemas.microsoft.com/office/drawing/2014/main" id="{D8550867-9771-4BB9-8609-8DF0E558BBDA}"/>
+                <a16:creationId xmlns:a16="http://schemas.microsoft.com/office/drawing/2014/main" id="{AA27E098-3E30-4455-97A9-C427A76531A7}"/>
               </a:ext>
             </a:extLst>
           </p:cNvPr>
@@ -12467,7 +13462,7 @@
           <p:cNvPr id="9" name="step-label-3">
             <a:extLst xmlns:a="http://schemas.openxmlformats.org/drawingml/2006/main">
               <a:ext uri="{FF2B5EF4-FFF2-40B4-BE49-F238E27FC236}">
-                <a16:creationId xmlns:a16="http://schemas.microsoft.com/office/drawing/2014/main" id="{CC3BA0C7-7768-4D55-8F20-8777D142E78A}"/>
+                <a16:creationId xmlns:a16="http://schemas.microsoft.com/office/drawing/2014/main" id="{3327B077-38D3-4DDC-A3E4-87CE55023E12}"/>
               </a:ext>
             </a:extLst>
           </p:cNvPr>
@@ -12518,7 +13513,7 @@
           <p:cNvPr id="10" name="eyebrow">
             <a:extLst xmlns:a="http://schemas.openxmlformats.org/drawingml/2006/main">
               <a:ext uri="{FF2B5EF4-FFF2-40B4-BE49-F238E27FC236}">
-                <a16:creationId xmlns:a16="http://schemas.microsoft.com/office/drawing/2014/main" id="{0E298E92-D250-4712-BD02-48FB20786844}"/>
+                <a16:creationId xmlns:a16="http://schemas.microsoft.com/office/drawing/2014/main" id="{81B0112B-6E26-4799-8E66-A591CE0C3690}"/>
               </a:ext>
             </a:extLst>
           </p:cNvPr>
@@ -12566,10 +13561,69 @@
       </p:sp>
       <p:sp>
         <p:nvSpPr>
-          <p:cNvPr id="11" name="footer-rule">
-            <a:extLst xmlns:a="http://schemas.openxmlformats.org/drawingml/2006/main">
-              <a:ext uri="{FF2B5EF4-FFF2-40B4-BE49-F238E27FC236}">
-                <a16:creationId xmlns:a16="http://schemas.microsoft.com/office/drawing/2014/main" id="{D66F74DF-4B23-4BFE-9E99-E6A690B6E622}"/>
+          <p:cNvPr id="11" name="rescue-point-logo-background">
+            <a:extLst xmlns:a="http://schemas.openxmlformats.org/drawingml/2006/main">
+              <a:ext uri="{FF2B5EF4-FFF2-40B4-BE49-F238E27FC236}">
+                <a16:creationId xmlns:a16="http://schemas.microsoft.com/office/drawing/2014/main" id="{4B1714C3-440F-4B36-A316-8AFB43B16044}"/>
+              </a:ext>
+            </a:extLst>
+          </p:cNvPr>
+          <p:cNvSpPr>
+            <a:spLocks xmlns:a="http://schemas.openxmlformats.org/drawingml/2006/main" noGrp="1"/>
+          </p:cNvSpPr>
+          <p:nvPr/>
+        </p:nvSpPr>
+        <p:spPr>
+          <a:xfrm xmlns:a="http://schemas.openxmlformats.org/drawingml/2006/main">
+            <a:off x="9772650" y="133350"/>
+            <a:ext cx="1733550" cy="457200"/>
+          </a:xfrm>
+          <a:prstGeom xmlns:a="http://schemas.openxmlformats.org/drawingml/2006/main" prst="roundRect">
+            <a:avLst>
+              <a:gd name="adj" fmla="val 16667"/>
+            </a:avLst>
+          </a:prstGeom>
+          <a:solidFill xmlns:a="http://schemas.openxmlformats.org/drawingml/2006/main">
+            <a:srgbClr val="06142E"/>
+          </a:solidFill>
+          <a:ln xmlns:a="http://schemas.openxmlformats.org/drawingml/2006/main" w="9525">
+            <a:solidFill>
+              <a:srgbClr val="1EC5FF">
+                <a:alpha val="33333"/>
+              </a:srgbClr>
+            </a:solidFill>
+            <a:prstDash val="solid"/>
+          </a:ln>
+        </p:spPr>
+      </p:sp>
+      <p:pic>
+        <p:nvPicPr>
+          <p:cNvPr id="29" name="" descr="Figura oficial da documentação dbt usada para explicar: Ao final, você consegue... — 01."/>
+          <p:cNvPicPr>
+            <a:picLocks xmlns:a="http://schemas.openxmlformats.org/drawingml/2006/main" noChangeAspect="1"/>
+          </p:cNvPicPr>
+          <p:nvPr/>
+        </p:nvPicPr>
+        <p:blipFill>
+          <a:blip xmlns:r="http://schemas.openxmlformats.org/officeDocument/2006/relationships" xmlns:a="http://schemas.openxmlformats.org/drawingml/2006/main" r:embed="R8b439e46207145c3"/>
+          <a:stretch xmlns:a="http://schemas.openxmlformats.org/drawingml/2006/main"/>
+        </p:blipFill>
+        <p:spPr>
+          <a:xfrm xmlns:a="http://schemas.openxmlformats.org/drawingml/2006/main">
+            <a:off x="9893718" y="209550"/>
+            <a:ext cx="1491414" cy="323850"/>
+          </a:xfrm>
+          <a:prstGeom xmlns:a="http://schemas.openxmlformats.org/drawingml/2006/main" prst="rect">
+            <a:avLst/>
+          </a:prstGeom>
+        </p:spPr>
+      </p:pic>
+      <p:sp>
+        <p:nvSpPr>
+          <p:cNvPr id="13" name="footer-rule">
+            <a:extLst xmlns:a="http://schemas.openxmlformats.org/drawingml/2006/main">
+              <a:ext uri="{FF2B5EF4-FFF2-40B4-BE49-F238E27FC236}">
+                <a16:creationId xmlns:a16="http://schemas.microsoft.com/office/drawing/2014/main" id="{2D14FD14-C7E6-4D8A-9F08-91FF1AF812DB}"/>
               </a:ext>
             </a:extLst>
           </p:cNvPr>
@@ -12599,10 +13653,10 @@
       </p:sp>
       <p:sp>
         <p:nvSpPr>
-          <p:cNvPr id="12" name="footer">
-            <a:extLst xmlns:a="http://schemas.openxmlformats.org/drawingml/2006/main">
-              <a:ext uri="{FF2B5EF4-FFF2-40B4-BE49-F238E27FC236}">
-                <a16:creationId xmlns:a16="http://schemas.microsoft.com/office/drawing/2014/main" id="{C6191C9D-217E-4C13-BAFB-875374D4A7D9}"/>
+          <p:cNvPr id="14" name="footer">
+            <a:extLst xmlns:a="http://schemas.openxmlformats.org/drawingml/2006/main">
+              <a:ext uri="{FF2B5EF4-FFF2-40B4-BE49-F238E27FC236}">
+                <a16:creationId xmlns:a16="http://schemas.microsoft.com/office/drawing/2014/main" id="{954043C1-D750-4D86-A96F-E89F956932A6}"/>
               </a:ext>
             </a:extLst>
           </p:cNvPr>
@@ -12654,10 +13708,10 @@
       </p:sp>
       <p:sp>
         <p:nvSpPr>
-          <p:cNvPr id="13" name="page-number">
-            <a:extLst xmlns:a="http://schemas.openxmlformats.org/drawingml/2006/main">
-              <a:ext uri="{FF2B5EF4-FFF2-40B4-BE49-F238E27FC236}">
-                <a16:creationId xmlns:a16="http://schemas.microsoft.com/office/drawing/2014/main" id="{6B189936-EF91-4E03-B679-317DBE29AB2B}"/>
+          <p:cNvPr id="15" name="page-number">
+            <a:extLst xmlns:a="http://schemas.openxmlformats.org/drawingml/2006/main">
+              <a:ext uri="{FF2B5EF4-FFF2-40B4-BE49-F238E27FC236}">
+                <a16:creationId xmlns:a16="http://schemas.microsoft.com/office/drawing/2014/main" id="{99996F1D-4C3C-4C6D-9674-90BF94852C67}"/>
               </a:ext>
             </a:extLst>
           </p:cNvPr>
@@ -12710,7 +13764,7 @@
     </p:spTree>
     <p:extLst>
       <p:ext uri="{BB962C8B-B14F-4D97-AF65-F5344CB8AC3E}">
-        <p14:creationId xmlns:p14="http://schemas.microsoft.com/office/powerpoint/2010/main" val="1858662613"/>
+        <p14:creationId xmlns:p14="http://schemas.microsoft.com/office/powerpoint/2010/main" val="1018216146"/>
       </p:ext>
     </p:extLst>
   </p:cSld>
@@ -12746,10 +13800,10 @@
       </p:grpSpPr>
       <p:sp>
         <p:nvSpPr>
-          <p:cNvPr id="11" name="slide-title">
-            <a:extLst xmlns:a="http://schemas.openxmlformats.org/drawingml/2006/main">
-              <a:ext uri="{FF2B5EF4-FFF2-40B4-BE49-F238E27FC236}">
-                <a16:creationId xmlns:a16="http://schemas.microsoft.com/office/drawing/2014/main" id="{8D0D3CDA-5E2E-4912-9792-C3423343ACEC}"/>
+          <p:cNvPr id="13" name="slide-title">
+            <a:extLst xmlns:a="http://schemas.openxmlformats.org/drawingml/2006/main">
+              <a:ext uri="{FF2B5EF4-FFF2-40B4-BE49-F238E27FC236}">
+                <a16:creationId xmlns:a16="http://schemas.microsoft.com/office/drawing/2014/main" id="{16B0D549-0C9C-42AE-9BA8-5DA87D32FC06}"/>
               </a:ext>
             </a:extLst>
           </p:cNvPr>
@@ -12800,7 +13854,7 @@
           <p:cNvPr id="2" name="slide-subtitle">
             <a:extLst xmlns:a="http://schemas.openxmlformats.org/drawingml/2006/main">
               <a:ext uri="{FF2B5EF4-FFF2-40B4-BE49-F238E27FC236}">
-                <a16:creationId xmlns:a16="http://schemas.microsoft.com/office/drawing/2014/main" id="{8CEFF357-3633-4FBA-A636-9D2E0F567E1A}"/>
+                <a16:creationId xmlns:a16="http://schemas.microsoft.com/office/drawing/2014/main" id="{D759AB3B-8194-4929-BA76-2D0B7D17559F}"/>
               </a:ext>
             </a:extLst>
           </p:cNvPr>
@@ -12851,7 +13905,7 @@
           <p:cNvPr id="3" name="bullets">
             <a:extLst xmlns:a="http://schemas.openxmlformats.org/drawingml/2006/main">
               <a:ext uri="{FF2B5EF4-FFF2-40B4-BE49-F238E27FC236}">
-                <a16:creationId xmlns:a16="http://schemas.microsoft.com/office/drawing/2014/main" id="{CCC18B6E-6D57-41A3-92A7-0E21BF542B2C}"/>
+                <a16:creationId xmlns:a16="http://schemas.microsoft.com/office/drawing/2014/main" id="{CFB1DB5A-9163-446F-8AF8-2ABB4E279CE3}"/>
               </a:ext>
             </a:extLst>
           </p:cNvPr>
@@ -12938,7 +13992,7 @@
           <p:cNvPr id="4" name="ambient-glow">
             <a:extLst xmlns:a="http://schemas.openxmlformats.org/drawingml/2006/main">
               <a:ext uri="{FF2B5EF4-FFF2-40B4-BE49-F238E27FC236}">
-                <a16:creationId xmlns:a16="http://schemas.microsoft.com/office/drawing/2014/main" id="{79C049D0-BAFB-4E4A-920D-5EC22AA66929}"/>
+                <a16:creationId xmlns:a16="http://schemas.microsoft.com/office/drawing/2014/main" id="{51191881-2784-486F-A5CC-DCB0878656B1}"/>
               </a:ext>
             </a:extLst>
           </p:cNvPr>
@@ -12975,7 +14029,7 @@
           <p:cNvPr id="5" name="ambient-core">
             <a:extLst xmlns:a="http://schemas.openxmlformats.org/drawingml/2006/main">
               <a:ext uri="{FF2B5EF4-FFF2-40B4-BE49-F238E27FC236}">
-                <a16:creationId xmlns:a16="http://schemas.microsoft.com/office/drawing/2014/main" id="{8C8D476D-B588-4D90-8D04-AA2A6A87835B}"/>
+                <a16:creationId xmlns:a16="http://schemas.microsoft.com/office/drawing/2014/main" id="{CEE046E0-E8B6-47FE-8815-F8EA67A2037C}"/>
               </a:ext>
             </a:extLst>
           </p:cNvPr>
@@ -13012,7 +14066,7 @@
           <p:cNvPr id="6" name="section-number">
             <a:extLst xmlns:a="http://schemas.openxmlformats.org/drawingml/2006/main">
               <a:ext uri="{FF2B5EF4-FFF2-40B4-BE49-F238E27FC236}">
-                <a16:creationId xmlns:a16="http://schemas.microsoft.com/office/drawing/2014/main" id="{8B6FCDF4-D3EB-493D-8F46-AD152FB63F86}"/>
+                <a16:creationId xmlns:a16="http://schemas.microsoft.com/office/drawing/2014/main" id="{83E17141-4979-46B8-BA85-A739F2B10BDA}"/>
               </a:ext>
             </a:extLst>
           </p:cNvPr>
@@ -13063,7 +14117,7 @@
           <p:cNvPr id="7" name="eyebrow">
             <a:extLst xmlns:a="http://schemas.openxmlformats.org/drawingml/2006/main">
               <a:ext uri="{FF2B5EF4-FFF2-40B4-BE49-F238E27FC236}">
-                <a16:creationId xmlns:a16="http://schemas.microsoft.com/office/drawing/2014/main" id="{D3C8347A-2788-4F95-8AEA-2AB5AEE72F44}"/>
+                <a16:creationId xmlns:a16="http://schemas.microsoft.com/office/drawing/2014/main" id="{6960B3C4-9589-46A6-B725-56262037ED6E}"/>
               </a:ext>
             </a:extLst>
           </p:cNvPr>
@@ -13111,10 +14165,69 @@
       </p:sp>
       <p:sp>
         <p:nvSpPr>
-          <p:cNvPr id="8" name="footer-rule">
-            <a:extLst xmlns:a="http://schemas.openxmlformats.org/drawingml/2006/main">
-              <a:ext uri="{FF2B5EF4-FFF2-40B4-BE49-F238E27FC236}">
-                <a16:creationId xmlns:a16="http://schemas.microsoft.com/office/drawing/2014/main" id="{3FB32D46-33A6-49E2-AA40-11DBABCD5410}"/>
+          <p:cNvPr id="8" name="rescue-point-logo-background">
+            <a:extLst xmlns:a="http://schemas.openxmlformats.org/drawingml/2006/main">
+              <a:ext uri="{FF2B5EF4-FFF2-40B4-BE49-F238E27FC236}">
+                <a16:creationId xmlns:a16="http://schemas.microsoft.com/office/drawing/2014/main" id="{82E40D54-DFAC-46A9-9E5F-F9494395EFD9}"/>
+              </a:ext>
+            </a:extLst>
+          </p:cNvPr>
+          <p:cNvSpPr>
+            <a:spLocks xmlns:a="http://schemas.openxmlformats.org/drawingml/2006/main" noGrp="1"/>
+          </p:cNvSpPr>
+          <p:nvPr/>
+        </p:nvSpPr>
+        <p:spPr>
+          <a:xfrm xmlns:a="http://schemas.openxmlformats.org/drawingml/2006/main">
+            <a:off x="9772650" y="133350"/>
+            <a:ext cx="1733550" cy="457200"/>
+          </a:xfrm>
+          <a:prstGeom xmlns:a="http://schemas.openxmlformats.org/drawingml/2006/main" prst="roundRect">
+            <a:avLst>
+              <a:gd name="adj" fmla="val 16667"/>
+            </a:avLst>
+          </a:prstGeom>
+          <a:solidFill xmlns:a="http://schemas.openxmlformats.org/drawingml/2006/main">
+            <a:srgbClr val="06142E"/>
+          </a:solidFill>
+          <a:ln xmlns:a="http://schemas.openxmlformats.org/drawingml/2006/main" w="9525">
+            <a:solidFill>
+              <a:srgbClr val="1EC5FF">
+                <a:alpha val="33333"/>
+              </a:srgbClr>
+            </a:solidFill>
+            <a:prstDash val="solid"/>
+          </a:ln>
+        </p:spPr>
+      </p:sp>
+      <p:pic>
+        <p:nvPicPr>
+          <p:cNvPr id="23" name="" descr="Figura oficial da documentação dbt usada para explicar: Custo precisa de uma equação — Compute × tempo não é o único componente.."/>
+          <p:cNvPicPr>
+            <a:picLocks xmlns:a="http://schemas.openxmlformats.org/drawingml/2006/main" noChangeAspect="1"/>
+          </p:cNvPicPr>
+          <p:nvPr/>
+        </p:nvPicPr>
+        <p:blipFill>
+          <a:blip xmlns:r="http://schemas.openxmlformats.org/officeDocument/2006/relationships" xmlns:a="http://schemas.openxmlformats.org/drawingml/2006/main" r:embed="R6fc7e10597e64737"/>
+          <a:stretch xmlns:a="http://schemas.openxmlformats.org/drawingml/2006/main"/>
+        </p:blipFill>
+        <p:spPr>
+          <a:xfrm xmlns:a="http://schemas.openxmlformats.org/drawingml/2006/main">
+            <a:off x="9893718" y="209550"/>
+            <a:ext cx="1491414" cy="323850"/>
+          </a:xfrm>
+          <a:prstGeom xmlns:a="http://schemas.openxmlformats.org/drawingml/2006/main" prst="rect">
+            <a:avLst/>
+          </a:prstGeom>
+        </p:spPr>
+      </p:pic>
+      <p:sp>
+        <p:nvSpPr>
+          <p:cNvPr id="10" name="footer-rule">
+            <a:extLst xmlns:a="http://schemas.openxmlformats.org/drawingml/2006/main">
+              <a:ext uri="{FF2B5EF4-FFF2-40B4-BE49-F238E27FC236}">
+                <a16:creationId xmlns:a16="http://schemas.microsoft.com/office/drawing/2014/main" id="{28E36941-00E7-40CA-971C-C265993EAA9D}"/>
               </a:ext>
             </a:extLst>
           </p:cNvPr>
@@ -13144,10 +14257,10 @@
       </p:sp>
       <p:sp>
         <p:nvSpPr>
-          <p:cNvPr id="9" name="footer">
-            <a:extLst xmlns:a="http://schemas.openxmlformats.org/drawingml/2006/main">
-              <a:ext uri="{FF2B5EF4-FFF2-40B4-BE49-F238E27FC236}">
-                <a16:creationId xmlns:a16="http://schemas.microsoft.com/office/drawing/2014/main" id="{38B7B08C-FA32-4986-A1E6-3E6A42B60E77}"/>
+          <p:cNvPr id="11" name="footer">
+            <a:extLst xmlns:a="http://schemas.openxmlformats.org/drawingml/2006/main">
+              <a:ext uri="{FF2B5EF4-FFF2-40B4-BE49-F238E27FC236}">
+                <a16:creationId xmlns:a16="http://schemas.microsoft.com/office/drawing/2014/main" id="{3C3363AA-FD71-4578-B3E2-941D9CBB8149}"/>
               </a:ext>
             </a:extLst>
           </p:cNvPr>
@@ -13199,10 +14312,10 @@
       </p:sp>
       <p:sp>
         <p:nvSpPr>
-          <p:cNvPr id="10" name="page-number">
-            <a:extLst xmlns:a="http://schemas.openxmlformats.org/drawingml/2006/main">
-              <a:ext uri="{FF2B5EF4-FFF2-40B4-BE49-F238E27FC236}">
-                <a16:creationId xmlns:a16="http://schemas.microsoft.com/office/drawing/2014/main" id="{C38D9E55-7F02-4B0D-88E0-EBEBD87BBD1D}"/>
+          <p:cNvPr id="12" name="page-number">
+            <a:extLst xmlns:a="http://schemas.openxmlformats.org/drawingml/2006/main">
+              <a:ext uri="{FF2B5EF4-FFF2-40B4-BE49-F238E27FC236}">
+                <a16:creationId xmlns:a16="http://schemas.microsoft.com/office/drawing/2014/main" id="{9B6EFC87-60BD-4D6A-AAB0-806B06D7671B}"/>
               </a:ext>
             </a:extLst>
           </p:cNvPr>
@@ -13255,7 +14368,7 @@
     </p:spTree>
     <p:extLst>
       <p:ext uri="{BB962C8B-B14F-4D97-AF65-F5344CB8AC3E}">
-        <p14:creationId xmlns:p14="http://schemas.microsoft.com/office/powerpoint/2010/main" val="1039883692"/>
+        <p14:creationId xmlns:p14="http://schemas.microsoft.com/office/powerpoint/2010/main" val="662063872"/>
       </p:ext>
     </p:extLst>
   </p:cSld>
@@ -13283,10 +14396,10 @@
       </p:grpSpPr>
       <p:sp>
         <p:nvSpPr>
-          <p:cNvPr id="11" name="slide-title">
-            <a:extLst xmlns:a="http://schemas.openxmlformats.org/drawingml/2006/main">
-              <a:ext uri="{FF2B5EF4-FFF2-40B4-BE49-F238E27FC236}">
-                <a16:creationId xmlns:a16="http://schemas.microsoft.com/office/drawing/2014/main" id="{903B7813-2B56-44FF-A2BC-2CD949889202}"/>
+          <p:cNvPr id="13" name="slide-title">
+            <a:extLst xmlns:a="http://schemas.openxmlformats.org/drawingml/2006/main">
+              <a:ext uri="{FF2B5EF4-FFF2-40B4-BE49-F238E27FC236}">
+                <a16:creationId xmlns:a16="http://schemas.microsoft.com/office/drawing/2014/main" id="{060F48B6-1D22-432F-BCE7-140950D15956}"/>
               </a:ext>
             </a:extLst>
           </p:cNvPr>
@@ -13337,7 +14450,7 @@
           <p:cNvPr id="2" name="slide-subtitle">
             <a:extLst xmlns:a="http://schemas.openxmlformats.org/drawingml/2006/main">
               <a:ext uri="{FF2B5EF4-FFF2-40B4-BE49-F238E27FC236}">
-                <a16:creationId xmlns:a16="http://schemas.microsoft.com/office/drawing/2014/main" id="{4AF8C16D-BAD7-4A0A-B845-B188F462FFD9}"/>
+                <a16:creationId xmlns:a16="http://schemas.microsoft.com/office/drawing/2014/main" id="{59AA1004-1388-4AF7-8779-363856A167E8}"/>
               </a:ext>
             </a:extLst>
           </p:cNvPr>
@@ -13388,7 +14501,7 @@
           <p:cNvPr id="3" name="bullets">
             <a:extLst xmlns:a="http://schemas.openxmlformats.org/drawingml/2006/main">
               <a:ext uri="{FF2B5EF4-FFF2-40B4-BE49-F238E27FC236}">
-                <a16:creationId xmlns:a16="http://schemas.microsoft.com/office/drawing/2014/main" id="{528D700F-CA00-425B-8BDD-E8528753E5B3}"/>
+                <a16:creationId xmlns:a16="http://schemas.microsoft.com/office/drawing/2014/main" id="{EFB36FDE-9E8A-4D13-BA4C-BB270717F130}"/>
               </a:ext>
             </a:extLst>
           </p:cNvPr>
@@ -13475,7 +14588,7 @@
           <p:cNvPr id="4" name="ambient-glow">
             <a:extLst xmlns:a="http://schemas.openxmlformats.org/drawingml/2006/main">
               <a:ext uri="{FF2B5EF4-FFF2-40B4-BE49-F238E27FC236}">
-                <a16:creationId xmlns:a16="http://schemas.microsoft.com/office/drawing/2014/main" id="{29ADC550-EC7E-4938-816C-96A14E65D4CB}"/>
+                <a16:creationId xmlns:a16="http://schemas.microsoft.com/office/drawing/2014/main" id="{ADF999E8-825D-48F6-BA69-BF04DED7BAB0}"/>
               </a:ext>
             </a:extLst>
           </p:cNvPr>
@@ -13512,7 +14625,7 @@
           <p:cNvPr id="5" name="ambient-core">
             <a:extLst xmlns:a="http://schemas.openxmlformats.org/drawingml/2006/main">
               <a:ext uri="{FF2B5EF4-FFF2-40B4-BE49-F238E27FC236}">
-                <a16:creationId xmlns:a16="http://schemas.microsoft.com/office/drawing/2014/main" id="{8F91BE21-D1A5-46C6-9A8B-4B9DA6DBBBF6}"/>
+                <a16:creationId xmlns:a16="http://schemas.microsoft.com/office/drawing/2014/main" id="{9803B4CD-B1FA-494F-B806-6A7197E0C235}"/>
               </a:ext>
             </a:extLst>
           </p:cNvPr>
@@ -13549,7 +14662,7 @@
           <p:cNvPr id="6" name="section-number">
             <a:extLst xmlns:a="http://schemas.openxmlformats.org/drawingml/2006/main">
               <a:ext uri="{FF2B5EF4-FFF2-40B4-BE49-F238E27FC236}">
-                <a16:creationId xmlns:a16="http://schemas.microsoft.com/office/drawing/2014/main" id="{762E5C7B-B205-4169-B7FC-0D91957566C3}"/>
+                <a16:creationId xmlns:a16="http://schemas.microsoft.com/office/drawing/2014/main" id="{ADBD4BA0-7C40-4019-BACF-48076C3EBDC2}"/>
               </a:ext>
             </a:extLst>
           </p:cNvPr>
@@ -13600,7 +14713,7 @@
           <p:cNvPr id="7" name="eyebrow">
             <a:extLst xmlns:a="http://schemas.openxmlformats.org/drawingml/2006/main">
               <a:ext uri="{FF2B5EF4-FFF2-40B4-BE49-F238E27FC236}">
-                <a16:creationId xmlns:a16="http://schemas.microsoft.com/office/drawing/2014/main" id="{92AF4E2E-3DA0-4948-8B4F-ECD12E5F02E4}"/>
+                <a16:creationId xmlns:a16="http://schemas.microsoft.com/office/drawing/2014/main" id="{8EF26201-62EE-4F8D-A5FE-221FAF4AD66F}"/>
               </a:ext>
             </a:extLst>
           </p:cNvPr>
@@ -13648,10 +14761,69 @@
       </p:sp>
       <p:sp>
         <p:nvSpPr>
-          <p:cNvPr id="8" name="footer-rule">
-            <a:extLst xmlns:a="http://schemas.openxmlformats.org/drawingml/2006/main">
-              <a:ext uri="{FF2B5EF4-FFF2-40B4-BE49-F238E27FC236}">
-                <a16:creationId xmlns:a16="http://schemas.microsoft.com/office/drawing/2014/main" id="{08A12003-EA33-42E7-AB43-F7A231987657}"/>
+          <p:cNvPr id="8" name="rescue-point-logo-background">
+            <a:extLst xmlns:a="http://schemas.openxmlformats.org/drawingml/2006/main">
+              <a:ext uri="{FF2B5EF4-FFF2-40B4-BE49-F238E27FC236}">
+                <a16:creationId xmlns:a16="http://schemas.microsoft.com/office/drawing/2014/main" id="{7F51B664-3503-4703-AC24-50A0FC64EDBF}"/>
+              </a:ext>
+            </a:extLst>
+          </p:cNvPr>
+          <p:cNvSpPr>
+            <a:spLocks xmlns:a="http://schemas.openxmlformats.org/drawingml/2006/main" noGrp="1"/>
+          </p:cNvSpPr>
+          <p:nvPr/>
+        </p:nvSpPr>
+        <p:spPr>
+          <a:xfrm xmlns:a="http://schemas.openxmlformats.org/drawingml/2006/main">
+            <a:off x="9772650" y="133350"/>
+            <a:ext cx="1733550" cy="457200"/>
+          </a:xfrm>
+          <a:prstGeom xmlns:a="http://schemas.openxmlformats.org/drawingml/2006/main" prst="roundRect">
+            <a:avLst>
+              <a:gd name="adj" fmla="val 16667"/>
+            </a:avLst>
+          </a:prstGeom>
+          <a:solidFill xmlns:a="http://schemas.openxmlformats.org/drawingml/2006/main">
+            <a:srgbClr val="06142E"/>
+          </a:solidFill>
+          <a:ln xmlns:a="http://schemas.openxmlformats.org/drawingml/2006/main" w="9525">
+            <a:solidFill>
+              <a:srgbClr val="1EC5FF">
+                <a:alpha val="33333"/>
+              </a:srgbClr>
+            </a:solidFill>
+            <a:prstDash val="solid"/>
+          </a:ln>
+        </p:spPr>
+      </p:sp>
+      <p:pic>
+        <p:nvPicPr>
+          <p:cNvPr id="23" name="" descr="Figura oficial da documentação dbt usada para explicar: Incremental exige filtro e chave — merge sem is_incremental() ainda lê todo o histórico.."/>
+          <p:cNvPicPr>
+            <a:picLocks xmlns:a="http://schemas.openxmlformats.org/drawingml/2006/main" noChangeAspect="1"/>
+          </p:cNvPicPr>
+          <p:nvPr/>
+        </p:nvPicPr>
+        <p:blipFill>
+          <a:blip xmlns:r="http://schemas.openxmlformats.org/officeDocument/2006/relationships" xmlns:a="http://schemas.openxmlformats.org/drawingml/2006/main" r:embed="R6494da6ac1914480"/>
+          <a:stretch xmlns:a="http://schemas.openxmlformats.org/drawingml/2006/main"/>
+        </p:blipFill>
+        <p:spPr>
+          <a:xfrm xmlns:a="http://schemas.openxmlformats.org/drawingml/2006/main">
+            <a:off x="9893718" y="209550"/>
+            <a:ext cx="1491414" cy="323850"/>
+          </a:xfrm>
+          <a:prstGeom xmlns:a="http://schemas.openxmlformats.org/drawingml/2006/main" prst="rect">
+            <a:avLst/>
+          </a:prstGeom>
+        </p:spPr>
+      </p:pic>
+      <p:sp>
+        <p:nvSpPr>
+          <p:cNvPr id="10" name="footer-rule">
+            <a:extLst xmlns:a="http://schemas.openxmlformats.org/drawingml/2006/main">
+              <a:ext uri="{FF2B5EF4-FFF2-40B4-BE49-F238E27FC236}">
+                <a16:creationId xmlns:a16="http://schemas.microsoft.com/office/drawing/2014/main" id="{82653D90-2594-462F-B9F2-4D533AE2D51F}"/>
               </a:ext>
             </a:extLst>
           </p:cNvPr>
@@ -13681,10 +14853,10 @@
       </p:sp>
       <p:sp>
         <p:nvSpPr>
-          <p:cNvPr id="9" name="footer">
-            <a:extLst xmlns:a="http://schemas.openxmlformats.org/drawingml/2006/main">
-              <a:ext uri="{FF2B5EF4-FFF2-40B4-BE49-F238E27FC236}">
-                <a16:creationId xmlns:a16="http://schemas.microsoft.com/office/drawing/2014/main" id="{7C516E70-5EA8-4EBD-8075-72A92185B496}"/>
+          <p:cNvPr id="11" name="footer">
+            <a:extLst xmlns:a="http://schemas.openxmlformats.org/drawingml/2006/main">
+              <a:ext uri="{FF2B5EF4-FFF2-40B4-BE49-F238E27FC236}">
+                <a16:creationId xmlns:a16="http://schemas.microsoft.com/office/drawing/2014/main" id="{BD9DABAF-91A9-47D8-8153-E4F33B9C4368}"/>
               </a:ext>
             </a:extLst>
           </p:cNvPr>
@@ -13736,10 +14908,10 @@
       </p:sp>
       <p:sp>
         <p:nvSpPr>
-          <p:cNvPr id="10" name="page-number">
-            <a:extLst xmlns:a="http://schemas.openxmlformats.org/drawingml/2006/main">
-              <a:ext uri="{FF2B5EF4-FFF2-40B4-BE49-F238E27FC236}">
-                <a16:creationId xmlns:a16="http://schemas.microsoft.com/office/drawing/2014/main" id="{C9B84BF5-DB13-4D30-89BC-2ACFE6A98B58}"/>
+          <p:cNvPr id="12" name="page-number">
+            <a:extLst xmlns:a="http://schemas.openxmlformats.org/drawingml/2006/main">
+              <a:ext uri="{FF2B5EF4-FFF2-40B4-BE49-F238E27FC236}">
+                <a16:creationId xmlns:a16="http://schemas.microsoft.com/office/drawing/2014/main" id="{C1D84CC5-71BE-45CB-B7F5-CCF58ECE0E97}"/>
               </a:ext>
             </a:extLst>
           </p:cNvPr>
@@ -13792,7 +14964,7 @@
     </p:spTree>
     <p:extLst>
       <p:ext uri="{BB962C8B-B14F-4D97-AF65-F5344CB8AC3E}">
-        <p14:creationId xmlns:p14="http://schemas.microsoft.com/office/powerpoint/2010/main" val="454755728"/>
+        <p14:creationId xmlns:p14="http://schemas.microsoft.com/office/powerpoint/2010/main" val="1319416490"/>
       </p:ext>
     </p:extLst>
   </p:cSld>
@@ -13828,10 +15000,10 @@
       </p:grpSpPr>
       <p:sp>
         <p:nvSpPr>
-          <p:cNvPr id="13" name="slide-title">
-            <a:extLst xmlns:a="http://schemas.openxmlformats.org/drawingml/2006/main">
-              <a:ext uri="{FF2B5EF4-FFF2-40B4-BE49-F238E27FC236}">
-                <a16:creationId xmlns:a16="http://schemas.microsoft.com/office/drawing/2014/main" id="{46AA1A93-7B09-4B38-B25E-1B58ED52AFF4}"/>
+          <p:cNvPr id="15" name="slide-title">
+            <a:extLst xmlns:a="http://schemas.openxmlformats.org/drawingml/2006/main">
+              <a:ext uri="{FF2B5EF4-FFF2-40B4-BE49-F238E27FC236}">
+                <a16:creationId xmlns:a16="http://schemas.microsoft.com/office/drawing/2014/main" id="{B4A521F3-57DB-4375-8CA9-DB2971366A71}"/>
               </a:ext>
             </a:extLst>
           </p:cNvPr>
@@ -13882,7 +15054,7 @@
           <p:cNvPr id="2" name="flow-1">
             <a:extLst xmlns:a="http://schemas.openxmlformats.org/drawingml/2006/main">
               <a:ext uri="{FF2B5EF4-FFF2-40B4-BE49-F238E27FC236}">
-                <a16:creationId xmlns:a16="http://schemas.microsoft.com/office/drawing/2014/main" id="{0D90A5BD-67F1-4E63-AA2D-FE97CFABBA8D}"/>
+                <a16:creationId xmlns:a16="http://schemas.microsoft.com/office/drawing/2014/main" id="{88F81CD8-1F33-474A-89EE-93837C5949B3}"/>
               </a:ext>
             </a:extLst>
           </p:cNvPr>
@@ -13939,7 +15111,7 @@
           <p:cNvPr id="3" name="flow-2">
             <a:extLst xmlns:a="http://schemas.openxmlformats.org/drawingml/2006/main">
               <a:ext uri="{FF2B5EF4-FFF2-40B4-BE49-F238E27FC236}">
-                <a16:creationId xmlns:a16="http://schemas.microsoft.com/office/drawing/2014/main" id="{279EB0BF-424E-4D35-8110-B92BB9BD34B7}"/>
+                <a16:creationId xmlns:a16="http://schemas.microsoft.com/office/drawing/2014/main" id="{B177BE72-4E09-4158-88BF-97CB42CE4214}"/>
               </a:ext>
             </a:extLst>
           </p:cNvPr>
@@ -13996,7 +15168,7 @@
           <p:cNvPr id="4" name="flow-3">
             <a:extLst xmlns:a="http://schemas.openxmlformats.org/drawingml/2006/main">
               <a:ext uri="{FF2B5EF4-FFF2-40B4-BE49-F238E27FC236}">
-                <a16:creationId xmlns:a16="http://schemas.microsoft.com/office/drawing/2014/main" id="{B8C0D945-5B79-4015-94BF-3F7F75A01D7F}"/>
+                <a16:creationId xmlns:a16="http://schemas.microsoft.com/office/drawing/2014/main" id="{CA3D50F8-3B25-4F5A-833D-18C5C157A691}"/>
               </a:ext>
             </a:extLst>
           </p:cNvPr>
@@ -14053,7 +15225,7 @@
           <p:cNvPr id="5" name="flow-4">
             <a:extLst xmlns:a="http://schemas.openxmlformats.org/drawingml/2006/main">
               <a:ext uri="{FF2B5EF4-FFF2-40B4-BE49-F238E27FC236}">
-                <a16:creationId xmlns:a16="http://schemas.microsoft.com/office/drawing/2014/main" id="{DF21D80B-FF08-4E81-A76A-25F9FEC1580C}"/>
+                <a16:creationId xmlns:a16="http://schemas.microsoft.com/office/drawing/2014/main" id="{54B9E5AB-A3EC-4FA3-B5F7-98FCD64B0950}"/>
               </a:ext>
             </a:extLst>
           </p:cNvPr>
@@ -14107,7 +15279,7 @@
       </p:sp>
       <p:cxnSp>
         <p:nvCxnSpPr>
-          <p:cNvPr id="26" name=""/>
+          <p:cNvPr id="29" name=""/>
           <p:cNvCxnSpPr>
             <a:stCxn xmlns:a="http://schemas.openxmlformats.org/drawingml/2006/main" id="2" idx="3"/>
             <a:endCxn xmlns:a="http://schemas.openxmlformats.org/drawingml/2006/main" id="3" idx="1"/>
@@ -14133,7 +15305,7 @@
       </p:cxnSp>
       <p:cxnSp>
         <p:nvCxnSpPr>
-          <p:cNvPr id="27" name=""/>
+          <p:cNvPr id="30" name=""/>
           <p:cNvCxnSpPr>
             <a:stCxn xmlns:a="http://schemas.openxmlformats.org/drawingml/2006/main" id="3" idx="3"/>
             <a:endCxn xmlns:a="http://schemas.openxmlformats.org/drawingml/2006/main" id="4" idx="1"/>
@@ -14159,7 +15331,7 @@
       </p:cxnSp>
       <p:cxnSp>
         <p:nvCxnSpPr>
-          <p:cNvPr id="28" name=""/>
+          <p:cNvPr id="31" name=""/>
           <p:cNvCxnSpPr>
             <a:stCxn xmlns:a="http://schemas.openxmlformats.org/drawingml/2006/main" id="4" idx="3"/>
             <a:endCxn xmlns:a="http://schemas.openxmlformats.org/drawingml/2006/main" id="5" idx="1"/>
@@ -14188,7 +15360,7 @@
           <p:cNvPr id="9" name="eyebrow">
             <a:extLst xmlns:a="http://schemas.openxmlformats.org/drawingml/2006/main">
               <a:ext uri="{FF2B5EF4-FFF2-40B4-BE49-F238E27FC236}">
-                <a16:creationId xmlns:a16="http://schemas.microsoft.com/office/drawing/2014/main" id="{1D4F9785-8672-4B23-8AB3-6FD37E8A18DC}"/>
+                <a16:creationId xmlns:a16="http://schemas.microsoft.com/office/drawing/2014/main" id="{8D1A4360-6E40-40EF-AE3B-8D83F7DECF80}"/>
               </a:ext>
             </a:extLst>
           </p:cNvPr>
@@ -14236,10 +15408,69 @@
       </p:sp>
       <p:sp>
         <p:nvSpPr>
-          <p:cNvPr id="10" name="footer-rule">
-            <a:extLst xmlns:a="http://schemas.openxmlformats.org/drawingml/2006/main">
-              <a:ext uri="{FF2B5EF4-FFF2-40B4-BE49-F238E27FC236}">
-                <a16:creationId xmlns:a16="http://schemas.microsoft.com/office/drawing/2014/main" id="{08DE6C7E-7FE8-443E-AE70-65617FCFB172}"/>
+          <p:cNvPr id="10" name="rescue-point-logo-background">
+            <a:extLst xmlns:a="http://schemas.openxmlformats.org/drawingml/2006/main">
+              <a:ext uri="{FF2B5EF4-FFF2-40B4-BE49-F238E27FC236}">
+                <a16:creationId xmlns:a16="http://schemas.microsoft.com/office/drawing/2014/main" id="{B3BC6DD8-AB3A-4F86-A85A-9BEB045136EF}"/>
+              </a:ext>
+            </a:extLst>
+          </p:cNvPr>
+          <p:cNvSpPr>
+            <a:spLocks xmlns:a="http://schemas.openxmlformats.org/drawingml/2006/main" noGrp="1"/>
+          </p:cNvSpPr>
+          <p:nvPr/>
+        </p:nvSpPr>
+        <p:spPr>
+          <a:xfrm xmlns:a="http://schemas.openxmlformats.org/drawingml/2006/main">
+            <a:off x="9772650" y="133350"/>
+            <a:ext cx="1733550" cy="457200"/>
+          </a:xfrm>
+          <a:prstGeom xmlns:a="http://schemas.openxmlformats.org/drawingml/2006/main" prst="roundRect">
+            <a:avLst>
+              <a:gd name="adj" fmla="val 16667"/>
+            </a:avLst>
+          </a:prstGeom>
+          <a:solidFill xmlns:a="http://schemas.openxmlformats.org/drawingml/2006/main">
+            <a:srgbClr val="06142E"/>
+          </a:solidFill>
+          <a:ln xmlns:a="http://schemas.openxmlformats.org/drawingml/2006/main" w="9525">
+            <a:solidFill>
+              <a:srgbClr val="1EC5FF">
+                <a:alpha val="33333"/>
+              </a:srgbClr>
+            </a:solidFill>
+            <a:prstDash val="solid"/>
+          </a:ln>
+        </p:spPr>
+      </p:sp>
+      <p:pic>
+        <p:nvPicPr>
+          <p:cNvPr id="34" name="" descr="Figura oficial da documentação dbt usada para explicar: Incremental exige filtro e chave — Fonte."/>
+          <p:cNvPicPr>
+            <a:picLocks xmlns:a="http://schemas.openxmlformats.org/drawingml/2006/main" noChangeAspect="1"/>
+          </p:cNvPicPr>
+          <p:nvPr/>
+        </p:nvPicPr>
+        <p:blipFill>
+          <a:blip xmlns:r="http://schemas.openxmlformats.org/officeDocument/2006/relationships" xmlns:a="http://schemas.openxmlformats.org/drawingml/2006/main" r:embed="R0ccebd9535934fc8"/>
+          <a:stretch xmlns:a="http://schemas.openxmlformats.org/drawingml/2006/main"/>
+        </p:blipFill>
+        <p:spPr>
+          <a:xfrm xmlns:a="http://schemas.openxmlformats.org/drawingml/2006/main">
+            <a:off x="9893718" y="209550"/>
+            <a:ext cx="1491414" cy="323850"/>
+          </a:xfrm>
+          <a:prstGeom xmlns:a="http://schemas.openxmlformats.org/drawingml/2006/main" prst="rect">
+            <a:avLst/>
+          </a:prstGeom>
+        </p:spPr>
+      </p:pic>
+      <p:sp>
+        <p:nvSpPr>
+          <p:cNvPr id="12" name="footer-rule">
+            <a:extLst xmlns:a="http://schemas.openxmlformats.org/drawingml/2006/main">
+              <a:ext uri="{FF2B5EF4-FFF2-40B4-BE49-F238E27FC236}">
+                <a16:creationId xmlns:a16="http://schemas.microsoft.com/office/drawing/2014/main" id="{04079628-D01B-4674-885F-03422D986BC1}"/>
               </a:ext>
             </a:extLst>
           </p:cNvPr>
@@ -14269,10 +15500,10 @@
       </p:sp>
       <p:sp>
         <p:nvSpPr>
-          <p:cNvPr id="11" name="footer">
-            <a:extLst xmlns:a="http://schemas.openxmlformats.org/drawingml/2006/main">
-              <a:ext uri="{FF2B5EF4-FFF2-40B4-BE49-F238E27FC236}">
-                <a16:creationId xmlns:a16="http://schemas.microsoft.com/office/drawing/2014/main" id="{73FE5EEB-2F5E-4C90-8B40-5B367576B14F}"/>
+          <p:cNvPr id="13" name="footer">
+            <a:extLst xmlns:a="http://schemas.openxmlformats.org/drawingml/2006/main">
+              <a:ext uri="{FF2B5EF4-FFF2-40B4-BE49-F238E27FC236}">
+                <a16:creationId xmlns:a16="http://schemas.microsoft.com/office/drawing/2014/main" id="{3E152B63-5508-4F3A-948D-76AF500D3A54}"/>
               </a:ext>
             </a:extLst>
           </p:cNvPr>
@@ -14324,10 +15555,10 @@
       </p:sp>
       <p:sp>
         <p:nvSpPr>
-          <p:cNvPr id="12" name="page-number">
-            <a:extLst xmlns:a="http://schemas.openxmlformats.org/drawingml/2006/main">
-              <a:ext uri="{FF2B5EF4-FFF2-40B4-BE49-F238E27FC236}">
-                <a16:creationId xmlns:a16="http://schemas.microsoft.com/office/drawing/2014/main" id="{F2598DE1-D42E-43F2-A8D6-4286F8E3580E}"/>
+          <p:cNvPr id="14" name="page-number">
+            <a:extLst xmlns:a="http://schemas.openxmlformats.org/drawingml/2006/main">
+              <a:ext uri="{FF2B5EF4-FFF2-40B4-BE49-F238E27FC236}">
+                <a16:creationId xmlns:a16="http://schemas.microsoft.com/office/drawing/2014/main" id="{C63D062C-AAC2-4D00-8621-9373DEBD87D1}"/>
               </a:ext>
             </a:extLst>
           </p:cNvPr>
@@ -14380,7 +15611,7 @@
     </p:spTree>
     <p:extLst>
       <p:ext uri="{BB962C8B-B14F-4D97-AF65-F5344CB8AC3E}">
-        <p14:creationId xmlns:p14="http://schemas.microsoft.com/office/powerpoint/2010/main" val="862301738"/>
+        <p14:creationId xmlns:p14="http://schemas.microsoft.com/office/powerpoint/2010/main" val="481312490"/>
       </p:ext>
     </p:extLst>
   </p:cSld>
@@ -14416,10 +15647,10 @@
       </p:grpSpPr>
       <p:sp>
         <p:nvSpPr>
-          <p:cNvPr id="11" name="slide-title">
-            <a:extLst xmlns:a="http://schemas.openxmlformats.org/drawingml/2006/main">
-              <a:ext uri="{FF2B5EF4-FFF2-40B4-BE49-F238E27FC236}">
-                <a16:creationId xmlns:a16="http://schemas.microsoft.com/office/drawing/2014/main" id="{E54CCCA8-4C82-4495-9680-8A47FF5B0D7B}"/>
+          <p:cNvPr id="13" name="slide-title">
+            <a:extLst xmlns:a="http://schemas.openxmlformats.org/drawingml/2006/main">
+              <a:ext uri="{FF2B5EF4-FFF2-40B4-BE49-F238E27FC236}">
+                <a16:creationId xmlns:a16="http://schemas.microsoft.com/office/drawing/2014/main" id="{FD543D94-9135-431E-A698-87C890A24893}"/>
               </a:ext>
             </a:extLst>
           </p:cNvPr>
@@ -14470,7 +15701,7 @@
           <p:cNvPr id="2" name="slide-subtitle">
             <a:extLst xmlns:a="http://schemas.openxmlformats.org/drawingml/2006/main">
               <a:ext uri="{FF2B5EF4-FFF2-40B4-BE49-F238E27FC236}">
-                <a16:creationId xmlns:a16="http://schemas.microsoft.com/office/drawing/2014/main" id="{A5E1D36A-6554-4109-916B-630C0BA1532A}"/>
+                <a16:creationId xmlns:a16="http://schemas.microsoft.com/office/drawing/2014/main" id="{4987D448-33F6-48C1-B9B1-C6079FC4B597}"/>
               </a:ext>
             </a:extLst>
           </p:cNvPr>
@@ -14521,7 +15752,7 @@
           <p:cNvPr id="3" name="bullets">
             <a:extLst xmlns:a="http://schemas.openxmlformats.org/drawingml/2006/main">
               <a:ext uri="{FF2B5EF4-FFF2-40B4-BE49-F238E27FC236}">
-                <a16:creationId xmlns:a16="http://schemas.microsoft.com/office/drawing/2014/main" id="{F03070AF-D1E6-43CD-870E-92DA5EABA5E6}"/>
+                <a16:creationId xmlns:a16="http://schemas.microsoft.com/office/drawing/2014/main" id="{45FB840F-BDF1-4752-A9D2-0E347B50439E}"/>
               </a:ext>
             </a:extLst>
           </p:cNvPr>
@@ -14608,7 +15839,7 @@
           <p:cNvPr id="4" name="ambient-glow">
             <a:extLst xmlns:a="http://schemas.openxmlformats.org/drawingml/2006/main">
               <a:ext uri="{FF2B5EF4-FFF2-40B4-BE49-F238E27FC236}">
-                <a16:creationId xmlns:a16="http://schemas.microsoft.com/office/drawing/2014/main" id="{60455C24-BF6C-45FE-B512-6FB1F0A07D19}"/>
+                <a16:creationId xmlns:a16="http://schemas.microsoft.com/office/drawing/2014/main" id="{FB58F83E-5D7A-4C37-B813-52373F3576E3}"/>
               </a:ext>
             </a:extLst>
           </p:cNvPr>
@@ -14645,7 +15876,7 @@
           <p:cNvPr id="5" name="ambient-core">
             <a:extLst xmlns:a="http://schemas.openxmlformats.org/drawingml/2006/main">
               <a:ext uri="{FF2B5EF4-FFF2-40B4-BE49-F238E27FC236}">
-                <a16:creationId xmlns:a16="http://schemas.microsoft.com/office/drawing/2014/main" id="{7BFA70E0-A1D2-4EBC-943A-98E534C9F1DA}"/>
+                <a16:creationId xmlns:a16="http://schemas.microsoft.com/office/drawing/2014/main" id="{89FC330F-00CA-46F0-83F6-EDCDF2B4F2BB}"/>
               </a:ext>
             </a:extLst>
           </p:cNvPr>
@@ -14682,7 +15913,7 @@
           <p:cNvPr id="6" name="section-number">
             <a:extLst xmlns:a="http://schemas.openxmlformats.org/drawingml/2006/main">
               <a:ext uri="{FF2B5EF4-FFF2-40B4-BE49-F238E27FC236}">
-                <a16:creationId xmlns:a16="http://schemas.microsoft.com/office/drawing/2014/main" id="{415F764E-F030-4C87-A4CB-F4EBD5C22766}"/>
+                <a16:creationId xmlns:a16="http://schemas.microsoft.com/office/drawing/2014/main" id="{3749EED5-310D-4E62-A3DC-397F6324A327}"/>
               </a:ext>
             </a:extLst>
           </p:cNvPr>
@@ -14733,7 +15964,7 @@
           <p:cNvPr id="7" name="eyebrow">
             <a:extLst xmlns:a="http://schemas.openxmlformats.org/drawingml/2006/main">
               <a:ext uri="{FF2B5EF4-FFF2-40B4-BE49-F238E27FC236}">
-                <a16:creationId xmlns:a16="http://schemas.microsoft.com/office/drawing/2014/main" id="{64795CDD-2355-4A7C-BAB6-96E152BF25CF}"/>
+                <a16:creationId xmlns:a16="http://schemas.microsoft.com/office/drawing/2014/main" id="{77A5786D-B14C-4056-820E-B517FF0A85F3}"/>
               </a:ext>
             </a:extLst>
           </p:cNvPr>
@@ -14781,10 +16012,69 @@
       </p:sp>
       <p:sp>
         <p:nvSpPr>
-          <p:cNvPr id="8" name="footer-rule">
-            <a:extLst xmlns:a="http://schemas.openxmlformats.org/drawingml/2006/main">
-              <a:ext uri="{FF2B5EF4-FFF2-40B4-BE49-F238E27FC236}">
-                <a16:creationId xmlns:a16="http://schemas.microsoft.com/office/drawing/2014/main" id="{AB64BB93-64DA-45B7-9ED7-21F33AB4688F}"/>
+          <p:cNvPr id="8" name="rescue-point-logo-background">
+            <a:extLst xmlns:a="http://schemas.openxmlformats.org/drawingml/2006/main">
+              <a:ext uri="{FF2B5EF4-FFF2-40B4-BE49-F238E27FC236}">
+                <a16:creationId xmlns:a16="http://schemas.microsoft.com/office/drawing/2014/main" id="{EE622E3C-5A98-401E-8CC3-DF4B9790C18C}"/>
+              </a:ext>
+            </a:extLst>
+          </p:cNvPr>
+          <p:cNvSpPr>
+            <a:spLocks xmlns:a="http://schemas.openxmlformats.org/drawingml/2006/main" noGrp="1"/>
+          </p:cNvSpPr>
+          <p:nvPr/>
+        </p:nvSpPr>
+        <p:spPr>
+          <a:xfrm xmlns:a="http://schemas.openxmlformats.org/drawingml/2006/main">
+            <a:off x="9772650" y="133350"/>
+            <a:ext cx="1733550" cy="457200"/>
+          </a:xfrm>
+          <a:prstGeom xmlns:a="http://schemas.openxmlformats.org/drawingml/2006/main" prst="roundRect">
+            <a:avLst>
+              <a:gd name="adj" fmla="val 16667"/>
+            </a:avLst>
+          </a:prstGeom>
+          <a:solidFill xmlns:a="http://schemas.openxmlformats.org/drawingml/2006/main">
+            <a:srgbClr val="06142E"/>
+          </a:solidFill>
+          <a:ln xmlns:a="http://schemas.openxmlformats.org/drawingml/2006/main" w="9525">
+            <a:solidFill>
+              <a:srgbClr val="1EC5FF">
+                <a:alpha val="33333"/>
+              </a:srgbClr>
+            </a:solidFill>
+            <a:prstDash val="solid"/>
+          </a:ln>
+        </p:spPr>
+      </p:sp>
+      <p:pic>
+        <p:nvPicPr>
+          <p:cNvPr id="23" name="" descr="Figura oficial da documentação dbt usada para explicar: O diagrama oficial mostra a redução de leitura — Registros existentes permanecem; somente novos candidatos entram.."/>
+          <p:cNvPicPr>
+            <a:picLocks xmlns:a="http://schemas.openxmlformats.org/drawingml/2006/main" noChangeAspect="1"/>
+          </p:cNvPicPr>
+          <p:nvPr/>
+        </p:nvPicPr>
+        <p:blipFill>
+          <a:blip xmlns:r="http://schemas.openxmlformats.org/officeDocument/2006/relationships" xmlns:a="http://schemas.openxmlformats.org/drawingml/2006/main" r:embed="Rbe32256e55264b7a"/>
+          <a:stretch xmlns:a="http://schemas.openxmlformats.org/drawingml/2006/main"/>
+        </p:blipFill>
+        <p:spPr>
+          <a:xfrm xmlns:a="http://schemas.openxmlformats.org/drawingml/2006/main">
+            <a:off x="9893718" y="209550"/>
+            <a:ext cx="1491414" cy="323850"/>
+          </a:xfrm>
+          <a:prstGeom xmlns:a="http://schemas.openxmlformats.org/drawingml/2006/main" prst="rect">
+            <a:avLst/>
+          </a:prstGeom>
+        </p:spPr>
+      </p:pic>
+      <p:sp>
+        <p:nvSpPr>
+          <p:cNvPr id="10" name="footer-rule">
+            <a:extLst xmlns:a="http://schemas.openxmlformats.org/drawingml/2006/main">
+              <a:ext uri="{FF2B5EF4-FFF2-40B4-BE49-F238E27FC236}">
+                <a16:creationId xmlns:a16="http://schemas.microsoft.com/office/drawing/2014/main" id="{3940C194-C9DF-4C10-B09A-9671EBE77B53}"/>
               </a:ext>
             </a:extLst>
           </p:cNvPr>
@@ -14814,10 +16104,10 @@
       </p:sp>
       <p:sp>
         <p:nvSpPr>
-          <p:cNvPr id="9" name="footer">
-            <a:extLst xmlns:a="http://schemas.openxmlformats.org/drawingml/2006/main">
-              <a:ext uri="{FF2B5EF4-FFF2-40B4-BE49-F238E27FC236}">
-                <a16:creationId xmlns:a16="http://schemas.microsoft.com/office/drawing/2014/main" id="{AED63C2B-982C-4974-B874-46B45A2A0193}"/>
+          <p:cNvPr id="11" name="footer">
+            <a:extLst xmlns:a="http://schemas.openxmlformats.org/drawingml/2006/main">
+              <a:ext uri="{FF2B5EF4-FFF2-40B4-BE49-F238E27FC236}">
+                <a16:creationId xmlns:a16="http://schemas.microsoft.com/office/drawing/2014/main" id="{FFC275B1-7C27-4FFA-97D8-661DB1C86597}"/>
               </a:ext>
             </a:extLst>
           </p:cNvPr>
@@ -14869,10 +16159,10 @@
       </p:sp>
       <p:sp>
         <p:nvSpPr>
-          <p:cNvPr id="10" name="page-number">
-            <a:extLst xmlns:a="http://schemas.openxmlformats.org/drawingml/2006/main">
-              <a:ext uri="{FF2B5EF4-FFF2-40B4-BE49-F238E27FC236}">
-                <a16:creationId xmlns:a16="http://schemas.microsoft.com/office/drawing/2014/main" id="{EACD38DA-FF6C-46A4-B277-789DF014CCAE}"/>
+          <p:cNvPr id="12" name="page-number">
+            <a:extLst xmlns:a="http://schemas.openxmlformats.org/drawingml/2006/main">
+              <a:ext uri="{FF2B5EF4-FFF2-40B4-BE49-F238E27FC236}">
+                <a16:creationId xmlns:a16="http://schemas.microsoft.com/office/drawing/2014/main" id="{4EDBF01D-7195-46E7-B351-DB693F7CC4EE}"/>
               </a:ext>
             </a:extLst>
           </p:cNvPr>
@@ -14925,7 +16215,7 @@
     </p:spTree>
     <p:extLst>
       <p:ext uri="{BB962C8B-B14F-4D97-AF65-F5344CB8AC3E}">
-        <p14:creationId xmlns:p14="http://schemas.microsoft.com/office/powerpoint/2010/main" val="462376039"/>
+        <p14:creationId xmlns:p14="http://schemas.microsoft.com/office/powerpoint/2010/main" val="286852787"/>
       </p:ext>
     </p:extLst>
   </p:cSld>
@@ -14953,10 +16243,10 @@
       </p:grpSpPr>
       <p:sp>
         <p:nvSpPr>
-          <p:cNvPr id="10" name="slide-title">
-            <a:extLst xmlns:a="http://schemas.openxmlformats.org/drawingml/2006/main">
-              <a:ext uri="{FF2B5EF4-FFF2-40B4-BE49-F238E27FC236}">
-                <a16:creationId xmlns:a16="http://schemas.microsoft.com/office/drawing/2014/main" id="{D7273B7D-D207-478B-A2FB-39F61D5369C4}"/>
+          <p:cNvPr id="12" name="slide-title">
+            <a:extLst xmlns:a="http://schemas.openxmlformats.org/drawingml/2006/main">
+              <a:ext uri="{FF2B5EF4-FFF2-40B4-BE49-F238E27FC236}">
+                <a16:creationId xmlns:a16="http://schemas.microsoft.com/office/drawing/2014/main" id="{54E57B9F-CA41-4899-88FA-2E535250EADF}"/>
               </a:ext>
             </a:extLst>
           </p:cNvPr>
@@ -15007,7 +16297,7 @@
           <p:cNvPr id="2" name="visual-claim">
             <a:extLst xmlns:a="http://schemas.openxmlformats.org/drawingml/2006/main">
               <a:ext uri="{FF2B5EF4-FFF2-40B4-BE49-F238E27FC236}">
-                <a16:creationId xmlns:a16="http://schemas.microsoft.com/office/drawing/2014/main" id="{9E452144-F65D-45D2-9C5C-93769FB508F2}"/>
+                <a16:creationId xmlns:a16="http://schemas.microsoft.com/office/drawing/2014/main" id="{B1D28455-393D-4E89-9F17-4425C3369063}"/>
               </a:ext>
             </a:extLst>
           </p:cNvPr>
@@ -15058,7 +16348,7 @@
           <p:cNvPr id="3" name="image-surface">
             <a:extLst xmlns:a="http://schemas.openxmlformats.org/drawingml/2006/main">
               <a:ext uri="{FF2B5EF4-FFF2-40B4-BE49-F238E27FC236}">
-                <a16:creationId xmlns:a16="http://schemas.microsoft.com/office/drawing/2014/main" id="{D57E8CA5-A049-4CCE-9C23-CD8059E887F4}"/>
+                <a16:creationId xmlns:a16="http://schemas.microsoft.com/office/drawing/2014/main" id="{4682C094-A81F-400B-8AEB-F603EBFF4586}"/>
               </a:ext>
             </a:extLst>
           </p:cNvPr>
@@ -15090,14 +16380,14 @@
       </p:sp>
       <p:pic>
         <p:nvPicPr>
-          <p:cNvPr id="15" name="" descr="Figura oficial da documentação dbt usada para explicar: O diagrama oficial mostra a redução de leitura — Registros existentes permanecem; somente novos candidatos entram.."/>
+          <p:cNvPr id="18" name="" descr="Figura oficial da documentação dbt usada para explicar: O diagrama oficial mostra a redução de leitura — Registros existentes permanecem; somente novos candidatos entram.."/>
           <p:cNvPicPr>
             <a:picLocks xmlns:a="http://schemas.openxmlformats.org/drawingml/2006/main" noChangeAspect="1"/>
           </p:cNvPicPr>
           <p:nvPr/>
         </p:nvPicPr>
         <p:blipFill>
-          <a:blip xmlns:r="http://schemas.openxmlformats.org/officeDocument/2006/relationships" xmlns:a="http://schemas.openxmlformats.org/drawingml/2006/main" r:embed="R0c1fff735bff4118"/>
+          <a:blip xmlns:r="http://schemas.openxmlformats.org/officeDocument/2006/relationships" xmlns:a="http://schemas.openxmlformats.org/drawingml/2006/main" r:embed="Rf72edd8681d541ba"/>
           <a:stretch xmlns:a="http://schemas.openxmlformats.org/drawingml/2006/main"/>
         </p:blipFill>
         <p:spPr>
@@ -15115,7 +16405,7 @@
           <p:cNvPr id="5" name="image-caption">
             <a:extLst xmlns:a="http://schemas.openxmlformats.org/drawingml/2006/main">
               <a:ext uri="{FF2B5EF4-FFF2-40B4-BE49-F238E27FC236}">
-                <a16:creationId xmlns:a16="http://schemas.microsoft.com/office/drawing/2014/main" id="{86FFF3CB-F280-4D5A-9EAD-542320F4ECB6}"/>
+                <a16:creationId xmlns:a16="http://schemas.microsoft.com/office/drawing/2014/main" id="{3418A2BE-5472-43D5-90E7-208289499451}"/>
               </a:ext>
             </a:extLst>
           </p:cNvPr>
@@ -15166,7 +16456,7 @@
           <p:cNvPr id="6" name="eyebrow">
             <a:extLst xmlns:a="http://schemas.openxmlformats.org/drawingml/2006/main">
               <a:ext uri="{FF2B5EF4-FFF2-40B4-BE49-F238E27FC236}">
-                <a16:creationId xmlns:a16="http://schemas.microsoft.com/office/drawing/2014/main" id="{5C3B07C2-7347-4326-80C4-34C15E1B72CE}"/>
+                <a16:creationId xmlns:a16="http://schemas.microsoft.com/office/drawing/2014/main" id="{BAF1D840-1737-4163-B425-2CD7C880CD86}"/>
               </a:ext>
             </a:extLst>
           </p:cNvPr>
@@ -15214,10 +16504,69 @@
       </p:sp>
       <p:sp>
         <p:nvSpPr>
-          <p:cNvPr id="7" name="footer-rule">
-            <a:extLst xmlns:a="http://schemas.openxmlformats.org/drawingml/2006/main">
-              <a:ext uri="{FF2B5EF4-FFF2-40B4-BE49-F238E27FC236}">
-                <a16:creationId xmlns:a16="http://schemas.microsoft.com/office/drawing/2014/main" id="{33C79D00-67DC-423F-BBBD-6C3BDC99C37E}"/>
+          <p:cNvPr id="7" name="rescue-point-logo-background">
+            <a:extLst xmlns:a="http://schemas.openxmlformats.org/drawingml/2006/main">
+              <a:ext uri="{FF2B5EF4-FFF2-40B4-BE49-F238E27FC236}">
+                <a16:creationId xmlns:a16="http://schemas.microsoft.com/office/drawing/2014/main" id="{04CFFABB-80CC-47CB-A9C0-7EB8FD97D7A7}"/>
+              </a:ext>
+            </a:extLst>
+          </p:cNvPr>
+          <p:cNvSpPr>
+            <a:spLocks xmlns:a="http://schemas.openxmlformats.org/drawingml/2006/main" noGrp="1"/>
+          </p:cNvSpPr>
+          <p:nvPr/>
+        </p:nvSpPr>
+        <p:spPr>
+          <a:xfrm xmlns:a="http://schemas.openxmlformats.org/drawingml/2006/main">
+            <a:off x="9772650" y="133350"/>
+            <a:ext cx="1733550" cy="457200"/>
+          </a:xfrm>
+          <a:prstGeom xmlns:a="http://schemas.openxmlformats.org/drawingml/2006/main" prst="roundRect">
+            <a:avLst>
+              <a:gd name="adj" fmla="val 16667"/>
+            </a:avLst>
+          </a:prstGeom>
+          <a:solidFill xmlns:a="http://schemas.openxmlformats.org/drawingml/2006/main">
+            <a:srgbClr val="06142E"/>
+          </a:solidFill>
+          <a:ln xmlns:a="http://schemas.openxmlformats.org/drawingml/2006/main" w="9525">
+            <a:solidFill>
+              <a:srgbClr val="1EC5FF">
+                <a:alpha val="33333"/>
+              </a:srgbClr>
+            </a:solidFill>
+            <a:prstDash val="solid"/>
+          </a:ln>
+        </p:spPr>
+      </p:sp>
+      <p:pic>
+        <p:nvPicPr>
+          <p:cNvPr id="22" name="" descr="Figura oficial da documentação dbt usada para explicar: O diagrama oficial mostra a redução de leitura — Registros existentes permanecem; somente novos candidatos entram.."/>
+          <p:cNvPicPr>
+            <a:picLocks xmlns:a="http://schemas.openxmlformats.org/drawingml/2006/main" noChangeAspect="1"/>
+          </p:cNvPicPr>
+          <p:nvPr/>
+        </p:nvPicPr>
+        <p:blipFill>
+          <a:blip xmlns:r="http://schemas.openxmlformats.org/officeDocument/2006/relationships" xmlns:a="http://schemas.openxmlformats.org/drawingml/2006/main" r:embed="Rab384b330ba24053"/>
+          <a:stretch xmlns:a="http://schemas.openxmlformats.org/drawingml/2006/main"/>
+        </p:blipFill>
+        <p:spPr>
+          <a:xfrm xmlns:a="http://schemas.openxmlformats.org/drawingml/2006/main">
+            <a:off x="9893718" y="209550"/>
+            <a:ext cx="1491414" cy="323850"/>
+          </a:xfrm>
+          <a:prstGeom xmlns:a="http://schemas.openxmlformats.org/drawingml/2006/main" prst="rect">
+            <a:avLst/>
+          </a:prstGeom>
+        </p:spPr>
+      </p:pic>
+      <p:sp>
+        <p:nvSpPr>
+          <p:cNvPr id="9" name="footer-rule">
+            <a:extLst xmlns:a="http://schemas.openxmlformats.org/drawingml/2006/main">
+              <a:ext uri="{FF2B5EF4-FFF2-40B4-BE49-F238E27FC236}">
+                <a16:creationId xmlns:a16="http://schemas.microsoft.com/office/drawing/2014/main" id="{7D5F2E3C-FD7C-4A42-8F3C-E695E0D06EFC}"/>
               </a:ext>
             </a:extLst>
           </p:cNvPr>
@@ -15247,10 +16596,10 @@
       </p:sp>
       <p:sp>
         <p:nvSpPr>
-          <p:cNvPr id="8" name="footer">
-            <a:extLst xmlns:a="http://schemas.openxmlformats.org/drawingml/2006/main">
-              <a:ext uri="{FF2B5EF4-FFF2-40B4-BE49-F238E27FC236}">
-                <a16:creationId xmlns:a16="http://schemas.microsoft.com/office/drawing/2014/main" id="{BFDB92D9-AA13-41D9-A581-B32C1D4E4D3E}"/>
+          <p:cNvPr id="10" name="footer">
+            <a:extLst xmlns:a="http://schemas.openxmlformats.org/drawingml/2006/main">
+              <a:ext uri="{FF2B5EF4-FFF2-40B4-BE49-F238E27FC236}">
+                <a16:creationId xmlns:a16="http://schemas.microsoft.com/office/drawing/2014/main" id="{91004C18-8502-468F-B77A-004CCB1972C6}"/>
               </a:ext>
             </a:extLst>
           </p:cNvPr>
@@ -15302,10 +16651,10 @@
       </p:sp>
       <p:sp>
         <p:nvSpPr>
-          <p:cNvPr id="9" name="page-number">
-            <a:extLst xmlns:a="http://schemas.openxmlformats.org/drawingml/2006/main">
-              <a:ext uri="{FF2B5EF4-FFF2-40B4-BE49-F238E27FC236}">
-                <a16:creationId xmlns:a16="http://schemas.microsoft.com/office/drawing/2014/main" id="{718F14F2-0AB0-4D72-842D-639C5806DE53}"/>
+          <p:cNvPr id="11" name="page-number">
+            <a:extLst xmlns:a="http://schemas.openxmlformats.org/drawingml/2006/main">
+              <a:ext uri="{FF2B5EF4-FFF2-40B4-BE49-F238E27FC236}">
+                <a16:creationId xmlns:a16="http://schemas.microsoft.com/office/drawing/2014/main" id="{DB7202F0-ED3E-4B45-B80D-DE2D692DE9C2}"/>
               </a:ext>
             </a:extLst>
           </p:cNvPr>
@@ -15358,7 +16707,7 @@
     </p:spTree>
     <p:extLst>
       <p:ext uri="{BB962C8B-B14F-4D97-AF65-F5344CB8AC3E}">
-        <p14:creationId xmlns:p14="http://schemas.microsoft.com/office/powerpoint/2010/main" val="1480443616"/>
+        <p14:creationId xmlns:p14="http://schemas.microsoft.com/office/powerpoint/2010/main" val="27317715"/>
       </p:ext>
     </p:extLst>
   </p:cSld>
@@ -15386,10 +16735,10 @@
       </p:grpSpPr>
       <p:sp>
         <p:nvSpPr>
-          <p:cNvPr id="11" name="slide-title">
-            <a:extLst xmlns:a="http://schemas.openxmlformats.org/drawingml/2006/main">
-              <a:ext uri="{FF2B5EF4-FFF2-40B4-BE49-F238E27FC236}">
-                <a16:creationId xmlns:a16="http://schemas.microsoft.com/office/drawing/2014/main" id="{5059CC22-EBC8-4E78-8638-570C5796B5FD}"/>
+          <p:cNvPr id="13" name="slide-title">
+            <a:extLst xmlns:a="http://schemas.openxmlformats.org/drawingml/2006/main">
+              <a:ext uri="{FF2B5EF4-FFF2-40B4-BE49-F238E27FC236}">
+                <a16:creationId xmlns:a16="http://schemas.microsoft.com/office/drawing/2014/main" id="{0F6B66B0-7805-40D9-AD93-6CDBF9CBB6D6}"/>
               </a:ext>
             </a:extLst>
           </p:cNvPr>
@@ -15440,7 +16789,7 @@
           <p:cNvPr id="2" name="slide-subtitle">
             <a:extLst xmlns:a="http://schemas.openxmlformats.org/drawingml/2006/main">
               <a:ext uri="{FF2B5EF4-FFF2-40B4-BE49-F238E27FC236}">
-                <a16:creationId xmlns:a16="http://schemas.microsoft.com/office/drawing/2014/main" id="{08C5E7F4-73D5-4C59-B4B7-732833F96EB2}"/>
+                <a16:creationId xmlns:a16="http://schemas.microsoft.com/office/drawing/2014/main" id="{6EE5989F-A681-4103-A1BB-7FBCEF1CC777}"/>
               </a:ext>
             </a:extLst>
           </p:cNvPr>
@@ -15491,7 +16840,7 @@
           <p:cNvPr id="3" name="bullets">
             <a:extLst xmlns:a="http://schemas.openxmlformats.org/drawingml/2006/main">
               <a:ext uri="{FF2B5EF4-FFF2-40B4-BE49-F238E27FC236}">
-                <a16:creationId xmlns:a16="http://schemas.microsoft.com/office/drawing/2014/main" id="{13172ED9-631F-4207-ADE4-EAB047FA4ECA}"/>
+                <a16:creationId xmlns:a16="http://schemas.microsoft.com/office/drawing/2014/main" id="{F4A210AF-D865-4C05-9B71-4951370E5EBA}"/>
               </a:ext>
             </a:extLst>
           </p:cNvPr>
@@ -15578,7 +16927,7 @@
           <p:cNvPr id="4" name="ambient-glow">
             <a:extLst xmlns:a="http://schemas.openxmlformats.org/drawingml/2006/main">
               <a:ext uri="{FF2B5EF4-FFF2-40B4-BE49-F238E27FC236}">
-                <a16:creationId xmlns:a16="http://schemas.microsoft.com/office/drawing/2014/main" id="{79CD8E61-B6FC-4F46-88CB-4DACCCCA3143}"/>
+                <a16:creationId xmlns:a16="http://schemas.microsoft.com/office/drawing/2014/main" id="{D48DF4B9-6B00-4CBD-9C3F-055954314D9C}"/>
               </a:ext>
             </a:extLst>
           </p:cNvPr>
@@ -15615,7 +16964,7 @@
           <p:cNvPr id="5" name="ambient-core">
             <a:extLst xmlns:a="http://schemas.openxmlformats.org/drawingml/2006/main">
               <a:ext uri="{FF2B5EF4-FFF2-40B4-BE49-F238E27FC236}">
-                <a16:creationId xmlns:a16="http://schemas.microsoft.com/office/drawing/2014/main" id="{2E88E224-2E91-4861-856C-A0C17F3D2B3C}"/>
+                <a16:creationId xmlns:a16="http://schemas.microsoft.com/office/drawing/2014/main" id="{1BBF7400-956E-4B7F-8D42-CB3DDF56C55A}"/>
               </a:ext>
             </a:extLst>
           </p:cNvPr>
@@ -15652,7 +17001,7 @@
           <p:cNvPr id="6" name="section-number">
             <a:extLst xmlns:a="http://schemas.openxmlformats.org/drawingml/2006/main">
               <a:ext uri="{FF2B5EF4-FFF2-40B4-BE49-F238E27FC236}">
-                <a16:creationId xmlns:a16="http://schemas.microsoft.com/office/drawing/2014/main" id="{75725994-0BC5-4666-A4CE-B9ED1A0FB120}"/>
+                <a16:creationId xmlns:a16="http://schemas.microsoft.com/office/drawing/2014/main" id="{A13DF3B6-FECB-425B-B718-0CCD22D504EF}"/>
               </a:ext>
             </a:extLst>
           </p:cNvPr>
@@ -15703,7 +17052,7 @@
           <p:cNvPr id="7" name="eyebrow">
             <a:extLst xmlns:a="http://schemas.openxmlformats.org/drawingml/2006/main">
               <a:ext uri="{FF2B5EF4-FFF2-40B4-BE49-F238E27FC236}">
-                <a16:creationId xmlns:a16="http://schemas.microsoft.com/office/drawing/2014/main" id="{36A049AD-C4AB-4347-8694-232A380A604E}"/>
+                <a16:creationId xmlns:a16="http://schemas.microsoft.com/office/drawing/2014/main" id="{B7B0C5A9-98C9-416B-8C5F-FEE81C495FAE}"/>
               </a:ext>
             </a:extLst>
           </p:cNvPr>
@@ -15751,10 +17100,69 @@
       </p:sp>
       <p:sp>
         <p:nvSpPr>
-          <p:cNvPr id="8" name="footer-rule">
-            <a:extLst xmlns:a="http://schemas.openxmlformats.org/drawingml/2006/main">
-              <a:ext uri="{FF2B5EF4-FFF2-40B4-BE49-F238E27FC236}">
-                <a16:creationId xmlns:a16="http://schemas.microsoft.com/office/drawing/2014/main" id="{1AE1C733-9F20-4120-BCEF-39DCD7FE616B}"/>
+          <p:cNvPr id="8" name="rescue-point-logo-background">
+            <a:extLst xmlns:a="http://schemas.openxmlformats.org/drawingml/2006/main">
+              <a:ext uri="{FF2B5EF4-FFF2-40B4-BE49-F238E27FC236}">
+                <a16:creationId xmlns:a16="http://schemas.microsoft.com/office/drawing/2014/main" id="{59A1E9A9-C397-4454-A576-C1699F71BD31}"/>
+              </a:ext>
+            </a:extLst>
+          </p:cNvPr>
+          <p:cNvSpPr>
+            <a:spLocks xmlns:a="http://schemas.openxmlformats.org/drawingml/2006/main" noGrp="1"/>
+          </p:cNvSpPr>
+          <p:nvPr/>
+        </p:nvSpPr>
+        <p:spPr>
+          <a:xfrm xmlns:a="http://schemas.openxmlformats.org/drawingml/2006/main">
+            <a:off x="9772650" y="133350"/>
+            <a:ext cx="1733550" cy="457200"/>
+          </a:xfrm>
+          <a:prstGeom xmlns:a="http://schemas.openxmlformats.org/drawingml/2006/main" prst="roundRect">
+            <a:avLst>
+              <a:gd name="adj" fmla="val 16667"/>
+            </a:avLst>
+          </a:prstGeom>
+          <a:solidFill xmlns:a="http://schemas.openxmlformats.org/drawingml/2006/main">
+            <a:srgbClr val="06142E"/>
+          </a:solidFill>
+          <a:ln xmlns:a="http://schemas.openxmlformats.org/drawingml/2006/main" w="9525">
+            <a:solidFill>
+              <a:srgbClr val="1EC5FF">
+                <a:alpha val="33333"/>
+              </a:srgbClr>
+            </a:solidFill>
+            <a:prstDash val="solid"/>
+          </a:ln>
+        </p:spPr>
+      </p:sp>
+      <p:pic>
+        <p:nvPicPr>
+          <p:cNvPr id="23" name="" descr="Figura oficial da documentação dbt usada para explicar: Microbatch precisa de event_time — Lotes temporais só ajudam quando evento, janela e backfill são mensuráveis.."/>
+          <p:cNvPicPr>
+            <a:picLocks xmlns:a="http://schemas.openxmlformats.org/drawingml/2006/main" noChangeAspect="1"/>
+          </p:cNvPicPr>
+          <p:nvPr/>
+        </p:nvPicPr>
+        <p:blipFill>
+          <a:blip xmlns:r="http://schemas.openxmlformats.org/officeDocument/2006/relationships" xmlns:a="http://schemas.openxmlformats.org/drawingml/2006/main" r:embed="R1c2aa25696364fee"/>
+          <a:stretch xmlns:a="http://schemas.openxmlformats.org/drawingml/2006/main"/>
+        </p:blipFill>
+        <p:spPr>
+          <a:xfrm xmlns:a="http://schemas.openxmlformats.org/drawingml/2006/main">
+            <a:off x="9893718" y="209550"/>
+            <a:ext cx="1491414" cy="323850"/>
+          </a:xfrm>
+          <a:prstGeom xmlns:a="http://schemas.openxmlformats.org/drawingml/2006/main" prst="rect">
+            <a:avLst/>
+          </a:prstGeom>
+        </p:spPr>
+      </p:pic>
+      <p:sp>
+        <p:nvSpPr>
+          <p:cNvPr id="10" name="footer-rule">
+            <a:extLst xmlns:a="http://schemas.openxmlformats.org/drawingml/2006/main">
+              <a:ext uri="{FF2B5EF4-FFF2-40B4-BE49-F238E27FC236}">
+                <a16:creationId xmlns:a16="http://schemas.microsoft.com/office/drawing/2014/main" id="{5A5D6229-CA8F-4614-92F2-B79D1D61F1E0}"/>
               </a:ext>
             </a:extLst>
           </p:cNvPr>
@@ -15784,10 +17192,10 @@
       </p:sp>
       <p:sp>
         <p:nvSpPr>
-          <p:cNvPr id="9" name="footer">
-            <a:extLst xmlns:a="http://schemas.openxmlformats.org/drawingml/2006/main">
-              <a:ext uri="{FF2B5EF4-FFF2-40B4-BE49-F238E27FC236}">
-                <a16:creationId xmlns:a16="http://schemas.microsoft.com/office/drawing/2014/main" id="{C2452558-4DB9-495B-A9B3-F3485A14AE0D}"/>
+          <p:cNvPr id="11" name="footer">
+            <a:extLst xmlns:a="http://schemas.openxmlformats.org/drawingml/2006/main">
+              <a:ext uri="{FF2B5EF4-FFF2-40B4-BE49-F238E27FC236}">
+                <a16:creationId xmlns:a16="http://schemas.microsoft.com/office/drawing/2014/main" id="{2551FA7E-18ED-4E44-8AC1-EB76BC8E584E}"/>
               </a:ext>
             </a:extLst>
           </p:cNvPr>
@@ -15839,10 +17247,10 @@
       </p:sp>
       <p:sp>
         <p:nvSpPr>
-          <p:cNvPr id="10" name="page-number">
-            <a:extLst xmlns:a="http://schemas.openxmlformats.org/drawingml/2006/main">
-              <a:ext uri="{FF2B5EF4-FFF2-40B4-BE49-F238E27FC236}">
-                <a16:creationId xmlns:a16="http://schemas.microsoft.com/office/drawing/2014/main" id="{D9C66993-F583-4E24-8BA3-50D80F8A8AB2}"/>
+          <p:cNvPr id="12" name="page-number">
+            <a:extLst xmlns:a="http://schemas.openxmlformats.org/drawingml/2006/main">
+              <a:ext uri="{FF2B5EF4-FFF2-40B4-BE49-F238E27FC236}">
+                <a16:creationId xmlns:a16="http://schemas.microsoft.com/office/drawing/2014/main" id="{1FB8E8CB-CBB6-4B0F-B1DD-290794081C33}"/>
               </a:ext>
             </a:extLst>
           </p:cNvPr>
@@ -15895,7 +17303,7 @@
     </p:spTree>
     <p:extLst>
       <p:ext uri="{BB962C8B-B14F-4D97-AF65-F5344CB8AC3E}">
-        <p14:creationId xmlns:p14="http://schemas.microsoft.com/office/powerpoint/2010/main" val="859374304"/>
+        <p14:creationId xmlns:p14="http://schemas.microsoft.com/office/powerpoint/2010/main" val="1932553414"/>
       </p:ext>
     </p:extLst>
   </p:cSld>
